--- a/presentations/Aurora_Stays_RAG_Project_Presentation_Template_Style.pptx
+++ b/presentations/Aurora_Stays_RAG_Project_Presentation_Template_Style.pptx
@@ -28,6 +28,18 @@
     <p:sldId id="272" r:id="rId24"/>
     <p:sldId id="273" r:id="rId25"/>
     <p:sldId id="274" r:id="rId26"/>
+    <p:sldId id="275" r:id="rId27"/>
+    <p:sldId id="276" r:id="rId28"/>
+    <p:sldId id="277" r:id="rId29"/>
+    <p:sldId id="278" r:id="rId30"/>
+    <p:sldId id="279" r:id="rId31"/>
+    <p:sldId id="280" r:id="rId32"/>
+    <p:sldId id="281" r:id="rId33"/>
+    <p:sldId id="282" r:id="rId34"/>
+    <p:sldId id="283" r:id="rId35"/>
+    <p:sldId id="284" r:id="rId36"/>
+    <p:sldId id="285" r:id="rId37"/>
+    <p:sldId id="286" r:id="rId38"/>
   </p:sldIdLst>
   <p:sldSz cy="5143500" cx="9144000"/>
   <p:notesSz cx="6858000" cy="9144000"/>
@@ -2279,12 +2291,12 @@
 </p:notes>
 </file>
 
-<file path=ppt/notesSlides/notesSlide3.xml><?xml version="1.0" encoding="utf-8"?>
+<file path=ppt/notesSlides/notesSlide20.xml><?xml version="1.0" encoding="utf-8"?>
 <p:notes xmlns:a="http://schemas.openxmlformats.org/drawingml/2006/main" xmlns:r="http://schemas.openxmlformats.org/officeDocument/2006/relationships" xmlns:mc="http://schemas.openxmlformats.org/markup-compatibility/2006" xmlns:mv="urn:schemas-microsoft-com:mac:vml" xmlns:p="http://schemas.openxmlformats.org/presentationml/2006/main" xmlns:c="http://schemas.openxmlformats.org/drawingml/2006/chart" xmlns:dgm="http://schemas.openxmlformats.org/drawingml/2006/diagram" xmlns:o="urn:schemas-microsoft-com:office:office" xmlns:v="urn:schemas-microsoft-com:vml" xmlns:pvml="urn:schemas-microsoft-com:office:powerpoint" xmlns:com="http://schemas.openxmlformats.org/drawingml/2006/compatibility" xmlns:p14="http://schemas.microsoft.com/office/powerpoint/2010/main" xmlns:p15="http://schemas.microsoft.com/office/powerpoint/2012/main" xmlns:ahyp="http://schemas.microsoft.com/office/drawing/2018/hyperlinkcolor" showMasterPhAnim="0" showMasterSp="0">
   <p:cSld>
     <p:spTree>
       <p:nvGrpSpPr>
-        <p:cNvPr id="186" name="Shape 186"/>
+        <p:cNvPr id="322" name="Shape 322"/>
         <p:cNvGrpSpPr/>
         <p:nvPr/>
       </p:nvGrpSpPr>
@@ -2298,7 +2310,7 @@
       </p:grpSpPr>
       <p:sp>
         <p:nvSpPr>
-          <p:cNvPr id="187" name="Google Shape;187;p3:notes"/>
+          <p:cNvPr id="323" name="Google Shape;323;h1ee84572765e4f1b_1_93:notes"/>
           <p:cNvSpPr/>
           <p:nvPr>
             <p:ph idx="2" type="sldImg"/>
@@ -2343,7 +2355,1411 @@
       </p:sp>
       <p:sp>
         <p:nvSpPr>
+          <p:cNvPr id="324" name="Google Shape;324;h1ee84572765e4f1b_1_93:notes"/>
+          <p:cNvSpPr txBox="1"/>
+          <p:nvPr>
+            <p:ph idx="1" type="body"/>
+          </p:nvPr>
+        </p:nvSpPr>
+        <p:spPr>
+          <a:xfrm>
+            <a:off x="685800" y="4343400"/>
+            <a:ext cx="5486400" cy="4114800"/>
+          </a:xfrm>
+          <a:prstGeom prst="rect">
+            <a:avLst/>
+          </a:prstGeom>
+          <a:noFill/>
+          <a:ln>
+            <a:noFill/>
+          </a:ln>
+        </p:spPr>
+        <p:txBody>
+          <a:bodyPr anchorCtr="0" anchor="t" bIns="91425" lIns="91425" spcFirstLastPara="1" rIns="91425" wrap="square" tIns="91425">
+            <a:noAutofit/>
+          </a:bodyPr>
+          <a:lstStyle/>
+          <a:p>
+            <a:pPr indent="0" lvl="0" marL="0" rtl="0" algn="l">
+              <a:lnSpc>
+                <a:spcPct val="100000"/>
+              </a:lnSpc>
+              <a:spcBef>
+                <a:spcPts val="0"/>
+              </a:spcBef>
+              <a:spcAft>
+                <a:spcPts val="0"/>
+              </a:spcAft>
+              <a:buSzPts val="1100"/>
+              <a:buNone/>
+            </a:pPr>
+            <a:r>
+              <a:t/>
+            </a:r>
+            <a:endParaRPr/>
+          </a:p>
+        </p:txBody>
+      </p:sp>
+    </p:spTree>
+  </p:cSld>
+  <p:clrMapOvr>
+    <a:masterClrMapping/>
+  </p:clrMapOvr>
+</p:notes>
+</file>
+
+<file path=ppt/notesSlides/notesSlide21.xml><?xml version="1.0" encoding="utf-8"?>
+<p:notes xmlns:a="http://schemas.openxmlformats.org/drawingml/2006/main" xmlns:r="http://schemas.openxmlformats.org/officeDocument/2006/relationships" xmlns:mc="http://schemas.openxmlformats.org/markup-compatibility/2006" xmlns:mv="urn:schemas-microsoft-com:mac:vml" xmlns:p="http://schemas.openxmlformats.org/presentationml/2006/main" xmlns:c="http://schemas.openxmlformats.org/drawingml/2006/chart" xmlns:dgm="http://schemas.openxmlformats.org/drawingml/2006/diagram" xmlns:o="urn:schemas-microsoft-com:office:office" xmlns:v="urn:schemas-microsoft-com:vml" xmlns:pvml="urn:schemas-microsoft-com:office:powerpoint" xmlns:com="http://schemas.openxmlformats.org/drawingml/2006/compatibility" xmlns:p14="http://schemas.microsoft.com/office/powerpoint/2010/main" xmlns:p15="http://schemas.microsoft.com/office/powerpoint/2012/main" xmlns:ahyp="http://schemas.microsoft.com/office/drawing/2018/hyperlinkcolor" showMasterPhAnim="0" showMasterSp="0">
+  <p:cSld>
+    <p:spTree>
+      <p:nvGrpSpPr>
+        <p:cNvPr id="330" name="Shape 330"/>
+        <p:cNvGrpSpPr/>
+        <p:nvPr/>
+      </p:nvGrpSpPr>
+      <p:grpSpPr>
+        <a:xfrm>
+          <a:off x="0" y="0"/>
+          <a:ext cx="0" cy="0"/>
+          <a:chOff x="0" y="0"/>
+          <a:chExt cx="0" cy="0"/>
+        </a:xfrm>
+      </p:grpSpPr>
+      <p:sp>
+        <p:nvSpPr>
+          <p:cNvPr id="331" name="Google Shape;331;h1ee84572765e4f1b_1_100:notes"/>
+          <p:cNvSpPr/>
+          <p:nvPr>
+            <p:ph idx="2" type="sldImg"/>
+          </p:nvPr>
+        </p:nvSpPr>
+        <p:spPr>
+          <a:xfrm>
+            <a:off x="381300" y="685800"/>
+            <a:ext cx="6096000" cy="3429000"/>
+          </a:xfrm>
+          <a:custGeom>
+            <a:rect b="b" l="l" r="r" t="t"/>
+            <a:pathLst>
+              <a:path extrusionOk="0" h="120000" w="120000">
+                <a:moveTo>
+                  <a:pt x="0" y="0"/>
+                </a:moveTo>
+                <a:lnTo>
+                  <a:pt x="120000" y="0"/>
+                </a:lnTo>
+                <a:lnTo>
+                  <a:pt x="120000" y="120000"/>
+                </a:lnTo>
+                <a:lnTo>
+                  <a:pt x="0" y="120000"/>
+                </a:lnTo>
+                <a:close/>
+              </a:path>
+            </a:pathLst>
+          </a:custGeom>
+          <a:noFill/>
+          <a:ln cap="flat" cmpd="sng" w="9525">
+            <a:solidFill>
+              <a:srgbClr val="000000"/>
+            </a:solidFill>
+            <a:prstDash val="solid"/>
+            <a:round/>
+            <a:headEnd len="sm" w="sm" type="none"/>
+            <a:tailEnd len="sm" w="sm" type="none"/>
+          </a:ln>
+        </p:spPr>
+      </p:sp>
+      <p:sp>
+        <p:nvSpPr>
+          <p:cNvPr id="332" name="Google Shape;332;h1ee84572765e4f1b_1_100:notes"/>
+          <p:cNvSpPr txBox="1"/>
+          <p:nvPr>
+            <p:ph idx="1" type="body"/>
+          </p:nvPr>
+        </p:nvSpPr>
+        <p:spPr>
+          <a:xfrm>
+            <a:off x="685800" y="4343400"/>
+            <a:ext cx="5486400" cy="4114800"/>
+          </a:xfrm>
+          <a:prstGeom prst="rect">
+            <a:avLst/>
+          </a:prstGeom>
+          <a:noFill/>
+          <a:ln>
+            <a:noFill/>
+          </a:ln>
+        </p:spPr>
+        <p:txBody>
+          <a:bodyPr anchorCtr="0" anchor="t" bIns="91425" lIns="91425" spcFirstLastPara="1" rIns="91425" wrap="square" tIns="91425">
+            <a:noAutofit/>
+          </a:bodyPr>
+          <a:lstStyle/>
+          <a:p>
+            <a:pPr indent="0" lvl="0" marL="0" rtl="0" algn="l">
+              <a:lnSpc>
+                <a:spcPct val="100000"/>
+              </a:lnSpc>
+              <a:spcBef>
+                <a:spcPts val="0"/>
+              </a:spcBef>
+              <a:spcAft>
+                <a:spcPts val="0"/>
+              </a:spcAft>
+              <a:buSzPts val="1100"/>
+              <a:buNone/>
+            </a:pPr>
+            <a:r>
+              <a:t/>
+            </a:r>
+            <a:endParaRPr/>
+          </a:p>
+        </p:txBody>
+      </p:sp>
+    </p:spTree>
+  </p:cSld>
+  <p:clrMapOvr>
+    <a:masterClrMapping/>
+  </p:clrMapOvr>
+</p:notes>
+</file>
+
+<file path=ppt/notesSlides/notesSlide22.xml><?xml version="1.0" encoding="utf-8"?>
+<p:notes xmlns:a="http://schemas.openxmlformats.org/drawingml/2006/main" xmlns:r="http://schemas.openxmlformats.org/officeDocument/2006/relationships" xmlns:mc="http://schemas.openxmlformats.org/markup-compatibility/2006" xmlns:mv="urn:schemas-microsoft-com:mac:vml" xmlns:p="http://schemas.openxmlformats.org/presentationml/2006/main" xmlns:c="http://schemas.openxmlformats.org/drawingml/2006/chart" xmlns:dgm="http://schemas.openxmlformats.org/drawingml/2006/diagram" xmlns:o="urn:schemas-microsoft-com:office:office" xmlns:v="urn:schemas-microsoft-com:vml" xmlns:pvml="urn:schemas-microsoft-com:office:powerpoint" xmlns:com="http://schemas.openxmlformats.org/drawingml/2006/compatibility" xmlns:p14="http://schemas.microsoft.com/office/powerpoint/2010/main" xmlns:p15="http://schemas.microsoft.com/office/powerpoint/2012/main" xmlns:ahyp="http://schemas.microsoft.com/office/drawing/2018/hyperlinkcolor" showMasterPhAnim="0" showMasterSp="0">
+  <p:cSld>
+    <p:spTree>
+      <p:nvGrpSpPr>
+        <p:cNvPr id="338" name="Shape 338"/>
+        <p:cNvGrpSpPr/>
+        <p:nvPr/>
+      </p:nvGrpSpPr>
+      <p:grpSpPr>
+        <a:xfrm>
+          <a:off x="0" y="0"/>
+          <a:ext cx="0" cy="0"/>
+          <a:chOff x="0" y="0"/>
+          <a:chExt cx="0" cy="0"/>
+        </a:xfrm>
+      </p:grpSpPr>
+      <p:sp>
+        <p:nvSpPr>
+          <p:cNvPr id="339" name="Google Shape;339;h1ee84572765e4f1b_1_107:notes"/>
+          <p:cNvSpPr/>
+          <p:nvPr>
+            <p:ph idx="2" type="sldImg"/>
+          </p:nvPr>
+        </p:nvSpPr>
+        <p:spPr>
+          <a:xfrm>
+            <a:off x="381300" y="685800"/>
+            <a:ext cx="6096000" cy="3429000"/>
+          </a:xfrm>
+          <a:custGeom>
+            <a:rect b="b" l="l" r="r" t="t"/>
+            <a:pathLst>
+              <a:path extrusionOk="0" h="120000" w="120000">
+                <a:moveTo>
+                  <a:pt x="0" y="0"/>
+                </a:moveTo>
+                <a:lnTo>
+                  <a:pt x="120000" y="0"/>
+                </a:lnTo>
+                <a:lnTo>
+                  <a:pt x="120000" y="120000"/>
+                </a:lnTo>
+                <a:lnTo>
+                  <a:pt x="0" y="120000"/>
+                </a:lnTo>
+                <a:close/>
+              </a:path>
+            </a:pathLst>
+          </a:custGeom>
+          <a:noFill/>
+          <a:ln cap="flat" cmpd="sng" w="9525">
+            <a:solidFill>
+              <a:srgbClr val="000000"/>
+            </a:solidFill>
+            <a:prstDash val="solid"/>
+            <a:round/>
+            <a:headEnd len="sm" w="sm" type="none"/>
+            <a:tailEnd len="sm" w="sm" type="none"/>
+          </a:ln>
+        </p:spPr>
+      </p:sp>
+      <p:sp>
+        <p:nvSpPr>
+          <p:cNvPr id="340" name="Google Shape;340;h1ee84572765e4f1b_1_107:notes"/>
+          <p:cNvSpPr txBox="1"/>
+          <p:nvPr>
+            <p:ph idx="1" type="body"/>
+          </p:nvPr>
+        </p:nvSpPr>
+        <p:spPr>
+          <a:xfrm>
+            <a:off x="685800" y="4343400"/>
+            <a:ext cx="5486400" cy="4114800"/>
+          </a:xfrm>
+          <a:prstGeom prst="rect">
+            <a:avLst/>
+          </a:prstGeom>
+          <a:noFill/>
+          <a:ln>
+            <a:noFill/>
+          </a:ln>
+        </p:spPr>
+        <p:txBody>
+          <a:bodyPr anchorCtr="0" anchor="t" bIns="91425" lIns="91425" spcFirstLastPara="1" rIns="91425" wrap="square" tIns="91425">
+            <a:noAutofit/>
+          </a:bodyPr>
+          <a:lstStyle/>
+          <a:p>
+            <a:pPr indent="0" lvl="0" marL="0" rtl="0" algn="l">
+              <a:lnSpc>
+                <a:spcPct val="100000"/>
+              </a:lnSpc>
+              <a:spcBef>
+                <a:spcPts val="0"/>
+              </a:spcBef>
+              <a:spcAft>
+                <a:spcPts val="0"/>
+              </a:spcAft>
+              <a:buSzPts val="1100"/>
+              <a:buNone/>
+            </a:pPr>
+            <a:r>
+              <a:t/>
+            </a:r>
+            <a:endParaRPr/>
+          </a:p>
+        </p:txBody>
+      </p:sp>
+    </p:spTree>
+  </p:cSld>
+  <p:clrMapOvr>
+    <a:masterClrMapping/>
+  </p:clrMapOvr>
+</p:notes>
+</file>
+
+<file path=ppt/notesSlides/notesSlide23.xml><?xml version="1.0" encoding="utf-8"?>
+<p:notes xmlns:a="http://schemas.openxmlformats.org/drawingml/2006/main" xmlns:r="http://schemas.openxmlformats.org/officeDocument/2006/relationships" xmlns:mc="http://schemas.openxmlformats.org/markup-compatibility/2006" xmlns:mv="urn:schemas-microsoft-com:mac:vml" xmlns:p="http://schemas.openxmlformats.org/presentationml/2006/main" xmlns:c="http://schemas.openxmlformats.org/drawingml/2006/chart" xmlns:dgm="http://schemas.openxmlformats.org/drawingml/2006/diagram" xmlns:o="urn:schemas-microsoft-com:office:office" xmlns:v="urn:schemas-microsoft-com:vml" xmlns:pvml="urn:schemas-microsoft-com:office:powerpoint" xmlns:com="http://schemas.openxmlformats.org/drawingml/2006/compatibility" xmlns:p14="http://schemas.microsoft.com/office/powerpoint/2010/main" xmlns:p15="http://schemas.microsoft.com/office/powerpoint/2012/main" xmlns:ahyp="http://schemas.microsoft.com/office/drawing/2018/hyperlinkcolor" showMasterPhAnim="0" showMasterSp="0">
+  <p:cSld>
+    <p:spTree>
+      <p:nvGrpSpPr>
+        <p:cNvPr id="346" name="Shape 346"/>
+        <p:cNvGrpSpPr/>
+        <p:nvPr/>
+      </p:nvGrpSpPr>
+      <p:grpSpPr>
+        <a:xfrm>
+          <a:off x="0" y="0"/>
+          <a:ext cx="0" cy="0"/>
+          <a:chOff x="0" y="0"/>
+          <a:chExt cx="0" cy="0"/>
+        </a:xfrm>
+      </p:grpSpPr>
+      <p:sp>
+        <p:nvSpPr>
+          <p:cNvPr id="347" name="Google Shape;347;h1ee84572765e4f1b_1_114:notes"/>
+          <p:cNvSpPr/>
+          <p:nvPr>
+            <p:ph idx="2" type="sldImg"/>
+          </p:nvPr>
+        </p:nvSpPr>
+        <p:spPr>
+          <a:xfrm>
+            <a:off x="381300" y="685800"/>
+            <a:ext cx="6096000" cy="3429000"/>
+          </a:xfrm>
+          <a:custGeom>
+            <a:rect b="b" l="l" r="r" t="t"/>
+            <a:pathLst>
+              <a:path extrusionOk="0" h="120000" w="120000">
+                <a:moveTo>
+                  <a:pt x="0" y="0"/>
+                </a:moveTo>
+                <a:lnTo>
+                  <a:pt x="120000" y="0"/>
+                </a:lnTo>
+                <a:lnTo>
+                  <a:pt x="120000" y="120000"/>
+                </a:lnTo>
+                <a:lnTo>
+                  <a:pt x="0" y="120000"/>
+                </a:lnTo>
+                <a:close/>
+              </a:path>
+            </a:pathLst>
+          </a:custGeom>
+          <a:noFill/>
+          <a:ln cap="flat" cmpd="sng" w="9525">
+            <a:solidFill>
+              <a:srgbClr val="000000"/>
+            </a:solidFill>
+            <a:prstDash val="solid"/>
+            <a:round/>
+            <a:headEnd len="sm" w="sm" type="none"/>
+            <a:tailEnd len="sm" w="sm" type="none"/>
+          </a:ln>
+        </p:spPr>
+      </p:sp>
+      <p:sp>
+        <p:nvSpPr>
+          <p:cNvPr id="348" name="Google Shape;348;h1ee84572765e4f1b_1_114:notes"/>
+          <p:cNvSpPr txBox="1"/>
+          <p:nvPr>
+            <p:ph idx="1" type="body"/>
+          </p:nvPr>
+        </p:nvSpPr>
+        <p:spPr>
+          <a:xfrm>
+            <a:off x="685800" y="4343400"/>
+            <a:ext cx="5486400" cy="4114800"/>
+          </a:xfrm>
+          <a:prstGeom prst="rect">
+            <a:avLst/>
+          </a:prstGeom>
+          <a:noFill/>
+          <a:ln>
+            <a:noFill/>
+          </a:ln>
+        </p:spPr>
+        <p:txBody>
+          <a:bodyPr anchorCtr="0" anchor="t" bIns="91425" lIns="91425" spcFirstLastPara="1" rIns="91425" wrap="square" tIns="91425">
+            <a:noAutofit/>
+          </a:bodyPr>
+          <a:lstStyle/>
+          <a:p>
+            <a:pPr indent="0" lvl="0" marL="0" rtl="0" algn="l">
+              <a:lnSpc>
+                <a:spcPct val="100000"/>
+              </a:lnSpc>
+              <a:spcBef>
+                <a:spcPts val="0"/>
+              </a:spcBef>
+              <a:spcAft>
+                <a:spcPts val="0"/>
+              </a:spcAft>
+              <a:buSzPts val="1100"/>
+              <a:buNone/>
+            </a:pPr>
+            <a:r>
+              <a:t/>
+            </a:r>
+            <a:endParaRPr/>
+          </a:p>
+        </p:txBody>
+      </p:sp>
+    </p:spTree>
+  </p:cSld>
+  <p:clrMapOvr>
+    <a:masterClrMapping/>
+  </p:clrMapOvr>
+</p:notes>
+</file>
+
+<file path=ppt/notesSlides/notesSlide24.xml><?xml version="1.0" encoding="utf-8"?>
+<p:notes xmlns:a="http://schemas.openxmlformats.org/drawingml/2006/main" xmlns:r="http://schemas.openxmlformats.org/officeDocument/2006/relationships" xmlns:mc="http://schemas.openxmlformats.org/markup-compatibility/2006" xmlns:mv="urn:schemas-microsoft-com:mac:vml" xmlns:p="http://schemas.openxmlformats.org/presentationml/2006/main" xmlns:c="http://schemas.openxmlformats.org/drawingml/2006/chart" xmlns:dgm="http://schemas.openxmlformats.org/drawingml/2006/diagram" xmlns:o="urn:schemas-microsoft-com:office:office" xmlns:v="urn:schemas-microsoft-com:vml" xmlns:pvml="urn:schemas-microsoft-com:office:powerpoint" xmlns:com="http://schemas.openxmlformats.org/drawingml/2006/compatibility" xmlns:p14="http://schemas.microsoft.com/office/powerpoint/2010/main" xmlns:p15="http://schemas.microsoft.com/office/powerpoint/2012/main" xmlns:ahyp="http://schemas.microsoft.com/office/drawing/2018/hyperlinkcolor" showMasterPhAnim="0" showMasterSp="0">
+  <p:cSld>
+    <p:spTree>
+      <p:nvGrpSpPr>
+        <p:cNvPr id="354" name="Shape 354"/>
+        <p:cNvGrpSpPr/>
+        <p:nvPr/>
+      </p:nvGrpSpPr>
+      <p:grpSpPr>
+        <a:xfrm>
+          <a:off x="0" y="0"/>
+          <a:ext cx="0" cy="0"/>
+          <a:chOff x="0" y="0"/>
+          <a:chExt cx="0" cy="0"/>
+        </a:xfrm>
+      </p:grpSpPr>
+      <p:sp>
+        <p:nvSpPr>
+          <p:cNvPr id="355" name="Google Shape;355;h1ee84572765e4f1b_1_121:notes"/>
+          <p:cNvSpPr/>
+          <p:nvPr>
+            <p:ph idx="2" type="sldImg"/>
+          </p:nvPr>
+        </p:nvSpPr>
+        <p:spPr>
+          <a:xfrm>
+            <a:off x="381300" y="685800"/>
+            <a:ext cx="6096000" cy="3429000"/>
+          </a:xfrm>
+          <a:custGeom>
+            <a:rect b="b" l="l" r="r" t="t"/>
+            <a:pathLst>
+              <a:path extrusionOk="0" h="120000" w="120000">
+                <a:moveTo>
+                  <a:pt x="0" y="0"/>
+                </a:moveTo>
+                <a:lnTo>
+                  <a:pt x="120000" y="0"/>
+                </a:lnTo>
+                <a:lnTo>
+                  <a:pt x="120000" y="120000"/>
+                </a:lnTo>
+                <a:lnTo>
+                  <a:pt x="0" y="120000"/>
+                </a:lnTo>
+                <a:close/>
+              </a:path>
+            </a:pathLst>
+          </a:custGeom>
+          <a:noFill/>
+          <a:ln cap="flat" cmpd="sng" w="9525">
+            <a:solidFill>
+              <a:srgbClr val="000000"/>
+            </a:solidFill>
+            <a:prstDash val="solid"/>
+            <a:round/>
+            <a:headEnd len="sm" w="sm" type="none"/>
+            <a:tailEnd len="sm" w="sm" type="none"/>
+          </a:ln>
+        </p:spPr>
+      </p:sp>
+      <p:sp>
+        <p:nvSpPr>
+          <p:cNvPr id="356" name="Google Shape;356;h1ee84572765e4f1b_1_121:notes"/>
+          <p:cNvSpPr txBox="1"/>
+          <p:nvPr>
+            <p:ph idx="1" type="body"/>
+          </p:nvPr>
+        </p:nvSpPr>
+        <p:spPr>
+          <a:xfrm>
+            <a:off x="685800" y="4343400"/>
+            <a:ext cx="5486400" cy="4114800"/>
+          </a:xfrm>
+          <a:prstGeom prst="rect">
+            <a:avLst/>
+          </a:prstGeom>
+          <a:noFill/>
+          <a:ln>
+            <a:noFill/>
+          </a:ln>
+        </p:spPr>
+        <p:txBody>
+          <a:bodyPr anchorCtr="0" anchor="t" bIns="91425" lIns="91425" spcFirstLastPara="1" rIns="91425" wrap="square" tIns="91425">
+            <a:noAutofit/>
+          </a:bodyPr>
+          <a:lstStyle/>
+          <a:p>
+            <a:pPr indent="0" lvl="0" marL="0" rtl="0" algn="l">
+              <a:lnSpc>
+                <a:spcPct val="100000"/>
+              </a:lnSpc>
+              <a:spcBef>
+                <a:spcPts val="0"/>
+              </a:spcBef>
+              <a:spcAft>
+                <a:spcPts val="0"/>
+              </a:spcAft>
+              <a:buSzPts val="1100"/>
+              <a:buNone/>
+            </a:pPr>
+            <a:r>
+              <a:t/>
+            </a:r>
+            <a:endParaRPr/>
+          </a:p>
+        </p:txBody>
+      </p:sp>
+    </p:spTree>
+  </p:cSld>
+  <p:clrMapOvr>
+    <a:masterClrMapping/>
+  </p:clrMapOvr>
+</p:notes>
+</file>
+
+<file path=ppt/notesSlides/notesSlide25.xml><?xml version="1.0" encoding="utf-8"?>
+<p:notes xmlns:a="http://schemas.openxmlformats.org/drawingml/2006/main" xmlns:r="http://schemas.openxmlformats.org/officeDocument/2006/relationships" xmlns:mc="http://schemas.openxmlformats.org/markup-compatibility/2006" xmlns:mv="urn:schemas-microsoft-com:mac:vml" xmlns:p="http://schemas.openxmlformats.org/presentationml/2006/main" xmlns:c="http://schemas.openxmlformats.org/drawingml/2006/chart" xmlns:dgm="http://schemas.openxmlformats.org/drawingml/2006/diagram" xmlns:o="urn:schemas-microsoft-com:office:office" xmlns:v="urn:schemas-microsoft-com:vml" xmlns:pvml="urn:schemas-microsoft-com:office:powerpoint" xmlns:com="http://schemas.openxmlformats.org/drawingml/2006/compatibility" xmlns:p14="http://schemas.microsoft.com/office/powerpoint/2010/main" xmlns:p15="http://schemas.microsoft.com/office/powerpoint/2012/main" xmlns:ahyp="http://schemas.microsoft.com/office/drawing/2018/hyperlinkcolor" showMasterPhAnim="0" showMasterSp="0">
+  <p:cSld>
+    <p:spTree>
+      <p:nvGrpSpPr>
+        <p:cNvPr id="362" name="Shape 362"/>
+        <p:cNvGrpSpPr/>
+        <p:nvPr/>
+      </p:nvGrpSpPr>
+      <p:grpSpPr>
+        <a:xfrm>
+          <a:off x="0" y="0"/>
+          <a:ext cx="0" cy="0"/>
+          <a:chOff x="0" y="0"/>
+          <a:chExt cx="0" cy="0"/>
+        </a:xfrm>
+      </p:grpSpPr>
+      <p:sp>
+        <p:nvSpPr>
+          <p:cNvPr id="363" name="Google Shape;363;h1ee84572765e4f1b_1_128:notes"/>
+          <p:cNvSpPr/>
+          <p:nvPr>
+            <p:ph idx="2" type="sldImg"/>
+          </p:nvPr>
+        </p:nvSpPr>
+        <p:spPr>
+          <a:xfrm>
+            <a:off x="381300" y="685800"/>
+            <a:ext cx="6096000" cy="3429000"/>
+          </a:xfrm>
+          <a:custGeom>
+            <a:rect b="b" l="l" r="r" t="t"/>
+            <a:pathLst>
+              <a:path extrusionOk="0" h="120000" w="120000">
+                <a:moveTo>
+                  <a:pt x="0" y="0"/>
+                </a:moveTo>
+                <a:lnTo>
+                  <a:pt x="120000" y="0"/>
+                </a:lnTo>
+                <a:lnTo>
+                  <a:pt x="120000" y="120000"/>
+                </a:lnTo>
+                <a:lnTo>
+                  <a:pt x="0" y="120000"/>
+                </a:lnTo>
+                <a:close/>
+              </a:path>
+            </a:pathLst>
+          </a:custGeom>
+          <a:noFill/>
+          <a:ln cap="flat" cmpd="sng" w="9525">
+            <a:solidFill>
+              <a:srgbClr val="000000"/>
+            </a:solidFill>
+            <a:prstDash val="solid"/>
+            <a:round/>
+            <a:headEnd len="sm" w="sm" type="none"/>
+            <a:tailEnd len="sm" w="sm" type="none"/>
+          </a:ln>
+        </p:spPr>
+      </p:sp>
+      <p:sp>
+        <p:nvSpPr>
+          <p:cNvPr id="364" name="Google Shape;364;h1ee84572765e4f1b_1_128:notes"/>
+          <p:cNvSpPr txBox="1"/>
+          <p:nvPr>
+            <p:ph idx="1" type="body"/>
+          </p:nvPr>
+        </p:nvSpPr>
+        <p:spPr>
+          <a:xfrm>
+            <a:off x="685800" y="4343400"/>
+            <a:ext cx="5486400" cy="4114800"/>
+          </a:xfrm>
+          <a:prstGeom prst="rect">
+            <a:avLst/>
+          </a:prstGeom>
+          <a:noFill/>
+          <a:ln>
+            <a:noFill/>
+          </a:ln>
+        </p:spPr>
+        <p:txBody>
+          <a:bodyPr anchorCtr="0" anchor="t" bIns="91425" lIns="91425" spcFirstLastPara="1" rIns="91425" wrap="square" tIns="91425">
+            <a:noAutofit/>
+          </a:bodyPr>
+          <a:lstStyle/>
+          <a:p>
+            <a:pPr indent="0" lvl="0" marL="0" rtl="0" algn="l">
+              <a:lnSpc>
+                <a:spcPct val="100000"/>
+              </a:lnSpc>
+              <a:spcBef>
+                <a:spcPts val="0"/>
+              </a:spcBef>
+              <a:spcAft>
+                <a:spcPts val="0"/>
+              </a:spcAft>
+              <a:buSzPts val="1100"/>
+              <a:buNone/>
+            </a:pPr>
+            <a:r>
+              <a:t/>
+            </a:r>
+            <a:endParaRPr/>
+          </a:p>
+        </p:txBody>
+      </p:sp>
+    </p:spTree>
+  </p:cSld>
+  <p:clrMapOvr>
+    <a:masterClrMapping/>
+  </p:clrMapOvr>
+</p:notes>
+</file>
+
+<file path=ppt/notesSlides/notesSlide26.xml><?xml version="1.0" encoding="utf-8"?>
+<p:notes xmlns:a="http://schemas.openxmlformats.org/drawingml/2006/main" xmlns:r="http://schemas.openxmlformats.org/officeDocument/2006/relationships" xmlns:mc="http://schemas.openxmlformats.org/markup-compatibility/2006" xmlns:mv="urn:schemas-microsoft-com:mac:vml" xmlns:p="http://schemas.openxmlformats.org/presentationml/2006/main" xmlns:c="http://schemas.openxmlformats.org/drawingml/2006/chart" xmlns:dgm="http://schemas.openxmlformats.org/drawingml/2006/diagram" xmlns:o="urn:schemas-microsoft-com:office:office" xmlns:v="urn:schemas-microsoft-com:vml" xmlns:pvml="urn:schemas-microsoft-com:office:powerpoint" xmlns:com="http://schemas.openxmlformats.org/drawingml/2006/compatibility" xmlns:p14="http://schemas.microsoft.com/office/powerpoint/2010/main" xmlns:p15="http://schemas.microsoft.com/office/powerpoint/2012/main" xmlns:ahyp="http://schemas.microsoft.com/office/drawing/2018/hyperlinkcolor" showMasterPhAnim="0" showMasterSp="0">
+  <p:cSld>
+    <p:spTree>
+      <p:nvGrpSpPr>
+        <p:cNvPr id="370" name="Shape 370"/>
+        <p:cNvGrpSpPr/>
+        <p:nvPr/>
+      </p:nvGrpSpPr>
+      <p:grpSpPr>
+        <a:xfrm>
+          <a:off x="0" y="0"/>
+          <a:ext cx="0" cy="0"/>
+          <a:chOff x="0" y="0"/>
+          <a:chExt cx="0" cy="0"/>
+        </a:xfrm>
+      </p:grpSpPr>
+      <p:sp>
+        <p:nvSpPr>
+          <p:cNvPr id="371" name="Google Shape;371;h1ee84572765e4f1b_1_135:notes"/>
+          <p:cNvSpPr/>
+          <p:nvPr>
+            <p:ph idx="2" type="sldImg"/>
+          </p:nvPr>
+        </p:nvSpPr>
+        <p:spPr>
+          <a:xfrm>
+            <a:off x="381300" y="685800"/>
+            <a:ext cx="6096000" cy="3429000"/>
+          </a:xfrm>
+          <a:custGeom>
+            <a:rect b="b" l="l" r="r" t="t"/>
+            <a:pathLst>
+              <a:path extrusionOk="0" h="120000" w="120000">
+                <a:moveTo>
+                  <a:pt x="0" y="0"/>
+                </a:moveTo>
+                <a:lnTo>
+                  <a:pt x="120000" y="0"/>
+                </a:lnTo>
+                <a:lnTo>
+                  <a:pt x="120000" y="120000"/>
+                </a:lnTo>
+                <a:lnTo>
+                  <a:pt x="0" y="120000"/>
+                </a:lnTo>
+                <a:close/>
+              </a:path>
+            </a:pathLst>
+          </a:custGeom>
+          <a:noFill/>
+          <a:ln cap="flat" cmpd="sng" w="9525">
+            <a:solidFill>
+              <a:srgbClr val="000000"/>
+            </a:solidFill>
+            <a:prstDash val="solid"/>
+            <a:round/>
+            <a:headEnd len="sm" w="sm" type="none"/>
+            <a:tailEnd len="sm" w="sm" type="none"/>
+          </a:ln>
+        </p:spPr>
+      </p:sp>
+      <p:sp>
+        <p:nvSpPr>
+          <p:cNvPr id="372" name="Google Shape;372;h1ee84572765e4f1b_1_135:notes"/>
+          <p:cNvSpPr txBox="1"/>
+          <p:nvPr>
+            <p:ph idx="1" type="body"/>
+          </p:nvPr>
+        </p:nvSpPr>
+        <p:spPr>
+          <a:xfrm>
+            <a:off x="685800" y="4343400"/>
+            <a:ext cx="5486400" cy="4114800"/>
+          </a:xfrm>
+          <a:prstGeom prst="rect">
+            <a:avLst/>
+          </a:prstGeom>
+          <a:noFill/>
+          <a:ln>
+            <a:noFill/>
+          </a:ln>
+        </p:spPr>
+        <p:txBody>
+          <a:bodyPr anchorCtr="0" anchor="t" bIns="91425" lIns="91425" spcFirstLastPara="1" rIns="91425" wrap="square" tIns="91425">
+            <a:noAutofit/>
+          </a:bodyPr>
+          <a:lstStyle/>
+          <a:p>
+            <a:pPr indent="0" lvl="0" marL="0" rtl="0" algn="l">
+              <a:lnSpc>
+                <a:spcPct val="100000"/>
+              </a:lnSpc>
+              <a:spcBef>
+                <a:spcPts val="0"/>
+              </a:spcBef>
+              <a:spcAft>
+                <a:spcPts val="0"/>
+              </a:spcAft>
+              <a:buSzPts val="1100"/>
+              <a:buNone/>
+            </a:pPr>
+            <a:r>
+              <a:t/>
+            </a:r>
+            <a:endParaRPr/>
+          </a:p>
+        </p:txBody>
+      </p:sp>
+    </p:spTree>
+  </p:cSld>
+  <p:clrMapOvr>
+    <a:masterClrMapping/>
+  </p:clrMapOvr>
+</p:notes>
+</file>
+
+<file path=ppt/notesSlides/notesSlide27.xml><?xml version="1.0" encoding="utf-8"?>
+<p:notes xmlns:a="http://schemas.openxmlformats.org/drawingml/2006/main" xmlns:r="http://schemas.openxmlformats.org/officeDocument/2006/relationships" xmlns:mc="http://schemas.openxmlformats.org/markup-compatibility/2006" xmlns:mv="urn:schemas-microsoft-com:mac:vml" xmlns:p="http://schemas.openxmlformats.org/presentationml/2006/main" xmlns:c="http://schemas.openxmlformats.org/drawingml/2006/chart" xmlns:dgm="http://schemas.openxmlformats.org/drawingml/2006/diagram" xmlns:o="urn:schemas-microsoft-com:office:office" xmlns:v="urn:schemas-microsoft-com:vml" xmlns:pvml="urn:schemas-microsoft-com:office:powerpoint" xmlns:com="http://schemas.openxmlformats.org/drawingml/2006/compatibility" xmlns:p14="http://schemas.microsoft.com/office/powerpoint/2010/main" xmlns:p15="http://schemas.microsoft.com/office/powerpoint/2012/main" xmlns:ahyp="http://schemas.microsoft.com/office/drawing/2018/hyperlinkcolor" showMasterPhAnim="0" showMasterSp="0">
+  <p:cSld>
+    <p:spTree>
+      <p:nvGrpSpPr>
+        <p:cNvPr id="378" name="Shape 378"/>
+        <p:cNvGrpSpPr/>
+        <p:nvPr/>
+      </p:nvGrpSpPr>
+      <p:grpSpPr>
+        <a:xfrm>
+          <a:off x="0" y="0"/>
+          <a:ext cx="0" cy="0"/>
+          <a:chOff x="0" y="0"/>
+          <a:chExt cx="0" cy="0"/>
+        </a:xfrm>
+      </p:grpSpPr>
+      <p:sp>
+        <p:nvSpPr>
+          <p:cNvPr id="379" name="Google Shape;379;h1ee84572765e4f1b_1_142:notes"/>
+          <p:cNvSpPr/>
+          <p:nvPr>
+            <p:ph idx="2" type="sldImg"/>
+          </p:nvPr>
+        </p:nvSpPr>
+        <p:spPr>
+          <a:xfrm>
+            <a:off x="381300" y="685800"/>
+            <a:ext cx="6096000" cy="3429000"/>
+          </a:xfrm>
+          <a:custGeom>
+            <a:rect b="b" l="l" r="r" t="t"/>
+            <a:pathLst>
+              <a:path extrusionOk="0" h="120000" w="120000">
+                <a:moveTo>
+                  <a:pt x="0" y="0"/>
+                </a:moveTo>
+                <a:lnTo>
+                  <a:pt x="120000" y="0"/>
+                </a:lnTo>
+                <a:lnTo>
+                  <a:pt x="120000" y="120000"/>
+                </a:lnTo>
+                <a:lnTo>
+                  <a:pt x="0" y="120000"/>
+                </a:lnTo>
+                <a:close/>
+              </a:path>
+            </a:pathLst>
+          </a:custGeom>
+          <a:noFill/>
+          <a:ln cap="flat" cmpd="sng" w="9525">
+            <a:solidFill>
+              <a:srgbClr val="000000"/>
+            </a:solidFill>
+            <a:prstDash val="solid"/>
+            <a:round/>
+            <a:headEnd len="sm" w="sm" type="none"/>
+            <a:tailEnd len="sm" w="sm" type="none"/>
+          </a:ln>
+        </p:spPr>
+      </p:sp>
+      <p:sp>
+        <p:nvSpPr>
+          <p:cNvPr id="380" name="Google Shape;380;h1ee84572765e4f1b_1_142:notes"/>
+          <p:cNvSpPr txBox="1"/>
+          <p:nvPr>
+            <p:ph idx="1" type="body"/>
+          </p:nvPr>
+        </p:nvSpPr>
+        <p:spPr>
+          <a:xfrm>
+            <a:off x="685800" y="4343400"/>
+            <a:ext cx="5486400" cy="4114800"/>
+          </a:xfrm>
+          <a:prstGeom prst="rect">
+            <a:avLst/>
+          </a:prstGeom>
+          <a:noFill/>
+          <a:ln>
+            <a:noFill/>
+          </a:ln>
+        </p:spPr>
+        <p:txBody>
+          <a:bodyPr anchorCtr="0" anchor="t" bIns="91425" lIns="91425" spcFirstLastPara="1" rIns="91425" wrap="square" tIns="91425">
+            <a:noAutofit/>
+          </a:bodyPr>
+          <a:lstStyle/>
+          <a:p>
+            <a:pPr indent="0" lvl="0" marL="0" rtl="0" algn="l">
+              <a:lnSpc>
+                <a:spcPct val="100000"/>
+              </a:lnSpc>
+              <a:spcBef>
+                <a:spcPts val="0"/>
+              </a:spcBef>
+              <a:spcAft>
+                <a:spcPts val="0"/>
+              </a:spcAft>
+              <a:buSzPts val="1100"/>
+              <a:buNone/>
+            </a:pPr>
+            <a:r>
+              <a:t/>
+            </a:r>
+            <a:endParaRPr/>
+          </a:p>
+        </p:txBody>
+      </p:sp>
+    </p:spTree>
+  </p:cSld>
+  <p:clrMapOvr>
+    <a:masterClrMapping/>
+  </p:clrMapOvr>
+</p:notes>
+</file>
+
+<file path=ppt/notesSlides/notesSlide28.xml><?xml version="1.0" encoding="utf-8"?>
+<p:notes xmlns:a="http://schemas.openxmlformats.org/drawingml/2006/main" xmlns:r="http://schemas.openxmlformats.org/officeDocument/2006/relationships" xmlns:mc="http://schemas.openxmlformats.org/markup-compatibility/2006" xmlns:mv="urn:schemas-microsoft-com:mac:vml" xmlns:p="http://schemas.openxmlformats.org/presentationml/2006/main" xmlns:c="http://schemas.openxmlformats.org/drawingml/2006/chart" xmlns:dgm="http://schemas.openxmlformats.org/drawingml/2006/diagram" xmlns:o="urn:schemas-microsoft-com:office:office" xmlns:v="urn:schemas-microsoft-com:vml" xmlns:pvml="urn:schemas-microsoft-com:office:powerpoint" xmlns:com="http://schemas.openxmlformats.org/drawingml/2006/compatibility" xmlns:p14="http://schemas.microsoft.com/office/powerpoint/2010/main" xmlns:p15="http://schemas.microsoft.com/office/powerpoint/2012/main" xmlns:ahyp="http://schemas.microsoft.com/office/drawing/2018/hyperlinkcolor" showMasterPhAnim="0" showMasterSp="0">
+  <p:cSld>
+    <p:spTree>
+      <p:nvGrpSpPr>
+        <p:cNvPr id="386" name="Shape 386"/>
+        <p:cNvGrpSpPr/>
+        <p:nvPr/>
+      </p:nvGrpSpPr>
+      <p:grpSpPr>
+        <a:xfrm>
+          <a:off x="0" y="0"/>
+          <a:ext cx="0" cy="0"/>
+          <a:chOff x="0" y="0"/>
+          <a:chExt cx="0" cy="0"/>
+        </a:xfrm>
+      </p:grpSpPr>
+      <p:sp>
+        <p:nvSpPr>
+          <p:cNvPr id="387" name="Google Shape;387;h1ee84572765e4f1b_1_149:notes"/>
+          <p:cNvSpPr/>
+          <p:nvPr>
+            <p:ph idx="2" type="sldImg"/>
+          </p:nvPr>
+        </p:nvSpPr>
+        <p:spPr>
+          <a:xfrm>
+            <a:off x="381300" y="685800"/>
+            <a:ext cx="6096000" cy="3429000"/>
+          </a:xfrm>
+          <a:custGeom>
+            <a:rect b="b" l="l" r="r" t="t"/>
+            <a:pathLst>
+              <a:path extrusionOk="0" h="120000" w="120000">
+                <a:moveTo>
+                  <a:pt x="0" y="0"/>
+                </a:moveTo>
+                <a:lnTo>
+                  <a:pt x="120000" y="0"/>
+                </a:lnTo>
+                <a:lnTo>
+                  <a:pt x="120000" y="120000"/>
+                </a:lnTo>
+                <a:lnTo>
+                  <a:pt x="0" y="120000"/>
+                </a:lnTo>
+                <a:close/>
+              </a:path>
+            </a:pathLst>
+          </a:custGeom>
+          <a:noFill/>
+          <a:ln cap="flat" cmpd="sng" w="9525">
+            <a:solidFill>
+              <a:srgbClr val="000000"/>
+            </a:solidFill>
+            <a:prstDash val="solid"/>
+            <a:round/>
+            <a:headEnd len="sm" w="sm" type="none"/>
+            <a:tailEnd len="sm" w="sm" type="none"/>
+          </a:ln>
+        </p:spPr>
+      </p:sp>
+      <p:sp>
+        <p:nvSpPr>
+          <p:cNvPr id="388" name="Google Shape;388;h1ee84572765e4f1b_1_149:notes"/>
+          <p:cNvSpPr txBox="1"/>
+          <p:nvPr>
+            <p:ph idx="1" type="body"/>
+          </p:nvPr>
+        </p:nvSpPr>
+        <p:spPr>
+          <a:xfrm>
+            <a:off x="685800" y="4343400"/>
+            <a:ext cx="5486400" cy="4114800"/>
+          </a:xfrm>
+          <a:prstGeom prst="rect">
+            <a:avLst/>
+          </a:prstGeom>
+          <a:noFill/>
+          <a:ln>
+            <a:noFill/>
+          </a:ln>
+        </p:spPr>
+        <p:txBody>
+          <a:bodyPr anchorCtr="0" anchor="t" bIns="91425" lIns="91425" spcFirstLastPara="1" rIns="91425" wrap="square" tIns="91425">
+            <a:noAutofit/>
+          </a:bodyPr>
+          <a:lstStyle/>
+          <a:p>
+            <a:pPr indent="0" lvl="0" marL="0" rtl="0" algn="l">
+              <a:lnSpc>
+                <a:spcPct val="100000"/>
+              </a:lnSpc>
+              <a:spcBef>
+                <a:spcPts val="0"/>
+              </a:spcBef>
+              <a:spcAft>
+                <a:spcPts val="0"/>
+              </a:spcAft>
+              <a:buSzPts val="1100"/>
+              <a:buNone/>
+            </a:pPr>
+            <a:r>
+              <a:t/>
+            </a:r>
+            <a:endParaRPr/>
+          </a:p>
+        </p:txBody>
+      </p:sp>
+    </p:spTree>
+  </p:cSld>
+  <p:clrMapOvr>
+    <a:masterClrMapping/>
+  </p:clrMapOvr>
+</p:notes>
+</file>
+
+<file path=ppt/notesSlides/notesSlide29.xml><?xml version="1.0" encoding="utf-8"?>
+<p:notes xmlns:a="http://schemas.openxmlformats.org/drawingml/2006/main" xmlns:r="http://schemas.openxmlformats.org/officeDocument/2006/relationships" xmlns:mc="http://schemas.openxmlformats.org/markup-compatibility/2006" xmlns:mv="urn:schemas-microsoft-com:mac:vml" xmlns:p="http://schemas.openxmlformats.org/presentationml/2006/main" xmlns:c="http://schemas.openxmlformats.org/drawingml/2006/chart" xmlns:dgm="http://schemas.openxmlformats.org/drawingml/2006/diagram" xmlns:o="urn:schemas-microsoft-com:office:office" xmlns:v="urn:schemas-microsoft-com:vml" xmlns:pvml="urn:schemas-microsoft-com:office:powerpoint" xmlns:com="http://schemas.openxmlformats.org/drawingml/2006/compatibility" xmlns:p14="http://schemas.microsoft.com/office/powerpoint/2010/main" xmlns:p15="http://schemas.microsoft.com/office/powerpoint/2012/main" xmlns:ahyp="http://schemas.microsoft.com/office/drawing/2018/hyperlinkcolor" showMasterPhAnim="0" showMasterSp="0">
+  <p:cSld>
+    <p:spTree>
+      <p:nvGrpSpPr>
+        <p:cNvPr id="394" name="Shape 394"/>
+        <p:cNvGrpSpPr/>
+        <p:nvPr/>
+      </p:nvGrpSpPr>
+      <p:grpSpPr>
+        <a:xfrm>
+          <a:off x="0" y="0"/>
+          <a:ext cx="0" cy="0"/>
+          <a:chOff x="0" y="0"/>
+          <a:chExt cx="0" cy="0"/>
+        </a:xfrm>
+      </p:grpSpPr>
+      <p:sp>
+        <p:nvSpPr>
+          <p:cNvPr id="395" name="Google Shape;395;h1ee84572765e4f1b_1_156:notes"/>
+          <p:cNvSpPr/>
+          <p:nvPr>
+            <p:ph idx="2" type="sldImg"/>
+          </p:nvPr>
+        </p:nvSpPr>
+        <p:spPr>
+          <a:xfrm>
+            <a:off x="381300" y="685800"/>
+            <a:ext cx="6096000" cy="3429000"/>
+          </a:xfrm>
+          <a:custGeom>
+            <a:rect b="b" l="l" r="r" t="t"/>
+            <a:pathLst>
+              <a:path extrusionOk="0" h="120000" w="120000">
+                <a:moveTo>
+                  <a:pt x="0" y="0"/>
+                </a:moveTo>
+                <a:lnTo>
+                  <a:pt x="120000" y="0"/>
+                </a:lnTo>
+                <a:lnTo>
+                  <a:pt x="120000" y="120000"/>
+                </a:lnTo>
+                <a:lnTo>
+                  <a:pt x="0" y="120000"/>
+                </a:lnTo>
+                <a:close/>
+              </a:path>
+            </a:pathLst>
+          </a:custGeom>
+          <a:noFill/>
+          <a:ln cap="flat" cmpd="sng" w="9525">
+            <a:solidFill>
+              <a:srgbClr val="000000"/>
+            </a:solidFill>
+            <a:prstDash val="solid"/>
+            <a:round/>
+            <a:headEnd len="sm" w="sm" type="none"/>
+            <a:tailEnd len="sm" w="sm" type="none"/>
+          </a:ln>
+        </p:spPr>
+      </p:sp>
+      <p:sp>
+        <p:nvSpPr>
+          <p:cNvPr id="396" name="Google Shape;396;h1ee84572765e4f1b_1_156:notes"/>
+          <p:cNvSpPr txBox="1"/>
+          <p:nvPr>
+            <p:ph idx="1" type="body"/>
+          </p:nvPr>
+        </p:nvSpPr>
+        <p:spPr>
+          <a:xfrm>
+            <a:off x="685800" y="4343400"/>
+            <a:ext cx="5486400" cy="4114800"/>
+          </a:xfrm>
+          <a:prstGeom prst="rect">
+            <a:avLst/>
+          </a:prstGeom>
+          <a:noFill/>
+          <a:ln>
+            <a:noFill/>
+          </a:ln>
+        </p:spPr>
+        <p:txBody>
+          <a:bodyPr anchorCtr="0" anchor="t" bIns="91425" lIns="91425" spcFirstLastPara="1" rIns="91425" wrap="square" tIns="91425">
+            <a:noAutofit/>
+          </a:bodyPr>
+          <a:lstStyle/>
+          <a:p>
+            <a:pPr indent="0" lvl="0" marL="0" rtl="0" algn="l">
+              <a:lnSpc>
+                <a:spcPct val="100000"/>
+              </a:lnSpc>
+              <a:spcBef>
+                <a:spcPts val="0"/>
+              </a:spcBef>
+              <a:spcAft>
+                <a:spcPts val="0"/>
+              </a:spcAft>
+              <a:buSzPts val="1100"/>
+              <a:buNone/>
+            </a:pPr>
+            <a:r>
+              <a:t/>
+            </a:r>
+            <a:endParaRPr/>
+          </a:p>
+        </p:txBody>
+      </p:sp>
+    </p:spTree>
+  </p:cSld>
+  <p:clrMapOvr>
+    <a:masterClrMapping/>
+  </p:clrMapOvr>
+</p:notes>
+</file>
+
+<file path=ppt/notesSlides/notesSlide3.xml><?xml version="1.0" encoding="utf-8"?>
+<p:notes xmlns:a="http://schemas.openxmlformats.org/drawingml/2006/main" xmlns:r="http://schemas.openxmlformats.org/officeDocument/2006/relationships" xmlns:mc="http://schemas.openxmlformats.org/markup-compatibility/2006" xmlns:mv="urn:schemas-microsoft-com:mac:vml" xmlns:p="http://schemas.openxmlformats.org/presentationml/2006/main" xmlns:c="http://schemas.openxmlformats.org/drawingml/2006/chart" xmlns:dgm="http://schemas.openxmlformats.org/drawingml/2006/diagram" xmlns:o="urn:schemas-microsoft-com:office:office" xmlns:v="urn:schemas-microsoft-com:vml" xmlns:pvml="urn:schemas-microsoft-com:office:powerpoint" xmlns:com="http://schemas.openxmlformats.org/drawingml/2006/compatibility" xmlns:p14="http://schemas.microsoft.com/office/powerpoint/2010/main" xmlns:p15="http://schemas.microsoft.com/office/powerpoint/2012/main" xmlns:ahyp="http://schemas.microsoft.com/office/drawing/2018/hyperlinkcolor" showMasterPhAnim="0" showMasterSp="0">
+  <p:cSld>
+    <p:spTree>
+      <p:nvGrpSpPr>
+        <p:cNvPr id="186" name="Shape 186"/>
+        <p:cNvGrpSpPr/>
+        <p:nvPr/>
+      </p:nvGrpSpPr>
+      <p:grpSpPr>
+        <a:xfrm>
+          <a:off x="0" y="0"/>
+          <a:ext cx="0" cy="0"/>
+          <a:chOff x="0" y="0"/>
+          <a:chExt cx="0" cy="0"/>
+        </a:xfrm>
+      </p:grpSpPr>
+      <p:sp>
+        <p:nvSpPr>
+          <p:cNvPr id="187" name="Google Shape;187;p3:notes"/>
+          <p:cNvSpPr/>
+          <p:nvPr>
+            <p:ph idx="2" type="sldImg"/>
+          </p:nvPr>
+        </p:nvSpPr>
+        <p:spPr>
+          <a:xfrm>
+            <a:off x="381300" y="685800"/>
+            <a:ext cx="6096000" cy="3429000"/>
+          </a:xfrm>
+          <a:custGeom>
+            <a:rect b="b" l="l" r="r" t="t"/>
+            <a:pathLst>
+              <a:path extrusionOk="0" h="120000" w="120000">
+                <a:moveTo>
+                  <a:pt x="0" y="0"/>
+                </a:moveTo>
+                <a:lnTo>
+                  <a:pt x="120000" y="0"/>
+                </a:lnTo>
+                <a:lnTo>
+                  <a:pt x="120000" y="120000"/>
+                </a:lnTo>
+                <a:lnTo>
+                  <a:pt x="0" y="120000"/>
+                </a:lnTo>
+                <a:close/>
+              </a:path>
+            </a:pathLst>
+          </a:custGeom>
+          <a:noFill/>
+          <a:ln cap="flat" cmpd="sng" w="9525">
+            <a:solidFill>
+              <a:srgbClr val="000000"/>
+            </a:solidFill>
+            <a:prstDash val="solid"/>
+            <a:round/>
+            <a:headEnd len="sm" w="sm" type="none"/>
+            <a:tailEnd len="sm" w="sm" type="none"/>
+          </a:ln>
+        </p:spPr>
+      </p:sp>
+      <p:sp>
+        <p:nvSpPr>
           <p:cNvPr id="188" name="Google Shape;188;p3:notes"/>
+          <p:cNvSpPr txBox="1"/>
+          <p:nvPr>
+            <p:ph idx="1" type="body"/>
+          </p:nvPr>
+        </p:nvSpPr>
+        <p:spPr>
+          <a:xfrm>
+            <a:off x="685800" y="4343400"/>
+            <a:ext cx="5486400" cy="4114800"/>
+          </a:xfrm>
+          <a:prstGeom prst="rect">
+            <a:avLst/>
+          </a:prstGeom>
+          <a:noFill/>
+          <a:ln>
+            <a:noFill/>
+          </a:ln>
+        </p:spPr>
+        <p:txBody>
+          <a:bodyPr anchorCtr="0" anchor="t" bIns="91425" lIns="91425" spcFirstLastPara="1" rIns="91425" wrap="square" tIns="91425">
+            <a:noAutofit/>
+          </a:bodyPr>
+          <a:lstStyle/>
+          <a:p>
+            <a:pPr indent="0" lvl="0" marL="0" rtl="0" algn="l">
+              <a:lnSpc>
+                <a:spcPct val="100000"/>
+              </a:lnSpc>
+              <a:spcBef>
+                <a:spcPts val="0"/>
+              </a:spcBef>
+              <a:spcAft>
+                <a:spcPts val="0"/>
+              </a:spcAft>
+              <a:buSzPts val="1100"/>
+              <a:buNone/>
+            </a:pPr>
+            <a:r>
+              <a:t/>
+            </a:r>
+            <a:endParaRPr/>
+          </a:p>
+        </p:txBody>
+      </p:sp>
+    </p:spTree>
+  </p:cSld>
+  <p:clrMapOvr>
+    <a:masterClrMapping/>
+  </p:clrMapOvr>
+</p:notes>
+</file>
+
+<file path=ppt/notesSlides/notesSlide30.xml><?xml version="1.0" encoding="utf-8"?>
+<p:notes xmlns:a="http://schemas.openxmlformats.org/drawingml/2006/main" xmlns:r="http://schemas.openxmlformats.org/officeDocument/2006/relationships" xmlns:mc="http://schemas.openxmlformats.org/markup-compatibility/2006" xmlns:mv="urn:schemas-microsoft-com:mac:vml" xmlns:p="http://schemas.openxmlformats.org/presentationml/2006/main" xmlns:c="http://schemas.openxmlformats.org/drawingml/2006/chart" xmlns:dgm="http://schemas.openxmlformats.org/drawingml/2006/diagram" xmlns:o="urn:schemas-microsoft-com:office:office" xmlns:v="urn:schemas-microsoft-com:vml" xmlns:pvml="urn:schemas-microsoft-com:office:powerpoint" xmlns:com="http://schemas.openxmlformats.org/drawingml/2006/compatibility" xmlns:p14="http://schemas.microsoft.com/office/powerpoint/2010/main" xmlns:p15="http://schemas.microsoft.com/office/powerpoint/2012/main" xmlns:ahyp="http://schemas.microsoft.com/office/drawing/2018/hyperlinkcolor" showMasterPhAnim="0" showMasterSp="0">
+  <p:cSld>
+    <p:spTree>
+      <p:nvGrpSpPr>
+        <p:cNvPr id="402" name="Shape 402"/>
+        <p:cNvGrpSpPr/>
+        <p:nvPr/>
+      </p:nvGrpSpPr>
+      <p:grpSpPr>
+        <a:xfrm>
+          <a:off x="0" y="0"/>
+          <a:ext cx="0" cy="0"/>
+          <a:chOff x="0" y="0"/>
+          <a:chExt cx="0" cy="0"/>
+        </a:xfrm>
+      </p:grpSpPr>
+      <p:sp>
+        <p:nvSpPr>
+          <p:cNvPr id="403" name="Google Shape;403;p10:notes"/>
+          <p:cNvSpPr/>
+          <p:nvPr>
+            <p:ph idx="2" type="sldImg"/>
+          </p:nvPr>
+        </p:nvSpPr>
+        <p:spPr>
+          <a:xfrm>
+            <a:off x="381300" y="685800"/>
+            <a:ext cx="6096000" cy="3429000"/>
+          </a:xfrm>
+          <a:custGeom>
+            <a:rect b="b" l="l" r="r" t="t"/>
+            <a:pathLst>
+              <a:path extrusionOk="0" h="120000" w="120000">
+                <a:moveTo>
+                  <a:pt x="0" y="0"/>
+                </a:moveTo>
+                <a:lnTo>
+                  <a:pt x="120000" y="0"/>
+                </a:lnTo>
+                <a:lnTo>
+                  <a:pt x="120000" y="120000"/>
+                </a:lnTo>
+                <a:lnTo>
+                  <a:pt x="0" y="120000"/>
+                </a:lnTo>
+                <a:close/>
+              </a:path>
+            </a:pathLst>
+          </a:custGeom>
+          <a:noFill/>
+          <a:ln cap="flat" cmpd="sng" w="9525">
+            <a:solidFill>
+              <a:srgbClr val="000000"/>
+            </a:solidFill>
+            <a:prstDash val="solid"/>
+            <a:round/>
+            <a:headEnd len="sm" w="sm" type="none"/>
+            <a:tailEnd len="sm" w="sm" type="none"/>
+          </a:ln>
+        </p:spPr>
+      </p:sp>
+      <p:sp>
+        <p:nvSpPr>
+          <p:cNvPr id="404" name="Google Shape;404;p10:notes"/>
+          <p:cNvSpPr txBox="1"/>
+          <p:nvPr>
+            <p:ph idx="1" type="body"/>
+          </p:nvPr>
+        </p:nvSpPr>
+        <p:spPr>
+          <a:xfrm>
+            <a:off x="685800" y="4343400"/>
+            <a:ext cx="5486400" cy="4114800"/>
+          </a:xfrm>
+          <a:prstGeom prst="rect">
+            <a:avLst/>
+          </a:prstGeom>
+          <a:noFill/>
+          <a:ln>
+            <a:noFill/>
+          </a:ln>
+        </p:spPr>
+        <p:txBody>
+          <a:bodyPr anchorCtr="0" anchor="t" bIns="91425" lIns="91425" spcFirstLastPara="1" rIns="91425" wrap="square" tIns="91425">
+            <a:noAutofit/>
+          </a:bodyPr>
+          <a:lstStyle/>
+          <a:p>
+            <a:pPr indent="0" lvl="0" marL="0" rtl="0" algn="l">
+              <a:lnSpc>
+                <a:spcPct val="100000"/>
+              </a:lnSpc>
+              <a:spcBef>
+                <a:spcPts val="0"/>
+              </a:spcBef>
+              <a:spcAft>
+                <a:spcPts val="0"/>
+              </a:spcAft>
+              <a:buSzPts val="1100"/>
+              <a:buNone/>
+            </a:pPr>
+            <a:r>
+              <a:t/>
+            </a:r>
+            <a:endParaRPr/>
+          </a:p>
+        </p:txBody>
+      </p:sp>
+    </p:spTree>
+  </p:cSld>
+  <p:clrMapOvr>
+    <a:masterClrMapping/>
+  </p:clrMapOvr>
+</p:notes>
+</file>
+
+<file path=ppt/notesSlides/notesSlide31.xml><?xml version="1.0" encoding="utf-8"?>
+<p:notes xmlns:a="http://schemas.openxmlformats.org/drawingml/2006/main" xmlns:r="http://schemas.openxmlformats.org/officeDocument/2006/relationships" xmlns:mc="http://schemas.openxmlformats.org/markup-compatibility/2006" xmlns:mv="urn:schemas-microsoft-com:mac:vml" xmlns:p="http://schemas.openxmlformats.org/presentationml/2006/main" xmlns:c="http://schemas.openxmlformats.org/drawingml/2006/chart" xmlns:dgm="http://schemas.openxmlformats.org/drawingml/2006/diagram" xmlns:o="urn:schemas-microsoft-com:office:office" xmlns:v="urn:schemas-microsoft-com:vml" xmlns:pvml="urn:schemas-microsoft-com:office:powerpoint" xmlns:com="http://schemas.openxmlformats.org/drawingml/2006/compatibility" xmlns:p14="http://schemas.microsoft.com/office/powerpoint/2010/main" xmlns:p15="http://schemas.microsoft.com/office/powerpoint/2012/main" xmlns:ahyp="http://schemas.microsoft.com/office/drawing/2018/hyperlinkcolor" showMasterPhAnim="0" showMasterSp="0">
+  <p:cSld>
+    <p:spTree>
+      <p:nvGrpSpPr>
+        <p:cNvPr id="408" name="Shape 408"/>
+        <p:cNvGrpSpPr/>
+        <p:nvPr/>
+      </p:nvGrpSpPr>
+      <p:grpSpPr>
+        <a:xfrm>
+          <a:off x="0" y="0"/>
+          <a:ext cx="0" cy="0"/>
+          <a:chOff x="0" y="0"/>
+          <a:chExt cx="0" cy="0"/>
+        </a:xfrm>
+      </p:grpSpPr>
+      <p:sp>
+        <p:nvSpPr>
+          <p:cNvPr id="409" name="Google Shape;409;p12:notes"/>
+          <p:cNvSpPr/>
+          <p:nvPr>
+            <p:ph idx="2" type="sldImg"/>
+          </p:nvPr>
+        </p:nvSpPr>
+        <p:spPr>
+          <a:xfrm>
+            <a:off x="381300" y="685800"/>
+            <a:ext cx="6096000" cy="3429000"/>
+          </a:xfrm>
+          <a:custGeom>
+            <a:rect b="b" l="l" r="r" t="t"/>
+            <a:pathLst>
+              <a:path extrusionOk="0" h="120000" w="120000">
+                <a:moveTo>
+                  <a:pt x="0" y="0"/>
+                </a:moveTo>
+                <a:lnTo>
+                  <a:pt x="120000" y="0"/>
+                </a:lnTo>
+                <a:lnTo>
+                  <a:pt x="120000" y="120000"/>
+                </a:lnTo>
+                <a:lnTo>
+                  <a:pt x="0" y="120000"/>
+                </a:lnTo>
+                <a:close/>
+              </a:path>
+            </a:pathLst>
+          </a:custGeom>
+          <a:noFill/>
+          <a:ln cap="flat" cmpd="sng" w="9525">
+            <a:solidFill>
+              <a:srgbClr val="000000"/>
+            </a:solidFill>
+            <a:prstDash val="solid"/>
+            <a:round/>
+            <a:headEnd len="sm" w="sm" type="none"/>
+            <a:tailEnd len="sm" w="sm" type="none"/>
+          </a:ln>
+        </p:spPr>
+      </p:sp>
+      <p:sp>
+        <p:nvSpPr>
+          <p:cNvPr id="410" name="Google Shape;410;p12:notes"/>
           <p:cNvSpPr txBox="1"/>
           <p:nvPr>
             <p:ph idx="1" type="body"/>
@@ -37569,7 +38985,7 @@
                 </a:solidFill>
                 <a:latin typeface="Montserrat"/>
               </a:rPr>
-              <a:t>Recommendations and Next Steps</a:t>
+              <a:t>Deployment, Inference and Handoff</a:t>
             </a:r>
           </a:p>
         </p:txBody>
@@ -37590,6 +39006,5916 @@
           </a:prstGeom>
           <a:solidFill>
             <a:srgbClr val="0E39A9"/>
+          </a:solidFill>
+          <a:ln>
+            <a:noFill/>
+          </a:ln>
+        </p:spPr>
+        <p:style>
+          <a:lnRef idx="1">
+            <a:schemeClr val="accent1"/>
+          </a:lnRef>
+          <a:fillRef idx="3">
+            <a:schemeClr val="accent1"/>
+          </a:fillRef>
+          <a:effectRef idx="2">
+            <a:schemeClr val="accent1"/>
+          </a:effectRef>
+          <a:fontRef idx="minor">
+            <a:schemeClr val="lt1"/>
+          </a:fontRef>
+        </p:style>
+        <p:txBody>
+          <a:bodyPr rtlCol="0" anchor="ctr"/>
+          <a:lstStyle/>
+          <a:p>
+            <a:pPr algn="ctr"/>
+          </a:p>
+        </p:txBody>
+      </p:sp>
+    </p:spTree>
+  </p:cSld>
+  <p:clrMapOvr>
+    <a:masterClrMapping/>
+  </p:clrMapOvr>
+</p:sld>
+</file>
+
+<file path=ppt/slides/slide20.xml><?xml version="1.0" encoding="utf-8"?>
+<p:sld xmlns:a="http://schemas.openxmlformats.org/drawingml/2006/main" xmlns:r="http://schemas.openxmlformats.org/officeDocument/2006/relationships" xmlns:mc="http://schemas.openxmlformats.org/markup-compatibility/2006" xmlns:mv="urn:schemas-microsoft-com:mac:vml" xmlns:p="http://schemas.openxmlformats.org/presentationml/2006/main" xmlns:c="http://schemas.openxmlformats.org/drawingml/2006/chart" xmlns:dgm="http://schemas.openxmlformats.org/drawingml/2006/diagram" xmlns:o="urn:schemas-microsoft-com:office:office" xmlns:v="urn:schemas-microsoft-com:vml" xmlns:pvml="urn:schemas-microsoft-com:office:powerpoint" xmlns:com="http://schemas.openxmlformats.org/drawingml/2006/compatibility" xmlns:p14="http://schemas.microsoft.com/office/powerpoint/2010/main" xmlns:p15="http://schemas.microsoft.com/office/powerpoint/2012/main" xmlns:ahyp="http://schemas.microsoft.com/office/drawing/2018/hyperlinkcolor">
+  <p:cSld>
+    <p:spTree>
+      <p:nvGrpSpPr>
+        <p:cNvPr id="325" name="Shape 325"/>
+        <p:cNvGrpSpPr/>
+        <p:nvPr/>
+      </p:nvGrpSpPr>
+      <p:grpSpPr>
+        <a:xfrm>
+          <a:off x="0" y="0"/>
+          <a:ext cx="0" cy="0"/>
+          <a:chOff x="0" y="0"/>
+          <a:chExt cx="0" cy="0"/>
+        </a:xfrm>
+      </p:grpSpPr>
+      <p:sp>
+        <p:nvSpPr>
+          <p:cNvPr id="326" name="Google Shape;326;p55"/>
+          <p:cNvSpPr txBox="1"/>
+          <p:nvPr>
+            <p:ph type="title"/>
+          </p:nvPr>
+        </p:nvSpPr>
+        <p:spPr>
+          <a:xfrm>
+            <a:off x="202550" y="289279"/>
+            <a:ext cx="8520600" cy="572700"/>
+          </a:xfrm>
+          <a:prstGeom prst="rect">
+            <a:avLst/>
+          </a:prstGeom>
+          <a:noFill/>
+          <a:ln>
+            <a:noFill/>
+          </a:ln>
+        </p:spPr>
+        <p:txBody>
+          <a:bodyPr anchorCtr="0" anchor="t" bIns="91425" lIns="91425" spcFirstLastPara="1" rIns="91425" wrap="square" tIns="91425">
+            <a:noAutofit/>
+          </a:bodyPr>
+          <a:lstStyle/>
+          <a:p>
+            <a:r>
+              <a:rPr sz="2200" b="1">
+                <a:solidFill>
+                  <a:srgbClr val="0E39A9"/>
+                </a:solidFill>
+                <a:latin typeface="Montserrat"/>
+              </a:rPr>
+              <a:t>Deployment - Backend - Serialize the Vector Database</a:t>
+            </a:r>
+          </a:p>
+        </p:txBody>
+      </p:sp>
+      <p:sp>
+        <p:nvSpPr>
+          <p:cNvPr id="327" name="Rectangle 326"/>
+          <p:cNvSpPr/>
+          <p:nvPr/>
+        </p:nvSpPr>
+        <p:spPr>
+          <a:xfrm>
+            <a:off x="502920" y="1005840"/>
+            <a:ext cx="8138160" cy="32004"/>
+          </a:xfrm>
+          <a:prstGeom prst="rect">
+            <a:avLst/>
+          </a:prstGeom>
+          <a:solidFill>
+            <a:srgbClr val="0E39A9"/>
+          </a:solidFill>
+          <a:ln>
+            <a:noFill/>
+          </a:ln>
+        </p:spPr>
+        <p:style>
+          <a:lnRef idx="1">
+            <a:schemeClr val="accent1"/>
+          </a:lnRef>
+          <a:fillRef idx="3">
+            <a:schemeClr val="accent1"/>
+          </a:fillRef>
+          <a:effectRef idx="2">
+            <a:schemeClr val="accent1"/>
+          </a:effectRef>
+          <a:fontRef idx="minor">
+            <a:schemeClr val="lt1"/>
+          </a:fontRef>
+        </p:style>
+        <p:txBody>
+          <a:bodyPr rtlCol="0" anchor="ctr"/>
+          <a:lstStyle/>
+          <a:p>
+            <a:pPr algn="ctr"/>
+          </a:p>
+        </p:txBody>
+      </p:sp>
+      <p:sp>
+        <p:nvSpPr>
+          <p:cNvPr id="328" name="TextBox 327"/>
+          <p:cNvSpPr txBox="1"/>
+          <p:nvPr/>
+        </p:nvSpPr>
+        <p:spPr>
+          <a:xfrm>
+            <a:off x="694944" y="1325880"/>
+            <a:ext cx="6729984" cy="278892"/>
+          </a:xfrm>
+          <a:prstGeom prst="rect">
+            <a:avLst/>
+          </a:prstGeom>
+          <a:noFill/>
+        </p:spPr>
+        <p:txBody>
+          <a:bodyPr wrap="square" lIns="82296" rIns="36576" tIns="18288" bIns="18288">
+            <a:normAutofit/>
+          </a:bodyPr>
+          <a:lstStyle/>
+          <a:p>
+            <a:pPr>
+              <a:lnSpc>
+                <a:spcPct val="100000"/>
+              </a:lnSpc>
+              <a:spcBef>
+                <a:spcPts val="0"/>
+              </a:spcBef>
+              <a:spcAft>
+                <a:spcPts val="0"/>
+              </a:spcAft>
+            </a:pPr>
+            <a:r>
+              <a:rPr sz="1500" b="0">
+                <a:solidFill>
+                  <a:srgbClr val="000000"/>
+                </a:solidFill>
+                <a:latin typeface="Montserrat"/>
+              </a:rPr>
+              <a:t>Backend artifact: backend/faiss_index/index.faiss.</a:t>
+            </a:r>
+          </a:p>
+        </p:txBody>
+      </p:sp>
+      <p:sp>
+        <p:nvSpPr>
+          <p:cNvPr id="329" name="Oval 328"/>
+          <p:cNvSpPr/>
+          <p:nvPr/>
+        </p:nvSpPr>
+        <p:spPr>
+          <a:xfrm>
+            <a:off x="402336" y="1426464"/>
+            <a:ext cx="192024" cy="192024"/>
+          </a:xfrm>
+          <a:prstGeom prst="ellipse">
+            <a:avLst/>
+          </a:prstGeom>
+          <a:solidFill>
+            <a:srgbClr val="0944A1"/>
+          </a:solidFill>
+          <a:ln>
+            <a:noFill/>
+          </a:ln>
+        </p:spPr>
+        <p:style>
+          <a:lnRef idx="1">
+            <a:schemeClr val="accent1"/>
+          </a:lnRef>
+          <a:fillRef idx="3">
+            <a:schemeClr val="accent1"/>
+          </a:fillRef>
+          <a:effectRef idx="2">
+            <a:schemeClr val="accent1"/>
+          </a:effectRef>
+          <a:fontRef idx="minor">
+            <a:schemeClr val="lt1"/>
+          </a:fontRef>
+        </p:style>
+        <p:txBody>
+          <a:bodyPr rtlCol="0" anchor="ctr"/>
+          <a:lstStyle/>
+          <a:p>
+            <a:pPr algn="ctr"/>
+          </a:p>
+        </p:txBody>
+      </p:sp>
+      <p:sp>
+        <p:nvSpPr>
+          <p:cNvPr id="330" name="TextBox 329"/>
+          <p:cNvSpPr txBox="1"/>
+          <p:nvPr/>
+        </p:nvSpPr>
+        <p:spPr>
+          <a:xfrm>
+            <a:off x="694944" y="1636776"/>
+            <a:ext cx="6729984" cy="512064"/>
+          </a:xfrm>
+          <a:prstGeom prst="rect">
+            <a:avLst/>
+          </a:prstGeom>
+          <a:noFill/>
+        </p:spPr>
+        <p:txBody>
+          <a:bodyPr wrap="square" lIns="82296" rIns="36576" tIns="18288" bIns="18288">
+            <a:normAutofit/>
+          </a:bodyPr>
+          <a:lstStyle/>
+          <a:p>
+            <a:pPr>
+              <a:lnSpc>
+                <a:spcPct val="100000"/>
+              </a:lnSpc>
+              <a:spcBef>
+                <a:spcPts val="0"/>
+              </a:spcBef>
+              <a:spcAft>
+                <a:spcPts val="0"/>
+              </a:spcAft>
+            </a:pPr>
+            <a:r>
+              <a:rPr sz="1500" b="0">
+                <a:solidFill>
+                  <a:srgbClr val="000000"/>
+                </a:solidFill>
+                <a:latin typeface="Montserrat"/>
+              </a:rPr>
+              <a:t>Metadata and document store: backend/faiss_index/index.pkl.</a:t>
+            </a:r>
+          </a:p>
+        </p:txBody>
+      </p:sp>
+      <p:sp>
+        <p:nvSpPr>
+          <p:cNvPr id="331" name="Oval 330"/>
+          <p:cNvSpPr/>
+          <p:nvPr/>
+        </p:nvSpPr>
+        <p:spPr>
+          <a:xfrm>
+            <a:off x="402336" y="1737360"/>
+            <a:ext cx="192024" cy="192024"/>
+          </a:xfrm>
+          <a:prstGeom prst="ellipse">
+            <a:avLst/>
+          </a:prstGeom>
+          <a:solidFill>
+            <a:srgbClr val="0944A1"/>
+          </a:solidFill>
+          <a:ln>
+            <a:noFill/>
+          </a:ln>
+        </p:spPr>
+        <p:style>
+          <a:lnRef idx="1">
+            <a:schemeClr val="accent1"/>
+          </a:lnRef>
+          <a:fillRef idx="3">
+            <a:schemeClr val="accent1"/>
+          </a:fillRef>
+          <a:effectRef idx="2">
+            <a:schemeClr val="accent1"/>
+          </a:effectRef>
+          <a:fontRef idx="minor">
+            <a:schemeClr val="lt1"/>
+          </a:fontRef>
+        </p:style>
+        <p:txBody>
+          <a:bodyPr rtlCol="0" anchor="ctr"/>
+          <a:lstStyle/>
+          <a:p>
+            <a:pPr algn="ctr"/>
+          </a:p>
+        </p:txBody>
+      </p:sp>
+      <p:sp>
+        <p:nvSpPr>
+          <p:cNvPr id="332" name="TextBox 331"/>
+          <p:cNvSpPr txBox="1"/>
+          <p:nvPr/>
+        </p:nvSpPr>
+        <p:spPr>
+          <a:xfrm>
+            <a:off x="694944" y="2180844"/>
+            <a:ext cx="6729984" cy="512064"/>
+          </a:xfrm>
+          <a:prstGeom prst="rect">
+            <a:avLst/>
+          </a:prstGeom>
+          <a:noFill/>
+        </p:spPr>
+        <p:txBody>
+          <a:bodyPr wrap="square" lIns="82296" rIns="36576" tIns="18288" bIns="18288">
+            <a:normAutofit/>
+          </a:bodyPr>
+          <a:lstStyle/>
+          <a:p>
+            <a:pPr>
+              <a:lnSpc>
+                <a:spcPct val="100000"/>
+              </a:lnSpc>
+              <a:spcBef>
+                <a:spcPts val="0"/>
+              </a:spcBef>
+              <a:spcAft>
+                <a:spcPts val="0"/>
+              </a:spcAft>
+            </a:pPr>
+            <a:r>
+              <a:rPr sz="1500" b="0">
+                <a:solidFill>
+                  <a:srgbClr val="000000"/>
+                </a:solidFill>
+                <a:latin typeface="Montserrat"/>
+              </a:rPr>
+              <a:t>The persisted FAISS index contains 43 normalized vectors from the policy knowledge base.</a:t>
+            </a:r>
+          </a:p>
+        </p:txBody>
+      </p:sp>
+      <p:sp>
+        <p:nvSpPr>
+          <p:cNvPr id="333" name="Oval 332"/>
+          <p:cNvSpPr/>
+          <p:nvPr/>
+        </p:nvSpPr>
+        <p:spPr>
+          <a:xfrm>
+            <a:off x="402336" y="2281428"/>
+            <a:ext cx="192024" cy="192024"/>
+          </a:xfrm>
+          <a:prstGeom prst="ellipse">
+            <a:avLst/>
+          </a:prstGeom>
+          <a:solidFill>
+            <a:srgbClr val="0944A1"/>
+          </a:solidFill>
+          <a:ln>
+            <a:noFill/>
+          </a:ln>
+        </p:spPr>
+        <p:style>
+          <a:lnRef idx="1">
+            <a:schemeClr val="accent1"/>
+          </a:lnRef>
+          <a:fillRef idx="3">
+            <a:schemeClr val="accent1"/>
+          </a:fillRef>
+          <a:effectRef idx="2">
+            <a:schemeClr val="accent1"/>
+          </a:effectRef>
+          <a:fontRef idx="minor">
+            <a:schemeClr val="lt1"/>
+          </a:fontRef>
+        </p:style>
+        <p:txBody>
+          <a:bodyPr rtlCol="0" anchor="ctr"/>
+          <a:lstStyle/>
+          <a:p>
+            <a:pPr algn="ctr"/>
+          </a:p>
+        </p:txBody>
+      </p:sp>
+      <p:sp>
+        <p:nvSpPr>
+          <p:cNvPr id="334" name="TextBox 333"/>
+          <p:cNvSpPr txBox="1"/>
+          <p:nvPr/>
+        </p:nvSpPr>
+        <p:spPr>
+          <a:xfrm>
+            <a:off x="694944" y="2724912"/>
+            <a:ext cx="6729984" cy="745236"/>
+          </a:xfrm>
+          <a:prstGeom prst="rect">
+            <a:avLst/>
+          </a:prstGeom>
+          <a:noFill/>
+        </p:spPr>
+        <p:txBody>
+          <a:bodyPr wrap="square" lIns="82296" rIns="36576" tIns="18288" bIns="18288">
+            <a:normAutofit/>
+          </a:bodyPr>
+          <a:lstStyle/>
+          <a:p>
+            <a:pPr>
+              <a:lnSpc>
+                <a:spcPct val="100000"/>
+              </a:lnSpc>
+              <a:spcBef>
+                <a:spcPts val="0"/>
+              </a:spcBef>
+              <a:spcAft>
+                <a:spcPts val="0"/>
+              </a:spcAft>
+            </a:pPr>
+            <a:r>
+              <a:rPr sz="1500" b="0">
+                <a:solidFill>
+                  <a:srgbClr val="000000"/>
+                </a:solidFill>
+                <a:latin typeface="Montserrat"/>
+              </a:rPr>
+              <a:t>The backend loads the trusted local artifact at startup; the Docker image copies the index into /app/faiss_index.</a:t>
+            </a:r>
+          </a:p>
+        </p:txBody>
+      </p:sp>
+      <p:sp>
+        <p:nvSpPr>
+          <p:cNvPr id="335" name="Oval 334"/>
+          <p:cNvSpPr/>
+          <p:nvPr/>
+        </p:nvSpPr>
+        <p:spPr>
+          <a:xfrm>
+            <a:off x="402336" y="2825496"/>
+            <a:ext cx="192024" cy="192024"/>
+          </a:xfrm>
+          <a:prstGeom prst="ellipse">
+            <a:avLst/>
+          </a:prstGeom>
+          <a:solidFill>
+            <a:srgbClr val="0944A1"/>
+          </a:solidFill>
+          <a:ln>
+            <a:noFill/>
+          </a:ln>
+        </p:spPr>
+        <p:style>
+          <a:lnRef idx="1">
+            <a:schemeClr val="accent1"/>
+          </a:lnRef>
+          <a:fillRef idx="3">
+            <a:schemeClr val="accent1"/>
+          </a:fillRef>
+          <a:effectRef idx="2">
+            <a:schemeClr val="accent1"/>
+          </a:effectRef>
+          <a:fontRef idx="minor">
+            <a:schemeClr val="lt1"/>
+          </a:fontRef>
+        </p:style>
+        <p:txBody>
+          <a:bodyPr rtlCol="0" anchor="ctr"/>
+          <a:lstStyle/>
+          <a:p>
+            <a:pPr algn="ctr"/>
+          </a:p>
+        </p:txBody>
+      </p:sp>
+      <p:sp>
+        <p:nvSpPr>
+          <p:cNvPr id="336" name="TextBox 335"/>
+          <p:cNvSpPr txBox="1"/>
+          <p:nvPr/>
+        </p:nvSpPr>
+        <p:spPr>
+          <a:xfrm>
+            <a:off x="694944" y="3502152"/>
+            <a:ext cx="6729984" cy="512064"/>
+          </a:xfrm>
+          <a:prstGeom prst="rect">
+            <a:avLst/>
+          </a:prstGeom>
+          <a:noFill/>
+        </p:spPr>
+        <p:txBody>
+          <a:bodyPr wrap="square" lIns="82296" rIns="36576" tIns="18288" bIns="18288">
+            <a:normAutofit/>
+          </a:bodyPr>
+          <a:lstStyle/>
+          <a:p>
+            <a:pPr>
+              <a:lnSpc>
+                <a:spcPct val="100000"/>
+              </a:lnSpc>
+              <a:spcBef>
+                <a:spcPts val="0"/>
+              </a:spcBef>
+              <a:spcAft>
+                <a:spcPts val="0"/>
+              </a:spcAft>
+            </a:pPr>
+            <a:r>
+              <a:rPr sz="1500" b="0">
+                <a:solidFill>
+                  <a:srgbClr val="000000"/>
+                </a:solidFill>
+                <a:latin typeface="Montserrat"/>
+              </a:rPr>
+              <a:t>The artifact must be rebuilt whenever source documents, chunking, or embeddings change.</a:t>
+            </a:r>
+          </a:p>
+        </p:txBody>
+      </p:sp>
+      <p:sp>
+        <p:nvSpPr>
+          <p:cNvPr id="337" name="Oval 336"/>
+          <p:cNvSpPr/>
+          <p:nvPr/>
+        </p:nvSpPr>
+        <p:spPr>
+          <a:xfrm>
+            <a:off x="402336" y="3602736"/>
+            <a:ext cx="192024" cy="192024"/>
+          </a:xfrm>
+          <a:prstGeom prst="ellipse">
+            <a:avLst/>
+          </a:prstGeom>
+          <a:solidFill>
+            <a:srgbClr val="0944A1"/>
+          </a:solidFill>
+          <a:ln>
+            <a:noFill/>
+          </a:ln>
+        </p:spPr>
+        <p:style>
+          <a:lnRef idx="1">
+            <a:schemeClr val="accent1"/>
+          </a:lnRef>
+          <a:fillRef idx="3">
+            <a:schemeClr val="accent1"/>
+          </a:fillRef>
+          <a:effectRef idx="2">
+            <a:schemeClr val="accent1"/>
+          </a:effectRef>
+          <a:fontRef idx="minor">
+            <a:schemeClr val="lt1"/>
+          </a:fontRef>
+        </p:style>
+        <p:txBody>
+          <a:bodyPr rtlCol="0" anchor="ctr"/>
+          <a:lstStyle/>
+          <a:p>
+            <a:pPr algn="ctr"/>
+          </a:p>
+        </p:txBody>
+      </p:sp>
+    </p:spTree>
+  </p:cSld>
+  <p:clrMapOvr>
+    <a:masterClrMapping/>
+  </p:clrMapOvr>
+</p:sld>
+</file>
+
+<file path=ppt/slides/slide21.xml><?xml version="1.0" encoding="utf-8"?>
+<p:sld xmlns:a="http://schemas.openxmlformats.org/drawingml/2006/main" xmlns:r="http://schemas.openxmlformats.org/officeDocument/2006/relationships" xmlns:mc="http://schemas.openxmlformats.org/markup-compatibility/2006" xmlns:mv="urn:schemas-microsoft-com:mac:vml" xmlns:p="http://schemas.openxmlformats.org/presentationml/2006/main" xmlns:c="http://schemas.openxmlformats.org/drawingml/2006/chart" xmlns:dgm="http://schemas.openxmlformats.org/drawingml/2006/diagram" xmlns:o="urn:schemas-microsoft-com:office:office" xmlns:v="urn:schemas-microsoft-com:vml" xmlns:pvml="urn:schemas-microsoft-com:office:powerpoint" xmlns:com="http://schemas.openxmlformats.org/drawingml/2006/compatibility" xmlns:p14="http://schemas.microsoft.com/office/powerpoint/2010/main" xmlns:p15="http://schemas.microsoft.com/office/powerpoint/2012/main" xmlns:ahyp="http://schemas.microsoft.com/office/drawing/2018/hyperlinkcolor">
+  <p:cSld>
+    <p:spTree>
+      <p:nvGrpSpPr>
+        <p:cNvPr id="333" name="Shape 333"/>
+        <p:cNvGrpSpPr/>
+        <p:nvPr/>
+      </p:nvGrpSpPr>
+      <p:grpSpPr>
+        <a:xfrm>
+          <a:off x="0" y="0"/>
+          <a:ext cx="0" cy="0"/>
+          <a:chOff x="0" y="0"/>
+          <a:chExt cx="0" cy="0"/>
+        </a:xfrm>
+      </p:grpSpPr>
+      <p:sp>
+        <p:nvSpPr>
+          <p:cNvPr id="334" name="Google Shape;334;p56"/>
+          <p:cNvSpPr txBox="1"/>
+          <p:nvPr>
+            <p:ph type="title"/>
+          </p:nvPr>
+        </p:nvSpPr>
+        <p:spPr>
+          <a:xfrm>
+            <a:off x="202550" y="289279"/>
+            <a:ext cx="8520600" cy="572700"/>
+          </a:xfrm>
+          <a:prstGeom prst="rect">
+            <a:avLst/>
+          </a:prstGeom>
+          <a:noFill/>
+          <a:ln>
+            <a:noFill/>
+          </a:ln>
+        </p:spPr>
+        <p:txBody>
+          <a:bodyPr anchorCtr="0" anchor="t" bIns="91425" lIns="91425" spcFirstLastPara="1" rIns="91425" wrap="square" tIns="91425">
+            <a:noAutofit/>
+          </a:bodyPr>
+          <a:lstStyle/>
+          <a:p>
+            <a:r>
+              <a:rPr sz="2200" b="1">
+                <a:solidFill>
+                  <a:srgbClr val="0E39A9"/>
+                </a:solidFill>
+                <a:latin typeface="Montserrat"/>
+              </a:rPr>
+              <a:t>Deployment - Backend - Define the Flask Application</a:t>
+            </a:r>
+          </a:p>
+        </p:txBody>
+      </p:sp>
+      <p:sp>
+        <p:nvSpPr>
+          <p:cNvPr id="335" name="Rectangle 334"/>
+          <p:cNvSpPr/>
+          <p:nvPr/>
+        </p:nvSpPr>
+        <p:spPr>
+          <a:xfrm>
+            <a:off x="502920" y="1005840"/>
+            <a:ext cx="8138160" cy="32004"/>
+          </a:xfrm>
+          <a:prstGeom prst="rect">
+            <a:avLst/>
+          </a:prstGeom>
+          <a:solidFill>
+            <a:srgbClr val="0E39A9"/>
+          </a:solidFill>
+          <a:ln>
+            <a:noFill/>
+          </a:ln>
+        </p:spPr>
+        <p:style>
+          <a:lnRef idx="1">
+            <a:schemeClr val="accent1"/>
+          </a:lnRef>
+          <a:fillRef idx="3">
+            <a:schemeClr val="accent1"/>
+          </a:fillRef>
+          <a:effectRef idx="2">
+            <a:schemeClr val="accent1"/>
+          </a:effectRef>
+          <a:fontRef idx="minor">
+            <a:schemeClr val="lt1"/>
+          </a:fontRef>
+        </p:style>
+        <p:txBody>
+          <a:bodyPr rtlCol="0" anchor="ctr"/>
+          <a:lstStyle/>
+          <a:p>
+            <a:pPr algn="ctr"/>
+          </a:p>
+        </p:txBody>
+      </p:sp>
+      <p:sp>
+        <p:nvSpPr>
+          <p:cNvPr id="336" name="TextBox 335"/>
+          <p:cNvSpPr txBox="1"/>
+          <p:nvPr/>
+        </p:nvSpPr>
+        <p:spPr>
+          <a:xfrm>
+            <a:off x="694944" y="1325880"/>
+            <a:ext cx="6729984" cy="512064"/>
+          </a:xfrm>
+          <a:prstGeom prst="rect">
+            <a:avLst/>
+          </a:prstGeom>
+          <a:noFill/>
+        </p:spPr>
+        <p:txBody>
+          <a:bodyPr wrap="square" lIns="82296" rIns="36576" tIns="18288" bIns="18288">
+            <a:normAutofit/>
+          </a:bodyPr>
+          <a:lstStyle/>
+          <a:p>
+            <a:pPr>
+              <a:lnSpc>
+                <a:spcPct val="100000"/>
+              </a:lnSpc>
+              <a:spcBef>
+                <a:spcPts val="0"/>
+              </a:spcBef>
+              <a:spcAft>
+                <a:spcPts val="0"/>
+              </a:spcAft>
+            </a:pPr>
+            <a:r>
+              <a:rPr sz="1250" b="0">
+                <a:solidFill>
+                  <a:srgbClr val="000000"/>
+                </a:solidFill>
+                <a:latin typeface="Montserrat"/>
+              </a:rPr>
+              <a:t>Service entry point: backend/app.py; production command uses Gunicorn and app:rag_api.</a:t>
+            </a:r>
+          </a:p>
+        </p:txBody>
+      </p:sp>
+      <p:sp>
+        <p:nvSpPr>
+          <p:cNvPr id="337" name="Oval 336"/>
+          <p:cNvSpPr/>
+          <p:nvPr/>
+        </p:nvSpPr>
+        <p:spPr>
+          <a:xfrm>
+            <a:off x="402336" y="1426464"/>
+            <a:ext cx="192024" cy="192024"/>
+          </a:xfrm>
+          <a:prstGeom prst="ellipse">
+            <a:avLst/>
+          </a:prstGeom>
+          <a:solidFill>
+            <a:srgbClr val="0944A1"/>
+          </a:solidFill>
+          <a:ln>
+            <a:noFill/>
+          </a:ln>
+        </p:spPr>
+        <p:style>
+          <a:lnRef idx="1">
+            <a:schemeClr val="accent1"/>
+          </a:lnRef>
+          <a:fillRef idx="3">
+            <a:schemeClr val="accent1"/>
+          </a:fillRef>
+          <a:effectRef idx="2">
+            <a:schemeClr val="accent1"/>
+          </a:effectRef>
+          <a:fontRef idx="minor">
+            <a:schemeClr val="lt1"/>
+          </a:fontRef>
+        </p:style>
+        <p:txBody>
+          <a:bodyPr rtlCol="0" anchor="ctr"/>
+          <a:lstStyle/>
+          <a:p>
+            <a:pPr algn="ctr"/>
+          </a:p>
+        </p:txBody>
+      </p:sp>
+      <p:sp>
+        <p:nvSpPr>
+          <p:cNvPr id="338" name="TextBox 337"/>
+          <p:cNvSpPr txBox="1"/>
+          <p:nvPr/>
+        </p:nvSpPr>
+        <p:spPr>
+          <a:xfrm>
+            <a:off x="694944" y="1869948"/>
+            <a:ext cx="6729984" cy="278892"/>
+          </a:xfrm>
+          <a:prstGeom prst="rect">
+            <a:avLst/>
+          </a:prstGeom>
+          <a:noFill/>
+        </p:spPr>
+        <p:txBody>
+          <a:bodyPr wrap="square" lIns="82296" rIns="36576" tIns="18288" bIns="18288">
+            <a:normAutofit/>
+          </a:bodyPr>
+          <a:lstStyle/>
+          <a:p>
+            <a:pPr>
+              <a:lnSpc>
+                <a:spcPct val="100000"/>
+              </a:lnSpc>
+              <a:spcBef>
+                <a:spcPts val="0"/>
+              </a:spcBef>
+              <a:spcAft>
+                <a:spcPts val="0"/>
+              </a:spcAft>
+            </a:pPr>
+            <a:r>
+              <a:rPr sz="1250" b="0">
+                <a:solidFill>
+                  <a:srgbClr val="000000"/>
+                </a:solidFill>
+                <a:latin typeface="Montserrat"/>
+              </a:rPr>
+              <a:t>GET / returns a lightweight readiness message.</a:t>
+            </a:r>
+          </a:p>
+        </p:txBody>
+      </p:sp>
+      <p:sp>
+        <p:nvSpPr>
+          <p:cNvPr id="339" name="Oval 338"/>
+          <p:cNvSpPr/>
+          <p:nvPr/>
+        </p:nvSpPr>
+        <p:spPr>
+          <a:xfrm>
+            <a:off x="402336" y="1970531"/>
+            <a:ext cx="192024" cy="192024"/>
+          </a:xfrm>
+          <a:prstGeom prst="ellipse">
+            <a:avLst/>
+          </a:prstGeom>
+          <a:solidFill>
+            <a:srgbClr val="0944A1"/>
+          </a:solidFill>
+          <a:ln>
+            <a:noFill/>
+          </a:ln>
+        </p:spPr>
+        <p:style>
+          <a:lnRef idx="1">
+            <a:schemeClr val="accent1"/>
+          </a:lnRef>
+          <a:fillRef idx="3">
+            <a:schemeClr val="accent1"/>
+          </a:fillRef>
+          <a:effectRef idx="2">
+            <a:schemeClr val="accent1"/>
+          </a:effectRef>
+          <a:fontRef idx="minor">
+            <a:schemeClr val="lt1"/>
+          </a:fontRef>
+        </p:style>
+        <p:txBody>
+          <a:bodyPr rtlCol="0" anchor="ctr"/>
+          <a:lstStyle/>
+          <a:p>
+            <a:pPr algn="ctr"/>
+          </a:p>
+        </p:txBody>
+      </p:sp>
+      <p:sp>
+        <p:nvSpPr>
+          <p:cNvPr id="340" name="TextBox 339"/>
+          <p:cNvSpPr txBox="1"/>
+          <p:nvPr/>
+        </p:nvSpPr>
+        <p:spPr>
+          <a:xfrm>
+            <a:off x="694944" y="2180844"/>
+            <a:ext cx="6729984" cy="512064"/>
+          </a:xfrm>
+          <a:prstGeom prst="rect">
+            <a:avLst/>
+          </a:prstGeom>
+          <a:noFill/>
+        </p:spPr>
+        <p:txBody>
+          <a:bodyPr wrap="square" lIns="82296" rIns="36576" tIns="18288" bIns="18288">
+            <a:normAutofit/>
+          </a:bodyPr>
+          <a:lstStyle/>
+          <a:p>
+            <a:pPr>
+              <a:lnSpc>
+                <a:spcPct val="100000"/>
+              </a:lnSpc>
+              <a:spcBef>
+                <a:spcPts val="0"/>
+              </a:spcBef>
+              <a:spcAft>
+                <a:spcPts val="0"/>
+              </a:spcAft>
+            </a:pPr>
+            <a:r>
+              <a:rPr sz="1250" b="0">
+                <a:solidFill>
+                  <a:srgbClr val="000000"/>
+                </a:solidFill>
+                <a:latin typeface="Montserrat"/>
+              </a:rPr>
+              <a:t>POST /v1/relevant_chunks returns the top-k retrieved policy chunks.</a:t>
+            </a:r>
+          </a:p>
+        </p:txBody>
+      </p:sp>
+      <p:sp>
+        <p:nvSpPr>
+          <p:cNvPr id="341" name="Oval 340"/>
+          <p:cNvSpPr/>
+          <p:nvPr/>
+        </p:nvSpPr>
+        <p:spPr>
+          <a:xfrm>
+            <a:off x="402336" y="2281427"/>
+            <a:ext cx="192024" cy="192024"/>
+          </a:xfrm>
+          <a:prstGeom prst="ellipse">
+            <a:avLst/>
+          </a:prstGeom>
+          <a:solidFill>
+            <a:srgbClr val="0944A1"/>
+          </a:solidFill>
+          <a:ln>
+            <a:noFill/>
+          </a:ln>
+        </p:spPr>
+        <p:style>
+          <a:lnRef idx="1">
+            <a:schemeClr val="accent1"/>
+          </a:lnRef>
+          <a:fillRef idx="3">
+            <a:schemeClr val="accent1"/>
+          </a:fillRef>
+          <a:effectRef idx="2">
+            <a:schemeClr val="accent1"/>
+          </a:effectRef>
+          <a:fontRef idx="minor">
+            <a:schemeClr val="lt1"/>
+          </a:fontRef>
+        </p:style>
+        <p:txBody>
+          <a:bodyPr rtlCol="0" anchor="ctr"/>
+          <a:lstStyle/>
+          <a:p>
+            <a:pPr algn="ctr"/>
+          </a:p>
+        </p:txBody>
+      </p:sp>
+      <p:sp>
+        <p:nvSpPr>
+          <p:cNvPr id="342" name="TextBox 341"/>
+          <p:cNvSpPr txBox="1"/>
+          <p:nvPr/>
+        </p:nvSpPr>
+        <p:spPr>
+          <a:xfrm>
+            <a:off x="694944" y="2724912"/>
+            <a:ext cx="6729984" cy="512064"/>
+          </a:xfrm>
+          <a:prstGeom prst="rect">
+            <a:avLst/>
+          </a:prstGeom>
+          <a:noFill/>
+        </p:spPr>
+        <p:txBody>
+          <a:bodyPr wrap="square" lIns="82296" rIns="36576" tIns="18288" bIns="18288">
+            <a:normAutofit/>
+          </a:bodyPr>
+          <a:lstStyle/>
+          <a:p>
+            <a:pPr>
+              <a:lnSpc>
+                <a:spcPct val="100000"/>
+              </a:lnSpc>
+              <a:spcBef>
+                <a:spcPts val="0"/>
+              </a:spcBef>
+              <a:spcAft>
+                <a:spcPts val="0"/>
+              </a:spcAft>
+            </a:pPr>
+            <a:r>
+              <a:rPr sz="1250" b="0">
+                <a:solidFill>
+                  <a:srgbClr val="000000"/>
+                </a:solidFill>
+                <a:latin typeface="Montserrat"/>
+              </a:rPr>
+              <a:t>POST /v1/answer_with_relevant_chunks returns the generated answer and evidence chunks.</a:t>
+            </a:r>
+          </a:p>
+        </p:txBody>
+      </p:sp>
+      <p:sp>
+        <p:nvSpPr>
+          <p:cNvPr id="343" name="Oval 342"/>
+          <p:cNvSpPr/>
+          <p:nvPr/>
+        </p:nvSpPr>
+        <p:spPr>
+          <a:xfrm>
+            <a:off x="402336" y="2825496"/>
+            <a:ext cx="192024" cy="192024"/>
+          </a:xfrm>
+          <a:prstGeom prst="ellipse">
+            <a:avLst/>
+          </a:prstGeom>
+          <a:solidFill>
+            <a:srgbClr val="0944A1"/>
+          </a:solidFill>
+          <a:ln>
+            <a:noFill/>
+          </a:ln>
+        </p:spPr>
+        <p:style>
+          <a:lnRef idx="1">
+            <a:schemeClr val="accent1"/>
+          </a:lnRef>
+          <a:fillRef idx="3">
+            <a:schemeClr val="accent1"/>
+          </a:fillRef>
+          <a:effectRef idx="2">
+            <a:schemeClr val="accent1"/>
+          </a:effectRef>
+          <a:fontRef idx="minor">
+            <a:schemeClr val="lt1"/>
+          </a:fontRef>
+        </p:style>
+        <p:txBody>
+          <a:bodyPr rtlCol="0" anchor="ctr"/>
+          <a:lstStyle/>
+          <a:p>
+            <a:pPr algn="ctr"/>
+          </a:p>
+        </p:txBody>
+      </p:sp>
+      <p:sp>
+        <p:nvSpPr>
+          <p:cNvPr id="344" name="TextBox 343"/>
+          <p:cNvSpPr txBox="1"/>
+          <p:nvPr/>
+        </p:nvSpPr>
+        <p:spPr>
+          <a:xfrm>
+            <a:off x="694944" y="3268980"/>
+            <a:ext cx="6729984" cy="278892"/>
+          </a:xfrm>
+          <a:prstGeom prst="rect">
+            <a:avLst/>
+          </a:prstGeom>
+          <a:noFill/>
+        </p:spPr>
+        <p:txBody>
+          <a:bodyPr wrap="square" lIns="82296" rIns="36576" tIns="18288" bIns="18288">
+            <a:normAutofit/>
+          </a:bodyPr>
+          <a:lstStyle/>
+          <a:p>
+            <a:pPr>
+              <a:lnSpc>
+                <a:spcPct val="100000"/>
+              </a:lnSpc>
+              <a:spcBef>
+                <a:spcPts val="0"/>
+              </a:spcBef>
+              <a:spcAft>
+                <a:spcPts val="0"/>
+              </a:spcAft>
+            </a:pPr>
+            <a:r>
+              <a:rPr sz="1250" b="0">
+                <a:solidFill>
+                  <a:srgbClr val="000000"/>
+                </a:solidFill>
+                <a:latin typeface="Montserrat"/>
+              </a:rPr>
+              <a:t>POST /v1/answer returns the generated answer only.</a:t>
+            </a:r>
+          </a:p>
+        </p:txBody>
+      </p:sp>
+      <p:sp>
+        <p:nvSpPr>
+          <p:cNvPr id="345" name="Oval 344"/>
+          <p:cNvSpPr/>
+          <p:nvPr/>
+        </p:nvSpPr>
+        <p:spPr>
+          <a:xfrm>
+            <a:off x="402336" y="3369564"/>
+            <a:ext cx="192024" cy="192024"/>
+          </a:xfrm>
+          <a:prstGeom prst="ellipse">
+            <a:avLst/>
+          </a:prstGeom>
+          <a:solidFill>
+            <a:srgbClr val="0944A1"/>
+          </a:solidFill>
+          <a:ln>
+            <a:noFill/>
+          </a:ln>
+        </p:spPr>
+        <p:style>
+          <a:lnRef idx="1">
+            <a:schemeClr val="accent1"/>
+          </a:lnRef>
+          <a:fillRef idx="3">
+            <a:schemeClr val="accent1"/>
+          </a:fillRef>
+          <a:effectRef idx="2">
+            <a:schemeClr val="accent1"/>
+          </a:effectRef>
+          <a:fontRef idx="minor">
+            <a:schemeClr val="lt1"/>
+          </a:fontRef>
+        </p:style>
+        <p:txBody>
+          <a:bodyPr rtlCol="0" anchor="ctr"/>
+          <a:lstStyle/>
+          <a:p>
+            <a:pPr algn="ctr"/>
+          </a:p>
+        </p:txBody>
+      </p:sp>
+      <p:sp>
+        <p:nvSpPr>
+          <p:cNvPr id="346" name="TextBox 345"/>
+          <p:cNvSpPr txBox="1"/>
+          <p:nvPr/>
+        </p:nvSpPr>
+        <p:spPr>
+          <a:xfrm>
+            <a:off x="694944" y="3579876"/>
+            <a:ext cx="6729984" cy="512064"/>
+          </a:xfrm>
+          <a:prstGeom prst="rect">
+            <a:avLst/>
+          </a:prstGeom>
+          <a:noFill/>
+        </p:spPr>
+        <p:txBody>
+          <a:bodyPr wrap="square" lIns="82296" rIns="36576" tIns="18288" bIns="18288">
+            <a:normAutofit/>
+          </a:bodyPr>
+          <a:lstStyle/>
+          <a:p>
+            <a:pPr>
+              <a:lnSpc>
+                <a:spcPct val="100000"/>
+              </a:lnSpc>
+              <a:spcBef>
+                <a:spcPts val="0"/>
+              </a:spcBef>
+              <a:spcAft>
+                <a:spcPts val="0"/>
+              </a:spcAft>
+            </a:pPr>
+            <a:r>
+              <a:rPr sz="1250" b="0">
+                <a:solidFill>
+                  <a:srgbClr val="000000"/>
+                </a:solidFill>
+                <a:latin typeface="Montserrat"/>
+              </a:rPr>
+              <a:t>Defaults: k=5, gpt-4o-mini, temperature=0.0, top_p=1.0, max_tokens=512.</a:t>
+            </a:r>
+          </a:p>
+        </p:txBody>
+      </p:sp>
+      <p:sp>
+        <p:nvSpPr>
+          <p:cNvPr id="347" name="Oval 346"/>
+          <p:cNvSpPr/>
+          <p:nvPr/>
+        </p:nvSpPr>
+        <p:spPr>
+          <a:xfrm>
+            <a:off x="402336" y="3680460"/>
+            <a:ext cx="192024" cy="192024"/>
+          </a:xfrm>
+          <a:prstGeom prst="ellipse">
+            <a:avLst/>
+          </a:prstGeom>
+          <a:solidFill>
+            <a:srgbClr val="0944A1"/>
+          </a:solidFill>
+          <a:ln>
+            <a:noFill/>
+          </a:ln>
+        </p:spPr>
+        <p:style>
+          <a:lnRef idx="1">
+            <a:schemeClr val="accent1"/>
+          </a:lnRef>
+          <a:fillRef idx="3">
+            <a:schemeClr val="accent1"/>
+          </a:fillRef>
+          <a:effectRef idx="2">
+            <a:schemeClr val="accent1"/>
+          </a:effectRef>
+          <a:fontRef idx="minor">
+            <a:schemeClr val="lt1"/>
+          </a:fontRef>
+        </p:style>
+        <p:txBody>
+          <a:bodyPr rtlCol="0" anchor="ctr"/>
+          <a:lstStyle/>
+          <a:p>
+            <a:pPr algn="ctr"/>
+          </a:p>
+        </p:txBody>
+      </p:sp>
+      <p:sp>
+        <p:nvSpPr>
+          <p:cNvPr id="348" name="TextBox 347"/>
+          <p:cNvSpPr txBox="1"/>
+          <p:nvPr/>
+        </p:nvSpPr>
+        <p:spPr>
+          <a:xfrm>
+            <a:off x="694944" y="4123944"/>
+            <a:ext cx="6729984" cy="512064"/>
+          </a:xfrm>
+          <a:prstGeom prst="rect">
+            <a:avLst/>
+          </a:prstGeom>
+          <a:noFill/>
+        </p:spPr>
+        <p:txBody>
+          <a:bodyPr wrap="square" lIns="82296" rIns="36576" tIns="18288" bIns="18288">
+            <a:normAutofit/>
+          </a:bodyPr>
+          <a:lstStyle/>
+          <a:p>
+            <a:pPr>
+              <a:lnSpc>
+                <a:spcPct val="100000"/>
+              </a:lnSpc>
+              <a:spcBef>
+                <a:spcPts val="0"/>
+              </a:spcBef>
+              <a:spcAft>
+                <a:spcPts val="0"/>
+              </a:spcAft>
+            </a:pPr>
+            <a:r>
+              <a:rPr sz="1250" b="0">
+                <a:solidFill>
+                  <a:srgbClr val="000000"/>
+                </a:solidFill>
+                <a:latin typeface="Montserrat"/>
+              </a:rPr>
+              <a:t>Container binding: 0.0.0.0:7860; local smoke tests use port 5000.</a:t>
+            </a:r>
+          </a:p>
+        </p:txBody>
+      </p:sp>
+      <p:sp>
+        <p:nvSpPr>
+          <p:cNvPr id="349" name="Oval 348"/>
+          <p:cNvSpPr/>
+          <p:nvPr/>
+        </p:nvSpPr>
+        <p:spPr>
+          <a:xfrm>
+            <a:off x="402336" y="4224528"/>
+            <a:ext cx="192024" cy="192024"/>
+          </a:xfrm>
+          <a:prstGeom prst="ellipse">
+            <a:avLst/>
+          </a:prstGeom>
+          <a:solidFill>
+            <a:srgbClr val="0944A1"/>
+          </a:solidFill>
+          <a:ln>
+            <a:noFill/>
+          </a:ln>
+        </p:spPr>
+        <p:style>
+          <a:lnRef idx="1">
+            <a:schemeClr val="accent1"/>
+          </a:lnRef>
+          <a:fillRef idx="3">
+            <a:schemeClr val="accent1"/>
+          </a:fillRef>
+          <a:effectRef idx="2">
+            <a:schemeClr val="accent1"/>
+          </a:effectRef>
+          <a:fontRef idx="minor">
+            <a:schemeClr val="lt1"/>
+          </a:fontRef>
+        </p:style>
+        <p:txBody>
+          <a:bodyPr rtlCol="0" anchor="ctr"/>
+          <a:lstStyle/>
+          <a:p>
+            <a:pPr algn="ctr"/>
+          </a:p>
+        </p:txBody>
+      </p:sp>
+    </p:spTree>
+  </p:cSld>
+  <p:clrMapOvr>
+    <a:masterClrMapping/>
+  </p:clrMapOvr>
+</p:sld>
+</file>
+
+<file path=ppt/slides/slide22.xml><?xml version="1.0" encoding="utf-8"?>
+<p:sld xmlns:a="http://schemas.openxmlformats.org/drawingml/2006/main" xmlns:r="http://schemas.openxmlformats.org/officeDocument/2006/relationships" xmlns:mc="http://schemas.openxmlformats.org/markup-compatibility/2006" xmlns:mv="urn:schemas-microsoft-com:mac:vml" xmlns:p="http://schemas.openxmlformats.org/presentationml/2006/main" xmlns:c="http://schemas.openxmlformats.org/drawingml/2006/chart" xmlns:dgm="http://schemas.openxmlformats.org/drawingml/2006/diagram" xmlns:o="urn:schemas-microsoft-com:office:office" xmlns:v="urn:schemas-microsoft-com:vml" xmlns:pvml="urn:schemas-microsoft-com:office:powerpoint" xmlns:com="http://schemas.openxmlformats.org/drawingml/2006/compatibility" xmlns:p14="http://schemas.microsoft.com/office/powerpoint/2010/main" xmlns:p15="http://schemas.microsoft.com/office/powerpoint/2012/main" xmlns:ahyp="http://schemas.microsoft.com/office/drawing/2018/hyperlinkcolor">
+  <p:cSld>
+    <p:spTree>
+      <p:nvGrpSpPr>
+        <p:cNvPr id="341" name="Shape 341"/>
+        <p:cNvGrpSpPr/>
+        <p:nvPr/>
+      </p:nvGrpSpPr>
+      <p:grpSpPr>
+        <a:xfrm>
+          <a:off x="0" y="0"/>
+          <a:ext cx="0" cy="0"/>
+          <a:chOff x="0" y="0"/>
+          <a:chExt cx="0" cy="0"/>
+        </a:xfrm>
+      </p:grpSpPr>
+      <p:sp>
+        <p:nvSpPr>
+          <p:cNvPr id="342" name="Google Shape;342;p57"/>
+          <p:cNvSpPr txBox="1"/>
+          <p:nvPr>
+            <p:ph type="title"/>
+          </p:nvPr>
+        </p:nvSpPr>
+        <p:spPr>
+          <a:xfrm>
+            <a:off x="202550" y="289279"/>
+            <a:ext cx="8520600" cy="572700"/>
+          </a:xfrm>
+          <a:prstGeom prst="rect">
+            <a:avLst/>
+          </a:prstGeom>
+          <a:noFill/>
+          <a:ln>
+            <a:noFill/>
+          </a:ln>
+        </p:spPr>
+        <p:txBody>
+          <a:bodyPr anchorCtr="0" anchor="t" bIns="91425" lIns="91425" spcFirstLastPara="1" rIns="91425" wrap="square" tIns="91425">
+            <a:noAutofit/>
+          </a:bodyPr>
+          <a:lstStyle/>
+          <a:p>
+            <a:r>
+              <a:rPr sz="2200" b="1">
+                <a:solidFill>
+                  <a:srgbClr val="0E39A9"/>
+                </a:solidFill>
+                <a:latin typeface="Montserrat"/>
+              </a:rPr>
+              <a:t>Deployment - Backend - Define the Dependencies</a:t>
+            </a:r>
+          </a:p>
+        </p:txBody>
+      </p:sp>
+      <p:sp>
+        <p:nvSpPr>
+          <p:cNvPr id="343" name="Rectangle 342"/>
+          <p:cNvSpPr/>
+          <p:nvPr/>
+        </p:nvSpPr>
+        <p:spPr>
+          <a:xfrm>
+            <a:off x="502920" y="1005840"/>
+            <a:ext cx="8138160" cy="32004"/>
+          </a:xfrm>
+          <a:prstGeom prst="rect">
+            <a:avLst/>
+          </a:prstGeom>
+          <a:solidFill>
+            <a:srgbClr val="0E39A9"/>
+          </a:solidFill>
+          <a:ln>
+            <a:noFill/>
+          </a:ln>
+        </p:spPr>
+        <p:style>
+          <a:lnRef idx="1">
+            <a:schemeClr val="accent1"/>
+          </a:lnRef>
+          <a:fillRef idx="3">
+            <a:schemeClr val="accent1"/>
+          </a:fillRef>
+          <a:effectRef idx="2">
+            <a:schemeClr val="accent1"/>
+          </a:effectRef>
+          <a:fontRef idx="minor">
+            <a:schemeClr val="lt1"/>
+          </a:fontRef>
+        </p:style>
+        <p:txBody>
+          <a:bodyPr rtlCol="0" anchor="ctr"/>
+          <a:lstStyle/>
+          <a:p>
+            <a:pPr algn="ctr"/>
+          </a:p>
+        </p:txBody>
+      </p:sp>
+      <p:sp>
+        <p:nvSpPr>
+          <p:cNvPr id="344" name="TextBox 343"/>
+          <p:cNvSpPr txBox="1"/>
+          <p:nvPr/>
+        </p:nvSpPr>
+        <p:spPr>
+          <a:xfrm>
+            <a:off x="694944" y="1325880"/>
+            <a:ext cx="6729984" cy="512064"/>
+          </a:xfrm>
+          <a:prstGeom prst="rect">
+            <a:avLst/>
+          </a:prstGeom>
+          <a:noFill/>
+        </p:spPr>
+        <p:txBody>
+          <a:bodyPr wrap="square" lIns="82296" rIns="36576" tIns="18288" bIns="18288">
+            <a:normAutofit/>
+          </a:bodyPr>
+          <a:lstStyle/>
+          <a:p>
+            <a:pPr>
+              <a:lnSpc>
+                <a:spcPct val="100000"/>
+              </a:lnSpc>
+              <a:spcBef>
+                <a:spcPts val="0"/>
+              </a:spcBef>
+              <a:spcAft>
+                <a:spcPts val="0"/>
+              </a:spcAft>
+            </a:pPr>
+            <a:r>
+              <a:rPr sz="1250" b="0">
+                <a:solidFill>
+                  <a:srgbClr val="000000"/>
+                </a:solidFill>
+                <a:latin typeface="Montserrat"/>
+              </a:rPr>
+              <a:t>Pinned backend dependencies are declared in backend/requirements.txt.</a:t>
+            </a:r>
+          </a:p>
+        </p:txBody>
+      </p:sp>
+      <p:sp>
+        <p:nvSpPr>
+          <p:cNvPr id="345" name="Oval 344"/>
+          <p:cNvSpPr/>
+          <p:nvPr/>
+        </p:nvSpPr>
+        <p:spPr>
+          <a:xfrm>
+            <a:off x="402336" y="1426464"/>
+            <a:ext cx="192024" cy="192024"/>
+          </a:xfrm>
+          <a:prstGeom prst="ellipse">
+            <a:avLst/>
+          </a:prstGeom>
+          <a:solidFill>
+            <a:srgbClr val="0944A1"/>
+          </a:solidFill>
+          <a:ln>
+            <a:noFill/>
+          </a:ln>
+        </p:spPr>
+        <p:style>
+          <a:lnRef idx="1">
+            <a:schemeClr val="accent1"/>
+          </a:lnRef>
+          <a:fillRef idx="3">
+            <a:schemeClr val="accent1"/>
+          </a:fillRef>
+          <a:effectRef idx="2">
+            <a:schemeClr val="accent1"/>
+          </a:effectRef>
+          <a:fontRef idx="minor">
+            <a:schemeClr val="lt1"/>
+          </a:fontRef>
+        </p:style>
+        <p:txBody>
+          <a:bodyPr rtlCol="0" anchor="ctr"/>
+          <a:lstStyle/>
+          <a:p>
+            <a:pPr algn="ctr"/>
+          </a:p>
+        </p:txBody>
+      </p:sp>
+      <p:sp>
+        <p:nvSpPr>
+          <p:cNvPr id="346" name="TextBox 345"/>
+          <p:cNvSpPr txBox="1"/>
+          <p:nvPr/>
+        </p:nvSpPr>
+        <p:spPr>
+          <a:xfrm>
+            <a:off x="694944" y="1869948"/>
+            <a:ext cx="6729984" cy="512064"/>
+          </a:xfrm>
+          <a:prstGeom prst="rect">
+            <a:avLst/>
+          </a:prstGeom>
+          <a:noFill/>
+        </p:spPr>
+        <p:txBody>
+          <a:bodyPr wrap="square" lIns="82296" rIns="36576" tIns="18288" bIns="18288">
+            <a:normAutofit/>
+          </a:bodyPr>
+          <a:lstStyle/>
+          <a:p>
+            <a:pPr>
+              <a:lnSpc>
+                <a:spcPct val="100000"/>
+              </a:lnSpc>
+              <a:spcBef>
+                <a:spcPts val="0"/>
+              </a:spcBef>
+              <a:spcAft>
+                <a:spcPts val="0"/>
+              </a:spcAft>
+            </a:pPr>
+            <a:r>
+              <a:rPr sz="1250" b="0">
+                <a:solidFill>
+                  <a:srgbClr val="000000"/>
+                </a:solidFill>
+                <a:latin typeface="Montserrat"/>
+              </a:rPr>
+              <a:t>Flask 3.1.3 and Gunicorn 26.2.0 provide the API service runtime.</a:t>
+            </a:r>
+          </a:p>
+        </p:txBody>
+      </p:sp>
+      <p:sp>
+        <p:nvSpPr>
+          <p:cNvPr id="347" name="Oval 346"/>
+          <p:cNvSpPr/>
+          <p:nvPr/>
+        </p:nvSpPr>
+        <p:spPr>
+          <a:xfrm>
+            <a:off x="402336" y="1970531"/>
+            <a:ext cx="192024" cy="192024"/>
+          </a:xfrm>
+          <a:prstGeom prst="ellipse">
+            <a:avLst/>
+          </a:prstGeom>
+          <a:solidFill>
+            <a:srgbClr val="0944A1"/>
+          </a:solidFill>
+          <a:ln>
+            <a:noFill/>
+          </a:ln>
+        </p:spPr>
+        <p:style>
+          <a:lnRef idx="1">
+            <a:schemeClr val="accent1"/>
+          </a:lnRef>
+          <a:fillRef idx="3">
+            <a:schemeClr val="accent1"/>
+          </a:fillRef>
+          <a:effectRef idx="2">
+            <a:schemeClr val="accent1"/>
+          </a:effectRef>
+          <a:fontRef idx="minor">
+            <a:schemeClr val="lt1"/>
+          </a:fontRef>
+        </p:style>
+        <p:txBody>
+          <a:bodyPr rtlCol="0" anchor="ctr"/>
+          <a:lstStyle/>
+          <a:p>
+            <a:pPr algn="ctr"/>
+          </a:p>
+        </p:txBody>
+      </p:sp>
+      <p:sp>
+        <p:nvSpPr>
+          <p:cNvPr id="348" name="TextBox 347"/>
+          <p:cNvSpPr txBox="1"/>
+          <p:nvPr/>
+        </p:nvSpPr>
+        <p:spPr>
+          <a:xfrm>
+            <a:off x="694944" y="2414016"/>
+            <a:ext cx="6729984" cy="512064"/>
+          </a:xfrm>
+          <a:prstGeom prst="rect">
+            <a:avLst/>
+          </a:prstGeom>
+          <a:noFill/>
+        </p:spPr>
+        <p:txBody>
+          <a:bodyPr wrap="square" lIns="82296" rIns="36576" tIns="18288" bIns="18288">
+            <a:normAutofit/>
+          </a:bodyPr>
+          <a:lstStyle/>
+          <a:p>
+            <a:pPr>
+              <a:lnSpc>
+                <a:spcPct val="100000"/>
+              </a:lnSpc>
+              <a:spcBef>
+                <a:spcPts val="0"/>
+              </a:spcBef>
+              <a:spcAft>
+                <a:spcPts val="0"/>
+              </a:spcAft>
+            </a:pPr>
+            <a:r>
+              <a:rPr sz="1250" b="0">
+                <a:solidFill>
+                  <a:srgbClr val="000000"/>
+                </a:solidFill>
+                <a:latin typeface="Montserrat"/>
+              </a:rPr>
+              <a:t>LangChain HuggingFace, LangChain Community, and LangChain OpenAI provide retrieval and generation integration.</a:t>
+            </a:r>
+          </a:p>
+        </p:txBody>
+      </p:sp>
+      <p:sp>
+        <p:nvSpPr>
+          <p:cNvPr id="349" name="Oval 348"/>
+          <p:cNvSpPr/>
+          <p:nvPr/>
+        </p:nvSpPr>
+        <p:spPr>
+          <a:xfrm>
+            <a:off x="402336" y="2514600"/>
+            <a:ext cx="192024" cy="192024"/>
+          </a:xfrm>
+          <a:prstGeom prst="ellipse">
+            <a:avLst/>
+          </a:prstGeom>
+          <a:solidFill>
+            <a:srgbClr val="0944A1"/>
+          </a:solidFill>
+          <a:ln>
+            <a:noFill/>
+          </a:ln>
+        </p:spPr>
+        <p:style>
+          <a:lnRef idx="1">
+            <a:schemeClr val="accent1"/>
+          </a:lnRef>
+          <a:fillRef idx="3">
+            <a:schemeClr val="accent1"/>
+          </a:fillRef>
+          <a:effectRef idx="2">
+            <a:schemeClr val="accent1"/>
+          </a:effectRef>
+          <a:fontRef idx="minor">
+            <a:schemeClr val="lt1"/>
+          </a:fontRef>
+        </p:style>
+        <p:txBody>
+          <a:bodyPr rtlCol="0" anchor="ctr"/>
+          <a:lstStyle/>
+          <a:p>
+            <a:pPr algn="ctr"/>
+          </a:p>
+        </p:txBody>
+      </p:sp>
+      <p:sp>
+        <p:nvSpPr>
+          <p:cNvPr id="350" name="TextBox 349"/>
+          <p:cNvSpPr txBox="1"/>
+          <p:nvPr/>
+        </p:nvSpPr>
+        <p:spPr>
+          <a:xfrm>
+            <a:off x="694944" y="2958084"/>
+            <a:ext cx="6729984" cy="512064"/>
+          </a:xfrm>
+          <a:prstGeom prst="rect">
+            <a:avLst/>
+          </a:prstGeom>
+          <a:noFill/>
+        </p:spPr>
+        <p:txBody>
+          <a:bodyPr wrap="square" lIns="82296" rIns="36576" tIns="18288" bIns="18288">
+            <a:normAutofit/>
+          </a:bodyPr>
+          <a:lstStyle/>
+          <a:p>
+            <a:pPr>
+              <a:lnSpc>
+                <a:spcPct val="100000"/>
+              </a:lnSpc>
+              <a:spcBef>
+                <a:spcPts val="0"/>
+              </a:spcBef>
+              <a:spcAft>
+                <a:spcPts val="0"/>
+              </a:spcAft>
+            </a:pPr>
+            <a:r>
+              <a:rPr sz="1250" b="0">
+                <a:solidFill>
+                  <a:srgbClr val="000000"/>
+                </a:solidFill>
+                <a:latin typeface="Montserrat"/>
+              </a:rPr>
+              <a:t>sentence-transformers 6.1.0 and faiss-cpu 1.15.0 provide embeddings and vector search.</a:t>
+            </a:r>
+          </a:p>
+        </p:txBody>
+      </p:sp>
+      <p:sp>
+        <p:nvSpPr>
+          <p:cNvPr id="351" name="Oval 350"/>
+          <p:cNvSpPr/>
+          <p:nvPr/>
+        </p:nvSpPr>
+        <p:spPr>
+          <a:xfrm>
+            <a:off x="402336" y="3058668"/>
+            <a:ext cx="192024" cy="192024"/>
+          </a:xfrm>
+          <a:prstGeom prst="ellipse">
+            <a:avLst/>
+          </a:prstGeom>
+          <a:solidFill>
+            <a:srgbClr val="0944A1"/>
+          </a:solidFill>
+          <a:ln>
+            <a:noFill/>
+          </a:ln>
+        </p:spPr>
+        <p:style>
+          <a:lnRef idx="1">
+            <a:schemeClr val="accent1"/>
+          </a:lnRef>
+          <a:fillRef idx="3">
+            <a:schemeClr val="accent1"/>
+          </a:fillRef>
+          <a:effectRef idx="2">
+            <a:schemeClr val="accent1"/>
+          </a:effectRef>
+          <a:fontRef idx="minor">
+            <a:schemeClr val="lt1"/>
+          </a:fontRef>
+        </p:style>
+        <p:txBody>
+          <a:bodyPr rtlCol="0" anchor="ctr"/>
+          <a:lstStyle/>
+          <a:p>
+            <a:pPr algn="ctr"/>
+          </a:p>
+        </p:txBody>
+      </p:sp>
+      <p:sp>
+        <p:nvSpPr>
+          <p:cNvPr id="352" name="TextBox 351"/>
+          <p:cNvSpPr txBox="1"/>
+          <p:nvPr/>
+        </p:nvSpPr>
+        <p:spPr>
+          <a:xfrm>
+            <a:off x="694944" y="3502152"/>
+            <a:ext cx="6729984" cy="512064"/>
+          </a:xfrm>
+          <a:prstGeom prst="rect">
+            <a:avLst/>
+          </a:prstGeom>
+          <a:noFill/>
+        </p:spPr>
+        <p:txBody>
+          <a:bodyPr wrap="square" lIns="82296" rIns="36576" tIns="18288" bIns="18288">
+            <a:normAutofit/>
+          </a:bodyPr>
+          <a:lstStyle/>
+          <a:p>
+            <a:pPr>
+              <a:lnSpc>
+                <a:spcPct val="100000"/>
+              </a:lnSpc>
+              <a:spcBef>
+                <a:spcPts val="0"/>
+              </a:spcBef>
+              <a:spcAft>
+                <a:spcPts val="0"/>
+              </a:spcAft>
+            </a:pPr>
+            <a:r>
+              <a:rPr sz="1250" b="0">
+                <a:solidFill>
+                  <a:srgbClr val="000000"/>
+                </a:solidFill>
+                <a:latin typeface="Montserrat"/>
+              </a:rPr>
+              <a:t>The Docker build installs CPU-only PyTorch before installing the requirements file.</a:t>
+            </a:r>
+          </a:p>
+        </p:txBody>
+      </p:sp>
+      <p:sp>
+        <p:nvSpPr>
+          <p:cNvPr id="353" name="Oval 352"/>
+          <p:cNvSpPr/>
+          <p:nvPr/>
+        </p:nvSpPr>
+        <p:spPr>
+          <a:xfrm>
+            <a:off x="402336" y="3602736"/>
+            <a:ext cx="192024" cy="192024"/>
+          </a:xfrm>
+          <a:prstGeom prst="ellipse">
+            <a:avLst/>
+          </a:prstGeom>
+          <a:solidFill>
+            <a:srgbClr val="0944A1"/>
+          </a:solidFill>
+          <a:ln>
+            <a:noFill/>
+          </a:ln>
+        </p:spPr>
+        <p:style>
+          <a:lnRef idx="1">
+            <a:schemeClr val="accent1"/>
+          </a:lnRef>
+          <a:fillRef idx="3">
+            <a:schemeClr val="accent1"/>
+          </a:fillRef>
+          <a:effectRef idx="2">
+            <a:schemeClr val="accent1"/>
+          </a:effectRef>
+          <a:fontRef idx="minor">
+            <a:schemeClr val="lt1"/>
+          </a:fontRef>
+        </p:style>
+        <p:txBody>
+          <a:bodyPr rtlCol="0" anchor="ctr"/>
+          <a:lstStyle/>
+          <a:p>
+            <a:pPr algn="ctr"/>
+          </a:p>
+        </p:txBody>
+      </p:sp>
+      <p:sp>
+        <p:nvSpPr>
+          <p:cNvPr id="354" name="TextBox 353"/>
+          <p:cNvSpPr txBox="1"/>
+          <p:nvPr/>
+        </p:nvSpPr>
+        <p:spPr>
+          <a:xfrm>
+            <a:off x="694944" y="4046220"/>
+            <a:ext cx="6729984" cy="512064"/>
+          </a:xfrm>
+          <a:prstGeom prst="rect">
+            <a:avLst/>
+          </a:prstGeom>
+          <a:noFill/>
+        </p:spPr>
+        <p:txBody>
+          <a:bodyPr wrap="square" lIns="82296" rIns="36576" tIns="18288" bIns="18288">
+            <a:normAutofit/>
+          </a:bodyPr>
+          <a:lstStyle/>
+          <a:p>
+            <a:pPr>
+              <a:lnSpc>
+                <a:spcPct val="100000"/>
+              </a:lnSpc>
+              <a:spcBef>
+                <a:spcPts val="0"/>
+              </a:spcBef>
+              <a:spcAft>
+                <a:spcPts val="0"/>
+              </a:spcAft>
+            </a:pPr>
+            <a:r>
+              <a:rPr sz="1250" b="0">
+                <a:solidFill>
+                  <a:srgbClr val="000000"/>
+                </a:solidFill>
+                <a:latin typeface="Montserrat"/>
+              </a:rPr>
+              <a:t>The embedding model is cached during image build so runtime can use offline mode.</a:t>
+            </a:r>
+          </a:p>
+        </p:txBody>
+      </p:sp>
+      <p:sp>
+        <p:nvSpPr>
+          <p:cNvPr id="355" name="Oval 354"/>
+          <p:cNvSpPr/>
+          <p:nvPr/>
+        </p:nvSpPr>
+        <p:spPr>
+          <a:xfrm>
+            <a:off x="402336" y="4146804"/>
+            <a:ext cx="192024" cy="192024"/>
+          </a:xfrm>
+          <a:prstGeom prst="ellipse">
+            <a:avLst/>
+          </a:prstGeom>
+          <a:solidFill>
+            <a:srgbClr val="0944A1"/>
+          </a:solidFill>
+          <a:ln>
+            <a:noFill/>
+          </a:ln>
+        </p:spPr>
+        <p:style>
+          <a:lnRef idx="1">
+            <a:schemeClr val="accent1"/>
+          </a:lnRef>
+          <a:fillRef idx="3">
+            <a:schemeClr val="accent1"/>
+          </a:fillRef>
+          <a:effectRef idx="2">
+            <a:schemeClr val="accent1"/>
+          </a:effectRef>
+          <a:fontRef idx="minor">
+            <a:schemeClr val="lt1"/>
+          </a:fontRef>
+        </p:style>
+        <p:txBody>
+          <a:bodyPr rtlCol="0" anchor="ctr"/>
+          <a:lstStyle/>
+          <a:p>
+            <a:pPr algn="ctr"/>
+          </a:p>
+        </p:txBody>
+      </p:sp>
+    </p:spTree>
+  </p:cSld>
+  <p:clrMapOvr>
+    <a:masterClrMapping/>
+  </p:clrMapOvr>
+</p:sld>
+</file>
+
+<file path=ppt/slides/slide23.xml><?xml version="1.0" encoding="utf-8"?>
+<p:sld xmlns:a="http://schemas.openxmlformats.org/drawingml/2006/main" xmlns:r="http://schemas.openxmlformats.org/officeDocument/2006/relationships" xmlns:mc="http://schemas.openxmlformats.org/markup-compatibility/2006" xmlns:mv="urn:schemas-microsoft-com:mac:vml" xmlns:p="http://schemas.openxmlformats.org/presentationml/2006/main" xmlns:c="http://schemas.openxmlformats.org/drawingml/2006/chart" xmlns:dgm="http://schemas.openxmlformats.org/drawingml/2006/diagram" xmlns:o="urn:schemas-microsoft-com:office:office" xmlns:v="urn:schemas-microsoft-com:vml" xmlns:pvml="urn:schemas-microsoft-com:office:powerpoint" xmlns:com="http://schemas.openxmlformats.org/drawingml/2006/compatibility" xmlns:p14="http://schemas.microsoft.com/office/powerpoint/2010/main" xmlns:p15="http://schemas.microsoft.com/office/powerpoint/2012/main" xmlns:ahyp="http://schemas.microsoft.com/office/drawing/2018/hyperlinkcolor">
+  <p:cSld>
+    <p:spTree>
+      <p:nvGrpSpPr>
+        <p:cNvPr id="349" name="Shape 349"/>
+        <p:cNvGrpSpPr/>
+        <p:nvPr/>
+      </p:nvGrpSpPr>
+      <p:grpSpPr>
+        <a:xfrm>
+          <a:off x="0" y="0"/>
+          <a:ext cx="0" cy="0"/>
+          <a:chOff x="0" y="0"/>
+          <a:chExt cx="0" cy="0"/>
+        </a:xfrm>
+      </p:grpSpPr>
+      <p:sp>
+        <p:nvSpPr>
+          <p:cNvPr id="350" name="Google Shape;350;p58"/>
+          <p:cNvSpPr txBox="1"/>
+          <p:nvPr>
+            <p:ph type="title"/>
+          </p:nvPr>
+        </p:nvSpPr>
+        <p:spPr>
+          <a:xfrm>
+            <a:off x="202550" y="289279"/>
+            <a:ext cx="8520600" cy="572700"/>
+          </a:xfrm>
+          <a:prstGeom prst="rect">
+            <a:avLst/>
+          </a:prstGeom>
+          <a:noFill/>
+          <a:ln>
+            <a:noFill/>
+          </a:ln>
+        </p:spPr>
+        <p:txBody>
+          <a:bodyPr anchorCtr="0" anchor="t" bIns="91425" lIns="91425" spcFirstLastPara="1" rIns="91425" wrap="square" tIns="91425">
+            <a:noAutofit/>
+          </a:bodyPr>
+          <a:lstStyle/>
+          <a:p>
+            <a:r>
+              <a:rPr sz="2200" b="1">
+                <a:solidFill>
+                  <a:srgbClr val="0E39A9"/>
+                </a:solidFill>
+                <a:latin typeface="Montserrat"/>
+              </a:rPr>
+              <a:t>Deployment - Backend - Define the Dockerfile</a:t>
+            </a:r>
+          </a:p>
+        </p:txBody>
+      </p:sp>
+      <p:sp>
+        <p:nvSpPr>
+          <p:cNvPr id="351" name="Rectangle 350"/>
+          <p:cNvSpPr/>
+          <p:nvPr/>
+        </p:nvSpPr>
+        <p:spPr>
+          <a:xfrm>
+            <a:off x="502920" y="1005840"/>
+            <a:ext cx="8138160" cy="32004"/>
+          </a:xfrm>
+          <a:prstGeom prst="rect">
+            <a:avLst/>
+          </a:prstGeom>
+          <a:solidFill>
+            <a:srgbClr val="0E39A9"/>
+          </a:solidFill>
+          <a:ln>
+            <a:noFill/>
+          </a:ln>
+        </p:spPr>
+        <p:style>
+          <a:lnRef idx="1">
+            <a:schemeClr val="accent1"/>
+          </a:lnRef>
+          <a:fillRef idx="3">
+            <a:schemeClr val="accent1"/>
+          </a:fillRef>
+          <a:effectRef idx="2">
+            <a:schemeClr val="accent1"/>
+          </a:effectRef>
+          <a:fontRef idx="minor">
+            <a:schemeClr val="lt1"/>
+          </a:fontRef>
+        </p:style>
+        <p:txBody>
+          <a:bodyPr rtlCol="0" anchor="ctr"/>
+          <a:lstStyle/>
+          <a:p>
+            <a:pPr algn="ctr"/>
+          </a:p>
+        </p:txBody>
+      </p:sp>
+      <p:sp>
+        <p:nvSpPr>
+          <p:cNvPr id="352" name="TextBox 351"/>
+          <p:cNvSpPr txBox="1"/>
+          <p:nvPr/>
+        </p:nvSpPr>
+        <p:spPr>
+          <a:xfrm>
+            <a:off x="694944" y="1325880"/>
+            <a:ext cx="6729984" cy="278892"/>
+          </a:xfrm>
+          <a:prstGeom prst="rect">
+            <a:avLst/>
+          </a:prstGeom>
+          <a:noFill/>
+        </p:spPr>
+        <p:txBody>
+          <a:bodyPr wrap="square" lIns="82296" rIns="36576" tIns="18288" bIns="18288">
+            <a:normAutofit/>
+          </a:bodyPr>
+          <a:lstStyle/>
+          <a:p>
+            <a:pPr>
+              <a:lnSpc>
+                <a:spcPct val="100000"/>
+              </a:lnSpc>
+              <a:spcBef>
+                <a:spcPts val="0"/>
+              </a:spcBef>
+              <a:spcAft>
+                <a:spcPts val="0"/>
+              </a:spcAft>
+            </a:pPr>
+            <a:r>
+              <a:rPr sz="1350" b="0">
+                <a:solidFill>
+                  <a:srgbClr val="000000"/>
+                </a:solidFill>
+                <a:latin typeface="Montserrat"/>
+              </a:rPr>
+              <a:t>Base image: python:3.13.15-slim.</a:t>
+            </a:r>
+          </a:p>
+        </p:txBody>
+      </p:sp>
+      <p:sp>
+        <p:nvSpPr>
+          <p:cNvPr id="353" name="Oval 352"/>
+          <p:cNvSpPr/>
+          <p:nvPr/>
+        </p:nvSpPr>
+        <p:spPr>
+          <a:xfrm>
+            <a:off x="402336" y="1426464"/>
+            <a:ext cx="192024" cy="192024"/>
+          </a:xfrm>
+          <a:prstGeom prst="ellipse">
+            <a:avLst/>
+          </a:prstGeom>
+          <a:solidFill>
+            <a:srgbClr val="0944A1"/>
+          </a:solidFill>
+          <a:ln>
+            <a:noFill/>
+          </a:ln>
+        </p:spPr>
+        <p:style>
+          <a:lnRef idx="1">
+            <a:schemeClr val="accent1"/>
+          </a:lnRef>
+          <a:fillRef idx="3">
+            <a:schemeClr val="accent1"/>
+          </a:fillRef>
+          <a:effectRef idx="2">
+            <a:schemeClr val="accent1"/>
+          </a:effectRef>
+          <a:fontRef idx="minor">
+            <a:schemeClr val="lt1"/>
+          </a:fontRef>
+        </p:style>
+        <p:txBody>
+          <a:bodyPr rtlCol="0" anchor="ctr"/>
+          <a:lstStyle/>
+          <a:p>
+            <a:pPr algn="ctr"/>
+          </a:p>
+        </p:txBody>
+      </p:sp>
+      <p:sp>
+        <p:nvSpPr>
+          <p:cNvPr id="354" name="TextBox 353"/>
+          <p:cNvSpPr txBox="1"/>
+          <p:nvPr/>
+        </p:nvSpPr>
+        <p:spPr>
+          <a:xfrm>
+            <a:off x="694944" y="1636776"/>
+            <a:ext cx="6729984" cy="512064"/>
+          </a:xfrm>
+          <a:prstGeom prst="rect">
+            <a:avLst/>
+          </a:prstGeom>
+          <a:noFill/>
+        </p:spPr>
+        <p:txBody>
+          <a:bodyPr wrap="square" lIns="82296" rIns="36576" tIns="18288" bIns="18288">
+            <a:normAutofit/>
+          </a:bodyPr>
+          <a:lstStyle/>
+          <a:p>
+            <a:pPr>
+              <a:lnSpc>
+                <a:spcPct val="100000"/>
+              </a:lnSpc>
+              <a:spcBef>
+                <a:spcPts val="0"/>
+              </a:spcBef>
+              <a:spcAft>
+                <a:spcPts val="0"/>
+              </a:spcAft>
+            </a:pPr>
+            <a:r>
+              <a:rPr sz="1350" b="0">
+                <a:solidFill>
+                  <a:srgbClr val="000000"/>
+                </a:solidFill>
+                <a:latin typeface="Montserrat"/>
+              </a:rPr>
+              <a:t>Copies the backend application, FAISS artifact, and requirements into /app.</a:t>
+            </a:r>
+          </a:p>
+        </p:txBody>
+      </p:sp>
+      <p:sp>
+        <p:nvSpPr>
+          <p:cNvPr id="355" name="Oval 354"/>
+          <p:cNvSpPr/>
+          <p:nvPr/>
+        </p:nvSpPr>
+        <p:spPr>
+          <a:xfrm>
+            <a:off x="402336" y="1737360"/>
+            <a:ext cx="192024" cy="192024"/>
+          </a:xfrm>
+          <a:prstGeom prst="ellipse">
+            <a:avLst/>
+          </a:prstGeom>
+          <a:solidFill>
+            <a:srgbClr val="0944A1"/>
+          </a:solidFill>
+          <a:ln>
+            <a:noFill/>
+          </a:ln>
+        </p:spPr>
+        <p:style>
+          <a:lnRef idx="1">
+            <a:schemeClr val="accent1"/>
+          </a:lnRef>
+          <a:fillRef idx="3">
+            <a:schemeClr val="accent1"/>
+          </a:fillRef>
+          <a:effectRef idx="2">
+            <a:schemeClr val="accent1"/>
+          </a:effectRef>
+          <a:fontRef idx="minor">
+            <a:schemeClr val="lt1"/>
+          </a:fontRef>
+        </p:style>
+        <p:txBody>
+          <a:bodyPr rtlCol="0" anchor="ctr"/>
+          <a:lstStyle/>
+          <a:p>
+            <a:pPr algn="ctr"/>
+          </a:p>
+        </p:txBody>
+      </p:sp>
+      <p:sp>
+        <p:nvSpPr>
+          <p:cNvPr id="356" name="TextBox 355"/>
+          <p:cNvSpPr txBox="1"/>
+          <p:nvPr/>
+        </p:nvSpPr>
+        <p:spPr>
+          <a:xfrm>
+            <a:off x="694944" y="2180844"/>
+            <a:ext cx="6729984" cy="512064"/>
+          </a:xfrm>
+          <a:prstGeom prst="rect">
+            <a:avLst/>
+          </a:prstGeom>
+          <a:noFill/>
+        </p:spPr>
+        <p:txBody>
+          <a:bodyPr wrap="square" lIns="82296" rIns="36576" tIns="18288" bIns="18288">
+            <a:normAutofit/>
+          </a:bodyPr>
+          <a:lstStyle/>
+          <a:p>
+            <a:pPr>
+              <a:lnSpc>
+                <a:spcPct val="100000"/>
+              </a:lnSpc>
+              <a:spcBef>
+                <a:spcPts val="0"/>
+              </a:spcBef>
+              <a:spcAft>
+                <a:spcPts val="0"/>
+              </a:spcAft>
+            </a:pPr>
+            <a:r>
+              <a:rPr sz="1350" b="0">
+                <a:solidFill>
+                  <a:srgbClr val="000000"/>
+                </a:solidFill>
+                <a:latin typeface="Montserrat"/>
+              </a:rPr>
+              <a:t>Installs CPU PyTorch and the pinned backend dependencies without pip cache.</a:t>
+            </a:r>
+          </a:p>
+        </p:txBody>
+      </p:sp>
+      <p:sp>
+        <p:nvSpPr>
+          <p:cNvPr id="357" name="Oval 356"/>
+          <p:cNvSpPr/>
+          <p:nvPr/>
+        </p:nvSpPr>
+        <p:spPr>
+          <a:xfrm>
+            <a:off x="402336" y="2281428"/>
+            <a:ext cx="192024" cy="192024"/>
+          </a:xfrm>
+          <a:prstGeom prst="ellipse">
+            <a:avLst/>
+          </a:prstGeom>
+          <a:solidFill>
+            <a:srgbClr val="0944A1"/>
+          </a:solidFill>
+          <a:ln>
+            <a:noFill/>
+          </a:ln>
+        </p:spPr>
+        <p:style>
+          <a:lnRef idx="1">
+            <a:schemeClr val="accent1"/>
+          </a:lnRef>
+          <a:fillRef idx="3">
+            <a:schemeClr val="accent1"/>
+          </a:fillRef>
+          <a:effectRef idx="2">
+            <a:schemeClr val="accent1"/>
+          </a:effectRef>
+          <a:fontRef idx="minor">
+            <a:schemeClr val="lt1"/>
+          </a:fontRef>
+        </p:style>
+        <p:txBody>
+          <a:bodyPr rtlCol="0" anchor="ctr"/>
+          <a:lstStyle/>
+          <a:p>
+            <a:pPr algn="ctr"/>
+          </a:p>
+        </p:txBody>
+      </p:sp>
+      <p:sp>
+        <p:nvSpPr>
+          <p:cNvPr id="358" name="TextBox 357"/>
+          <p:cNvSpPr txBox="1"/>
+          <p:nvPr/>
+        </p:nvSpPr>
+        <p:spPr>
+          <a:xfrm>
+            <a:off x="694944" y="2724912"/>
+            <a:ext cx="6729984" cy="512064"/>
+          </a:xfrm>
+          <a:prstGeom prst="rect">
+            <a:avLst/>
+          </a:prstGeom>
+          <a:noFill/>
+        </p:spPr>
+        <p:txBody>
+          <a:bodyPr wrap="square" lIns="82296" rIns="36576" tIns="18288" bIns="18288">
+            <a:normAutofit/>
+          </a:bodyPr>
+          <a:lstStyle/>
+          <a:p>
+            <a:pPr>
+              <a:lnSpc>
+                <a:spcPct val="100000"/>
+              </a:lnSpc>
+              <a:spcBef>
+                <a:spcPts val="0"/>
+              </a:spcBef>
+              <a:spcAft>
+                <a:spcPts val="0"/>
+              </a:spcAft>
+            </a:pPr>
+            <a:r>
+              <a:rPr sz="1350" b="0">
+                <a:solidFill>
+                  <a:srgbClr val="000000"/>
+                </a:solidFill>
+                <a:latin typeface="Montserrat"/>
+              </a:rPr>
+              <a:t>Downloads HarishMaths/Hotel-Policy-Embedding at build time and sets HF_HOME=/app/huggingface.</a:t>
+            </a:r>
+          </a:p>
+        </p:txBody>
+      </p:sp>
+      <p:sp>
+        <p:nvSpPr>
+          <p:cNvPr id="359" name="Oval 358"/>
+          <p:cNvSpPr/>
+          <p:nvPr/>
+        </p:nvSpPr>
+        <p:spPr>
+          <a:xfrm>
+            <a:off x="402336" y="2825496"/>
+            <a:ext cx="192024" cy="192024"/>
+          </a:xfrm>
+          <a:prstGeom prst="ellipse">
+            <a:avLst/>
+          </a:prstGeom>
+          <a:solidFill>
+            <a:srgbClr val="0944A1"/>
+          </a:solidFill>
+          <a:ln>
+            <a:noFill/>
+          </a:ln>
+        </p:spPr>
+        <p:style>
+          <a:lnRef idx="1">
+            <a:schemeClr val="accent1"/>
+          </a:lnRef>
+          <a:fillRef idx="3">
+            <a:schemeClr val="accent1"/>
+          </a:fillRef>
+          <a:effectRef idx="2">
+            <a:schemeClr val="accent1"/>
+          </a:effectRef>
+          <a:fontRef idx="minor">
+            <a:schemeClr val="lt1"/>
+          </a:fontRef>
+        </p:style>
+        <p:txBody>
+          <a:bodyPr rtlCol="0" anchor="ctr"/>
+          <a:lstStyle/>
+          <a:p>
+            <a:pPr algn="ctr"/>
+          </a:p>
+        </p:txBody>
+      </p:sp>
+      <p:sp>
+        <p:nvSpPr>
+          <p:cNvPr id="360" name="TextBox 359"/>
+          <p:cNvSpPr txBox="1"/>
+          <p:nvPr/>
+        </p:nvSpPr>
+        <p:spPr>
+          <a:xfrm>
+            <a:off x="694944" y="3268980"/>
+            <a:ext cx="6729984" cy="512064"/>
+          </a:xfrm>
+          <a:prstGeom prst="rect">
+            <a:avLst/>
+          </a:prstGeom>
+          <a:noFill/>
+        </p:spPr>
+        <p:txBody>
+          <a:bodyPr wrap="square" lIns="82296" rIns="36576" tIns="18288" bIns="18288">
+            <a:normAutofit/>
+          </a:bodyPr>
+          <a:lstStyle/>
+          <a:p>
+            <a:pPr>
+              <a:lnSpc>
+                <a:spcPct val="100000"/>
+              </a:lnSpc>
+              <a:spcBef>
+                <a:spcPts val="0"/>
+              </a:spcBef>
+              <a:spcAft>
+                <a:spcPts val="0"/>
+              </a:spcAft>
+            </a:pPr>
+            <a:r>
+              <a:rPr sz="1350" b="0">
+                <a:solidFill>
+                  <a:srgbClr val="000000"/>
+                </a:solidFill>
+                <a:latin typeface="Montserrat"/>
+              </a:rPr>
+              <a:t>TRANSFORMERS_OFFLINE=1 and HF_HUB_OFFLINE=1 prevent runtime model downloads.</a:t>
+            </a:r>
+          </a:p>
+        </p:txBody>
+      </p:sp>
+      <p:sp>
+        <p:nvSpPr>
+          <p:cNvPr id="361" name="Oval 360"/>
+          <p:cNvSpPr/>
+          <p:nvPr/>
+        </p:nvSpPr>
+        <p:spPr>
+          <a:xfrm>
+            <a:off x="402336" y="3369564"/>
+            <a:ext cx="192024" cy="192024"/>
+          </a:xfrm>
+          <a:prstGeom prst="ellipse">
+            <a:avLst/>
+          </a:prstGeom>
+          <a:solidFill>
+            <a:srgbClr val="0944A1"/>
+          </a:solidFill>
+          <a:ln>
+            <a:noFill/>
+          </a:ln>
+        </p:spPr>
+        <p:style>
+          <a:lnRef idx="1">
+            <a:schemeClr val="accent1"/>
+          </a:lnRef>
+          <a:fillRef idx="3">
+            <a:schemeClr val="accent1"/>
+          </a:fillRef>
+          <a:effectRef idx="2">
+            <a:schemeClr val="accent1"/>
+          </a:effectRef>
+          <a:fontRef idx="minor">
+            <a:schemeClr val="lt1"/>
+          </a:fontRef>
+        </p:style>
+        <p:txBody>
+          <a:bodyPr rtlCol="0" anchor="ctr"/>
+          <a:lstStyle/>
+          <a:p>
+            <a:pPr algn="ctr"/>
+          </a:p>
+        </p:txBody>
+      </p:sp>
+      <p:sp>
+        <p:nvSpPr>
+          <p:cNvPr id="362" name="TextBox 361"/>
+          <p:cNvSpPr txBox="1"/>
+          <p:nvPr/>
+        </p:nvSpPr>
+        <p:spPr>
+          <a:xfrm>
+            <a:off x="694944" y="3813048"/>
+            <a:ext cx="6729984" cy="512064"/>
+          </a:xfrm>
+          <a:prstGeom prst="rect">
+            <a:avLst/>
+          </a:prstGeom>
+          <a:noFill/>
+        </p:spPr>
+        <p:txBody>
+          <a:bodyPr wrap="square" lIns="82296" rIns="36576" tIns="18288" bIns="18288">
+            <a:normAutofit/>
+          </a:bodyPr>
+          <a:lstStyle/>
+          <a:p>
+            <a:pPr>
+              <a:lnSpc>
+                <a:spcPct val="100000"/>
+              </a:lnSpc>
+              <a:spcBef>
+                <a:spcPts val="0"/>
+              </a:spcBef>
+              <a:spcAft>
+                <a:spcPts val="0"/>
+              </a:spcAft>
+            </a:pPr>
+            <a:r>
+              <a:rPr sz="1350" b="0">
+                <a:solidFill>
+                  <a:srgbClr val="000000"/>
+                </a:solidFill>
+                <a:latin typeface="Montserrat"/>
+              </a:rPr>
+              <a:t>Starts one Gunicorn worker on port 7860 with a 120-second request timeout.</a:t>
+            </a:r>
+          </a:p>
+        </p:txBody>
+      </p:sp>
+      <p:sp>
+        <p:nvSpPr>
+          <p:cNvPr id="363" name="Oval 362"/>
+          <p:cNvSpPr/>
+          <p:nvPr/>
+        </p:nvSpPr>
+        <p:spPr>
+          <a:xfrm>
+            <a:off x="402336" y="3913632"/>
+            <a:ext cx="192024" cy="192024"/>
+          </a:xfrm>
+          <a:prstGeom prst="ellipse">
+            <a:avLst/>
+          </a:prstGeom>
+          <a:solidFill>
+            <a:srgbClr val="0944A1"/>
+          </a:solidFill>
+          <a:ln>
+            <a:noFill/>
+          </a:ln>
+        </p:spPr>
+        <p:style>
+          <a:lnRef idx="1">
+            <a:schemeClr val="accent1"/>
+          </a:lnRef>
+          <a:fillRef idx="3">
+            <a:schemeClr val="accent1"/>
+          </a:fillRef>
+          <a:effectRef idx="2">
+            <a:schemeClr val="accent1"/>
+          </a:effectRef>
+          <a:fontRef idx="minor">
+            <a:schemeClr val="lt1"/>
+          </a:fontRef>
+        </p:style>
+        <p:txBody>
+          <a:bodyPr rtlCol="0" anchor="ctr"/>
+          <a:lstStyle/>
+          <a:p>
+            <a:pPr algn="ctr"/>
+          </a:p>
+        </p:txBody>
+      </p:sp>
+    </p:spTree>
+  </p:cSld>
+  <p:clrMapOvr>
+    <a:masterClrMapping/>
+  </p:clrMapOvr>
+</p:sld>
+</file>
+
+<file path=ppt/slides/slide24.xml><?xml version="1.0" encoding="utf-8"?>
+<p:sld xmlns:a="http://schemas.openxmlformats.org/drawingml/2006/main" xmlns:r="http://schemas.openxmlformats.org/officeDocument/2006/relationships" xmlns:mc="http://schemas.openxmlformats.org/markup-compatibility/2006" xmlns:mv="urn:schemas-microsoft-com:mac:vml" xmlns:p="http://schemas.openxmlformats.org/presentationml/2006/main" xmlns:c="http://schemas.openxmlformats.org/drawingml/2006/chart" xmlns:dgm="http://schemas.openxmlformats.org/drawingml/2006/diagram" xmlns:o="urn:schemas-microsoft-com:office:office" xmlns:v="urn:schemas-microsoft-com:vml" xmlns:pvml="urn:schemas-microsoft-com:office:powerpoint" xmlns:com="http://schemas.openxmlformats.org/drawingml/2006/compatibility" xmlns:p14="http://schemas.microsoft.com/office/powerpoint/2010/main" xmlns:p15="http://schemas.microsoft.com/office/powerpoint/2012/main" xmlns:ahyp="http://schemas.microsoft.com/office/drawing/2018/hyperlinkcolor">
+  <p:cSld>
+    <p:spTree>
+      <p:nvGrpSpPr>
+        <p:cNvPr id="357" name="Shape 357"/>
+        <p:cNvGrpSpPr/>
+        <p:nvPr/>
+      </p:nvGrpSpPr>
+      <p:grpSpPr>
+        <a:xfrm>
+          <a:off x="0" y="0"/>
+          <a:ext cx="0" cy="0"/>
+          <a:chOff x="0" y="0"/>
+          <a:chExt cx="0" cy="0"/>
+        </a:xfrm>
+      </p:grpSpPr>
+      <p:sp>
+        <p:nvSpPr>
+          <p:cNvPr id="358" name="Google Shape;358;p59"/>
+          <p:cNvSpPr txBox="1"/>
+          <p:nvPr>
+            <p:ph type="title"/>
+          </p:nvPr>
+        </p:nvSpPr>
+        <p:spPr>
+          <a:xfrm>
+            <a:off x="202550" y="289279"/>
+            <a:ext cx="8520600" cy="572700"/>
+          </a:xfrm>
+          <a:prstGeom prst="rect">
+            <a:avLst/>
+          </a:prstGeom>
+          <a:noFill/>
+          <a:ln>
+            <a:noFill/>
+          </a:ln>
+        </p:spPr>
+        <p:txBody>
+          <a:bodyPr anchorCtr="0" anchor="t" bIns="91425" lIns="91425" spcFirstLastPara="1" rIns="91425" wrap="square" tIns="91425">
+            <a:noAutofit/>
+          </a:bodyPr>
+          <a:lstStyle/>
+          <a:p>
+            <a:r>
+              <a:rPr sz="2200" b="1">
+                <a:solidFill>
+                  <a:srgbClr val="0E39A9"/>
+                </a:solidFill>
+                <a:latin typeface="Montserrat"/>
+              </a:rPr>
+              <a:t>Deployment - Frontend - Define the Streamlit App</a:t>
+            </a:r>
+          </a:p>
+        </p:txBody>
+      </p:sp>
+      <p:sp>
+        <p:nvSpPr>
+          <p:cNvPr id="359" name="Rectangle 358"/>
+          <p:cNvSpPr/>
+          <p:nvPr/>
+        </p:nvSpPr>
+        <p:spPr>
+          <a:xfrm>
+            <a:off x="502920" y="1005840"/>
+            <a:ext cx="8138160" cy="32004"/>
+          </a:xfrm>
+          <a:prstGeom prst="rect">
+            <a:avLst/>
+          </a:prstGeom>
+          <a:solidFill>
+            <a:srgbClr val="0E39A9"/>
+          </a:solidFill>
+          <a:ln>
+            <a:noFill/>
+          </a:ln>
+        </p:spPr>
+        <p:style>
+          <a:lnRef idx="1">
+            <a:schemeClr val="accent1"/>
+          </a:lnRef>
+          <a:fillRef idx="3">
+            <a:schemeClr val="accent1"/>
+          </a:fillRef>
+          <a:effectRef idx="2">
+            <a:schemeClr val="accent1"/>
+          </a:effectRef>
+          <a:fontRef idx="minor">
+            <a:schemeClr val="lt1"/>
+          </a:fontRef>
+        </p:style>
+        <p:txBody>
+          <a:bodyPr rtlCol="0" anchor="ctr"/>
+          <a:lstStyle/>
+          <a:p>
+            <a:pPr algn="ctr"/>
+          </a:p>
+        </p:txBody>
+      </p:sp>
+      <p:sp>
+        <p:nvSpPr>
+          <p:cNvPr id="360" name="TextBox 359"/>
+          <p:cNvSpPr txBox="1"/>
+          <p:nvPr/>
+        </p:nvSpPr>
+        <p:spPr>
+          <a:xfrm>
+            <a:off x="694944" y="1325880"/>
+            <a:ext cx="6729984" cy="512064"/>
+          </a:xfrm>
+          <a:prstGeom prst="rect">
+            <a:avLst/>
+          </a:prstGeom>
+          <a:noFill/>
+        </p:spPr>
+        <p:txBody>
+          <a:bodyPr wrap="square" lIns="82296" rIns="36576" tIns="18288" bIns="18288">
+            <a:normAutofit/>
+          </a:bodyPr>
+          <a:lstStyle/>
+          <a:p>
+            <a:pPr>
+              <a:lnSpc>
+                <a:spcPct val="100000"/>
+              </a:lnSpc>
+              <a:spcBef>
+                <a:spcPts val="0"/>
+              </a:spcBef>
+              <a:spcAft>
+                <a:spcPts val="0"/>
+              </a:spcAft>
+            </a:pPr>
+            <a:r>
+              <a:rPr sz="1250" b="0">
+                <a:solidFill>
+                  <a:srgbClr val="000000"/>
+                </a:solidFill>
+                <a:latin typeface="Montserrat"/>
+              </a:rPr>
+              <a:t>Frontend entry point: frontend/app.py; it provides the Aurora Stays question-and-answer interface.</a:t>
+            </a:r>
+          </a:p>
+        </p:txBody>
+      </p:sp>
+      <p:sp>
+        <p:nvSpPr>
+          <p:cNvPr id="361" name="Oval 360"/>
+          <p:cNvSpPr/>
+          <p:nvPr/>
+        </p:nvSpPr>
+        <p:spPr>
+          <a:xfrm>
+            <a:off x="402336" y="1426464"/>
+            <a:ext cx="192024" cy="192024"/>
+          </a:xfrm>
+          <a:prstGeom prst="ellipse">
+            <a:avLst/>
+          </a:prstGeom>
+          <a:solidFill>
+            <a:srgbClr val="0944A1"/>
+          </a:solidFill>
+          <a:ln>
+            <a:noFill/>
+          </a:ln>
+        </p:spPr>
+        <p:style>
+          <a:lnRef idx="1">
+            <a:schemeClr val="accent1"/>
+          </a:lnRef>
+          <a:fillRef idx="3">
+            <a:schemeClr val="accent1"/>
+          </a:fillRef>
+          <a:effectRef idx="2">
+            <a:schemeClr val="accent1"/>
+          </a:effectRef>
+          <a:fontRef idx="minor">
+            <a:schemeClr val="lt1"/>
+          </a:fontRef>
+        </p:style>
+        <p:txBody>
+          <a:bodyPr rtlCol="0" anchor="ctr"/>
+          <a:lstStyle/>
+          <a:p>
+            <a:pPr algn="ctr"/>
+          </a:p>
+        </p:txBody>
+      </p:sp>
+      <p:sp>
+        <p:nvSpPr>
+          <p:cNvPr id="362" name="TextBox 361"/>
+          <p:cNvSpPr txBox="1"/>
+          <p:nvPr/>
+        </p:nvSpPr>
+        <p:spPr>
+          <a:xfrm>
+            <a:off x="694944" y="1869948"/>
+            <a:ext cx="6729984" cy="512064"/>
+          </a:xfrm>
+          <a:prstGeom prst="rect">
+            <a:avLst/>
+          </a:prstGeom>
+          <a:noFill/>
+        </p:spPr>
+        <p:txBody>
+          <a:bodyPr wrap="square" lIns="82296" rIns="36576" tIns="18288" bIns="18288">
+            <a:normAutofit/>
+          </a:bodyPr>
+          <a:lstStyle/>
+          <a:p>
+            <a:pPr>
+              <a:lnSpc>
+                <a:spcPct val="100000"/>
+              </a:lnSpc>
+              <a:spcBef>
+                <a:spcPts val="0"/>
+              </a:spcBef>
+              <a:spcAft>
+                <a:spcPts val="0"/>
+              </a:spcAft>
+            </a:pPr>
+            <a:r>
+              <a:rPr sz="1250" b="0">
+                <a:solidFill>
+                  <a:srgbClr val="000000"/>
+                </a:solidFill>
+                <a:latin typeface="Montserrat"/>
+              </a:rPr>
+              <a:t>Sidebar controls: k from 1 to 10, temperature from 0.0 to 1.0, and max_tokens from 64 to 2048.</a:t>
+            </a:r>
+          </a:p>
+        </p:txBody>
+      </p:sp>
+      <p:sp>
+        <p:nvSpPr>
+          <p:cNvPr id="363" name="Oval 362"/>
+          <p:cNvSpPr/>
+          <p:nvPr/>
+        </p:nvSpPr>
+        <p:spPr>
+          <a:xfrm>
+            <a:off x="402336" y="1970531"/>
+            <a:ext cx="192024" cy="192024"/>
+          </a:xfrm>
+          <a:prstGeom prst="ellipse">
+            <a:avLst/>
+          </a:prstGeom>
+          <a:solidFill>
+            <a:srgbClr val="0944A1"/>
+          </a:solidFill>
+          <a:ln>
+            <a:noFill/>
+          </a:ln>
+        </p:spPr>
+        <p:style>
+          <a:lnRef idx="1">
+            <a:schemeClr val="accent1"/>
+          </a:lnRef>
+          <a:fillRef idx="3">
+            <a:schemeClr val="accent1"/>
+          </a:fillRef>
+          <a:effectRef idx="2">
+            <a:schemeClr val="accent1"/>
+          </a:effectRef>
+          <a:fontRef idx="minor">
+            <a:schemeClr val="lt1"/>
+          </a:fontRef>
+        </p:style>
+        <p:txBody>
+          <a:bodyPr rtlCol="0" anchor="ctr"/>
+          <a:lstStyle/>
+          <a:p>
+            <a:pPr algn="ctr"/>
+          </a:p>
+        </p:txBody>
+      </p:sp>
+      <p:sp>
+        <p:nvSpPr>
+          <p:cNvPr id="364" name="TextBox 363"/>
+          <p:cNvSpPr txBox="1"/>
+          <p:nvPr/>
+        </p:nvSpPr>
+        <p:spPr>
+          <a:xfrm>
+            <a:off x="694944" y="2414016"/>
+            <a:ext cx="6729984" cy="512064"/>
+          </a:xfrm>
+          <a:prstGeom prst="rect">
+            <a:avLst/>
+          </a:prstGeom>
+          <a:noFill/>
+        </p:spPr>
+        <p:txBody>
+          <a:bodyPr wrap="square" lIns="82296" rIns="36576" tIns="18288" bIns="18288">
+            <a:normAutofit/>
+          </a:bodyPr>
+          <a:lstStyle/>
+          <a:p>
+            <a:pPr>
+              <a:lnSpc>
+                <a:spcPct val="100000"/>
+              </a:lnSpc>
+              <a:spcBef>
+                <a:spcPts val="0"/>
+              </a:spcBef>
+              <a:spcAft>
+                <a:spcPts val="0"/>
+              </a:spcAft>
+            </a:pPr>
+            <a:r>
+              <a:rPr sz="1250" b="0">
+                <a:solidFill>
+                  <a:srgbClr val="000000"/>
+                </a:solidFill>
+                <a:latin typeface="Montserrat"/>
+              </a:rPr>
+              <a:t>Users can select Answer only or Answer + Relevant Chunks.</a:t>
+            </a:r>
+          </a:p>
+        </p:txBody>
+      </p:sp>
+      <p:sp>
+        <p:nvSpPr>
+          <p:cNvPr id="365" name="Oval 364"/>
+          <p:cNvSpPr/>
+          <p:nvPr/>
+        </p:nvSpPr>
+        <p:spPr>
+          <a:xfrm>
+            <a:off x="402336" y="2514600"/>
+            <a:ext cx="192024" cy="192024"/>
+          </a:xfrm>
+          <a:prstGeom prst="ellipse">
+            <a:avLst/>
+          </a:prstGeom>
+          <a:solidFill>
+            <a:srgbClr val="0944A1"/>
+          </a:solidFill>
+          <a:ln>
+            <a:noFill/>
+          </a:ln>
+        </p:spPr>
+        <p:style>
+          <a:lnRef idx="1">
+            <a:schemeClr val="accent1"/>
+          </a:lnRef>
+          <a:fillRef idx="3">
+            <a:schemeClr val="accent1"/>
+          </a:fillRef>
+          <a:effectRef idx="2">
+            <a:schemeClr val="accent1"/>
+          </a:effectRef>
+          <a:fontRef idx="minor">
+            <a:schemeClr val="lt1"/>
+          </a:fontRef>
+        </p:style>
+        <p:txBody>
+          <a:bodyPr rtlCol="0" anchor="ctr"/>
+          <a:lstStyle/>
+          <a:p>
+            <a:pPr algn="ctr"/>
+          </a:p>
+        </p:txBody>
+      </p:sp>
+      <p:sp>
+        <p:nvSpPr>
+          <p:cNvPr id="366" name="TextBox 365"/>
+          <p:cNvSpPr txBox="1"/>
+          <p:nvPr/>
+        </p:nvSpPr>
+        <p:spPr>
+          <a:xfrm>
+            <a:off x="694944" y="2958084"/>
+            <a:ext cx="6729984" cy="512064"/>
+          </a:xfrm>
+          <a:prstGeom prst="rect">
+            <a:avLst/>
+          </a:prstGeom>
+          <a:noFill/>
+        </p:spPr>
+        <p:txBody>
+          <a:bodyPr wrap="square" lIns="82296" rIns="36576" tIns="18288" bIns="18288">
+            <a:normAutofit/>
+          </a:bodyPr>
+          <a:lstStyle/>
+          <a:p>
+            <a:pPr>
+              <a:lnSpc>
+                <a:spcPct val="100000"/>
+              </a:lnSpc>
+              <a:spcBef>
+                <a:spcPts val="0"/>
+              </a:spcBef>
+              <a:spcAft>
+                <a:spcPts val="0"/>
+              </a:spcAft>
+            </a:pPr>
+            <a:r>
+              <a:rPr sz="1250" b="0">
+                <a:solidFill>
+                  <a:srgbClr val="000000"/>
+                </a:solidFill>
+                <a:latin typeface="Montserrat"/>
+              </a:rPr>
+              <a:t>The backend address is supplied through BACKEND_URL; local default is http://localhost:5000.</a:t>
+            </a:r>
+          </a:p>
+        </p:txBody>
+      </p:sp>
+      <p:sp>
+        <p:nvSpPr>
+          <p:cNvPr id="367" name="Oval 366"/>
+          <p:cNvSpPr/>
+          <p:nvPr/>
+        </p:nvSpPr>
+        <p:spPr>
+          <a:xfrm>
+            <a:off x="402336" y="3058668"/>
+            <a:ext cx="192024" cy="192024"/>
+          </a:xfrm>
+          <a:prstGeom prst="ellipse">
+            <a:avLst/>
+          </a:prstGeom>
+          <a:solidFill>
+            <a:srgbClr val="0944A1"/>
+          </a:solidFill>
+          <a:ln>
+            <a:noFill/>
+          </a:ln>
+        </p:spPr>
+        <p:style>
+          <a:lnRef idx="1">
+            <a:schemeClr val="accent1"/>
+          </a:lnRef>
+          <a:fillRef idx="3">
+            <a:schemeClr val="accent1"/>
+          </a:fillRef>
+          <a:effectRef idx="2">
+            <a:schemeClr val="accent1"/>
+          </a:effectRef>
+          <a:fontRef idx="minor">
+            <a:schemeClr val="lt1"/>
+          </a:fontRef>
+        </p:style>
+        <p:txBody>
+          <a:bodyPr rtlCol="0" anchor="ctr"/>
+          <a:lstStyle/>
+          <a:p>
+            <a:pPr algn="ctr"/>
+          </a:p>
+        </p:txBody>
+      </p:sp>
+      <p:sp>
+        <p:nvSpPr>
+          <p:cNvPr id="368" name="TextBox 367"/>
+          <p:cNvSpPr txBox="1"/>
+          <p:nvPr/>
+        </p:nvSpPr>
+        <p:spPr>
+          <a:xfrm>
+            <a:off x="694944" y="3502152"/>
+            <a:ext cx="6729984" cy="745236"/>
+          </a:xfrm>
+          <a:prstGeom prst="rect">
+            <a:avLst/>
+          </a:prstGeom>
+          <a:noFill/>
+        </p:spPr>
+        <p:txBody>
+          <a:bodyPr wrap="square" lIns="82296" rIns="36576" tIns="18288" bIns="18288">
+            <a:normAutofit/>
+          </a:bodyPr>
+          <a:lstStyle/>
+          <a:p>
+            <a:pPr>
+              <a:lnSpc>
+                <a:spcPct val="100000"/>
+              </a:lnSpc>
+              <a:spcBef>
+                <a:spcPts val="0"/>
+              </a:spcBef>
+              <a:spcAft>
+                <a:spcPts val="0"/>
+              </a:spcAft>
+            </a:pPr>
+            <a:r>
+              <a:rPr sz="1250" b="0">
+                <a:solidFill>
+                  <a:srgbClr val="000000"/>
+                </a:solidFill>
+                <a:latin typeface="Montserrat"/>
+              </a:rPr>
+              <a:t>The interface displays the answer, retrieved evidence, and a clear API connectivity error when the backend is unavailable.</a:t>
+            </a:r>
+          </a:p>
+        </p:txBody>
+      </p:sp>
+      <p:sp>
+        <p:nvSpPr>
+          <p:cNvPr id="369" name="Oval 368"/>
+          <p:cNvSpPr/>
+          <p:nvPr/>
+        </p:nvSpPr>
+        <p:spPr>
+          <a:xfrm>
+            <a:off x="402336" y="3602736"/>
+            <a:ext cx="192024" cy="192024"/>
+          </a:xfrm>
+          <a:prstGeom prst="ellipse">
+            <a:avLst/>
+          </a:prstGeom>
+          <a:solidFill>
+            <a:srgbClr val="0944A1"/>
+          </a:solidFill>
+          <a:ln>
+            <a:noFill/>
+          </a:ln>
+        </p:spPr>
+        <p:style>
+          <a:lnRef idx="1">
+            <a:schemeClr val="accent1"/>
+          </a:lnRef>
+          <a:fillRef idx="3">
+            <a:schemeClr val="accent1"/>
+          </a:fillRef>
+          <a:effectRef idx="2">
+            <a:schemeClr val="accent1"/>
+          </a:effectRef>
+          <a:fontRef idx="minor">
+            <a:schemeClr val="lt1"/>
+          </a:fontRef>
+        </p:style>
+        <p:txBody>
+          <a:bodyPr rtlCol="0" anchor="ctr"/>
+          <a:lstStyle/>
+          <a:p>
+            <a:pPr algn="ctr"/>
+          </a:p>
+        </p:txBody>
+      </p:sp>
+      <p:sp>
+        <p:nvSpPr>
+          <p:cNvPr id="370" name="TextBox 369"/>
+          <p:cNvSpPr txBox="1"/>
+          <p:nvPr/>
+        </p:nvSpPr>
+        <p:spPr>
+          <a:xfrm>
+            <a:off x="694944" y="4279392"/>
+            <a:ext cx="6729984" cy="402335"/>
+          </a:xfrm>
+          <a:prstGeom prst="rect">
+            <a:avLst/>
+          </a:prstGeom>
+          <a:noFill/>
+        </p:spPr>
+        <p:txBody>
+          <a:bodyPr wrap="square" lIns="82296" rIns="36576" tIns="18288" bIns="18288">
+            <a:normAutofit/>
+          </a:bodyPr>
+          <a:lstStyle/>
+          <a:p>
+            <a:pPr>
+              <a:lnSpc>
+                <a:spcPct val="100000"/>
+              </a:lnSpc>
+              <a:spcBef>
+                <a:spcPts val="0"/>
+              </a:spcBef>
+              <a:spcAft>
+                <a:spcPts val="0"/>
+              </a:spcAft>
+            </a:pPr>
+            <a:r>
+              <a:rPr sz="1250" b="0">
+                <a:solidFill>
+                  <a:srgbClr val="000000"/>
+                </a:solidFill>
+                <a:latin typeface="Montserrat"/>
+              </a:rPr>
+              <a:t>Validated locally with Streamlit on port 8501 and the Flask API on port 5000.</a:t>
+            </a:r>
+          </a:p>
+        </p:txBody>
+      </p:sp>
+      <p:sp>
+        <p:nvSpPr>
+          <p:cNvPr id="371" name="Oval 370"/>
+          <p:cNvSpPr/>
+          <p:nvPr/>
+        </p:nvSpPr>
+        <p:spPr>
+          <a:xfrm>
+            <a:off x="402336" y="4379976"/>
+            <a:ext cx="192024" cy="192024"/>
+          </a:xfrm>
+          <a:prstGeom prst="ellipse">
+            <a:avLst/>
+          </a:prstGeom>
+          <a:solidFill>
+            <a:srgbClr val="0944A1"/>
+          </a:solidFill>
+          <a:ln>
+            <a:noFill/>
+          </a:ln>
+        </p:spPr>
+        <p:style>
+          <a:lnRef idx="1">
+            <a:schemeClr val="accent1"/>
+          </a:lnRef>
+          <a:fillRef idx="3">
+            <a:schemeClr val="accent1"/>
+          </a:fillRef>
+          <a:effectRef idx="2">
+            <a:schemeClr val="accent1"/>
+          </a:effectRef>
+          <a:fontRef idx="minor">
+            <a:schemeClr val="lt1"/>
+          </a:fontRef>
+        </p:style>
+        <p:txBody>
+          <a:bodyPr rtlCol="0" anchor="ctr"/>
+          <a:lstStyle/>
+          <a:p>
+            <a:pPr algn="ctr"/>
+          </a:p>
+        </p:txBody>
+      </p:sp>
+    </p:spTree>
+  </p:cSld>
+  <p:clrMapOvr>
+    <a:masterClrMapping/>
+  </p:clrMapOvr>
+</p:sld>
+</file>
+
+<file path=ppt/slides/slide25.xml><?xml version="1.0" encoding="utf-8"?>
+<p:sld xmlns:a="http://schemas.openxmlformats.org/drawingml/2006/main" xmlns:r="http://schemas.openxmlformats.org/officeDocument/2006/relationships" xmlns:mc="http://schemas.openxmlformats.org/markup-compatibility/2006" xmlns:mv="urn:schemas-microsoft-com:mac:vml" xmlns:p="http://schemas.openxmlformats.org/presentationml/2006/main" xmlns:c="http://schemas.openxmlformats.org/drawingml/2006/chart" xmlns:dgm="http://schemas.openxmlformats.org/drawingml/2006/diagram" xmlns:o="urn:schemas-microsoft-com:office:office" xmlns:v="urn:schemas-microsoft-com:vml" xmlns:pvml="urn:schemas-microsoft-com:office:powerpoint" xmlns:com="http://schemas.openxmlformats.org/drawingml/2006/compatibility" xmlns:p14="http://schemas.microsoft.com/office/powerpoint/2010/main" xmlns:p15="http://schemas.microsoft.com/office/powerpoint/2012/main" xmlns:ahyp="http://schemas.microsoft.com/office/drawing/2018/hyperlinkcolor">
+  <p:cSld>
+    <p:spTree>
+      <p:nvGrpSpPr>
+        <p:cNvPr id="365" name="Shape 365"/>
+        <p:cNvGrpSpPr/>
+        <p:nvPr/>
+      </p:nvGrpSpPr>
+      <p:grpSpPr>
+        <a:xfrm>
+          <a:off x="0" y="0"/>
+          <a:ext cx="0" cy="0"/>
+          <a:chOff x="0" y="0"/>
+          <a:chExt cx="0" cy="0"/>
+        </a:xfrm>
+      </p:grpSpPr>
+      <p:sp>
+        <p:nvSpPr>
+          <p:cNvPr id="366" name="Google Shape;366;p60"/>
+          <p:cNvSpPr txBox="1"/>
+          <p:nvPr>
+            <p:ph type="title"/>
+          </p:nvPr>
+        </p:nvSpPr>
+        <p:spPr>
+          <a:xfrm>
+            <a:off x="202550" y="289279"/>
+            <a:ext cx="8520600" cy="572700"/>
+          </a:xfrm>
+          <a:prstGeom prst="rect">
+            <a:avLst/>
+          </a:prstGeom>
+          <a:noFill/>
+          <a:ln>
+            <a:noFill/>
+          </a:ln>
+        </p:spPr>
+        <p:txBody>
+          <a:bodyPr anchorCtr="0" anchor="t" bIns="91425" lIns="91425" spcFirstLastPara="1" rIns="91425" wrap="square" tIns="91425">
+            <a:noAutofit/>
+          </a:bodyPr>
+          <a:lstStyle/>
+          <a:p>
+            <a:r>
+              <a:rPr sz="2200" b="1">
+                <a:solidFill>
+                  <a:srgbClr val="0E39A9"/>
+                </a:solidFill>
+                <a:latin typeface="Montserrat"/>
+              </a:rPr>
+              <a:t>Deployment - Frontend - Define the Dockerfile</a:t>
+            </a:r>
+          </a:p>
+        </p:txBody>
+      </p:sp>
+      <p:sp>
+        <p:nvSpPr>
+          <p:cNvPr id="367" name="Rectangle 366"/>
+          <p:cNvSpPr/>
+          <p:nvPr/>
+        </p:nvSpPr>
+        <p:spPr>
+          <a:xfrm>
+            <a:off x="502920" y="1005840"/>
+            <a:ext cx="8138160" cy="32004"/>
+          </a:xfrm>
+          <a:prstGeom prst="rect">
+            <a:avLst/>
+          </a:prstGeom>
+          <a:solidFill>
+            <a:srgbClr val="0E39A9"/>
+          </a:solidFill>
+          <a:ln>
+            <a:noFill/>
+          </a:ln>
+        </p:spPr>
+        <p:style>
+          <a:lnRef idx="1">
+            <a:schemeClr val="accent1"/>
+          </a:lnRef>
+          <a:fillRef idx="3">
+            <a:schemeClr val="accent1"/>
+          </a:fillRef>
+          <a:effectRef idx="2">
+            <a:schemeClr val="accent1"/>
+          </a:effectRef>
+          <a:fontRef idx="minor">
+            <a:schemeClr val="lt1"/>
+          </a:fontRef>
+        </p:style>
+        <p:txBody>
+          <a:bodyPr rtlCol="0" anchor="ctr"/>
+          <a:lstStyle/>
+          <a:p>
+            <a:pPr algn="ctr"/>
+          </a:p>
+        </p:txBody>
+      </p:sp>
+      <p:sp>
+        <p:nvSpPr>
+          <p:cNvPr id="368" name="TextBox 367"/>
+          <p:cNvSpPr txBox="1"/>
+          <p:nvPr/>
+        </p:nvSpPr>
+        <p:spPr>
+          <a:xfrm>
+            <a:off x="694944" y="1325880"/>
+            <a:ext cx="6729984" cy="278892"/>
+          </a:xfrm>
+          <a:prstGeom prst="rect">
+            <a:avLst/>
+          </a:prstGeom>
+          <a:noFill/>
+        </p:spPr>
+        <p:txBody>
+          <a:bodyPr wrap="square" lIns="82296" rIns="36576" tIns="18288" bIns="18288">
+            <a:normAutofit/>
+          </a:bodyPr>
+          <a:lstStyle/>
+          <a:p>
+            <a:pPr>
+              <a:lnSpc>
+                <a:spcPct val="100000"/>
+              </a:lnSpc>
+              <a:spcBef>
+                <a:spcPts val="0"/>
+              </a:spcBef>
+              <a:spcAft>
+                <a:spcPts val="0"/>
+              </a:spcAft>
+            </a:pPr>
+            <a:r>
+              <a:rPr sz="1400" b="0">
+                <a:solidFill>
+                  <a:srgbClr val="000000"/>
+                </a:solidFill>
+                <a:latin typeface="Montserrat"/>
+              </a:rPr>
+              <a:t>Base image: python:3.13.15-slim.</a:t>
+            </a:r>
+          </a:p>
+        </p:txBody>
+      </p:sp>
+      <p:sp>
+        <p:nvSpPr>
+          <p:cNvPr id="369" name="Oval 368"/>
+          <p:cNvSpPr/>
+          <p:nvPr/>
+        </p:nvSpPr>
+        <p:spPr>
+          <a:xfrm>
+            <a:off x="402336" y="1426464"/>
+            <a:ext cx="192024" cy="192024"/>
+          </a:xfrm>
+          <a:prstGeom prst="ellipse">
+            <a:avLst/>
+          </a:prstGeom>
+          <a:solidFill>
+            <a:srgbClr val="0944A1"/>
+          </a:solidFill>
+          <a:ln>
+            <a:noFill/>
+          </a:ln>
+        </p:spPr>
+        <p:style>
+          <a:lnRef idx="1">
+            <a:schemeClr val="accent1"/>
+          </a:lnRef>
+          <a:fillRef idx="3">
+            <a:schemeClr val="accent1"/>
+          </a:fillRef>
+          <a:effectRef idx="2">
+            <a:schemeClr val="accent1"/>
+          </a:effectRef>
+          <a:fontRef idx="minor">
+            <a:schemeClr val="lt1"/>
+          </a:fontRef>
+        </p:style>
+        <p:txBody>
+          <a:bodyPr rtlCol="0" anchor="ctr"/>
+          <a:lstStyle/>
+          <a:p>
+            <a:pPr algn="ctr"/>
+          </a:p>
+        </p:txBody>
+      </p:sp>
+      <p:sp>
+        <p:nvSpPr>
+          <p:cNvPr id="370" name="TextBox 369"/>
+          <p:cNvSpPr txBox="1"/>
+          <p:nvPr/>
+        </p:nvSpPr>
+        <p:spPr>
+          <a:xfrm>
+            <a:off x="694944" y="1636776"/>
+            <a:ext cx="6729984" cy="512064"/>
+          </a:xfrm>
+          <a:prstGeom prst="rect">
+            <a:avLst/>
+          </a:prstGeom>
+          <a:noFill/>
+        </p:spPr>
+        <p:txBody>
+          <a:bodyPr wrap="square" lIns="82296" rIns="36576" tIns="18288" bIns="18288">
+            <a:normAutofit/>
+          </a:bodyPr>
+          <a:lstStyle/>
+          <a:p>
+            <a:pPr>
+              <a:lnSpc>
+                <a:spcPct val="100000"/>
+              </a:lnSpc>
+              <a:spcBef>
+                <a:spcPts val="0"/>
+              </a:spcBef>
+              <a:spcAft>
+                <a:spcPts val="0"/>
+              </a:spcAft>
+            </a:pPr>
+            <a:r>
+              <a:rPr sz="1400" b="0">
+                <a:solidFill>
+                  <a:srgbClr val="000000"/>
+                </a:solidFill>
+                <a:latin typeface="Montserrat"/>
+              </a:rPr>
+              <a:t>Copies the Streamlit application and installs requests 2.34.2 and streamlit 1.64.0.</a:t>
+            </a:r>
+          </a:p>
+        </p:txBody>
+      </p:sp>
+      <p:sp>
+        <p:nvSpPr>
+          <p:cNvPr id="371" name="Oval 370"/>
+          <p:cNvSpPr/>
+          <p:nvPr/>
+        </p:nvSpPr>
+        <p:spPr>
+          <a:xfrm>
+            <a:off x="402336" y="1737360"/>
+            <a:ext cx="192024" cy="192024"/>
+          </a:xfrm>
+          <a:prstGeom prst="ellipse">
+            <a:avLst/>
+          </a:prstGeom>
+          <a:solidFill>
+            <a:srgbClr val="0944A1"/>
+          </a:solidFill>
+          <a:ln>
+            <a:noFill/>
+          </a:ln>
+        </p:spPr>
+        <p:style>
+          <a:lnRef idx="1">
+            <a:schemeClr val="accent1"/>
+          </a:lnRef>
+          <a:fillRef idx="3">
+            <a:schemeClr val="accent1"/>
+          </a:fillRef>
+          <a:effectRef idx="2">
+            <a:schemeClr val="accent1"/>
+          </a:effectRef>
+          <a:fontRef idx="minor">
+            <a:schemeClr val="lt1"/>
+          </a:fontRef>
+        </p:style>
+        <p:txBody>
+          <a:bodyPr rtlCol="0" anchor="ctr"/>
+          <a:lstStyle/>
+          <a:p>
+            <a:pPr algn="ctr"/>
+          </a:p>
+        </p:txBody>
+      </p:sp>
+      <p:sp>
+        <p:nvSpPr>
+          <p:cNvPr id="372" name="TextBox 371"/>
+          <p:cNvSpPr txBox="1"/>
+          <p:nvPr/>
+        </p:nvSpPr>
+        <p:spPr>
+          <a:xfrm>
+            <a:off x="694944" y="2180844"/>
+            <a:ext cx="6729984" cy="512064"/>
+          </a:xfrm>
+          <a:prstGeom prst="rect">
+            <a:avLst/>
+          </a:prstGeom>
+          <a:noFill/>
+        </p:spPr>
+        <p:txBody>
+          <a:bodyPr wrap="square" lIns="82296" rIns="36576" tIns="18288" bIns="18288">
+            <a:normAutofit/>
+          </a:bodyPr>
+          <a:lstStyle/>
+          <a:p>
+            <a:pPr>
+              <a:lnSpc>
+                <a:spcPct val="100000"/>
+              </a:lnSpc>
+              <a:spcBef>
+                <a:spcPts val="0"/>
+              </a:spcBef>
+              <a:spcAft>
+                <a:spcPts val="0"/>
+              </a:spcAft>
+            </a:pPr>
+            <a:r>
+              <a:rPr sz="1400" b="0">
+                <a:solidFill>
+                  <a:srgbClr val="000000"/>
+                </a:solidFill>
+                <a:latin typeface="Montserrat"/>
+              </a:rPr>
+              <a:t>Binds Streamlit to 0.0.0.0:8501 for Codespaces or container access.</a:t>
+            </a:r>
+          </a:p>
+        </p:txBody>
+      </p:sp>
+      <p:sp>
+        <p:nvSpPr>
+          <p:cNvPr id="373" name="Oval 372"/>
+          <p:cNvSpPr/>
+          <p:nvPr/>
+        </p:nvSpPr>
+        <p:spPr>
+          <a:xfrm>
+            <a:off x="402336" y="2281428"/>
+            <a:ext cx="192024" cy="192024"/>
+          </a:xfrm>
+          <a:prstGeom prst="ellipse">
+            <a:avLst/>
+          </a:prstGeom>
+          <a:solidFill>
+            <a:srgbClr val="0944A1"/>
+          </a:solidFill>
+          <a:ln>
+            <a:noFill/>
+          </a:ln>
+        </p:spPr>
+        <p:style>
+          <a:lnRef idx="1">
+            <a:schemeClr val="accent1"/>
+          </a:lnRef>
+          <a:fillRef idx="3">
+            <a:schemeClr val="accent1"/>
+          </a:fillRef>
+          <a:effectRef idx="2">
+            <a:schemeClr val="accent1"/>
+          </a:effectRef>
+          <a:fontRef idx="minor">
+            <a:schemeClr val="lt1"/>
+          </a:fontRef>
+        </p:style>
+        <p:txBody>
+          <a:bodyPr rtlCol="0" anchor="ctr"/>
+          <a:lstStyle/>
+          <a:p>
+            <a:pPr algn="ctr"/>
+          </a:p>
+        </p:txBody>
+      </p:sp>
+      <p:sp>
+        <p:nvSpPr>
+          <p:cNvPr id="374" name="TextBox 373"/>
+          <p:cNvSpPr txBox="1"/>
+          <p:nvPr/>
+        </p:nvSpPr>
+        <p:spPr>
+          <a:xfrm>
+            <a:off x="694944" y="2724912"/>
+            <a:ext cx="6729984" cy="512064"/>
+          </a:xfrm>
+          <a:prstGeom prst="rect">
+            <a:avLst/>
+          </a:prstGeom>
+          <a:noFill/>
+        </p:spPr>
+        <p:txBody>
+          <a:bodyPr wrap="square" lIns="82296" rIns="36576" tIns="18288" bIns="18288">
+            <a:normAutofit/>
+          </a:bodyPr>
+          <a:lstStyle/>
+          <a:p>
+            <a:pPr>
+              <a:lnSpc>
+                <a:spcPct val="100000"/>
+              </a:lnSpc>
+              <a:spcBef>
+                <a:spcPts val="0"/>
+              </a:spcBef>
+              <a:spcAft>
+                <a:spcPts val="0"/>
+              </a:spcAft>
+            </a:pPr>
+            <a:r>
+              <a:rPr sz="1400" b="0">
+                <a:solidFill>
+                  <a:srgbClr val="000000"/>
+                </a:solidFill>
+                <a:latin typeface="Montserrat"/>
+              </a:rPr>
+              <a:t>XSRF protection is disabled in the supplied deployment command to simplify external access.</a:t>
+            </a:r>
+          </a:p>
+        </p:txBody>
+      </p:sp>
+      <p:sp>
+        <p:nvSpPr>
+          <p:cNvPr id="375" name="Oval 374"/>
+          <p:cNvSpPr/>
+          <p:nvPr/>
+        </p:nvSpPr>
+        <p:spPr>
+          <a:xfrm>
+            <a:off x="402336" y="2825496"/>
+            <a:ext cx="192024" cy="192024"/>
+          </a:xfrm>
+          <a:prstGeom prst="ellipse">
+            <a:avLst/>
+          </a:prstGeom>
+          <a:solidFill>
+            <a:srgbClr val="0944A1"/>
+          </a:solidFill>
+          <a:ln>
+            <a:noFill/>
+          </a:ln>
+        </p:spPr>
+        <p:style>
+          <a:lnRef idx="1">
+            <a:schemeClr val="accent1"/>
+          </a:lnRef>
+          <a:fillRef idx="3">
+            <a:schemeClr val="accent1"/>
+          </a:fillRef>
+          <a:effectRef idx="2">
+            <a:schemeClr val="accent1"/>
+          </a:effectRef>
+          <a:fontRef idx="minor">
+            <a:schemeClr val="lt1"/>
+          </a:fontRef>
+        </p:style>
+        <p:txBody>
+          <a:bodyPr rtlCol="0" anchor="ctr"/>
+          <a:lstStyle/>
+          <a:p>
+            <a:pPr algn="ctr"/>
+          </a:p>
+        </p:txBody>
+      </p:sp>
+      <p:sp>
+        <p:nvSpPr>
+          <p:cNvPr id="376" name="TextBox 375"/>
+          <p:cNvSpPr txBox="1"/>
+          <p:nvPr/>
+        </p:nvSpPr>
+        <p:spPr>
+          <a:xfrm>
+            <a:off x="694944" y="3268980"/>
+            <a:ext cx="6729984" cy="512064"/>
+          </a:xfrm>
+          <a:prstGeom prst="rect">
+            <a:avLst/>
+          </a:prstGeom>
+          <a:noFill/>
+        </p:spPr>
+        <p:txBody>
+          <a:bodyPr wrap="square" lIns="82296" rIns="36576" tIns="18288" bIns="18288">
+            <a:normAutofit/>
+          </a:bodyPr>
+          <a:lstStyle/>
+          <a:p>
+            <a:pPr>
+              <a:lnSpc>
+                <a:spcPct val="100000"/>
+              </a:lnSpc>
+              <a:spcBef>
+                <a:spcPts val="0"/>
+              </a:spcBef>
+              <a:spcAft>
+                <a:spcPts val="0"/>
+              </a:spcAft>
+            </a:pPr>
+            <a:r>
+              <a:rPr sz="1400" b="0">
+                <a:solidFill>
+                  <a:srgbClr val="000000"/>
+                </a:solidFill>
+                <a:latin typeface="Montserrat"/>
+              </a:rPr>
+              <a:t>Set BACKEND_URL at runtime so the frontend can call the backend service or forwarded port.</a:t>
+            </a:r>
+          </a:p>
+        </p:txBody>
+      </p:sp>
+      <p:sp>
+        <p:nvSpPr>
+          <p:cNvPr id="377" name="Oval 376"/>
+          <p:cNvSpPr/>
+          <p:nvPr/>
+        </p:nvSpPr>
+        <p:spPr>
+          <a:xfrm>
+            <a:off x="402336" y="3369564"/>
+            <a:ext cx="192024" cy="192024"/>
+          </a:xfrm>
+          <a:prstGeom prst="ellipse">
+            <a:avLst/>
+          </a:prstGeom>
+          <a:solidFill>
+            <a:srgbClr val="0944A1"/>
+          </a:solidFill>
+          <a:ln>
+            <a:noFill/>
+          </a:ln>
+        </p:spPr>
+        <p:style>
+          <a:lnRef idx="1">
+            <a:schemeClr val="accent1"/>
+          </a:lnRef>
+          <a:fillRef idx="3">
+            <a:schemeClr val="accent1"/>
+          </a:fillRef>
+          <a:effectRef idx="2">
+            <a:schemeClr val="accent1"/>
+          </a:effectRef>
+          <a:fontRef idx="minor">
+            <a:schemeClr val="lt1"/>
+          </a:fontRef>
+        </p:style>
+        <p:txBody>
+          <a:bodyPr rtlCol="0" anchor="ctr"/>
+          <a:lstStyle/>
+          <a:p>
+            <a:pPr algn="ctr"/>
+          </a:p>
+        </p:txBody>
+      </p:sp>
+    </p:spTree>
+  </p:cSld>
+  <p:clrMapOvr>
+    <a:masterClrMapping/>
+  </p:clrMapOvr>
+</p:sld>
+</file>
+
+<file path=ppt/slides/slide26.xml><?xml version="1.0" encoding="utf-8"?>
+<p:sld xmlns:a="http://schemas.openxmlformats.org/drawingml/2006/main" xmlns:r="http://schemas.openxmlformats.org/officeDocument/2006/relationships" xmlns:mc="http://schemas.openxmlformats.org/markup-compatibility/2006" xmlns:mv="urn:schemas-microsoft-com:mac:vml" xmlns:p="http://schemas.openxmlformats.org/presentationml/2006/main" xmlns:c="http://schemas.openxmlformats.org/drawingml/2006/chart" xmlns:dgm="http://schemas.openxmlformats.org/drawingml/2006/diagram" xmlns:o="urn:schemas-microsoft-com:office:office" xmlns:v="urn:schemas-microsoft-com:vml" xmlns:pvml="urn:schemas-microsoft-com:office:powerpoint" xmlns:com="http://schemas.openxmlformats.org/drawingml/2006/compatibility" xmlns:p14="http://schemas.microsoft.com/office/powerpoint/2010/main" xmlns:p15="http://schemas.microsoft.com/office/powerpoint/2012/main" xmlns:ahyp="http://schemas.microsoft.com/office/drawing/2018/hyperlinkcolor">
+  <p:cSld>
+    <p:spTree>
+      <p:nvGrpSpPr>
+        <p:cNvPr id="373" name="Shape 373"/>
+        <p:cNvGrpSpPr/>
+        <p:nvPr/>
+      </p:nvGrpSpPr>
+      <p:grpSpPr>
+        <a:xfrm>
+          <a:off x="0" y="0"/>
+          <a:ext cx="0" cy="0"/>
+          <a:chOff x="0" y="0"/>
+          <a:chExt cx="0" cy="0"/>
+        </a:xfrm>
+      </p:grpSpPr>
+      <p:sp>
+        <p:nvSpPr>
+          <p:cNvPr id="374" name="Google Shape;374;p61"/>
+          <p:cNvSpPr txBox="1"/>
+          <p:nvPr>
+            <p:ph type="title"/>
+          </p:nvPr>
+        </p:nvSpPr>
+        <p:spPr>
+          <a:xfrm>
+            <a:off x="202550" y="289279"/>
+            <a:ext cx="8520600" cy="572700"/>
+          </a:xfrm>
+          <a:prstGeom prst="rect">
+            <a:avLst/>
+          </a:prstGeom>
+          <a:noFill/>
+          <a:ln>
+            <a:noFill/>
+          </a:ln>
+        </p:spPr>
+        <p:txBody>
+          <a:bodyPr anchorCtr="0" anchor="t" bIns="91425" lIns="91425" spcFirstLastPara="1" rIns="91425" wrap="square" tIns="91425">
+            <a:noAutofit/>
+          </a:bodyPr>
+          <a:lstStyle/>
+          <a:p>
+            <a:r>
+              <a:rPr sz="2200" b="1">
+                <a:solidFill>
+                  <a:srgbClr val="0E39A9"/>
+                </a:solidFill>
+                <a:latin typeface="Montserrat"/>
+              </a:rPr>
+              <a:t>Deployment - Frontend - Push the Files to GitHub</a:t>
+            </a:r>
+          </a:p>
+        </p:txBody>
+      </p:sp>
+      <p:sp>
+        <p:nvSpPr>
+          <p:cNvPr id="375" name="Rectangle 374"/>
+          <p:cNvSpPr/>
+          <p:nvPr/>
+        </p:nvSpPr>
+        <p:spPr>
+          <a:xfrm>
+            <a:off x="502920" y="1005840"/>
+            <a:ext cx="8138160" cy="32004"/>
+          </a:xfrm>
+          <a:prstGeom prst="rect">
+            <a:avLst/>
+          </a:prstGeom>
+          <a:solidFill>
+            <a:srgbClr val="0E39A9"/>
+          </a:solidFill>
+          <a:ln>
+            <a:noFill/>
+          </a:ln>
+        </p:spPr>
+        <p:style>
+          <a:lnRef idx="1">
+            <a:schemeClr val="accent1"/>
+          </a:lnRef>
+          <a:fillRef idx="3">
+            <a:schemeClr val="accent1"/>
+          </a:fillRef>
+          <a:effectRef idx="2">
+            <a:schemeClr val="accent1"/>
+          </a:effectRef>
+          <a:fontRef idx="minor">
+            <a:schemeClr val="lt1"/>
+          </a:fontRef>
+        </p:style>
+        <p:txBody>
+          <a:bodyPr rtlCol="0" anchor="ctr"/>
+          <a:lstStyle/>
+          <a:p>
+            <a:pPr algn="ctr"/>
+          </a:p>
+        </p:txBody>
+      </p:sp>
+      <p:sp>
+        <p:nvSpPr>
+          <p:cNvPr id="376" name="TextBox 375"/>
+          <p:cNvSpPr txBox="1"/>
+          <p:nvPr/>
+        </p:nvSpPr>
+        <p:spPr>
+          <a:xfrm>
+            <a:off x="694944" y="1325880"/>
+            <a:ext cx="6729984" cy="278892"/>
+          </a:xfrm>
+          <a:prstGeom prst="rect">
+            <a:avLst/>
+          </a:prstGeom>
+          <a:noFill/>
+        </p:spPr>
+        <p:txBody>
+          <a:bodyPr wrap="square" lIns="82296" rIns="36576" tIns="18288" bIns="18288">
+            <a:normAutofit/>
+          </a:bodyPr>
+          <a:lstStyle/>
+          <a:p>
+            <a:pPr>
+              <a:lnSpc>
+                <a:spcPct val="100000"/>
+              </a:lnSpc>
+              <a:spcBef>
+                <a:spcPts val="0"/>
+              </a:spcBef>
+              <a:spcAft>
+                <a:spcPts val="0"/>
+              </a:spcAft>
+            </a:pPr>
+            <a:r>
+              <a:rPr sz="1350" b="0">
+                <a:solidFill>
+                  <a:srgbClr val="000000"/>
+                </a:solidFill>
+                <a:latin typeface="Montserrat"/>
+              </a:rPr>
+              <a:t>Repository: github.com/raovutukoor1/aurora-stay-qna.</a:t>
+            </a:r>
+          </a:p>
+        </p:txBody>
+      </p:sp>
+      <p:sp>
+        <p:nvSpPr>
+          <p:cNvPr id="377" name="Oval 376"/>
+          <p:cNvSpPr/>
+          <p:nvPr/>
+        </p:nvSpPr>
+        <p:spPr>
+          <a:xfrm>
+            <a:off x="402336" y="1426464"/>
+            <a:ext cx="192024" cy="192024"/>
+          </a:xfrm>
+          <a:prstGeom prst="ellipse">
+            <a:avLst/>
+          </a:prstGeom>
+          <a:solidFill>
+            <a:srgbClr val="0944A1"/>
+          </a:solidFill>
+          <a:ln>
+            <a:noFill/>
+          </a:ln>
+        </p:spPr>
+        <p:style>
+          <a:lnRef idx="1">
+            <a:schemeClr val="accent1"/>
+          </a:lnRef>
+          <a:fillRef idx="3">
+            <a:schemeClr val="accent1"/>
+          </a:fillRef>
+          <a:effectRef idx="2">
+            <a:schemeClr val="accent1"/>
+          </a:effectRef>
+          <a:fontRef idx="minor">
+            <a:schemeClr val="lt1"/>
+          </a:fontRef>
+        </p:style>
+        <p:txBody>
+          <a:bodyPr rtlCol="0" anchor="ctr"/>
+          <a:lstStyle/>
+          <a:p>
+            <a:pPr algn="ctr"/>
+          </a:p>
+        </p:txBody>
+      </p:sp>
+      <p:sp>
+        <p:nvSpPr>
+          <p:cNvPr id="378" name="TextBox 377"/>
+          <p:cNvSpPr txBox="1"/>
+          <p:nvPr/>
+        </p:nvSpPr>
+        <p:spPr>
+          <a:xfrm>
+            <a:off x="694944" y="1636776"/>
+            <a:ext cx="6729984" cy="512064"/>
+          </a:xfrm>
+          <a:prstGeom prst="rect">
+            <a:avLst/>
+          </a:prstGeom>
+          <a:noFill/>
+        </p:spPr>
+        <p:txBody>
+          <a:bodyPr wrap="square" lIns="82296" rIns="36576" tIns="18288" bIns="18288">
+            <a:normAutofit/>
+          </a:bodyPr>
+          <a:lstStyle/>
+          <a:p>
+            <a:pPr>
+              <a:lnSpc>
+                <a:spcPct val="100000"/>
+              </a:lnSpc>
+              <a:spcBef>
+                <a:spcPts val="0"/>
+              </a:spcBef>
+              <a:spcAft>
+                <a:spcPts val="0"/>
+              </a:spcAft>
+            </a:pPr>
+            <a:r>
+              <a:rPr sz="1350" b="0">
+                <a:solidFill>
+                  <a:srgbClr val="000000"/>
+                </a:solidFill>
+                <a:latin typeface="Montserrat"/>
+              </a:rPr>
+              <a:t>Latest published commit: 7fda05a — Publish latest Aurora Stays evaluation and presentation.</a:t>
+            </a:r>
+          </a:p>
+        </p:txBody>
+      </p:sp>
+      <p:sp>
+        <p:nvSpPr>
+          <p:cNvPr id="379" name="Oval 378"/>
+          <p:cNvSpPr/>
+          <p:nvPr/>
+        </p:nvSpPr>
+        <p:spPr>
+          <a:xfrm>
+            <a:off x="402336" y="1737360"/>
+            <a:ext cx="192024" cy="192024"/>
+          </a:xfrm>
+          <a:prstGeom prst="ellipse">
+            <a:avLst/>
+          </a:prstGeom>
+          <a:solidFill>
+            <a:srgbClr val="0944A1"/>
+          </a:solidFill>
+          <a:ln>
+            <a:noFill/>
+          </a:ln>
+        </p:spPr>
+        <p:style>
+          <a:lnRef idx="1">
+            <a:schemeClr val="accent1"/>
+          </a:lnRef>
+          <a:fillRef idx="3">
+            <a:schemeClr val="accent1"/>
+          </a:fillRef>
+          <a:effectRef idx="2">
+            <a:schemeClr val="accent1"/>
+          </a:effectRef>
+          <a:fontRef idx="minor">
+            <a:schemeClr val="lt1"/>
+          </a:fontRef>
+        </p:style>
+        <p:txBody>
+          <a:bodyPr rtlCol="0" anchor="ctr"/>
+          <a:lstStyle/>
+          <a:p>
+            <a:pPr algn="ctr"/>
+          </a:p>
+        </p:txBody>
+      </p:sp>
+      <p:sp>
+        <p:nvSpPr>
+          <p:cNvPr id="380" name="TextBox 379"/>
+          <p:cNvSpPr txBox="1"/>
+          <p:nvPr/>
+        </p:nvSpPr>
+        <p:spPr>
+          <a:xfrm>
+            <a:off x="694944" y="2180844"/>
+            <a:ext cx="6729984" cy="745236"/>
+          </a:xfrm>
+          <a:prstGeom prst="rect">
+            <a:avLst/>
+          </a:prstGeom>
+          <a:noFill/>
+        </p:spPr>
+        <p:txBody>
+          <a:bodyPr wrap="square" lIns="82296" rIns="36576" tIns="18288" bIns="18288">
+            <a:normAutofit/>
+          </a:bodyPr>
+          <a:lstStyle/>
+          <a:p>
+            <a:pPr>
+              <a:lnSpc>
+                <a:spcPct val="100000"/>
+              </a:lnSpc>
+              <a:spcBef>
+                <a:spcPts val="0"/>
+              </a:spcBef>
+              <a:spcAft>
+                <a:spcPts val="0"/>
+              </a:spcAft>
+            </a:pPr>
+            <a:r>
+              <a:rPr sz="1350" b="0">
+                <a:solidFill>
+                  <a:srgbClr val="000000"/>
+                </a:solidFill>
+                <a:latin typeface="Montserrat"/>
+              </a:rPr>
+              <a:t>Published groups include backend and frontend source, FAISS artifacts, the final executed notebook, evaluation CSVs, and the presentation pack.</a:t>
+            </a:r>
+          </a:p>
+        </p:txBody>
+      </p:sp>
+      <p:sp>
+        <p:nvSpPr>
+          <p:cNvPr id="381" name="Oval 380"/>
+          <p:cNvSpPr/>
+          <p:nvPr/>
+        </p:nvSpPr>
+        <p:spPr>
+          <a:xfrm>
+            <a:off x="402336" y="2281428"/>
+            <a:ext cx="192024" cy="192024"/>
+          </a:xfrm>
+          <a:prstGeom prst="ellipse">
+            <a:avLst/>
+          </a:prstGeom>
+          <a:solidFill>
+            <a:srgbClr val="0944A1"/>
+          </a:solidFill>
+          <a:ln>
+            <a:noFill/>
+          </a:ln>
+        </p:spPr>
+        <p:style>
+          <a:lnRef idx="1">
+            <a:schemeClr val="accent1"/>
+          </a:lnRef>
+          <a:fillRef idx="3">
+            <a:schemeClr val="accent1"/>
+          </a:fillRef>
+          <a:effectRef idx="2">
+            <a:schemeClr val="accent1"/>
+          </a:effectRef>
+          <a:fontRef idx="minor">
+            <a:schemeClr val="lt1"/>
+          </a:fontRef>
+        </p:style>
+        <p:txBody>
+          <a:bodyPr rtlCol="0" anchor="ctr"/>
+          <a:lstStyle/>
+          <a:p>
+            <a:pPr algn="ctr"/>
+          </a:p>
+        </p:txBody>
+      </p:sp>
+      <p:sp>
+        <p:nvSpPr>
+          <p:cNvPr id="382" name="TextBox 381"/>
+          <p:cNvSpPr txBox="1"/>
+          <p:nvPr/>
+        </p:nvSpPr>
+        <p:spPr>
+          <a:xfrm>
+            <a:off x="694944" y="2958084"/>
+            <a:ext cx="6729984" cy="512064"/>
+          </a:xfrm>
+          <a:prstGeom prst="rect">
+            <a:avLst/>
+          </a:prstGeom>
+          <a:noFill/>
+        </p:spPr>
+        <p:txBody>
+          <a:bodyPr wrap="square" lIns="82296" rIns="36576" tIns="18288" bIns="18288">
+            <a:normAutofit/>
+          </a:bodyPr>
+          <a:lstStyle/>
+          <a:p>
+            <a:pPr>
+              <a:lnSpc>
+                <a:spcPct val="100000"/>
+              </a:lnSpc>
+              <a:spcBef>
+                <a:spcPts val="0"/>
+              </a:spcBef>
+              <a:spcAft>
+                <a:spcPts val="0"/>
+              </a:spcAft>
+            </a:pPr>
+            <a:r>
+              <a:rPr sz="1350" b="0">
+                <a:solidFill>
+                  <a:srgbClr val="000000"/>
+                </a:solidFill>
+                <a:latin typeface="Montserrat"/>
+              </a:rPr>
+              <a:t>The supplied template and generated PPTX/PDF presentation files are included for handoff.</a:t>
+            </a:r>
+          </a:p>
+        </p:txBody>
+      </p:sp>
+      <p:sp>
+        <p:nvSpPr>
+          <p:cNvPr id="383" name="Oval 382"/>
+          <p:cNvSpPr/>
+          <p:nvPr/>
+        </p:nvSpPr>
+        <p:spPr>
+          <a:xfrm>
+            <a:off x="402336" y="3058668"/>
+            <a:ext cx="192024" cy="192024"/>
+          </a:xfrm>
+          <a:prstGeom prst="ellipse">
+            <a:avLst/>
+          </a:prstGeom>
+          <a:solidFill>
+            <a:srgbClr val="0944A1"/>
+          </a:solidFill>
+          <a:ln>
+            <a:noFill/>
+          </a:ln>
+        </p:spPr>
+        <p:style>
+          <a:lnRef idx="1">
+            <a:schemeClr val="accent1"/>
+          </a:lnRef>
+          <a:fillRef idx="3">
+            <a:schemeClr val="accent1"/>
+          </a:fillRef>
+          <a:effectRef idx="2">
+            <a:schemeClr val="accent1"/>
+          </a:effectRef>
+          <a:fontRef idx="minor">
+            <a:schemeClr val="lt1"/>
+          </a:fontRef>
+        </p:style>
+        <p:txBody>
+          <a:bodyPr rtlCol="0" anchor="ctr"/>
+          <a:lstStyle/>
+          <a:p>
+            <a:pPr algn="ctr"/>
+          </a:p>
+        </p:txBody>
+      </p:sp>
+      <p:sp>
+        <p:nvSpPr>
+          <p:cNvPr id="384" name="TextBox 383"/>
+          <p:cNvSpPr txBox="1"/>
+          <p:nvPr/>
+        </p:nvSpPr>
+        <p:spPr>
+          <a:xfrm>
+            <a:off x="694944" y="3502152"/>
+            <a:ext cx="6729984" cy="512064"/>
+          </a:xfrm>
+          <a:prstGeom prst="rect">
+            <a:avLst/>
+          </a:prstGeom>
+          <a:noFill/>
+        </p:spPr>
+        <p:txBody>
+          <a:bodyPr wrap="square" lIns="82296" rIns="36576" tIns="18288" bIns="18288">
+            <a:normAutofit/>
+          </a:bodyPr>
+          <a:lstStyle/>
+          <a:p>
+            <a:pPr>
+              <a:lnSpc>
+                <a:spcPct val="100000"/>
+              </a:lnSpc>
+              <a:spcBef>
+                <a:spcPts val="0"/>
+              </a:spcBef>
+              <a:spcAft>
+                <a:spcPts val="0"/>
+              </a:spcAft>
+            </a:pPr>
+            <a:r>
+              <a:rPr sz="1350" b="0">
+                <a:solidFill>
+                  <a:srgbClr val="000000"/>
+                </a:solidFill>
+                <a:latin typeface="Montserrat"/>
+              </a:rPr>
+              <a:t>Credentials remain excluded: config/config.json, .env, and supplied token/config files are not tracked.</a:t>
+            </a:r>
+          </a:p>
+        </p:txBody>
+      </p:sp>
+      <p:sp>
+        <p:nvSpPr>
+          <p:cNvPr id="385" name="Oval 384"/>
+          <p:cNvSpPr/>
+          <p:nvPr/>
+        </p:nvSpPr>
+        <p:spPr>
+          <a:xfrm>
+            <a:off x="402336" y="3602736"/>
+            <a:ext cx="192024" cy="192024"/>
+          </a:xfrm>
+          <a:prstGeom prst="ellipse">
+            <a:avLst/>
+          </a:prstGeom>
+          <a:solidFill>
+            <a:srgbClr val="0944A1"/>
+          </a:solidFill>
+          <a:ln>
+            <a:noFill/>
+          </a:ln>
+        </p:spPr>
+        <p:style>
+          <a:lnRef idx="1">
+            <a:schemeClr val="accent1"/>
+          </a:lnRef>
+          <a:fillRef idx="3">
+            <a:schemeClr val="accent1"/>
+          </a:fillRef>
+          <a:effectRef idx="2">
+            <a:schemeClr val="accent1"/>
+          </a:effectRef>
+          <a:fontRef idx="minor">
+            <a:schemeClr val="lt1"/>
+          </a:fontRef>
+        </p:style>
+        <p:txBody>
+          <a:bodyPr rtlCol="0" anchor="ctr"/>
+          <a:lstStyle/>
+          <a:p>
+            <a:pPr algn="ctr"/>
+          </a:p>
+        </p:txBody>
+      </p:sp>
+    </p:spTree>
+  </p:cSld>
+  <p:clrMapOvr>
+    <a:masterClrMapping/>
+  </p:clrMapOvr>
+</p:sld>
+</file>
+
+<file path=ppt/slides/slide27.xml><?xml version="1.0" encoding="utf-8"?>
+<p:sld xmlns:a="http://schemas.openxmlformats.org/drawingml/2006/main" xmlns:r="http://schemas.openxmlformats.org/officeDocument/2006/relationships" xmlns:mc="http://schemas.openxmlformats.org/markup-compatibility/2006" xmlns:mv="urn:schemas-microsoft-com:mac:vml" xmlns:p="http://schemas.openxmlformats.org/presentationml/2006/main" xmlns:c="http://schemas.openxmlformats.org/drawingml/2006/chart" xmlns:dgm="http://schemas.openxmlformats.org/drawingml/2006/diagram" xmlns:o="urn:schemas-microsoft-com:office:office" xmlns:v="urn:schemas-microsoft-com:vml" xmlns:pvml="urn:schemas-microsoft-com:office:powerpoint" xmlns:com="http://schemas.openxmlformats.org/drawingml/2006/compatibility" xmlns:p14="http://schemas.microsoft.com/office/powerpoint/2010/main" xmlns:p15="http://schemas.microsoft.com/office/powerpoint/2012/main" xmlns:ahyp="http://schemas.microsoft.com/office/drawing/2018/hyperlinkcolor">
+  <p:cSld>
+    <p:spTree>
+      <p:nvGrpSpPr>
+        <p:cNvPr id="381" name="Shape 381"/>
+        <p:cNvGrpSpPr/>
+        <p:nvPr/>
+      </p:nvGrpSpPr>
+      <p:grpSpPr>
+        <a:xfrm>
+          <a:off x="0" y="0"/>
+          <a:ext cx="0" cy="0"/>
+          <a:chOff x="0" y="0"/>
+          <a:chExt cx="0" cy="0"/>
+        </a:xfrm>
+      </p:grpSpPr>
+      <p:sp>
+        <p:nvSpPr>
+          <p:cNvPr id="382" name="Google Shape;382;p62"/>
+          <p:cNvSpPr txBox="1"/>
+          <p:nvPr>
+            <p:ph type="title"/>
+          </p:nvPr>
+        </p:nvSpPr>
+        <p:spPr>
+          <a:xfrm>
+            <a:off x="202550" y="289279"/>
+            <a:ext cx="8520600" cy="572700"/>
+          </a:xfrm>
+          <a:prstGeom prst="rect">
+            <a:avLst/>
+          </a:prstGeom>
+          <a:noFill/>
+          <a:ln>
+            <a:noFill/>
+          </a:ln>
+        </p:spPr>
+        <p:txBody>
+          <a:bodyPr anchorCtr="0" anchor="t" bIns="91425" lIns="91425" spcFirstLastPara="1" rIns="91425" wrap="square" tIns="91425">
+            <a:noAutofit/>
+          </a:bodyPr>
+          <a:lstStyle/>
+          <a:p>
+            <a:r>
+              <a:rPr sz="2200" b="1">
+                <a:solidFill>
+                  <a:srgbClr val="0E39A9"/>
+                </a:solidFill>
+                <a:latin typeface="Montserrat"/>
+              </a:rPr>
+              <a:t>Deployment - Inference - Define the Forwarded URL</a:t>
+            </a:r>
+          </a:p>
+        </p:txBody>
+      </p:sp>
+      <p:sp>
+        <p:nvSpPr>
+          <p:cNvPr id="383" name="Rectangle 382"/>
+          <p:cNvSpPr/>
+          <p:nvPr/>
+        </p:nvSpPr>
+        <p:spPr>
+          <a:xfrm>
+            <a:off x="502920" y="1005840"/>
+            <a:ext cx="8138160" cy="32004"/>
+          </a:xfrm>
+          <a:prstGeom prst="rect">
+            <a:avLst/>
+          </a:prstGeom>
+          <a:solidFill>
+            <a:srgbClr val="0E39A9"/>
+          </a:solidFill>
+          <a:ln>
+            <a:noFill/>
+          </a:ln>
+        </p:spPr>
+        <p:style>
+          <a:lnRef idx="1">
+            <a:schemeClr val="accent1"/>
+          </a:lnRef>
+          <a:fillRef idx="3">
+            <a:schemeClr val="accent1"/>
+          </a:fillRef>
+          <a:effectRef idx="2">
+            <a:schemeClr val="accent1"/>
+          </a:effectRef>
+          <a:fontRef idx="minor">
+            <a:schemeClr val="lt1"/>
+          </a:fontRef>
+        </p:style>
+        <p:txBody>
+          <a:bodyPr rtlCol="0" anchor="ctr"/>
+          <a:lstStyle/>
+          <a:p>
+            <a:pPr algn="ctr"/>
+          </a:p>
+        </p:txBody>
+      </p:sp>
+      <p:sp>
+        <p:nvSpPr>
+          <p:cNvPr id="384" name="TextBox 383"/>
+          <p:cNvSpPr txBox="1"/>
+          <p:nvPr/>
+        </p:nvSpPr>
+        <p:spPr>
+          <a:xfrm>
+            <a:off x="694944" y="1325880"/>
+            <a:ext cx="6729984" cy="512064"/>
+          </a:xfrm>
+          <a:prstGeom prst="rect">
+            <a:avLst/>
+          </a:prstGeom>
+          <a:noFill/>
+        </p:spPr>
+        <p:txBody>
+          <a:bodyPr wrap="square" lIns="82296" rIns="36576" tIns="18288" bIns="18288">
+            <a:normAutofit/>
+          </a:bodyPr>
+          <a:lstStyle/>
+          <a:p>
+            <a:pPr>
+              <a:lnSpc>
+                <a:spcPct val="100000"/>
+              </a:lnSpc>
+              <a:spcBef>
+                <a:spcPts val="0"/>
+              </a:spcBef>
+              <a:spcAft>
+                <a:spcPts val="0"/>
+              </a:spcAft>
+            </a:pPr>
+            <a:r>
+              <a:rPr sz="1400" b="0">
+                <a:solidFill>
+                  <a:srgbClr val="000000"/>
+                </a:solidFill>
+                <a:latin typeface="Montserrat"/>
+              </a:rPr>
+              <a:t>In GitHub Codespaces, open the Ports panel and forward the Streamlit port 8501.</a:t>
+            </a:r>
+          </a:p>
+        </p:txBody>
+      </p:sp>
+      <p:sp>
+        <p:nvSpPr>
+          <p:cNvPr id="385" name="Oval 384"/>
+          <p:cNvSpPr/>
+          <p:nvPr/>
+        </p:nvSpPr>
+        <p:spPr>
+          <a:xfrm>
+            <a:off x="402336" y="1426464"/>
+            <a:ext cx="192024" cy="192024"/>
+          </a:xfrm>
+          <a:prstGeom prst="ellipse">
+            <a:avLst/>
+          </a:prstGeom>
+          <a:solidFill>
+            <a:srgbClr val="0944A1"/>
+          </a:solidFill>
+          <a:ln>
+            <a:noFill/>
+          </a:ln>
+        </p:spPr>
+        <p:style>
+          <a:lnRef idx="1">
+            <a:schemeClr val="accent1"/>
+          </a:lnRef>
+          <a:fillRef idx="3">
+            <a:schemeClr val="accent1"/>
+          </a:fillRef>
+          <a:effectRef idx="2">
+            <a:schemeClr val="accent1"/>
+          </a:effectRef>
+          <a:fontRef idx="minor">
+            <a:schemeClr val="lt1"/>
+          </a:fontRef>
+        </p:style>
+        <p:txBody>
+          <a:bodyPr rtlCol="0" anchor="ctr"/>
+          <a:lstStyle/>
+          <a:p>
+            <a:pPr algn="ctr"/>
+          </a:p>
+        </p:txBody>
+      </p:sp>
+      <p:sp>
+        <p:nvSpPr>
+          <p:cNvPr id="386" name="TextBox 385"/>
+          <p:cNvSpPr txBox="1"/>
+          <p:nvPr/>
+        </p:nvSpPr>
+        <p:spPr>
+          <a:xfrm>
+            <a:off x="694944" y="1869948"/>
+            <a:ext cx="6729984" cy="512064"/>
+          </a:xfrm>
+          <a:prstGeom prst="rect">
+            <a:avLst/>
+          </a:prstGeom>
+          <a:noFill/>
+        </p:spPr>
+        <p:txBody>
+          <a:bodyPr wrap="square" lIns="82296" rIns="36576" tIns="18288" bIns="18288">
+            <a:normAutofit/>
+          </a:bodyPr>
+          <a:lstStyle/>
+          <a:p>
+            <a:pPr>
+              <a:lnSpc>
+                <a:spcPct val="100000"/>
+              </a:lnSpc>
+              <a:spcBef>
+                <a:spcPts val="0"/>
+              </a:spcBef>
+              <a:spcAft>
+                <a:spcPts val="0"/>
+              </a:spcAft>
+            </a:pPr>
+            <a:r>
+              <a:rPr sz="1400" b="0">
+                <a:solidFill>
+                  <a:srgbClr val="000000"/>
+                </a:solidFill>
+                <a:latin typeface="Montserrat"/>
+              </a:rPr>
+              <a:t>The public URL is generated per Codespace session; it is not hard-coded in the repository.</a:t>
+            </a:r>
+          </a:p>
+        </p:txBody>
+      </p:sp>
+      <p:sp>
+        <p:nvSpPr>
+          <p:cNvPr id="387" name="Oval 386"/>
+          <p:cNvSpPr/>
+          <p:nvPr/>
+        </p:nvSpPr>
+        <p:spPr>
+          <a:xfrm>
+            <a:off x="402336" y="1970531"/>
+            <a:ext cx="192024" cy="192024"/>
+          </a:xfrm>
+          <a:prstGeom prst="ellipse">
+            <a:avLst/>
+          </a:prstGeom>
+          <a:solidFill>
+            <a:srgbClr val="0944A1"/>
+          </a:solidFill>
+          <a:ln>
+            <a:noFill/>
+          </a:ln>
+        </p:spPr>
+        <p:style>
+          <a:lnRef idx="1">
+            <a:schemeClr val="accent1"/>
+          </a:lnRef>
+          <a:fillRef idx="3">
+            <a:schemeClr val="accent1"/>
+          </a:fillRef>
+          <a:effectRef idx="2">
+            <a:schemeClr val="accent1"/>
+          </a:effectRef>
+          <a:fontRef idx="minor">
+            <a:schemeClr val="lt1"/>
+          </a:fontRef>
+        </p:style>
+        <p:txBody>
+          <a:bodyPr rtlCol="0" anchor="ctr"/>
+          <a:lstStyle/>
+          <a:p>
+            <a:pPr algn="ctr"/>
+          </a:p>
+        </p:txBody>
+      </p:sp>
+      <p:sp>
+        <p:nvSpPr>
+          <p:cNvPr id="388" name="TextBox 387"/>
+          <p:cNvSpPr txBox="1"/>
+          <p:nvPr/>
+        </p:nvSpPr>
+        <p:spPr>
+          <a:xfrm>
+            <a:off x="694944" y="2414016"/>
+            <a:ext cx="6729984" cy="512064"/>
+          </a:xfrm>
+          <a:prstGeom prst="rect">
+            <a:avLst/>
+          </a:prstGeom>
+          <a:noFill/>
+        </p:spPr>
+        <p:txBody>
+          <a:bodyPr wrap="square" lIns="82296" rIns="36576" tIns="18288" bIns="18288">
+            <a:normAutofit/>
+          </a:bodyPr>
+          <a:lstStyle/>
+          <a:p>
+            <a:pPr>
+              <a:lnSpc>
+                <a:spcPct val="100000"/>
+              </a:lnSpc>
+              <a:spcBef>
+                <a:spcPts val="0"/>
+              </a:spcBef>
+              <a:spcAft>
+                <a:spcPts val="0"/>
+              </a:spcAft>
+            </a:pPr>
+            <a:r>
+              <a:rPr sz="1400" b="0">
+                <a:solidFill>
+                  <a:srgbClr val="000000"/>
+                </a:solidFill>
+                <a:latin typeface="Montserrat"/>
+              </a:rPr>
+              <a:t>Set BACKEND_URL to the backend service URL or its forwarded port before starting Streamlit.</a:t>
+            </a:r>
+          </a:p>
+        </p:txBody>
+      </p:sp>
+      <p:sp>
+        <p:nvSpPr>
+          <p:cNvPr id="389" name="Oval 388"/>
+          <p:cNvSpPr/>
+          <p:nvPr/>
+        </p:nvSpPr>
+        <p:spPr>
+          <a:xfrm>
+            <a:off x="402336" y="2514600"/>
+            <a:ext cx="192024" cy="192024"/>
+          </a:xfrm>
+          <a:prstGeom prst="ellipse">
+            <a:avLst/>
+          </a:prstGeom>
+          <a:solidFill>
+            <a:srgbClr val="0944A1"/>
+          </a:solidFill>
+          <a:ln>
+            <a:noFill/>
+          </a:ln>
+        </p:spPr>
+        <p:style>
+          <a:lnRef idx="1">
+            <a:schemeClr val="accent1"/>
+          </a:lnRef>
+          <a:fillRef idx="3">
+            <a:schemeClr val="accent1"/>
+          </a:fillRef>
+          <a:effectRef idx="2">
+            <a:schemeClr val="accent1"/>
+          </a:effectRef>
+          <a:fontRef idx="minor">
+            <a:schemeClr val="lt1"/>
+          </a:fontRef>
+        </p:style>
+        <p:txBody>
+          <a:bodyPr rtlCol="0" anchor="ctr"/>
+          <a:lstStyle/>
+          <a:p>
+            <a:pPr algn="ctr"/>
+          </a:p>
+        </p:txBody>
+      </p:sp>
+      <p:sp>
+        <p:nvSpPr>
+          <p:cNvPr id="390" name="TextBox 389"/>
+          <p:cNvSpPr txBox="1"/>
+          <p:nvPr/>
+        </p:nvSpPr>
+        <p:spPr>
+          <a:xfrm>
+            <a:off x="694944" y="2958084"/>
+            <a:ext cx="6729984" cy="512064"/>
+          </a:xfrm>
+          <a:prstGeom prst="rect">
+            <a:avLst/>
+          </a:prstGeom>
+          <a:noFill/>
+        </p:spPr>
+        <p:txBody>
+          <a:bodyPr wrap="square" lIns="82296" rIns="36576" tIns="18288" bIns="18288">
+            <a:normAutofit/>
+          </a:bodyPr>
+          <a:lstStyle/>
+          <a:p>
+            <a:pPr>
+              <a:lnSpc>
+                <a:spcPct val="100000"/>
+              </a:lnSpc>
+              <a:spcBef>
+                <a:spcPts val="0"/>
+              </a:spcBef>
+              <a:spcAft>
+                <a:spcPts val="0"/>
+              </a:spcAft>
+            </a:pPr>
+            <a:r>
+              <a:rPr sz="1400" b="0">
+                <a:solidFill>
+                  <a:srgbClr val="000000"/>
+                </a:solidFill>
+                <a:latin typeface="Montserrat"/>
+              </a:rPr>
+              <a:t>Production smoke tests used the parking-fee query and the ASH-CHI Loop pet-charge query.</a:t>
+            </a:r>
+          </a:p>
+        </p:txBody>
+      </p:sp>
+      <p:sp>
+        <p:nvSpPr>
+          <p:cNvPr id="391" name="Oval 390"/>
+          <p:cNvSpPr/>
+          <p:nvPr/>
+        </p:nvSpPr>
+        <p:spPr>
+          <a:xfrm>
+            <a:off x="402336" y="3058668"/>
+            <a:ext cx="192024" cy="192024"/>
+          </a:xfrm>
+          <a:prstGeom prst="ellipse">
+            <a:avLst/>
+          </a:prstGeom>
+          <a:solidFill>
+            <a:srgbClr val="0944A1"/>
+          </a:solidFill>
+          <a:ln>
+            <a:noFill/>
+          </a:ln>
+        </p:spPr>
+        <p:style>
+          <a:lnRef idx="1">
+            <a:schemeClr val="accent1"/>
+          </a:lnRef>
+          <a:fillRef idx="3">
+            <a:schemeClr val="accent1"/>
+          </a:fillRef>
+          <a:effectRef idx="2">
+            <a:schemeClr val="accent1"/>
+          </a:effectRef>
+          <a:fontRef idx="minor">
+            <a:schemeClr val="lt1"/>
+          </a:fontRef>
+        </p:style>
+        <p:txBody>
+          <a:bodyPr rtlCol="0" anchor="ctr"/>
+          <a:lstStyle/>
+          <a:p>
+            <a:pPr algn="ctr"/>
+          </a:p>
+        </p:txBody>
+      </p:sp>
+      <p:sp>
+        <p:nvSpPr>
+          <p:cNvPr id="392" name="TextBox 391"/>
+          <p:cNvSpPr txBox="1"/>
+          <p:nvPr/>
+        </p:nvSpPr>
+        <p:spPr>
+          <a:xfrm>
+            <a:off x="694944" y="3502152"/>
+            <a:ext cx="6729984" cy="745236"/>
+          </a:xfrm>
+          <a:prstGeom prst="rect">
+            <a:avLst/>
+          </a:prstGeom>
+          <a:noFill/>
+        </p:spPr>
+        <p:txBody>
+          <a:bodyPr wrap="square" lIns="82296" rIns="36576" tIns="18288" bIns="18288">
+            <a:normAutofit/>
+          </a:bodyPr>
+          <a:lstStyle/>
+          <a:p>
+            <a:pPr>
+              <a:lnSpc>
+                <a:spcPct val="100000"/>
+              </a:lnSpc>
+              <a:spcBef>
+                <a:spcPts val="0"/>
+              </a:spcBef>
+              <a:spcAft>
+                <a:spcPts val="0"/>
+              </a:spcAft>
+            </a:pPr>
+            <a:r>
+              <a:rPr sz="1400" b="0">
+                <a:solidFill>
+                  <a:srgbClr val="000000"/>
+                </a:solidFill>
+                <a:latin typeface="Montserrat"/>
+              </a:rPr>
+              <a:t>API keys belong in Codespaces Secrets or a private local config file, never in the forwarded URL or source code.</a:t>
+            </a:r>
+          </a:p>
+        </p:txBody>
+      </p:sp>
+      <p:sp>
+        <p:nvSpPr>
+          <p:cNvPr id="393" name="Oval 392"/>
+          <p:cNvSpPr/>
+          <p:nvPr/>
+        </p:nvSpPr>
+        <p:spPr>
+          <a:xfrm>
+            <a:off x="402336" y="3602736"/>
+            <a:ext cx="192024" cy="192024"/>
+          </a:xfrm>
+          <a:prstGeom prst="ellipse">
+            <a:avLst/>
+          </a:prstGeom>
+          <a:solidFill>
+            <a:srgbClr val="0944A1"/>
+          </a:solidFill>
+          <a:ln>
+            <a:noFill/>
+          </a:ln>
+        </p:spPr>
+        <p:style>
+          <a:lnRef idx="1">
+            <a:schemeClr val="accent1"/>
+          </a:lnRef>
+          <a:fillRef idx="3">
+            <a:schemeClr val="accent1"/>
+          </a:fillRef>
+          <a:effectRef idx="2">
+            <a:schemeClr val="accent1"/>
+          </a:effectRef>
+          <a:fontRef idx="minor">
+            <a:schemeClr val="lt1"/>
+          </a:fontRef>
+        </p:style>
+        <p:txBody>
+          <a:bodyPr rtlCol="0" anchor="ctr"/>
+          <a:lstStyle/>
+          <a:p>
+            <a:pPr algn="ctr"/>
+          </a:p>
+        </p:txBody>
+      </p:sp>
+    </p:spTree>
+  </p:cSld>
+  <p:clrMapOvr>
+    <a:masterClrMapping/>
+  </p:clrMapOvr>
+</p:sld>
+</file>
+
+<file path=ppt/slides/slide28.xml><?xml version="1.0" encoding="utf-8"?>
+<p:sld xmlns:a="http://schemas.openxmlformats.org/drawingml/2006/main" xmlns:r="http://schemas.openxmlformats.org/officeDocument/2006/relationships" xmlns:mc="http://schemas.openxmlformats.org/markup-compatibility/2006" xmlns:mv="urn:schemas-microsoft-com:mac:vml" xmlns:p="http://schemas.openxmlformats.org/presentationml/2006/main" xmlns:c="http://schemas.openxmlformats.org/drawingml/2006/chart" xmlns:dgm="http://schemas.openxmlformats.org/drawingml/2006/diagram" xmlns:o="urn:schemas-microsoft-com:office:office" xmlns:v="urn:schemas-microsoft-com:vml" xmlns:pvml="urn:schemas-microsoft-com:office:powerpoint" xmlns:com="http://schemas.openxmlformats.org/drawingml/2006/compatibility" xmlns:p14="http://schemas.microsoft.com/office/powerpoint/2010/main" xmlns:p15="http://schemas.microsoft.com/office/powerpoint/2012/main" xmlns:ahyp="http://schemas.microsoft.com/office/drawing/2018/hyperlinkcolor">
+  <p:cSld>
+    <p:spTree>
+      <p:nvGrpSpPr>
+        <p:cNvPr id="389" name="Shape 389"/>
+        <p:cNvGrpSpPr/>
+        <p:nvPr/>
+      </p:nvGrpSpPr>
+      <p:grpSpPr>
+        <a:xfrm>
+          <a:off x="0" y="0"/>
+          <a:ext cx="0" cy="0"/>
+          <a:chOff x="0" y="0"/>
+          <a:chExt cx="0" cy="0"/>
+        </a:xfrm>
+      </p:grpSpPr>
+      <p:sp>
+        <p:nvSpPr>
+          <p:cNvPr id="390" name="Google Shape;390;p63"/>
+          <p:cNvSpPr txBox="1"/>
+          <p:nvPr>
+            <p:ph type="title"/>
+          </p:nvPr>
+        </p:nvSpPr>
+        <p:spPr>
+          <a:xfrm>
+            <a:off x="202550" y="289279"/>
+            <a:ext cx="8520600" cy="572700"/>
+          </a:xfrm>
+          <a:prstGeom prst="rect">
+            <a:avLst/>
+          </a:prstGeom>
+          <a:noFill/>
+          <a:ln>
+            <a:noFill/>
+          </a:ln>
+        </p:spPr>
+        <p:txBody>
+          <a:bodyPr anchorCtr="0" anchor="t" bIns="91425" lIns="91425" spcFirstLastPara="1" rIns="91425" wrap="square" tIns="91425">
+            <a:noAutofit/>
+          </a:bodyPr>
+          <a:lstStyle/>
+          <a:p>
+            <a:r>
+              <a:rPr sz="2400" b="1">
+                <a:solidFill>
+                  <a:srgbClr val="0E39A9"/>
+                </a:solidFill>
+                <a:latin typeface="Montserrat"/>
+              </a:rPr>
+              <a:t>Deployment - Inference - Relevant Chunks</a:t>
+            </a:r>
+          </a:p>
+        </p:txBody>
+      </p:sp>
+      <p:sp>
+        <p:nvSpPr>
+          <p:cNvPr id="391" name="Rectangle 390"/>
+          <p:cNvSpPr/>
+          <p:nvPr/>
+        </p:nvSpPr>
+        <p:spPr>
+          <a:xfrm>
+            <a:off x="502920" y="1005840"/>
+            <a:ext cx="8138160" cy="32004"/>
+          </a:xfrm>
+          <a:prstGeom prst="rect">
+            <a:avLst/>
+          </a:prstGeom>
+          <a:solidFill>
+            <a:srgbClr val="0E39A9"/>
+          </a:solidFill>
+          <a:ln>
+            <a:noFill/>
+          </a:ln>
+        </p:spPr>
+        <p:style>
+          <a:lnRef idx="1">
+            <a:schemeClr val="accent1"/>
+          </a:lnRef>
+          <a:fillRef idx="3">
+            <a:schemeClr val="accent1"/>
+          </a:fillRef>
+          <a:effectRef idx="2">
+            <a:schemeClr val="accent1"/>
+          </a:effectRef>
+          <a:fontRef idx="minor">
+            <a:schemeClr val="lt1"/>
+          </a:fontRef>
+        </p:style>
+        <p:txBody>
+          <a:bodyPr rtlCol="0" anchor="ctr"/>
+          <a:lstStyle/>
+          <a:p>
+            <a:pPr algn="ctr"/>
+          </a:p>
+        </p:txBody>
+      </p:sp>
+      <p:sp>
+        <p:nvSpPr>
+          <p:cNvPr id="392" name="TextBox 391"/>
+          <p:cNvSpPr txBox="1"/>
+          <p:nvPr/>
+        </p:nvSpPr>
+        <p:spPr>
+          <a:xfrm>
+            <a:off x="694944" y="1325880"/>
+            <a:ext cx="6729984" cy="278892"/>
+          </a:xfrm>
+          <a:prstGeom prst="rect">
+            <a:avLst/>
+          </a:prstGeom>
+          <a:noFill/>
+        </p:spPr>
+        <p:txBody>
+          <a:bodyPr wrap="square" lIns="82296" rIns="36576" tIns="18288" bIns="18288">
+            <a:normAutofit/>
+          </a:bodyPr>
+          <a:lstStyle/>
+          <a:p>
+            <a:pPr>
+              <a:lnSpc>
+                <a:spcPct val="100000"/>
+              </a:lnSpc>
+              <a:spcBef>
+                <a:spcPts val="0"/>
+              </a:spcBef>
+              <a:spcAft>
+                <a:spcPts val="0"/>
+              </a:spcAft>
+            </a:pPr>
+            <a:r>
+              <a:rPr sz="1400" b="0">
+                <a:solidFill>
+                  <a:srgbClr val="000000"/>
+                </a:solidFill>
+                <a:latin typeface="Montserrat"/>
+              </a:rPr>
+              <a:t>Endpoint: POST {BACKEND_URL}/v1/relevant_chunks.</a:t>
+            </a:r>
+          </a:p>
+        </p:txBody>
+      </p:sp>
+      <p:sp>
+        <p:nvSpPr>
+          <p:cNvPr id="393" name="Oval 392"/>
+          <p:cNvSpPr/>
+          <p:nvPr/>
+        </p:nvSpPr>
+        <p:spPr>
+          <a:xfrm>
+            <a:off x="402336" y="1426464"/>
+            <a:ext cx="192024" cy="192024"/>
+          </a:xfrm>
+          <a:prstGeom prst="ellipse">
+            <a:avLst/>
+          </a:prstGeom>
+          <a:solidFill>
+            <a:srgbClr val="0944A1"/>
+          </a:solidFill>
+          <a:ln>
+            <a:noFill/>
+          </a:ln>
+        </p:spPr>
+        <p:style>
+          <a:lnRef idx="1">
+            <a:schemeClr val="accent1"/>
+          </a:lnRef>
+          <a:fillRef idx="3">
+            <a:schemeClr val="accent1"/>
+          </a:fillRef>
+          <a:effectRef idx="2">
+            <a:schemeClr val="accent1"/>
+          </a:effectRef>
+          <a:fontRef idx="minor">
+            <a:schemeClr val="lt1"/>
+          </a:fontRef>
+        </p:style>
+        <p:txBody>
+          <a:bodyPr rtlCol="0" anchor="ctr"/>
+          <a:lstStyle/>
+          <a:p>
+            <a:pPr algn="ctr"/>
+          </a:p>
+        </p:txBody>
+      </p:sp>
+      <p:sp>
+        <p:nvSpPr>
+          <p:cNvPr id="394" name="TextBox 393"/>
+          <p:cNvSpPr txBox="1"/>
+          <p:nvPr/>
+        </p:nvSpPr>
+        <p:spPr>
+          <a:xfrm>
+            <a:off x="694944" y="1636776"/>
+            <a:ext cx="6729984" cy="512064"/>
+          </a:xfrm>
+          <a:prstGeom prst="rect">
+            <a:avLst/>
+          </a:prstGeom>
+          <a:noFill/>
+        </p:spPr>
+        <p:txBody>
+          <a:bodyPr wrap="square" lIns="82296" rIns="36576" tIns="18288" bIns="18288">
+            <a:normAutofit/>
+          </a:bodyPr>
+          <a:lstStyle/>
+          <a:p>
+            <a:pPr>
+              <a:lnSpc>
+                <a:spcPct val="100000"/>
+              </a:lnSpc>
+              <a:spcBef>
+                <a:spcPts val="0"/>
+              </a:spcBef>
+              <a:spcAft>
+                <a:spcPts val="0"/>
+              </a:spcAft>
+            </a:pPr>
+            <a:r>
+              <a:rPr sz="1400" b="0">
+                <a:solidFill>
+                  <a:srgbClr val="000000"/>
+                </a:solidFill>
+                <a:latin typeface="Montserrat"/>
+              </a:rPr>
+              <a:t>Payload: {"query": "What are the parking fees at the Atlanta and Miami hotels?", "k": 5}.</a:t>
+            </a:r>
+          </a:p>
+        </p:txBody>
+      </p:sp>
+      <p:sp>
+        <p:nvSpPr>
+          <p:cNvPr id="395" name="Oval 394"/>
+          <p:cNvSpPr/>
+          <p:nvPr/>
+        </p:nvSpPr>
+        <p:spPr>
+          <a:xfrm>
+            <a:off x="402336" y="1737360"/>
+            <a:ext cx="192024" cy="192024"/>
+          </a:xfrm>
+          <a:prstGeom prst="ellipse">
+            <a:avLst/>
+          </a:prstGeom>
+          <a:solidFill>
+            <a:srgbClr val="0944A1"/>
+          </a:solidFill>
+          <a:ln>
+            <a:noFill/>
+          </a:ln>
+        </p:spPr>
+        <p:style>
+          <a:lnRef idx="1">
+            <a:schemeClr val="accent1"/>
+          </a:lnRef>
+          <a:fillRef idx="3">
+            <a:schemeClr val="accent1"/>
+          </a:fillRef>
+          <a:effectRef idx="2">
+            <a:schemeClr val="accent1"/>
+          </a:effectRef>
+          <a:fontRef idx="minor">
+            <a:schemeClr val="lt1"/>
+          </a:fontRef>
+        </p:style>
+        <p:txBody>
+          <a:bodyPr rtlCol="0" anchor="ctr"/>
+          <a:lstStyle/>
+          <a:p>
+            <a:pPr algn="ctr"/>
+          </a:p>
+        </p:txBody>
+      </p:sp>
+      <p:sp>
+        <p:nvSpPr>
+          <p:cNvPr id="396" name="TextBox 395"/>
+          <p:cNvSpPr txBox="1"/>
+          <p:nvPr/>
+        </p:nvSpPr>
+        <p:spPr>
+          <a:xfrm>
+            <a:off x="694944" y="2180844"/>
+            <a:ext cx="6729984" cy="278892"/>
+          </a:xfrm>
+          <a:prstGeom prst="rect">
+            <a:avLst/>
+          </a:prstGeom>
+          <a:noFill/>
+        </p:spPr>
+        <p:txBody>
+          <a:bodyPr wrap="square" lIns="82296" rIns="36576" tIns="18288" bIns="18288">
+            <a:normAutofit/>
+          </a:bodyPr>
+          <a:lstStyle/>
+          <a:p>
+            <a:pPr>
+              <a:lnSpc>
+                <a:spcPct val="100000"/>
+              </a:lnSpc>
+              <a:spcBef>
+                <a:spcPts val="0"/>
+              </a:spcBef>
+              <a:spcAft>
+                <a:spcPts val="0"/>
+              </a:spcAft>
+            </a:pPr>
+            <a:r>
+              <a:rPr sz="1400" b="0">
+                <a:solidFill>
+                  <a:srgbClr val="000000"/>
+                </a:solidFill>
+                <a:latin typeface="Montserrat"/>
+              </a:rPr>
+              <a:t>Response fields: query, k, and relevant_chunks.</a:t>
+            </a:r>
+          </a:p>
+        </p:txBody>
+      </p:sp>
+      <p:sp>
+        <p:nvSpPr>
+          <p:cNvPr id="397" name="Oval 396"/>
+          <p:cNvSpPr/>
+          <p:nvPr/>
+        </p:nvSpPr>
+        <p:spPr>
+          <a:xfrm>
+            <a:off x="402336" y="2281428"/>
+            <a:ext cx="192024" cy="192024"/>
+          </a:xfrm>
+          <a:prstGeom prst="ellipse">
+            <a:avLst/>
+          </a:prstGeom>
+          <a:solidFill>
+            <a:srgbClr val="0944A1"/>
+          </a:solidFill>
+          <a:ln>
+            <a:noFill/>
+          </a:ln>
+        </p:spPr>
+        <p:style>
+          <a:lnRef idx="1">
+            <a:schemeClr val="accent1"/>
+          </a:lnRef>
+          <a:fillRef idx="3">
+            <a:schemeClr val="accent1"/>
+          </a:fillRef>
+          <a:effectRef idx="2">
+            <a:schemeClr val="accent1"/>
+          </a:effectRef>
+          <a:fontRef idx="minor">
+            <a:schemeClr val="lt1"/>
+          </a:fontRef>
+        </p:style>
+        <p:txBody>
+          <a:bodyPr rtlCol="0" anchor="ctr"/>
+          <a:lstStyle/>
+          <a:p>
+            <a:pPr algn="ctr"/>
+          </a:p>
+        </p:txBody>
+      </p:sp>
+      <p:sp>
+        <p:nvSpPr>
+          <p:cNvPr id="398" name="TextBox 397"/>
+          <p:cNvSpPr txBox="1"/>
+          <p:nvPr/>
+        </p:nvSpPr>
+        <p:spPr>
+          <a:xfrm>
+            <a:off x="694944" y="2491740"/>
+            <a:ext cx="6729984" cy="745236"/>
+          </a:xfrm>
+          <a:prstGeom prst="rect">
+            <a:avLst/>
+          </a:prstGeom>
+          <a:noFill/>
+        </p:spPr>
+        <p:txBody>
+          <a:bodyPr wrap="square" lIns="82296" rIns="36576" tIns="18288" bIns="18288">
+            <a:normAutofit/>
+          </a:bodyPr>
+          <a:lstStyle/>
+          <a:p>
+            <a:pPr>
+              <a:lnSpc>
+                <a:spcPct val="100000"/>
+              </a:lnSpc>
+              <a:spcBef>
+                <a:spcPts val="0"/>
+              </a:spcBef>
+              <a:spcAft>
+                <a:spcPts val="0"/>
+              </a:spcAft>
+            </a:pPr>
+            <a:r>
+              <a:rPr sz="1400" b="0">
+                <a:solidFill>
+                  <a:srgbClr val="000000"/>
+                </a:solidFill>
+                <a:latin typeface="Montserrat"/>
+              </a:rPr>
+              <a:t>Expected evidence includes ASH-ATL Midtown self parking at $28 per night and ASH-MIA Brickell valet at $55 per night.</a:t>
+            </a:r>
+          </a:p>
+        </p:txBody>
+      </p:sp>
+      <p:sp>
+        <p:nvSpPr>
+          <p:cNvPr id="399" name="Oval 398"/>
+          <p:cNvSpPr/>
+          <p:nvPr/>
+        </p:nvSpPr>
+        <p:spPr>
+          <a:xfrm>
+            <a:off x="402336" y="2592324"/>
+            <a:ext cx="192024" cy="192024"/>
+          </a:xfrm>
+          <a:prstGeom prst="ellipse">
+            <a:avLst/>
+          </a:prstGeom>
+          <a:solidFill>
+            <a:srgbClr val="0944A1"/>
+          </a:solidFill>
+          <a:ln>
+            <a:noFill/>
+          </a:ln>
+        </p:spPr>
+        <p:style>
+          <a:lnRef idx="1">
+            <a:schemeClr val="accent1"/>
+          </a:lnRef>
+          <a:fillRef idx="3">
+            <a:schemeClr val="accent1"/>
+          </a:fillRef>
+          <a:effectRef idx="2">
+            <a:schemeClr val="accent1"/>
+          </a:effectRef>
+          <a:fontRef idx="minor">
+            <a:schemeClr val="lt1"/>
+          </a:fontRef>
+        </p:style>
+        <p:txBody>
+          <a:bodyPr rtlCol="0" anchor="ctr"/>
+          <a:lstStyle/>
+          <a:p>
+            <a:pPr algn="ctr"/>
+          </a:p>
+        </p:txBody>
+      </p:sp>
+      <p:sp>
+        <p:nvSpPr>
+          <p:cNvPr id="400" name="TextBox 399"/>
+          <p:cNvSpPr txBox="1"/>
+          <p:nvPr/>
+        </p:nvSpPr>
+        <p:spPr>
+          <a:xfrm>
+            <a:off x="694944" y="3268980"/>
+            <a:ext cx="6729984" cy="512064"/>
+          </a:xfrm>
+          <a:prstGeom prst="rect">
+            <a:avLst/>
+          </a:prstGeom>
+          <a:noFill/>
+        </p:spPr>
+        <p:txBody>
+          <a:bodyPr wrap="square" lIns="82296" rIns="36576" tIns="18288" bIns="18288">
+            <a:normAutofit/>
+          </a:bodyPr>
+          <a:lstStyle/>
+          <a:p>
+            <a:pPr>
+              <a:lnSpc>
+                <a:spcPct val="100000"/>
+              </a:lnSpc>
+              <a:spcBef>
+                <a:spcPts val="0"/>
+              </a:spcBef>
+              <a:spcAft>
+                <a:spcPts val="0"/>
+              </a:spcAft>
+            </a:pPr>
+            <a:r>
+              <a:rPr sz="1400" b="0">
+                <a:solidFill>
+                  <a:srgbClr val="000000"/>
+                </a:solidFill>
+                <a:latin typeface="Montserrat"/>
+              </a:rPr>
+              <a:t>This endpoint is useful for checking retrieval quality before evaluating the generated answer.</a:t>
+            </a:r>
+          </a:p>
+        </p:txBody>
+      </p:sp>
+      <p:sp>
+        <p:nvSpPr>
+          <p:cNvPr id="401" name="Oval 400"/>
+          <p:cNvSpPr/>
+          <p:nvPr/>
+        </p:nvSpPr>
+        <p:spPr>
+          <a:xfrm>
+            <a:off x="402336" y="3369564"/>
+            <a:ext cx="192024" cy="192024"/>
+          </a:xfrm>
+          <a:prstGeom prst="ellipse">
+            <a:avLst/>
+          </a:prstGeom>
+          <a:solidFill>
+            <a:srgbClr val="0944A1"/>
+          </a:solidFill>
+          <a:ln>
+            <a:noFill/>
+          </a:ln>
+        </p:spPr>
+        <p:style>
+          <a:lnRef idx="1">
+            <a:schemeClr val="accent1"/>
+          </a:lnRef>
+          <a:fillRef idx="3">
+            <a:schemeClr val="accent1"/>
+          </a:fillRef>
+          <a:effectRef idx="2">
+            <a:schemeClr val="accent1"/>
+          </a:effectRef>
+          <a:fontRef idx="minor">
+            <a:schemeClr val="lt1"/>
+          </a:fontRef>
+        </p:style>
+        <p:txBody>
+          <a:bodyPr rtlCol="0" anchor="ctr"/>
+          <a:lstStyle/>
+          <a:p>
+            <a:pPr algn="ctr"/>
+          </a:p>
+        </p:txBody>
+      </p:sp>
+    </p:spTree>
+  </p:cSld>
+  <p:clrMapOvr>
+    <a:masterClrMapping/>
+  </p:clrMapOvr>
+</p:sld>
+</file>
+
+<file path=ppt/slides/slide29.xml><?xml version="1.0" encoding="utf-8"?>
+<p:sld xmlns:a="http://schemas.openxmlformats.org/drawingml/2006/main" xmlns:r="http://schemas.openxmlformats.org/officeDocument/2006/relationships" xmlns:mc="http://schemas.openxmlformats.org/markup-compatibility/2006" xmlns:mv="urn:schemas-microsoft-com:mac:vml" xmlns:p="http://schemas.openxmlformats.org/presentationml/2006/main" xmlns:c="http://schemas.openxmlformats.org/drawingml/2006/chart" xmlns:dgm="http://schemas.openxmlformats.org/drawingml/2006/diagram" xmlns:o="urn:schemas-microsoft-com:office:office" xmlns:v="urn:schemas-microsoft-com:vml" xmlns:pvml="urn:schemas-microsoft-com:office:powerpoint" xmlns:com="http://schemas.openxmlformats.org/drawingml/2006/compatibility" xmlns:p14="http://schemas.microsoft.com/office/powerpoint/2010/main" xmlns:p15="http://schemas.microsoft.com/office/powerpoint/2012/main" xmlns:ahyp="http://schemas.microsoft.com/office/drawing/2018/hyperlinkcolor">
+  <p:cSld>
+    <p:spTree>
+      <p:nvGrpSpPr>
+        <p:cNvPr id="397" name="Shape 397"/>
+        <p:cNvGrpSpPr/>
+        <p:nvPr/>
+      </p:nvGrpSpPr>
+      <p:grpSpPr>
+        <a:xfrm>
+          <a:off x="0" y="0"/>
+          <a:ext cx="0" cy="0"/>
+          <a:chOff x="0" y="0"/>
+          <a:chExt cx="0" cy="0"/>
+        </a:xfrm>
+      </p:grpSpPr>
+      <p:sp>
+        <p:nvSpPr>
+          <p:cNvPr id="398" name="Google Shape;398;p64"/>
+          <p:cNvSpPr txBox="1"/>
+          <p:nvPr>
+            <p:ph type="title"/>
+          </p:nvPr>
+        </p:nvSpPr>
+        <p:spPr>
+          <a:xfrm>
+            <a:off x="202550" y="289279"/>
+            <a:ext cx="8520600" cy="572700"/>
+          </a:xfrm>
+          <a:prstGeom prst="rect">
+            <a:avLst/>
+          </a:prstGeom>
+          <a:noFill/>
+          <a:ln>
+            <a:noFill/>
+          </a:ln>
+        </p:spPr>
+        <p:txBody>
+          <a:bodyPr anchorCtr="0" anchor="t" bIns="91425" lIns="91425" spcFirstLastPara="1" rIns="91425" wrap="square" tIns="91425">
+            <a:noAutofit/>
+          </a:bodyPr>
+          <a:lstStyle/>
+          <a:p>
+            <a:r>
+              <a:rPr sz="2200" b="1">
+                <a:solidFill>
+                  <a:srgbClr val="0E39A9"/>
+                </a:solidFill>
+                <a:latin typeface="Montserrat"/>
+              </a:rPr>
+              <a:t>Deployment - Inference - Answer with Relevant Chunks</a:t>
+            </a:r>
+          </a:p>
+        </p:txBody>
+      </p:sp>
+      <p:sp>
+        <p:nvSpPr>
+          <p:cNvPr id="399" name="Rectangle 398"/>
+          <p:cNvSpPr/>
+          <p:nvPr/>
+        </p:nvSpPr>
+        <p:spPr>
+          <a:xfrm>
+            <a:off x="502920" y="1005840"/>
+            <a:ext cx="8138160" cy="32004"/>
+          </a:xfrm>
+          <a:prstGeom prst="rect">
+            <a:avLst/>
+          </a:prstGeom>
+          <a:solidFill>
+            <a:srgbClr val="0E39A9"/>
+          </a:solidFill>
+          <a:ln>
+            <a:noFill/>
+          </a:ln>
+        </p:spPr>
+        <p:style>
+          <a:lnRef idx="1">
+            <a:schemeClr val="accent1"/>
+          </a:lnRef>
+          <a:fillRef idx="3">
+            <a:schemeClr val="accent1"/>
+          </a:fillRef>
+          <a:effectRef idx="2">
+            <a:schemeClr val="accent1"/>
+          </a:effectRef>
+          <a:fontRef idx="minor">
+            <a:schemeClr val="lt1"/>
+          </a:fontRef>
+        </p:style>
+        <p:txBody>
+          <a:bodyPr rtlCol="0" anchor="ctr"/>
+          <a:lstStyle/>
+          <a:p>
+            <a:pPr algn="ctr"/>
+          </a:p>
+        </p:txBody>
+      </p:sp>
+      <p:sp>
+        <p:nvSpPr>
+          <p:cNvPr id="400" name="TextBox 399"/>
+          <p:cNvSpPr txBox="1"/>
+          <p:nvPr/>
+        </p:nvSpPr>
+        <p:spPr>
+          <a:xfrm>
+            <a:off x="694944" y="1325880"/>
+            <a:ext cx="6729984" cy="512064"/>
+          </a:xfrm>
+          <a:prstGeom prst="rect">
+            <a:avLst/>
+          </a:prstGeom>
+          <a:noFill/>
+        </p:spPr>
+        <p:txBody>
+          <a:bodyPr wrap="square" lIns="82296" rIns="36576" tIns="18288" bIns="18288">
+            <a:normAutofit/>
+          </a:bodyPr>
+          <a:lstStyle/>
+          <a:p>
+            <a:pPr>
+              <a:lnSpc>
+                <a:spcPct val="100000"/>
+              </a:lnSpc>
+              <a:spcBef>
+                <a:spcPts val="0"/>
+              </a:spcBef>
+              <a:spcAft>
+                <a:spcPts val="0"/>
+              </a:spcAft>
+            </a:pPr>
+            <a:r>
+              <a:rPr sz="1400" b="0">
+                <a:solidFill>
+                  <a:srgbClr val="000000"/>
+                </a:solidFill>
+                <a:latin typeface="Montserrat"/>
+              </a:rPr>
+              <a:t>Endpoint: POST {BACKEND_URL}/v1/answer_with_relevant_chunks.</a:t>
+            </a:r>
+          </a:p>
+        </p:txBody>
+      </p:sp>
+      <p:sp>
+        <p:nvSpPr>
+          <p:cNvPr id="401" name="Oval 400"/>
+          <p:cNvSpPr/>
+          <p:nvPr/>
+        </p:nvSpPr>
+        <p:spPr>
+          <a:xfrm>
+            <a:off x="402336" y="1426464"/>
+            <a:ext cx="192024" cy="192024"/>
+          </a:xfrm>
+          <a:prstGeom prst="ellipse">
+            <a:avLst/>
+          </a:prstGeom>
+          <a:solidFill>
+            <a:srgbClr val="0944A1"/>
+          </a:solidFill>
+          <a:ln>
+            <a:noFill/>
+          </a:ln>
+        </p:spPr>
+        <p:style>
+          <a:lnRef idx="1">
+            <a:schemeClr val="accent1"/>
+          </a:lnRef>
+          <a:fillRef idx="3">
+            <a:schemeClr val="accent1"/>
+          </a:fillRef>
+          <a:effectRef idx="2">
+            <a:schemeClr val="accent1"/>
+          </a:effectRef>
+          <a:fontRef idx="minor">
+            <a:schemeClr val="lt1"/>
+          </a:fontRef>
+        </p:style>
+        <p:txBody>
+          <a:bodyPr rtlCol="0" anchor="ctr"/>
+          <a:lstStyle/>
+          <a:p>
+            <a:pPr algn="ctr"/>
+          </a:p>
+        </p:txBody>
+      </p:sp>
+      <p:sp>
+        <p:nvSpPr>
+          <p:cNvPr id="402" name="TextBox 401"/>
+          <p:cNvSpPr txBox="1"/>
+          <p:nvPr/>
+        </p:nvSpPr>
+        <p:spPr>
+          <a:xfrm>
+            <a:off x="694944" y="1869948"/>
+            <a:ext cx="6729984" cy="512064"/>
+          </a:xfrm>
+          <a:prstGeom prst="rect">
+            <a:avLst/>
+          </a:prstGeom>
+          <a:noFill/>
+        </p:spPr>
+        <p:txBody>
+          <a:bodyPr wrap="square" lIns="82296" rIns="36576" tIns="18288" bIns="18288">
+            <a:normAutofit/>
+          </a:bodyPr>
+          <a:lstStyle/>
+          <a:p>
+            <a:pPr>
+              <a:lnSpc>
+                <a:spcPct val="100000"/>
+              </a:lnSpc>
+              <a:spcBef>
+                <a:spcPts val="0"/>
+              </a:spcBef>
+              <a:spcAft>
+                <a:spcPts val="0"/>
+              </a:spcAft>
+            </a:pPr>
+            <a:r>
+              <a:rPr sz="1400" b="0">
+                <a:solidFill>
+                  <a:srgbClr val="000000"/>
+                </a:solidFill>
+                <a:latin typeface="Montserrat"/>
+              </a:rPr>
+              <a:t>Payload includes query, k=5, temperature=0.0, and max_tokens=512.</a:t>
+            </a:r>
+          </a:p>
+        </p:txBody>
+      </p:sp>
+      <p:sp>
+        <p:nvSpPr>
+          <p:cNvPr id="403" name="Oval 402"/>
+          <p:cNvSpPr/>
+          <p:nvPr/>
+        </p:nvSpPr>
+        <p:spPr>
+          <a:xfrm>
+            <a:off x="402336" y="1970531"/>
+            <a:ext cx="192024" cy="192024"/>
+          </a:xfrm>
+          <a:prstGeom prst="ellipse">
+            <a:avLst/>
+          </a:prstGeom>
+          <a:solidFill>
+            <a:srgbClr val="0944A1"/>
+          </a:solidFill>
+          <a:ln>
+            <a:noFill/>
+          </a:ln>
+        </p:spPr>
+        <p:style>
+          <a:lnRef idx="1">
+            <a:schemeClr val="accent1"/>
+          </a:lnRef>
+          <a:fillRef idx="3">
+            <a:schemeClr val="accent1"/>
+          </a:fillRef>
+          <a:effectRef idx="2">
+            <a:schemeClr val="accent1"/>
+          </a:effectRef>
+          <a:fontRef idx="minor">
+            <a:schemeClr val="lt1"/>
+          </a:fontRef>
+        </p:style>
+        <p:txBody>
+          <a:bodyPr rtlCol="0" anchor="ctr"/>
+          <a:lstStyle/>
+          <a:p>
+            <a:pPr algn="ctr"/>
+          </a:p>
+        </p:txBody>
+      </p:sp>
+      <p:sp>
+        <p:nvSpPr>
+          <p:cNvPr id="404" name="TextBox 403"/>
+          <p:cNvSpPr txBox="1"/>
+          <p:nvPr/>
+        </p:nvSpPr>
+        <p:spPr>
+          <a:xfrm>
+            <a:off x="694944" y="2414016"/>
+            <a:ext cx="6729984" cy="512064"/>
+          </a:xfrm>
+          <a:prstGeom prst="rect">
+            <a:avLst/>
+          </a:prstGeom>
+          <a:noFill/>
+        </p:spPr>
+        <p:txBody>
+          <a:bodyPr wrap="square" lIns="82296" rIns="36576" tIns="18288" bIns="18288">
+            <a:normAutofit/>
+          </a:bodyPr>
+          <a:lstStyle/>
+          <a:p>
+            <a:pPr>
+              <a:lnSpc>
+                <a:spcPct val="100000"/>
+              </a:lnSpc>
+              <a:spcBef>
+                <a:spcPts val="0"/>
+              </a:spcBef>
+              <a:spcAft>
+                <a:spcPts val="0"/>
+              </a:spcAft>
+            </a:pPr>
+            <a:r>
+              <a:rPr sz="1400" b="0">
+                <a:solidFill>
+                  <a:srgbClr val="000000"/>
+                </a:solidFill>
+                <a:latin typeface="Montserrat"/>
+              </a:rPr>
+              <a:t>Response fields include answer, relevant_chunks, model_name, and the generation parameters used.</a:t>
+            </a:r>
+          </a:p>
+        </p:txBody>
+      </p:sp>
+      <p:sp>
+        <p:nvSpPr>
+          <p:cNvPr id="405" name="Oval 404"/>
+          <p:cNvSpPr/>
+          <p:nvPr/>
+        </p:nvSpPr>
+        <p:spPr>
+          <a:xfrm>
+            <a:off x="402336" y="2514600"/>
+            <a:ext cx="192024" cy="192024"/>
+          </a:xfrm>
+          <a:prstGeom prst="ellipse">
+            <a:avLst/>
+          </a:prstGeom>
+          <a:solidFill>
+            <a:srgbClr val="0944A1"/>
+          </a:solidFill>
+          <a:ln>
+            <a:noFill/>
+          </a:ln>
+        </p:spPr>
+        <p:style>
+          <a:lnRef idx="1">
+            <a:schemeClr val="accent1"/>
+          </a:lnRef>
+          <a:fillRef idx="3">
+            <a:schemeClr val="accent1"/>
+          </a:fillRef>
+          <a:effectRef idx="2">
+            <a:schemeClr val="accent1"/>
+          </a:effectRef>
+          <a:fontRef idx="minor">
+            <a:schemeClr val="lt1"/>
+          </a:fontRef>
+        </p:style>
+        <p:txBody>
+          <a:bodyPr rtlCol="0" anchor="ctr"/>
+          <a:lstStyle/>
+          <a:p>
+            <a:pPr algn="ctr"/>
+          </a:p>
+        </p:txBody>
+      </p:sp>
+      <p:sp>
+        <p:nvSpPr>
+          <p:cNvPr id="406" name="TextBox 405"/>
+          <p:cNvSpPr txBox="1"/>
+          <p:nvPr/>
+        </p:nvSpPr>
+        <p:spPr>
+          <a:xfrm>
+            <a:off x="694944" y="2958084"/>
+            <a:ext cx="6729984" cy="512064"/>
+          </a:xfrm>
+          <a:prstGeom prst="rect">
+            <a:avLst/>
+          </a:prstGeom>
+          <a:noFill/>
+        </p:spPr>
+        <p:txBody>
+          <a:bodyPr wrap="square" lIns="82296" rIns="36576" tIns="18288" bIns="18288">
+            <a:normAutofit/>
+          </a:bodyPr>
+          <a:lstStyle/>
+          <a:p>
+            <a:pPr>
+              <a:lnSpc>
+                <a:spcPct val="100000"/>
+              </a:lnSpc>
+              <a:spcBef>
+                <a:spcPts val="0"/>
+              </a:spcBef>
+              <a:spcAft>
+                <a:spcPts val="0"/>
+              </a:spcAft>
+            </a:pPr>
+            <a:r>
+              <a:rPr sz="1400" b="0">
+                <a:solidFill>
+                  <a:srgbClr val="000000"/>
+                </a:solidFill>
+                <a:latin typeface="Montserrat"/>
+              </a:rPr>
+              <a:t>The parking example returns a grounded comparison of the Atlanta and Miami fees with supporting chunks.</a:t>
+            </a:r>
+          </a:p>
+        </p:txBody>
+      </p:sp>
+      <p:sp>
+        <p:nvSpPr>
+          <p:cNvPr id="407" name="Oval 406"/>
+          <p:cNvSpPr/>
+          <p:nvPr/>
+        </p:nvSpPr>
+        <p:spPr>
+          <a:xfrm>
+            <a:off x="402336" y="3058668"/>
+            <a:ext cx="192024" cy="192024"/>
+          </a:xfrm>
+          <a:prstGeom prst="ellipse">
+            <a:avLst/>
+          </a:prstGeom>
+          <a:solidFill>
+            <a:srgbClr val="0944A1"/>
+          </a:solidFill>
+          <a:ln>
+            <a:noFill/>
+          </a:ln>
+        </p:spPr>
+        <p:style>
+          <a:lnRef idx="1">
+            <a:schemeClr val="accent1"/>
+          </a:lnRef>
+          <a:fillRef idx="3">
+            <a:schemeClr val="accent1"/>
+          </a:fillRef>
+          <a:effectRef idx="2">
+            <a:schemeClr val="accent1"/>
+          </a:effectRef>
+          <a:fontRef idx="minor">
+            <a:schemeClr val="lt1"/>
+          </a:fontRef>
+        </p:style>
+        <p:txBody>
+          <a:bodyPr rtlCol="0" anchor="ctr"/>
+          <a:lstStyle/>
+          <a:p>
+            <a:pPr algn="ctr"/>
+          </a:p>
+        </p:txBody>
+      </p:sp>
+      <p:sp>
+        <p:nvSpPr>
+          <p:cNvPr id="408" name="TextBox 407"/>
+          <p:cNvSpPr txBox="1"/>
+          <p:nvPr/>
+        </p:nvSpPr>
+        <p:spPr>
+          <a:xfrm>
+            <a:off x="694944" y="3502152"/>
+            <a:ext cx="6729984" cy="512064"/>
+          </a:xfrm>
+          <a:prstGeom prst="rect">
+            <a:avLst/>
+          </a:prstGeom>
+          <a:noFill/>
+        </p:spPr>
+        <p:txBody>
+          <a:bodyPr wrap="square" lIns="82296" rIns="36576" tIns="18288" bIns="18288">
+            <a:normAutofit/>
+          </a:bodyPr>
+          <a:lstStyle/>
+          <a:p>
+            <a:pPr>
+              <a:lnSpc>
+                <a:spcPct val="100000"/>
+              </a:lnSpc>
+              <a:spcBef>
+                <a:spcPts val="0"/>
+              </a:spcBef>
+              <a:spcAft>
+                <a:spcPts val="0"/>
+              </a:spcAft>
+            </a:pPr>
+            <a:r>
+              <a:rPr sz="1400" b="0">
+                <a:solidFill>
+                  <a:srgbClr val="000000"/>
+                </a:solidFill>
+                <a:latin typeface="Montserrat"/>
+              </a:rPr>
+              <a:t>Use POST /v1/answer when only the final answer is required; use this endpoint for auditability.</a:t>
+            </a:r>
+          </a:p>
+        </p:txBody>
+      </p:sp>
+      <p:sp>
+        <p:nvSpPr>
+          <p:cNvPr id="409" name="Oval 408"/>
+          <p:cNvSpPr/>
+          <p:nvPr/>
+        </p:nvSpPr>
+        <p:spPr>
+          <a:xfrm>
+            <a:off x="402336" y="3602736"/>
+            <a:ext cx="192024" cy="192024"/>
+          </a:xfrm>
+          <a:prstGeom prst="ellipse">
+            <a:avLst/>
+          </a:prstGeom>
+          <a:solidFill>
+            <a:srgbClr val="0944A1"/>
           </a:solidFill>
           <a:ln>
             <a:noFill/>
@@ -38260,6 +45586,1276 @@
 </p:sld>
 </file>
 
+<file path=ppt/slides/slide30.xml><?xml version="1.0" encoding="utf-8"?>
+<p:sld xmlns:a="http://schemas.openxmlformats.org/drawingml/2006/main" xmlns:r="http://schemas.openxmlformats.org/officeDocument/2006/relationships" xmlns:mc="http://schemas.openxmlformats.org/markup-compatibility/2006" xmlns:mv="urn:schemas-microsoft-com:mac:vml" xmlns:p="http://schemas.openxmlformats.org/presentationml/2006/main" xmlns:c="http://schemas.openxmlformats.org/drawingml/2006/chart" xmlns:dgm="http://schemas.openxmlformats.org/drawingml/2006/diagram" xmlns:o="urn:schemas-microsoft-com:office:office" xmlns:v="urn:schemas-microsoft-com:vml" xmlns:pvml="urn:schemas-microsoft-com:office:powerpoint" xmlns:com="http://schemas.openxmlformats.org/drawingml/2006/compatibility" xmlns:p14="http://schemas.microsoft.com/office/powerpoint/2010/main" xmlns:p15="http://schemas.microsoft.com/office/powerpoint/2012/main" xmlns:ahyp="http://schemas.microsoft.com/office/drawing/2018/hyperlinkcolor">
+  <p:cSld>
+    <p:spTree>
+      <p:nvGrpSpPr>
+        <p:cNvPr id="405" name="Shape 405"/>
+        <p:cNvGrpSpPr/>
+        <p:nvPr/>
+      </p:nvGrpSpPr>
+      <p:grpSpPr>
+        <a:xfrm>
+          <a:off x="0" y="0"/>
+          <a:ext cx="0" cy="0"/>
+          <a:chOff x="0" y="0"/>
+          <a:chExt cx="0" cy="0"/>
+        </a:xfrm>
+      </p:grpSpPr>
+      <p:sp>
+        <p:nvSpPr>
+          <p:cNvPr id="407" name="Google Shape;407;p65"/>
+          <p:cNvSpPr txBox="1"/>
+          <p:nvPr/>
+        </p:nvSpPr>
+        <p:spPr>
+          <a:xfrm>
+            <a:off x="32525" y="292608"/>
+            <a:ext cx="4418700" cy="615600"/>
+          </a:xfrm>
+          <a:prstGeom prst="rect">
+            <a:avLst/>
+          </a:prstGeom>
+          <a:noFill/>
+          <a:ln>
+            <a:noFill/>
+          </a:ln>
+        </p:spPr>
+        <p:txBody>
+          <a:bodyPr anchorCtr="0" anchor="t" bIns="91425" lIns="91425" spcFirstLastPara="1" rIns="91425" wrap="square" tIns="91425">
+            <a:spAutoFit/>
+          </a:bodyPr>
+          <a:lstStyle/>
+          <a:p>
+            <a:r>
+              <a:rPr sz="2400" b="1">
+                <a:solidFill>
+                  <a:srgbClr val="0E39A9"/>
+                </a:solidFill>
+                <a:latin typeface="Montserrat"/>
+              </a:rPr>
+              <a:t>APPENDIX</a:t>
+            </a:r>
+          </a:p>
+        </p:txBody>
+      </p:sp>
+      <p:sp>
+        <p:nvSpPr>
+          <p:cNvPr id="408" name="Rectangle 407"/>
+          <p:cNvSpPr/>
+          <p:nvPr/>
+        </p:nvSpPr>
+        <p:spPr>
+          <a:xfrm>
+            <a:off x="502920" y="1005840"/>
+            <a:ext cx="8138160" cy="32004"/>
+          </a:xfrm>
+          <a:prstGeom prst="rect">
+            <a:avLst/>
+          </a:prstGeom>
+          <a:solidFill>
+            <a:srgbClr val="0E39A9"/>
+          </a:solidFill>
+          <a:ln>
+            <a:noFill/>
+          </a:ln>
+        </p:spPr>
+        <p:style>
+          <a:lnRef idx="1">
+            <a:schemeClr val="accent1"/>
+          </a:lnRef>
+          <a:fillRef idx="3">
+            <a:schemeClr val="accent1"/>
+          </a:fillRef>
+          <a:effectRef idx="2">
+            <a:schemeClr val="accent1"/>
+          </a:effectRef>
+          <a:fontRef idx="minor">
+            <a:schemeClr val="lt1"/>
+          </a:fontRef>
+        </p:style>
+        <p:txBody>
+          <a:bodyPr rtlCol="0" anchor="ctr"/>
+          <a:lstStyle/>
+          <a:p>
+            <a:pPr algn="ctr"/>
+          </a:p>
+        </p:txBody>
+      </p:sp>
+      <p:sp>
+        <p:nvSpPr>
+          <p:cNvPr id="409" name="TextBox 408"/>
+          <p:cNvSpPr txBox="1"/>
+          <p:nvPr/>
+        </p:nvSpPr>
+        <p:spPr>
+          <a:xfrm>
+            <a:off x="694944" y="1325880"/>
+            <a:ext cx="6729984" cy="278892"/>
+          </a:xfrm>
+          <a:prstGeom prst="rect">
+            <a:avLst/>
+          </a:prstGeom>
+          <a:noFill/>
+        </p:spPr>
+        <p:txBody>
+          <a:bodyPr wrap="square" lIns="82296" rIns="36576" tIns="18288" bIns="18288">
+            <a:normAutofit/>
+          </a:bodyPr>
+          <a:lstStyle/>
+          <a:p>
+            <a:pPr>
+              <a:lnSpc>
+                <a:spcPct val="100000"/>
+              </a:lnSpc>
+              <a:spcBef>
+                <a:spcPts val="0"/>
+              </a:spcBef>
+              <a:spcAft>
+                <a:spcPts val="0"/>
+              </a:spcAft>
+            </a:pPr>
+            <a:r>
+              <a:rPr sz="1300" b="1">
+                <a:solidFill>
+                  <a:srgbClr val="0E39A9"/>
+                </a:solidFill>
+                <a:latin typeface="Montserrat"/>
+              </a:rPr>
+              <a:t>Production checklist</a:t>
+            </a:r>
+          </a:p>
+        </p:txBody>
+      </p:sp>
+      <p:sp>
+        <p:nvSpPr>
+          <p:cNvPr id="410" name="TextBox 409"/>
+          <p:cNvSpPr txBox="1"/>
+          <p:nvPr/>
+        </p:nvSpPr>
+        <p:spPr>
+          <a:xfrm>
+            <a:off x="694944" y="1636776"/>
+            <a:ext cx="6729984" cy="512064"/>
+          </a:xfrm>
+          <a:prstGeom prst="rect">
+            <a:avLst/>
+          </a:prstGeom>
+          <a:noFill/>
+        </p:spPr>
+        <p:txBody>
+          <a:bodyPr wrap="square" lIns="82296" rIns="36576" tIns="18288" bIns="18288">
+            <a:normAutofit/>
+          </a:bodyPr>
+          <a:lstStyle/>
+          <a:p>
+            <a:pPr>
+              <a:lnSpc>
+                <a:spcPct val="100000"/>
+              </a:lnSpc>
+              <a:spcBef>
+                <a:spcPts val="0"/>
+              </a:spcBef>
+              <a:spcAft>
+                <a:spcPts val="0"/>
+              </a:spcAft>
+            </a:pPr>
+            <a:r>
+              <a:rPr sz="1250" b="0">
+                <a:solidFill>
+                  <a:srgbClr val="000000"/>
+                </a:solidFill>
+                <a:latin typeface="Montserrat"/>
+              </a:rPr>
+              <a:t>Create config/config.json locally or set Codespaces Secrets for OPENAI_API_KEY and OPENAI_BASE_URL.</a:t>
+            </a:r>
+          </a:p>
+        </p:txBody>
+      </p:sp>
+      <p:sp>
+        <p:nvSpPr>
+          <p:cNvPr id="411" name="Oval 410"/>
+          <p:cNvSpPr/>
+          <p:nvPr/>
+        </p:nvSpPr>
+        <p:spPr>
+          <a:xfrm>
+            <a:off x="402336" y="1737360"/>
+            <a:ext cx="192024" cy="192024"/>
+          </a:xfrm>
+          <a:prstGeom prst="ellipse">
+            <a:avLst/>
+          </a:prstGeom>
+          <a:solidFill>
+            <a:srgbClr val="0944A1"/>
+          </a:solidFill>
+          <a:ln>
+            <a:noFill/>
+          </a:ln>
+        </p:spPr>
+        <p:style>
+          <a:lnRef idx="1">
+            <a:schemeClr val="accent1"/>
+          </a:lnRef>
+          <a:fillRef idx="3">
+            <a:schemeClr val="accent1"/>
+          </a:fillRef>
+          <a:effectRef idx="2">
+            <a:schemeClr val="accent1"/>
+          </a:effectRef>
+          <a:fontRef idx="minor">
+            <a:schemeClr val="lt1"/>
+          </a:fontRef>
+        </p:style>
+        <p:txBody>
+          <a:bodyPr rtlCol="0" anchor="ctr"/>
+          <a:lstStyle/>
+          <a:p>
+            <a:pPr algn="ctr"/>
+          </a:p>
+        </p:txBody>
+      </p:sp>
+      <p:sp>
+        <p:nvSpPr>
+          <p:cNvPr id="412" name="TextBox 411"/>
+          <p:cNvSpPr txBox="1"/>
+          <p:nvPr/>
+        </p:nvSpPr>
+        <p:spPr>
+          <a:xfrm>
+            <a:off x="694944" y="2180844"/>
+            <a:ext cx="6729984" cy="512064"/>
+          </a:xfrm>
+          <a:prstGeom prst="rect">
+            <a:avLst/>
+          </a:prstGeom>
+          <a:noFill/>
+        </p:spPr>
+        <p:txBody>
+          <a:bodyPr wrap="square" lIns="82296" rIns="36576" tIns="18288" bIns="18288">
+            <a:normAutofit/>
+          </a:bodyPr>
+          <a:lstStyle/>
+          <a:p>
+            <a:pPr>
+              <a:lnSpc>
+                <a:spcPct val="100000"/>
+              </a:lnSpc>
+              <a:spcBef>
+                <a:spcPts val="0"/>
+              </a:spcBef>
+              <a:spcAft>
+                <a:spcPts val="0"/>
+              </a:spcAft>
+            </a:pPr>
+            <a:r>
+              <a:rPr sz="1250" b="0">
+                <a:solidFill>
+                  <a:srgbClr val="000000"/>
+                </a:solidFill>
+                <a:latin typeface="Montserrat"/>
+              </a:rPr>
+              <a:t>Start the backend first, confirm the readiness response, then start Streamlit on port 8501.</a:t>
+            </a:r>
+          </a:p>
+        </p:txBody>
+      </p:sp>
+      <p:sp>
+        <p:nvSpPr>
+          <p:cNvPr id="413" name="Oval 412"/>
+          <p:cNvSpPr/>
+          <p:nvPr/>
+        </p:nvSpPr>
+        <p:spPr>
+          <a:xfrm>
+            <a:off x="402336" y="2281428"/>
+            <a:ext cx="192024" cy="192024"/>
+          </a:xfrm>
+          <a:prstGeom prst="ellipse">
+            <a:avLst/>
+          </a:prstGeom>
+          <a:solidFill>
+            <a:srgbClr val="0944A1"/>
+          </a:solidFill>
+          <a:ln>
+            <a:noFill/>
+          </a:ln>
+        </p:spPr>
+        <p:style>
+          <a:lnRef idx="1">
+            <a:schemeClr val="accent1"/>
+          </a:lnRef>
+          <a:fillRef idx="3">
+            <a:schemeClr val="accent1"/>
+          </a:fillRef>
+          <a:effectRef idx="2">
+            <a:schemeClr val="accent1"/>
+          </a:effectRef>
+          <a:fontRef idx="minor">
+            <a:schemeClr val="lt1"/>
+          </a:fontRef>
+        </p:style>
+        <p:txBody>
+          <a:bodyPr rtlCol="0" anchor="ctr"/>
+          <a:lstStyle/>
+          <a:p>
+            <a:pPr algn="ctr"/>
+          </a:p>
+        </p:txBody>
+      </p:sp>
+      <p:sp>
+        <p:nvSpPr>
+          <p:cNvPr id="414" name="TextBox 413"/>
+          <p:cNvSpPr txBox="1"/>
+          <p:nvPr/>
+        </p:nvSpPr>
+        <p:spPr>
+          <a:xfrm>
+            <a:off x="694944" y="2724912"/>
+            <a:ext cx="6729984" cy="512064"/>
+          </a:xfrm>
+          <a:prstGeom prst="rect">
+            <a:avLst/>
+          </a:prstGeom>
+          <a:noFill/>
+        </p:spPr>
+        <p:txBody>
+          <a:bodyPr wrap="square" lIns="82296" rIns="36576" tIns="18288" bIns="18288">
+            <a:normAutofit/>
+          </a:bodyPr>
+          <a:lstStyle/>
+          <a:p>
+            <a:pPr>
+              <a:lnSpc>
+                <a:spcPct val="100000"/>
+              </a:lnSpc>
+              <a:spcBef>
+                <a:spcPts val="0"/>
+              </a:spcBef>
+              <a:spcAft>
+                <a:spcPts val="0"/>
+              </a:spcAft>
+            </a:pPr>
+            <a:r>
+              <a:rPr sz="1250" b="0">
+                <a:solidFill>
+                  <a:srgbClr val="000000"/>
+                </a:solidFill>
+                <a:latin typeface="Montserrat"/>
+              </a:rPr>
+              <a:t>Run a property-specific query and an evidence-display query before wider use.</a:t>
+            </a:r>
+          </a:p>
+        </p:txBody>
+      </p:sp>
+      <p:sp>
+        <p:nvSpPr>
+          <p:cNvPr id="415" name="Oval 414"/>
+          <p:cNvSpPr/>
+          <p:nvPr/>
+        </p:nvSpPr>
+        <p:spPr>
+          <a:xfrm>
+            <a:off x="402336" y="2825496"/>
+            <a:ext cx="192024" cy="192024"/>
+          </a:xfrm>
+          <a:prstGeom prst="ellipse">
+            <a:avLst/>
+          </a:prstGeom>
+          <a:solidFill>
+            <a:srgbClr val="0944A1"/>
+          </a:solidFill>
+          <a:ln>
+            <a:noFill/>
+          </a:ln>
+        </p:spPr>
+        <p:style>
+          <a:lnRef idx="1">
+            <a:schemeClr val="accent1"/>
+          </a:lnRef>
+          <a:fillRef idx="3">
+            <a:schemeClr val="accent1"/>
+          </a:fillRef>
+          <a:effectRef idx="2">
+            <a:schemeClr val="accent1"/>
+          </a:effectRef>
+          <a:fontRef idx="minor">
+            <a:schemeClr val="lt1"/>
+          </a:fontRef>
+        </p:style>
+        <p:txBody>
+          <a:bodyPr rtlCol="0" anchor="ctr"/>
+          <a:lstStyle/>
+          <a:p>
+            <a:pPr algn="ctr"/>
+          </a:p>
+        </p:txBody>
+      </p:sp>
+      <p:sp>
+        <p:nvSpPr>
+          <p:cNvPr id="416" name="TextBox 415"/>
+          <p:cNvSpPr txBox="1"/>
+          <p:nvPr/>
+        </p:nvSpPr>
+        <p:spPr>
+          <a:xfrm>
+            <a:off x="694944" y="3268980"/>
+            <a:ext cx="6729984" cy="278892"/>
+          </a:xfrm>
+          <a:prstGeom prst="rect">
+            <a:avLst/>
+          </a:prstGeom>
+          <a:noFill/>
+        </p:spPr>
+        <p:txBody>
+          <a:bodyPr wrap="square" lIns="82296" rIns="36576" tIns="18288" bIns="18288">
+            <a:normAutofit/>
+          </a:bodyPr>
+          <a:lstStyle/>
+          <a:p>
+            <a:pPr>
+              <a:lnSpc>
+                <a:spcPct val="100000"/>
+              </a:lnSpc>
+              <a:spcBef>
+                <a:spcPts val="0"/>
+              </a:spcBef>
+              <a:spcAft>
+                <a:spcPts val="0"/>
+              </a:spcAft>
+            </a:pPr>
+            <a:r>
+              <a:rPr sz="1300" b="1">
+                <a:solidFill>
+                  <a:srgbClr val="0E39A9"/>
+                </a:solidFill>
+                <a:latin typeface="Montserrat"/>
+              </a:rPr>
+              <a:t>Known limitation</a:t>
+            </a:r>
+          </a:p>
+        </p:txBody>
+      </p:sp>
+      <p:sp>
+        <p:nvSpPr>
+          <p:cNvPr id="417" name="TextBox 416"/>
+          <p:cNvSpPr txBox="1"/>
+          <p:nvPr/>
+        </p:nvSpPr>
+        <p:spPr>
+          <a:xfrm>
+            <a:off x="694944" y="3579876"/>
+            <a:ext cx="6729984" cy="745236"/>
+          </a:xfrm>
+          <a:prstGeom prst="rect">
+            <a:avLst/>
+          </a:prstGeom>
+          <a:noFill/>
+        </p:spPr>
+        <p:txBody>
+          <a:bodyPr wrap="square" lIns="82296" rIns="36576" tIns="18288" bIns="18288">
+            <a:normAutofit/>
+          </a:bodyPr>
+          <a:lstStyle/>
+          <a:p>
+            <a:pPr>
+              <a:lnSpc>
+                <a:spcPct val="100000"/>
+              </a:lnSpc>
+              <a:spcBef>
+                <a:spcPts val="0"/>
+              </a:spcBef>
+              <a:spcAft>
+                <a:spcPts val="0"/>
+              </a:spcAft>
+            </a:pPr>
+            <a:r>
+              <a:rPr sz="1250" b="0">
+                <a:solidFill>
+                  <a:srgbClr val="000000"/>
+                </a:solidFill>
+                <a:latin typeface="Montserrat"/>
+              </a:rPr>
+              <a:t>The Accessible King case has Contextual Precision=.451 because the benchmark question is underspecified for the auto-answer strategy.</a:t>
+            </a:r>
+          </a:p>
+        </p:txBody>
+      </p:sp>
+      <p:sp>
+        <p:nvSpPr>
+          <p:cNvPr id="418" name="Oval 417"/>
+          <p:cNvSpPr/>
+          <p:nvPr/>
+        </p:nvSpPr>
+        <p:spPr>
+          <a:xfrm>
+            <a:off x="402336" y="3680460"/>
+            <a:ext cx="192024" cy="192024"/>
+          </a:xfrm>
+          <a:prstGeom prst="ellipse">
+            <a:avLst/>
+          </a:prstGeom>
+          <a:solidFill>
+            <a:srgbClr val="0944A1"/>
+          </a:solidFill>
+          <a:ln>
+            <a:noFill/>
+          </a:ln>
+        </p:spPr>
+        <p:style>
+          <a:lnRef idx="1">
+            <a:schemeClr val="accent1"/>
+          </a:lnRef>
+          <a:fillRef idx="3">
+            <a:schemeClr val="accent1"/>
+          </a:fillRef>
+          <a:effectRef idx="2">
+            <a:schemeClr val="accent1"/>
+          </a:effectRef>
+          <a:fontRef idx="minor">
+            <a:schemeClr val="lt1"/>
+          </a:fontRef>
+        </p:style>
+        <p:txBody>
+          <a:bodyPr rtlCol="0" anchor="ctr"/>
+          <a:lstStyle/>
+          <a:p>
+            <a:pPr algn="ctr"/>
+          </a:p>
+        </p:txBody>
+      </p:sp>
+      <p:sp>
+        <p:nvSpPr>
+          <p:cNvPr id="419" name="TextBox 418"/>
+          <p:cNvSpPr txBox="1"/>
+          <p:nvPr/>
+        </p:nvSpPr>
+        <p:spPr>
+          <a:xfrm>
+            <a:off x="694944" y="4357116"/>
+            <a:ext cx="6729984" cy="324611"/>
+          </a:xfrm>
+          <a:prstGeom prst="rect">
+            <a:avLst/>
+          </a:prstGeom>
+          <a:noFill/>
+        </p:spPr>
+        <p:txBody>
+          <a:bodyPr wrap="square" lIns="82296" rIns="36576" tIns="18288" bIns="18288">
+            <a:normAutofit/>
+          </a:bodyPr>
+          <a:lstStyle/>
+          <a:p>
+            <a:pPr>
+              <a:lnSpc>
+                <a:spcPct val="100000"/>
+              </a:lnSpc>
+              <a:spcBef>
+                <a:spcPts val="0"/>
+              </a:spcBef>
+              <a:spcAft>
+                <a:spcPts val="0"/>
+              </a:spcAft>
+            </a:pPr>
+            <a:r>
+              <a:rPr sz="1250" b="0">
+                <a:solidFill>
+                  <a:srgbClr val="000000"/>
+                </a:solidFill>
+                <a:latin typeface="Montserrat"/>
+              </a:rPr>
+              <a:t>The focused clarification experiment reached Precision=.961; the benchmark question and retrieval baseline remain unchanged.</a:t>
+            </a:r>
+          </a:p>
+        </p:txBody>
+      </p:sp>
+      <p:sp>
+        <p:nvSpPr>
+          <p:cNvPr id="420" name="Oval 419"/>
+          <p:cNvSpPr/>
+          <p:nvPr/>
+        </p:nvSpPr>
+        <p:spPr>
+          <a:xfrm>
+            <a:off x="402336" y="4457700"/>
+            <a:ext cx="192024" cy="192024"/>
+          </a:xfrm>
+          <a:prstGeom prst="ellipse">
+            <a:avLst/>
+          </a:prstGeom>
+          <a:solidFill>
+            <a:srgbClr val="0944A1"/>
+          </a:solidFill>
+          <a:ln>
+            <a:noFill/>
+          </a:ln>
+        </p:spPr>
+        <p:style>
+          <a:lnRef idx="1">
+            <a:schemeClr val="accent1"/>
+          </a:lnRef>
+          <a:fillRef idx="3">
+            <a:schemeClr val="accent1"/>
+          </a:fillRef>
+          <a:effectRef idx="2">
+            <a:schemeClr val="accent1"/>
+          </a:effectRef>
+          <a:fontRef idx="minor">
+            <a:schemeClr val="lt1"/>
+          </a:fontRef>
+        </p:style>
+        <p:txBody>
+          <a:bodyPr rtlCol="0" anchor="ctr"/>
+          <a:lstStyle/>
+          <a:p>
+            <a:pPr algn="ctr"/>
+          </a:p>
+        </p:txBody>
+      </p:sp>
+    </p:spTree>
+  </p:cSld>
+  <p:clrMapOvr>
+    <a:masterClrMapping/>
+  </p:clrMapOvr>
+</p:sld>
+</file>
+
+<file path=ppt/slides/slide31.xml><?xml version="1.0" encoding="utf-8"?>
+<p:sld xmlns:a="http://schemas.openxmlformats.org/drawingml/2006/main" xmlns:r="http://schemas.openxmlformats.org/officeDocument/2006/relationships" xmlns:mc="http://schemas.openxmlformats.org/markup-compatibility/2006" xmlns:mv="urn:schemas-microsoft-com:mac:vml" xmlns:p="http://schemas.openxmlformats.org/presentationml/2006/main" xmlns:c="http://schemas.openxmlformats.org/drawingml/2006/chart" xmlns:dgm="http://schemas.openxmlformats.org/drawingml/2006/diagram" xmlns:o="urn:schemas-microsoft-com:office:office" xmlns:v="urn:schemas-microsoft-com:vml" xmlns:pvml="urn:schemas-microsoft-com:office:powerpoint" xmlns:com="http://schemas.openxmlformats.org/drawingml/2006/compatibility" xmlns:p14="http://schemas.microsoft.com/office/powerpoint/2010/main" xmlns:p15="http://schemas.microsoft.com/office/powerpoint/2012/main" xmlns:ahyp="http://schemas.microsoft.com/office/drawing/2018/hyperlinkcolor">
+  <p:cSld>
+    <p:spTree>
+      <p:nvGrpSpPr>
+        <p:cNvPr id="411" name="Shape 411"/>
+        <p:cNvGrpSpPr/>
+        <p:nvPr/>
+      </p:nvGrpSpPr>
+      <p:grpSpPr>
+        <a:xfrm>
+          <a:off x="0" y="0"/>
+          <a:ext cx="0" cy="0"/>
+          <a:chOff x="0" y="0"/>
+          <a:chExt cx="0" cy="0"/>
+        </a:xfrm>
+      </p:grpSpPr>
+      <p:sp>
+        <p:nvSpPr>
+          <p:cNvPr id="412" name="Google Shape;412;p66"/>
+          <p:cNvSpPr txBox="1"/>
+          <p:nvPr>
+            <p:ph type="title"/>
+          </p:nvPr>
+        </p:nvSpPr>
+        <p:spPr>
+          <a:xfrm>
+            <a:off x="202550" y="289279"/>
+            <a:ext cx="8520600" cy="572700"/>
+          </a:xfrm>
+          <a:prstGeom prst="rect">
+            <a:avLst/>
+          </a:prstGeom>
+          <a:noFill/>
+          <a:ln>
+            <a:noFill/>
+          </a:ln>
+        </p:spPr>
+        <p:txBody>
+          <a:bodyPr anchorCtr="0" anchor="t" bIns="91425" lIns="91425" spcFirstLastPara="1" rIns="91425" wrap="square" tIns="91425">
+            <a:noAutofit/>
+          </a:bodyPr>
+          <a:lstStyle/>
+          <a:p>
+            <a:r>
+              <a:rPr sz="2400" b="1">
+                <a:solidFill>
+                  <a:srgbClr val="0E39A9"/>
+                </a:solidFill>
+                <a:latin typeface="Montserrat"/>
+              </a:rPr>
+              <a:t>Production Readiness and Handoff Notes</a:t>
+            </a:r>
+          </a:p>
+        </p:txBody>
+      </p:sp>
+      <p:sp>
+        <p:nvSpPr>
+          <p:cNvPr id="413" name="Rectangle 412"/>
+          <p:cNvSpPr/>
+          <p:nvPr/>
+        </p:nvSpPr>
+        <p:spPr>
+          <a:xfrm>
+            <a:off x="502920" y="1005840"/>
+            <a:ext cx="8138160" cy="32004"/>
+          </a:xfrm>
+          <a:prstGeom prst="rect">
+            <a:avLst/>
+          </a:prstGeom>
+          <a:solidFill>
+            <a:srgbClr val="0E39A9"/>
+          </a:solidFill>
+          <a:ln>
+            <a:noFill/>
+          </a:ln>
+        </p:spPr>
+        <p:style>
+          <a:lnRef idx="1">
+            <a:schemeClr val="accent1"/>
+          </a:lnRef>
+          <a:fillRef idx="3">
+            <a:schemeClr val="accent1"/>
+          </a:fillRef>
+          <a:effectRef idx="2">
+            <a:schemeClr val="accent1"/>
+          </a:effectRef>
+          <a:fontRef idx="minor">
+            <a:schemeClr val="lt1"/>
+          </a:fontRef>
+        </p:style>
+        <p:txBody>
+          <a:bodyPr rtlCol="0" anchor="ctr"/>
+          <a:lstStyle/>
+          <a:p>
+            <a:pPr algn="ctr"/>
+          </a:p>
+        </p:txBody>
+      </p:sp>
+      <p:sp>
+        <p:nvSpPr>
+          <p:cNvPr id="414" name="TextBox 413"/>
+          <p:cNvSpPr txBox="1"/>
+          <p:nvPr/>
+        </p:nvSpPr>
+        <p:spPr>
+          <a:xfrm>
+            <a:off x="694944" y="1325880"/>
+            <a:ext cx="6729984" cy="745236"/>
+          </a:xfrm>
+          <a:prstGeom prst="rect">
+            <a:avLst/>
+          </a:prstGeom>
+          <a:noFill/>
+        </p:spPr>
+        <p:txBody>
+          <a:bodyPr wrap="square" lIns="82296" rIns="36576" tIns="18288" bIns="18288">
+            <a:normAutofit/>
+          </a:bodyPr>
+          <a:lstStyle/>
+          <a:p>
+            <a:pPr>
+              <a:lnSpc>
+                <a:spcPct val="100000"/>
+              </a:lnSpc>
+              <a:spcBef>
+                <a:spcPts val="0"/>
+              </a:spcBef>
+              <a:spcAft>
+                <a:spcPts val="0"/>
+              </a:spcAft>
+            </a:pPr>
+            <a:r>
+              <a:rPr sz="1300" b="0">
+                <a:solidFill>
+                  <a:srgbClr val="000000"/>
+                </a:solidFill>
+                <a:latin typeface="Montserrat"/>
+              </a:rPr>
+              <a:t>Selected baseline: k=5 with chunk_size=512, overlap=64, MMR lambda=0.50, fetch_k=20, and CrossEncoder reranking.</a:t>
+            </a:r>
+          </a:p>
+        </p:txBody>
+      </p:sp>
+      <p:sp>
+        <p:nvSpPr>
+          <p:cNvPr id="415" name="Oval 414"/>
+          <p:cNvSpPr/>
+          <p:nvPr/>
+        </p:nvSpPr>
+        <p:spPr>
+          <a:xfrm>
+            <a:off x="402336" y="1426464"/>
+            <a:ext cx="192024" cy="192024"/>
+          </a:xfrm>
+          <a:prstGeom prst="ellipse">
+            <a:avLst/>
+          </a:prstGeom>
+          <a:solidFill>
+            <a:srgbClr val="0944A1"/>
+          </a:solidFill>
+          <a:ln>
+            <a:noFill/>
+          </a:ln>
+        </p:spPr>
+        <p:style>
+          <a:lnRef idx="1">
+            <a:schemeClr val="accent1"/>
+          </a:lnRef>
+          <a:fillRef idx="3">
+            <a:schemeClr val="accent1"/>
+          </a:fillRef>
+          <a:effectRef idx="2">
+            <a:schemeClr val="accent1"/>
+          </a:effectRef>
+          <a:fontRef idx="minor">
+            <a:schemeClr val="lt1"/>
+          </a:fontRef>
+        </p:style>
+        <p:txBody>
+          <a:bodyPr rtlCol="0" anchor="ctr"/>
+          <a:lstStyle/>
+          <a:p>
+            <a:pPr algn="ctr"/>
+          </a:p>
+        </p:txBody>
+      </p:sp>
+      <p:sp>
+        <p:nvSpPr>
+          <p:cNvPr id="416" name="TextBox 415"/>
+          <p:cNvSpPr txBox="1"/>
+          <p:nvPr/>
+        </p:nvSpPr>
+        <p:spPr>
+          <a:xfrm>
+            <a:off x="694944" y="2103120"/>
+            <a:ext cx="6729984" cy="512064"/>
+          </a:xfrm>
+          <a:prstGeom prst="rect">
+            <a:avLst/>
+          </a:prstGeom>
+          <a:noFill/>
+        </p:spPr>
+        <p:txBody>
+          <a:bodyPr wrap="square" lIns="82296" rIns="36576" tIns="18288" bIns="18288">
+            <a:normAutofit/>
+          </a:bodyPr>
+          <a:lstStyle/>
+          <a:p>
+            <a:pPr>
+              <a:lnSpc>
+                <a:spcPct val="100000"/>
+              </a:lnSpc>
+              <a:spcBef>
+                <a:spcPts val="0"/>
+              </a:spcBef>
+              <a:spcAft>
+                <a:spcPts val="0"/>
+              </a:spcAft>
+            </a:pPr>
+            <a:r>
+              <a:rPr sz="1300" b="0">
+                <a:solidFill>
+                  <a:srgbClr val="000000"/>
+                </a:solidFill>
+                <a:latin typeface="Montserrat"/>
+              </a:rPr>
+              <a:t>Held-out result: 9/10 cases passed; weighted composite score 0.941.</a:t>
+            </a:r>
+          </a:p>
+        </p:txBody>
+      </p:sp>
+      <p:sp>
+        <p:nvSpPr>
+          <p:cNvPr id="417" name="Oval 416"/>
+          <p:cNvSpPr/>
+          <p:nvPr/>
+        </p:nvSpPr>
+        <p:spPr>
+          <a:xfrm>
+            <a:off x="402336" y="2203703"/>
+            <a:ext cx="192024" cy="192024"/>
+          </a:xfrm>
+          <a:prstGeom prst="ellipse">
+            <a:avLst/>
+          </a:prstGeom>
+          <a:solidFill>
+            <a:srgbClr val="0944A1"/>
+          </a:solidFill>
+          <a:ln>
+            <a:noFill/>
+          </a:ln>
+        </p:spPr>
+        <p:style>
+          <a:lnRef idx="1">
+            <a:schemeClr val="accent1"/>
+          </a:lnRef>
+          <a:fillRef idx="3">
+            <a:schemeClr val="accent1"/>
+          </a:fillRef>
+          <a:effectRef idx="2">
+            <a:schemeClr val="accent1"/>
+          </a:effectRef>
+          <a:fontRef idx="minor">
+            <a:schemeClr val="lt1"/>
+          </a:fontRef>
+        </p:style>
+        <p:txBody>
+          <a:bodyPr rtlCol="0" anchor="ctr"/>
+          <a:lstStyle/>
+          <a:p>
+            <a:pPr algn="ctr"/>
+          </a:p>
+        </p:txBody>
+      </p:sp>
+      <p:sp>
+        <p:nvSpPr>
+          <p:cNvPr id="418" name="TextBox 417"/>
+          <p:cNvSpPr txBox="1"/>
+          <p:nvPr/>
+        </p:nvSpPr>
+        <p:spPr>
+          <a:xfrm>
+            <a:off x="694944" y="2647188"/>
+            <a:ext cx="6729984" cy="512064"/>
+          </a:xfrm>
+          <a:prstGeom prst="rect">
+            <a:avLst/>
+          </a:prstGeom>
+          <a:noFill/>
+        </p:spPr>
+        <p:txBody>
+          <a:bodyPr wrap="square" lIns="82296" rIns="36576" tIns="18288" bIns="18288">
+            <a:normAutofit/>
+          </a:bodyPr>
+          <a:lstStyle/>
+          <a:p>
+            <a:pPr>
+              <a:lnSpc>
+                <a:spcPct val="100000"/>
+              </a:lnSpc>
+              <a:spcBef>
+                <a:spcPts val="0"/>
+              </a:spcBef>
+              <a:spcAft>
+                <a:spcPts val="0"/>
+              </a:spcAft>
+            </a:pPr>
+            <a:r>
+              <a:rPr sz="1300" b="0">
+                <a:solidFill>
+                  <a:srgbClr val="000000"/>
+                </a:solidFill>
+                <a:latin typeface="Montserrat"/>
+              </a:rPr>
+              <a:t>The application is runnable through the Flask backend and Streamlit frontend, locally or in GitHub Codespaces.</a:t>
+            </a:r>
+          </a:p>
+        </p:txBody>
+      </p:sp>
+      <p:sp>
+        <p:nvSpPr>
+          <p:cNvPr id="419" name="Oval 418"/>
+          <p:cNvSpPr/>
+          <p:nvPr/>
+        </p:nvSpPr>
+        <p:spPr>
+          <a:xfrm>
+            <a:off x="402336" y="2747772"/>
+            <a:ext cx="192024" cy="192024"/>
+          </a:xfrm>
+          <a:prstGeom prst="ellipse">
+            <a:avLst/>
+          </a:prstGeom>
+          <a:solidFill>
+            <a:srgbClr val="0944A1"/>
+          </a:solidFill>
+          <a:ln>
+            <a:noFill/>
+          </a:ln>
+        </p:spPr>
+        <p:style>
+          <a:lnRef idx="1">
+            <a:schemeClr val="accent1"/>
+          </a:lnRef>
+          <a:fillRef idx="3">
+            <a:schemeClr val="accent1"/>
+          </a:fillRef>
+          <a:effectRef idx="2">
+            <a:schemeClr val="accent1"/>
+          </a:effectRef>
+          <a:fontRef idx="minor">
+            <a:schemeClr val="lt1"/>
+          </a:fontRef>
+        </p:style>
+        <p:txBody>
+          <a:bodyPr rtlCol="0" anchor="ctr"/>
+          <a:lstStyle/>
+          <a:p>
+            <a:pPr algn="ctr"/>
+          </a:p>
+        </p:txBody>
+      </p:sp>
+      <p:sp>
+        <p:nvSpPr>
+          <p:cNvPr id="420" name="TextBox 419"/>
+          <p:cNvSpPr txBox="1"/>
+          <p:nvPr/>
+        </p:nvSpPr>
+        <p:spPr>
+          <a:xfrm>
+            <a:off x="694944" y="3191256"/>
+            <a:ext cx="6729984" cy="745236"/>
+          </a:xfrm>
+          <a:prstGeom prst="rect">
+            <a:avLst/>
+          </a:prstGeom>
+          <a:noFill/>
+        </p:spPr>
+        <p:txBody>
+          <a:bodyPr wrap="square" lIns="82296" rIns="36576" tIns="18288" bIns="18288">
+            <a:normAutofit/>
+          </a:bodyPr>
+          <a:lstStyle/>
+          <a:p>
+            <a:pPr>
+              <a:lnSpc>
+                <a:spcPct val="100000"/>
+              </a:lnSpc>
+              <a:spcBef>
+                <a:spcPts val="0"/>
+              </a:spcBef>
+              <a:spcAft>
+                <a:spcPts val="0"/>
+              </a:spcAft>
+            </a:pPr>
+            <a:r>
+              <a:rPr sz="1300" b="0">
+                <a:solidFill>
+                  <a:srgbClr val="000000"/>
+                </a:solidFill>
+                <a:latin typeface="Montserrat"/>
+              </a:rPr>
+              <a:t>Keep the benchmark question unchanged for evaluation; treat the remaining precision issue as a question/auto-answer limitation.</a:t>
+            </a:r>
+          </a:p>
+        </p:txBody>
+      </p:sp>
+      <p:sp>
+        <p:nvSpPr>
+          <p:cNvPr id="421" name="Oval 420"/>
+          <p:cNvSpPr/>
+          <p:nvPr/>
+        </p:nvSpPr>
+        <p:spPr>
+          <a:xfrm>
+            <a:off x="402336" y="3291840"/>
+            <a:ext cx="192024" cy="192024"/>
+          </a:xfrm>
+          <a:prstGeom prst="ellipse">
+            <a:avLst/>
+          </a:prstGeom>
+          <a:solidFill>
+            <a:srgbClr val="0944A1"/>
+          </a:solidFill>
+          <a:ln>
+            <a:noFill/>
+          </a:ln>
+        </p:spPr>
+        <p:style>
+          <a:lnRef idx="1">
+            <a:schemeClr val="accent1"/>
+          </a:lnRef>
+          <a:fillRef idx="3">
+            <a:schemeClr val="accent1"/>
+          </a:fillRef>
+          <a:effectRef idx="2">
+            <a:schemeClr val="accent1"/>
+          </a:effectRef>
+          <a:fontRef idx="minor">
+            <a:schemeClr val="lt1"/>
+          </a:fontRef>
+        </p:style>
+        <p:txBody>
+          <a:bodyPr rtlCol="0" anchor="ctr"/>
+          <a:lstStyle/>
+          <a:p>
+            <a:pPr algn="ctr"/>
+          </a:p>
+        </p:txBody>
+      </p:sp>
+      <p:sp>
+        <p:nvSpPr>
+          <p:cNvPr id="422" name="TextBox 421"/>
+          <p:cNvSpPr txBox="1"/>
+          <p:nvPr/>
+        </p:nvSpPr>
+        <p:spPr>
+          <a:xfrm>
+            <a:off x="694944" y="3968496"/>
+            <a:ext cx="6729984" cy="713232"/>
+          </a:xfrm>
+          <a:prstGeom prst="rect">
+            <a:avLst/>
+          </a:prstGeom>
+          <a:noFill/>
+        </p:spPr>
+        <p:txBody>
+          <a:bodyPr wrap="square" lIns="82296" rIns="36576" tIns="18288" bIns="18288">
+            <a:normAutofit/>
+          </a:bodyPr>
+          <a:lstStyle/>
+          <a:p>
+            <a:pPr>
+              <a:lnSpc>
+                <a:spcPct val="100000"/>
+              </a:lnSpc>
+              <a:spcBef>
+                <a:spcPts val="0"/>
+              </a:spcBef>
+              <a:spcAft>
+                <a:spcPts val="0"/>
+              </a:spcAft>
+            </a:pPr>
+            <a:r>
+              <a:rPr sz="1300" b="0">
+                <a:solidFill>
+                  <a:srgbClr val="000000"/>
+                </a:solidFill>
+                <a:latin typeface="Montserrat"/>
+              </a:rPr>
+              <a:t>Next operational step: add monitoring for insufficient context and review the single known failure before broader rollout.</a:t>
+            </a:r>
+          </a:p>
+        </p:txBody>
+      </p:sp>
+      <p:sp>
+        <p:nvSpPr>
+          <p:cNvPr id="423" name="Oval 422"/>
+          <p:cNvSpPr/>
+          <p:nvPr/>
+        </p:nvSpPr>
+        <p:spPr>
+          <a:xfrm>
+            <a:off x="402336" y="4069080"/>
+            <a:ext cx="192024" cy="192024"/>
+          </a:xfrm>
+          <a:prstGeom prst="ellipse">
+            <a:avLst/>
+          </a:prstGeom>
+          <a:solidFill>
+            <a:srgbClr val="0944A1"/>
+          </a:solidFill>
+          <a:ln>
+            <a:noFill/>
+          </a:ln>
+        </p:spPr>
+        <p:style>
+          <a:lnRef idx="1">
+            <a:schemeClr val="accent1"/>
+          </a:lnRef>
+          <a:fillRef idx="3">
+            <a:schemeClr val="accent1"/>
+          </a:fillRef>
+          <a:effectRef idx="2">
+            <a:schemeClr val="accent1"/>
+          </a:effectRef>
+          <a:fontRef idx="minor">
+            <a:schemeClr val="lt1"/>
+          </a:fontRef>
+        </p:style>
+        <p:txBody>
+          <a:bodyPr rtlCol="0" anchor="ctr"/>
+          <a:lstStyle/>
+          <a:p>
+            <a:pPr algn="ctr"/>
+          </a:p>
+        </p:txBody>
+      </p:sp>
+      <p:sp>
+        <p:nvSpPr>
+          <p:cNvPr id="424" name="TextBox 423"/>
+          <p:cNvSpPr txBox="1"/>
+          <p:nvPr/>
+        </p:nvSpPr>
+        <p:spPr>
+          <a:xfrm>
+            <a:off x="694944" y="4713732"/>
+            <a:ext cx="6729984" cy="182880"/>
+          </a:xfrm>
+          <a:prstGeom prst="rect">
+            <a:avLst/>
+          </a:prstGeom>
+          <a:noFill/>
+        </p:spPr>
+        <p:txBody>
+          <a:bodyPr wrap="square" lIns="82296" rIns="36576" tIns="18288" bIns="18288">
+            <a:normAutofit/>
+          </a:bodyPr>
+          <a:lstStyle/>
+          <a:p>
+            <a:pPr>
+              <a:lnSpc>
+                <a:spcPct val="100000"/>
+              </a:lnSpc>
+              <a:spcBef>
+                <a:spcPts val="0"/>
+              </a:spcBef>
+              <a:spcAft>
+                <a:spcPts val="0"/>
+              </a:spcAft>
+            </a:pPr>
+            <a:r>
+              <a:rPr sz="1300" b="0">
+                <a:solidFill>
+                  <a:srgbClr val="000000"/>
+                </a:solidFill>
+                <a:latin typeface="Montserrat"/>
+              </a:rPr>
+              <a:t>Handoff owner: raovutukoor1/aurora-stay-qna.</a:t>
+            </a:r>
+          </a:p>
+        </p:txBody>
+      </p:sp>
+      <p:sp>
+        <p:nvSpPr>
+          <p:cNvPr id="425" name="Oval 424"/>
+          <p:cNvSpPr/>
+          <p:nvPr/>
+        </p:nvSpPr>
+        <p:spPr>
+          <a:xfrm>
+            <a:off x="402336" y="4814316"/>
+            <a:ext cx="192024" cy="192024"/>
+          </a:xfrm>
+          <a:prstGeom prst="ellipse">
+            <a:avLst/>
+          </a:prstGeom>
+          <a:solidFill>
+            <a:srgbClr val="0944A1"/>
+          </a:solidFill>
+          <a:ln>
+            <a:noFill/>
+          </a:ln>
+        </p:spPr>
+        <p:style>
+          <a:lnRef idx="1">
+            <a:schemeClr val="accent1"/>
+          </a:lnRef>
+          <a:fillRef idx="3">
+            <a:schemeClr val="accent1"/>
+          </a:fillRef>
+          <a:effectRef idx="2">
+            <a:schemeClr val="accent1"/>
+          </a:effectRef>
+          <a:fontRef idx="minor">
+            <a:schemeClr val="lt1"/>
+          </a:fontRef>
+        </p:style>
+        <p:txBody>
+          <a:bodyPr rtlCol="0" anchor="ctr"/>
+          <a:lstStyle/>
+          <a:p>
+            <a:pPr algn="ctr"/>
+          </a:p>
+        </p:txBody>
+      </p:sp>
+    </p:spTree>
+  </p:cSld>
+  <p:clrMapOvr>
+    <a:masterClrMapping/>
+  </p:clrMapOvr>
+</p:sld>
+</file>
+
 <file path=ppt/slides/slide4.xml><?xml version="1.0" encoding="utf-8"?>
 <p:sld xmlns:a="http://schemas.openxmlformats.org/drawingml/2006/main" xmlns:r="http://schemas.openxmlformats.org/officeDocument/2006/relationships" xmlns:mc="http://schemas.openxmlformats.org/markup-compatibility/2006" xmlns:mv="urn:schemas-microsoft-com:mac:vml" xmlns:p="http://schemas.openxmlformats.org/presentationml/2006/main" xmlns:c="http://schemas.openxmlformats.org/drawingml/2006/chart" xmlns:dgm="http://schemas.openxmlformats.org/drawingml/2006/diagram" xmlns:o="urn:schemas-microsoft-com:office:office" xmlns:v="urn:schemas-microsoft-com:vml" xmlns:pvml="urn:schemas-microsoft-com:office:powerpoint" xmlns:com="http://schemas.openxmlformats.org/drawingml/2006/compatibility" xmlns:p14="http://schemas.microsoft.com/office/powerpoint/2010/main" xmlns:p15="http://schemas.microsoft.com/office/powerpoint/2012/main" xmlns:ahyp="http://schemas.microsoft.com/office/drawing/2018/hyperlinkcolor">
   <p:cSld>
@@ -38305,7 +46901,7 @@
           <a:lstStyle/>
           <a:p>
             <a:r>
-              <a:rPr sz="2400" b="1">
+              <a:rPr sz="2200" b="1">
                 <a:solidFill>
                   <a:srgbClr val="0E39A9"/>
                 </a:solidFill>

--- a/presentations/Aurora_Stays_RAG_Project_Presentation_Template_Style.pptx
+++ b/presentations/Aurora_Stays_RAG_Project_Presentation_Template_Style.pptx
@@ -32450,7 +32450,7 @@
         <p:spPr>
           <a:xfrm>
             <a:off x="1627632" y="2586175"/>
-            <a:ext cx="2194560" cy="523200"/>
+            <a:ext cx="3840480" cy="523200"/>
           </a:xfrm>
           <a:prstGeom prst="rect">
             <a:avLst/>

--- a/presentations/Aurora_Stays_RAG_Project_Presentation_Template_Style.pptx
+++ b/presentations/Aurora_Stays_RAG_Project_Presentation_Template_Style.pptx
@@ -32531,7 +32531,7 @@
           <a:lstStyle/>
           <a:p>
             <a:r>
-              <a:rPr sz="2400" b="1">
+              <a:rPr sz="2200" b="1">
                 <a:solidFill>
                   <a:srgbClr val="0E39A9"/>
                 </a:solidFill>
@@ -32594,7 +32594,7 @@
         <p:spPr>
           <a:xfrm>
             <a:off x="694944" y="1325880"/>
-            <a:ext cx="6729984" cy="512064"/>
+            <a:ext cx="6729984" cy="448056"/>
           </a:xfrm>
           <a:prstGeom prst="rect">
             <a:avLst/>
@@ -32619,7 +32619,7 @@
               </a:spcAft>
             </a:pPr>
             <a:r>
-              <a:rPr sz="1550" b="0">
+              <a:rPr sz="1350" b="0">
                 <a:solidFill>
                   <a:srgbClr val="000000"/>
                 </a:solidFill>
@@ -32681,8 +32681,8 @@
         </p:nvSpPr>
         <p:spPr>
           <a:xfrm>
-            <a:off x="694944" y="1869948"/>
-            <a:ext cx="6729984" cy="512064"/>
+            <a:off x="694944" y="1805940"/>
+            <a:ext cx="6729984" cy="448056"/>
           </a:xfrm>
           <a:prstGeom prst="rect">
             <a:avLst/>
@@ -32707,7 +32707,7 @@
               </a:spcAft>
             </a:pPr>
             <a:r>
-              <a:rPr sz="1550" b="0">
+              <a:rPr sz="1350" b="0">
                 <a:solidFill>
                   <a:srgbClr val="000000"/>
                 </a:solidFill>
@@ -32726,7 +32726,7 @@
         </p:nvSpPr>
         <p:spPr>
           <a:xfrm>
-            <a:off x="402336" y="1970531"/>
+            <a:off x="402336" y="1906524"/>
             <a:ext cx="192024" cy="192024"/>
           </a:xfrm>
           <a:prstGeom prst="ellipse">
@@ -32769,8 +32769,8 @@
         </p:nvSpPr>
         <p:spPr>
           <a:xfrm>
-            <a:off x="694944" y="2414016"/>
-            <a:ext cx="6729984" cy="512064"/>
+            <a:off x="694944" y="2286000"/>
+            <a:ext cx="6729984" cy="448056"/>
           </a:xfrm>
           <a:prstGeom prst="rect">
             <a:avLst/>
@@ -32795,7 +32795,7 @@
               </a:spcAft>
             </a:pPr>
             <a:r>
-              <a:rPr sz="1550" b="0">
+              <a:rPr sz="1350" b="0">
                 <a:solidFill>
                   <a:srgbClr val="000000"/>
                 </a:solidFill>
@@ -32814,7 +32814,7 @@
         </p:nvSpPr>
         <p:spPr>
           <a:xfrm>
-            <a:off x="402336" y="2514600"/>
+            <a:off x="402336" y="2386584"/>
             <a:ext cx="192024" cy="192024"/>
           </a:xfrm>
           <a:prstGeom prst="ellipse">
@@ -32857,8 +32857,8 @@
         </p:nvSpPr>
         <p:spPr>
           <a:xfrm>
-            <a:off x="694944" y="2958084"/>
-            <a:ext cx="6729984" cy="278892"/>
+            <a:off x="694944" y="2766060"/>
+            <a:ext cx="6729984" cy="256032"/>
           </a:xfrm>
           <a:prstGeom prst="rect">
             <a:avLst/>
@@ -32883,7 +32883,7 @@
               </a:spcAft>
             </a:pPr>
             <a:r>
-              <a:rPr sz="1600" b="1">
+              <a:rPr sz="1350" b="1">
                 <a:solidFill>
                   <a:srgbClr val="0E39A9"/>
                 </a:solidFill>
@@ -32902,8 +32902,8 @@
         </p:nvSpPr>
         <p:spPr>
           <a:xfrm>
-            <a:off x="694944" y="3268980"/>
-            <a:ext cx="6729984" cy="278892"/>
+            <a:off x="694944" y="3054096"/>
+            <a:ext cx="6729984" cy="256032"/>
           </a:xfrm>
           <a:prstGeom prst="rect">
             <a:avLst/>
@@ -32928,7 +32928,7 @@
               </a:spcAft>
             </a:pPr>
             <a:r>
-              <a:rPr sz="1550" b="0">
+              <a:rPr sz="1350" b="0">
                 <a:solidFill>
                   <a:srgbClr val="000000"/>
                 </a:solidFill>
@@ -32947,7 +32947,7 @@
         </p:nvSpPr>
         <p:spPr>
           <a:xfrm>
-            <a:off x="402336" y="3369564"/>
+            <a:off x="402336" y="3154679"/>
             <a:ext cx="192024" cy="192024"/>
           </a:xfrm>
           <a:prstGeom prst="ellipse">
@@ -32990,8 +32990,8 @@
         </p:nvSpPr>
         <p:spPr>
           <a:xfrm>
-            <a:off x="694944" y="3579876"/>
-            <a:ext cx="6729984" cy="278892"/>
+            <a:off x="694944" y="3342132"/>
+            <a:ext cx="6729984" cy="256032"/>
           </a:xfrm>
           <a:prstGeom prst="rect">
             <a:avLst/>
@@ -33016,7 +33016,7 @@
               </a:spcAft>
             </a:pPr>
             <a:r>
-              <a:rPr sz="1550" b="0">
+              <a:rPr sz="1350" b="0">
                 <a:solidFill>
                   <a:srgbClr val="000000"/>
                 </a:solidFill>
@@ -33035,7 +33035,7 @@
         </p:nvSpPr>
         <p:spPr>
           <a:xfrm>
-            <a:off x="402336" y="3680460"/>
+            <a:off x="402336" y="3442715"/>
             <a:ext cx="192024" cy="192024"/>
           </a:xfrm>
           <a:prstGeom prst="ellipse">
@@ -33078,8 +33078,8 @@
         </p:nvSpPr>
         <p:spPr>
           <a:xfrm>
-            <a:off x="694944" y="3890772"/>
-            <a:ext cx="6729984" cy="512064"/>
+            <a:off x="694944" y="3630168"/>
+            <a:ext cx="6729984" cy="448056"/>
           </a:xfrm>
           <a:prstGeom prst="rect">
             <a:avLst/>
@@ -33104,7 +33104,7 @@
               </a:spcAft>
             </a:pPr>
             <a:r>
-              <a:rPr sz="1550" b="0">
+              <a:rPr sz="1350" b="0">
                 <a:solidFill>
                   <a:srgbClr val="000000"/>
                 </a:solidFill>
@@ -33123,7 +33123,7 @@
         </p:nvSpPr>
         <p:spPr>
           <a:xfrm>
-            <a:off x="402336" y="3991356"/>
+            <a:off x="402336" y="3730752"/>
             <a:ext cx="192024" cy="192024"/>
           </a:xfrm>
           <a:prstGeom prst="ellipse">
@@ -33211,7 +33211,7 @@
           <a:lstStyle/>
           <a:p>
             <a:r>
-              <a:rPr sz="2400" b="1">
+              <a:rPr sz="2200" b="1">
                 <a:solidFill>
                   <a:srgbClr val="0E39A9"/>
                 </a:solidFill>
@@ -33274,7 +33274,7 @@
         <p:spPr>
           <a:xfrm>
             <a:off x="694944" y="1325880"/>
-            <a:ext cx="6729984" cy="278892"/>
+            <a:ext cx="6729984" cy="256032"/>
           </a:xfrm>
           <a:prstGeom prst="rect">
             <a:avLst/>
@@ -33299,7 +33299,7 @@
               </a:spcAft>
             </a:pPr>
             <a:r>
-              <a:rPr sz="1700" b="0">
+              <a:rPr sz="1350" b="0">
                 <a:solidFill>
                   <a:srgbClr val="000000"/>
                 </a:solidFill>
@@ -33361,8 +33361,8 @@
         </p:nvSpPr>
         <p:spPr>
           <a:xfrm>
-            <a:off x="694944" y="1636776"/>
-            <a:ext cx="6729984" cy="278892"/>
+            <a:off x="694944" y="1613916"/>
+            <a:ext cx="6729984" cy="256032"/>
           </a:xfrm>
           <a:prstGeom prst="rect">
             <a:avLst/>
@@ -33387,7 +33387,7 @@
               </a:spcAft>
             </a:pPr>
             <a:r>
-              <a:rPr sz="1700" b="0">
+              <a:rPr sz="1350" b="0">
                 <a:solidFill>
                   <a:srgbClr val="000000"/>
                 </a:solidFill>
@@ -33406,7 +33406,7 @@
         </p:nvSpPr>
         <p:spPr>
           <a:xfrm>
-            <a:off x="402336" y="1737360"/>
+            <a:off x="402336" y="1714500"/>
             <a:ext cx="192024" cy="192024"/>
           </a:xfrm>
           <a:prstGeom prst="ellipse">
@@ -33449,8 +33449,8 @@
         </p:nvSpPr>
         <p:spPr>
           <a:xfrm>
-            <a:off x="694944" y="1947672"/>
-            <a:ext cx="6729984" cy="278892"/>
+            <a:off x="694944" y="1901952"/>
+            <a:ext cx="6729984" cy="256032"/>
           </a:xfrm>
           <a:prstGeom prst="rect">
             <a:avLst/>
@@ -33475,7 +33475,7 @@
               </a:spcAft>
             </a:pPr>
             <a:r>
-              <a:rPr sz="1700" b="0">
+              <a:rPr sz="1350" b="0">
                 <a:solidFill>
                   <a:srgbClr val="000000"/>
                 </a:solidFill>
@@ -33494,7 +33494,7 @@
         </p:nvSpPr>
         <p:spPr>
           <a:xfrm>
-            <a:off x="402336" y="2048255"/>
+            <a:off x="402336" y="2002536"/>
             <a:ext cx="192024" cy="192024"/>
           </a:xfrm>
           <a:prstGeom prst="ellipse">
@@ -33537,8 +33537,8 @@
         </p:nvSpPr>
         <p:spPr>
           <a:xfrm>
-            <a:off x="694944" y="2258568"/>
-            <a:ext cx="6729984" cy="512064"/>
+            <a:off x="694944" y="2189988"/>
+            <a:ext cx="6729984" cy="448056"/>
           </a:xfrm>
           <a:prstGeom prst="rect">
             <a:avLst/>
@@ -33563,7 +33563,7 @@
               </a:spcAft>
             </a:pPr>
             <a:r>
-              <a:rPr sz="1700" b="0">
+              <a:rPr sz="1350" b="0">
                 <a:solidFill>
                   <a:srgbClr val="000000"/>
                 </a:solidFill>
@@ -33582,7 +33582,7 @@
         </p:nvSpPr>
         <p:spPr>
           <a:xfrm>
-            <a:off x="402336" y="2359151"/>
+            <a:off x="402336" y="2290572"/>
             <a:ext cx="192024" cy="192024"/>
           </a:xfrm>
           <a:prstGeom prst="ellipse">
@@ -33625,8 +33625,8 @@
         </p:nvSpPr>
         <p:spPr>
           <a:xfrm>
-            <a:off x="694944" y="2802636"/>
-            <a:ext cx="6729984" cy="512064"/>
+            <a:off x="694944" y="2670048"/>
+            <a:ext cx="6729984" cy="448056"/>
           </a:xfrm>
           <a:prstGeom prst="rect">
             <a:avLst/>
@@ -33651,7 +33651,7 @@
               </a:spcAft>
             </a:pPr>
             <a:r>
-              <a:rPr sz="1700" b="0">
+              <a:rPr sz="1350" b="0">
                 <a:solidFill>
                   <a:srgbClr val="000000"/>
                 </a:solidFill>
@@ -33670,7 +33670,7 @@
         </p:nvSpPr>
         <p:spPr>
           <a:xfrm>
-            <a:off x="402336" y="2903220"/>
+            <a:off x="402336" y="2770632"/>
             <a:ext cx="192024" cy="192024"/>
           </a:xfrm>
           <a:prstGeom prst="ellipse">
@@ -33758,7 +33758,7 @@
           <a:lstStyle/>
           <a:p>
             <a:r>
-              <a:rPr sz="2400" b="1">
+              <a:rPr sz="2200" b="1">
                 <a:solidFill>
                   <a:srgbClr val="0E39A9"/>
                 </a:solidFill>
@@ -33821,7 +33821,7 @@
         <p:spPr>
           <a:xfrm>
             <a:off x="694944" y="1325880"/>
-            <a:ext cx="6729984" cy="512064"/>
+            <a:ext cx="6729984" cy="256032"/>
           </a:xfrm>
           <a:prstGeom prst="rect">
             <a:avLst/>
@@ -33846,7 +33846,7 @@
               </a:spcAft>
             </a:pPr>
             <a:r>
-              <a:rPr sz="1400" b="0">
+              <a:rPr sz="1350" b="0">
                 <a:solidFill>
                   <a:srgbClr val="000000"/>
                 </a:solidFill>
@@ -33908,8 +33908,8 @@
         </p:nvSpPr>
         <p:spPr>
           <a:xfrm>
-            <a:off x="694944" y="1869948"/>
-            <a:ext cx="6729984" cy="512064"/>
+            <a:off x="694944" y="1613916"/>
+            <a:ext cx="6729984" cy="448056"/>
           </a:xfrm>
           <a:prstGeom prst="rect">
             <a:avLst/>
@@ -33934,7 +33934,7 @@
               </a:spcAft>
             </a:pPr>
             <a:r>
-              <a:rPr sz="1400" b="0">
+              <a:rPr sz="1350" b="0">
                 <a:solidFill>
                   <a:srgbClr val="000000"/>
                 </a:solidFill>
@@ -33953,7 +33953,7 @@
         </p:nvSpPr>
         <p:spPr>
           <a:xfrm>
-            <a:off x="402336" y="1970531"/>
+            <a:off x="402336" y="1714500"/>
             <a:ext cx="192024" cy="192024"/>
           </a:xfrm>
           <a:prstGeom prst="ellipse">
@@ -33996,8 +33996,8 @@
         </p:nvSpPr>
         <p:spPr>
           <a:xfrm>
-            <a:off x="694944" y="2414016"/>
-            <a:ext cx="6729984" cy="512064"/>
+            <a:off x="694944" y="2093976"/>
+            <a:ext cx="6729984" cy="448056"/>
           </a:xfrm>
           <a:prstGeom prst="rect">
             <a:avLst/>
@@ -34022,7 +34022,7 @@
               </a:spcAft>
             </a:pPr>
             <a:r>
-              <a:rPr sz="1400" b="0">
+              <a:rPr sz="1350" b="0">
                 <a:solidFill>
                   <a:srgbClr val="000000"/>
                 </a:solidFill>
@@ -34041,7 +34041,7 @@
         </p:nvSpPr>
         <p:spPr>
           <a:xfrm>
-            <a:off x="402336" y="2514600"/>
+            <a:off x="402336" y="2194560"/>
             <a:ext cx="192024" cy="192024"/>
           </a:xfrm>
           <a:prstGeom prst="ellipse">
@@ -34084,8 +34084,8 @@
         </p:nvSpPr>
         <p:spPr>
           <a:xfrm>
-            <a:off x="694944" y="2958084"/>
-            <a:ext cx="6729984" cy="512064"/>
+            <a:off x="694944" y="2574036"/>
+            <a:ext cx="6729984" cy="448056"/>
           </a:xfrm>
           <a:prstGeom prst="rect">
             <a:avLst/>
@@ -34110,7 +34110,7 @@
               </a:spcAft>
             </a:pPr>
             <a:r>
-              <a:rPr sz="1400" b="0">
+              <a:rPr sz="1350" b="0">
                 <a:solidFill>
                   <a:srgbClr val="000000"/>
                 </a:solidFill>
@@ -34129,7 +34129,7 @@
         </p:nvSpPr>
         <p:spPr>
           <a:xfrm>
-            <a:off x="402336" y="3058668"/>
+            <a:off x="402336" y="2674620"/>
             <a:ext cx="192024" cy="192024"/>
           </a:xfrm>
           <a:prstGeom prst="ellipse">
@@ -34172,8 +34172,8 @@
         </p:nvSpPr>
         <p:spPr>
           <a:xfrm>
-            <a:off x="694944" y="3502152"/>
-            <a:ext cx="6729984" cy="745236"/>
+            <a:off x="694944" y="3054096"/>
+            <a:ext cx="6729984" cy="649224"/>
           </a:xfrm>
           <a:prstGeom prst="rect">
             <a:avLst/>
@@ -34198,7 +34198,7 @@
               </a:spcAft>
             </a:pPr>
             <a:r>
-              <a:rPr sz="1400" b="0">
+              <a:rPr sz="1350" b="0">
                 <a:solidFill>
                   <a:srgbClr val="000000"/>
                 </a:solidFill>
@@ -34217,7 +34217,7 @@
         </p:nvSpPr>
         <p:spPr>
           <a:xfrm>
-            <a:off x="402336" y="3602736"/>
+            <a:off x="402336" y="3154679"/>
             <a:ext cx="192024" cy="192024"/>
           </a:xfrm>
           <a:prstGeom prst="ellipse">
@@ -34260,8 +34260,8 @@
         </p:nvSpPr>
         <p:spPr>
           <a:xfrm>
-            <a:off x="694944" y="4279392"/>
-            <a:ext cx="6729984" cy="402335"/>
+            <a:off x="694944" y="3735324"/>
+            <a:ext cx="6729984" cy="448056"/>
           </a:xfrm>
           <a:prstGeom prst="rect">
             <a:avLst/>
@@ -34286,7 +34286,7 @@
               </a:spcAft>
             </a:pPr>
             <a:r>
-              <a:rPr sz="1400" b="0">
+              <a:rPr sz="1350" b="0">
                 <a:solidFill>
                   <a:srgbClr val="000000"/>
                 </a:solidFill>
@@ -34305,7 +34305,7 @@
         </p:nvSpPr>
         <p:spPr>
           <a:xfrm>
-            <a:off x="402336" y="4379976"/>
+            <a:off x="402336" y="3835908"/>
             <a:ext cx="192024" cy="192024"/>
           </a:xfrm>
           <a:prstGeom prst="ellipse">
@@ -34393,7 +34393,7 @@
           <a:lstStyle/>
           <a:p>
             <a:r>
-              <a:rPr sz="2400" b="1">
+              <a:rPr sz="2200" b="1">
                 <a:solidFill>
                   <a:srgbClr val="0E39A9"/>
                 </a:solidFill>
@@ -34456,7 +34456,7 @@
         <p:spPr>
           <a:xfrm>
             <a:off x="694944" y="1325880"/>
-            <a:ext cx="6729984" cy="512064"/>
+            <a:ext cx="6729984" cy="448056"/>
           </a:xfrm>
           <a:prstGeom prst="rect">
             <a:avLst/>
@@ -34481,7 +34481,7 @@
               </a:spcAft>
             </a:pPr>
             <a:r>
-              <a:rPr sz="1550" b="0">
+              <a:rPr sz="1350" b="0">
                 <a:solidFill>
                   <a:srgbClr val="000000"/>
                 </a:solidFill>
@@ -34543,8 +34543,8 @@
         </p:nvSpPr>
         <p:spPr>
           <a:xfrm>
-            <a:off x="694944" y="1869948"/>
-            <a:ext cx="6729984" cy="512064"/>
+            <a:off x="694944" y="1805940"/>
+            <a:ext cx="6729984" cy="448056"/>
           </a:xfrm>
           <a:prstGeom prst="rect">
             <a:avLst/>
@@ -34569,7 +34569,7 @@
               </a:spcAft>
             </a:pPr>
             <a:r>
-              <a:rPr sz="1550" b="0">
+              <a:rPr sz="1350" b="0">
                 <a:solidFill>
                   <a:srgbClr val="000000"/>
                 </a:solidFill>
@@ -34588,7 +34588,7 @@
         </p:nvSpPr>
         <p:spPr>
           <a:xfrm>
-            <a:off x="402336" y="1970531"/>
+            <a:off x="402336" y="1906524"/>
             <a:ext cx="192024" cy="192024"/>
           </a:xfrm>
           <a:prstGeom prst="ellipse">
@@ -34631,8 +34631,8 @@
         </p:nvSpPr>
         <p:spPr>
           <a:xfrm>
-            <a:off x="694944" y="2414016"/>
-            <a:ext cx="6729984" cy="1211580"/>
+            <a:off x="694944" y="2286000"/>
+            <a:ext cx="6729984" cy="850392"/>
           </a:xfrm>
           <a:prstGeom prst="rect">
             <a:avLst/>
@@ -34657,7 +34657,7 @@
               </a:spcAft>
             </a:pPr>
             <a:r>
-              <a:rPr sz="1550" b="0">
+              <a:rPr sz="1350" b="0">
                 <a:solidFill>
                   <a:srgbClr val="000000"/>
                 </a:solidFill>
@@ -34676,7 +34676,7 @@
         </p:nvSpPr>
         <p:spPr>
           <a:xfrm>
-            <a:off x="402336" y="2514600"/>
+            <a:off x="402336" y="2386584"/>
             <a:ext cx="192024" cy="192024"/>
           </a:xfrm>
           <a:prstGeom prst="ellipse">
@@ -34719,8 +34719,8 @@
         </p:nvSpPr>
         <p:spPr>
           <a:xfrm>
-            <a:off x="694944" y="3657600"/>
-            <a:ext cx="6729984" cy="512064"/>
+            <a:off x="694944" y="3168396"/>
+            <a:ext cx="6729984" cy="448056"/>
           </a:xfrm>
           <a:prstGeom prst="rect">
             <a:avLst/>
@@ -34745,7 +34745,7 @@
               </a:spcAft>
             </a:pPr>
             <a:r>
-              <a:rPr sz="1550" b="0">
+              <a:rPr sz="1350" b="0">
                 <a:solidFill>
                   <a:srgbClr val="000000"/>
                 </a:solidFill>
@@ -34764,7 +34764,7 @@
         </p:nvSpPr>
         <p:spPr>
           <a:xfrm>
-            <a:off x="402336" y="3758184"/>
+            <a:off x="402336" y="3268979"/>
             <a:ext cx="192024" cy="192024"/>
           </a:xfrm>
           <a:prstGeom prst="ellipse">
@@ -34852,7 +34852,7 @@
           <a:lstStyle/>
           <a:p>
             <a:r>
-              <a:rPr sz="2400" b="1">
+              <a:rPr sz="2200" b="1">
                 <a:solidFill>
                   <a:srgbClr val="0E39A9"/>
                 </a:solidFill>
@@ -34915,7 +34915,7 @@
         <p:spPr>
           <a:xfrm>
             <a:off x="694944" y="1325880"/>
-            <a:ext cx="6729984" cy="278892"/>
+            <a:ext cx="6729984" cy="256032"/>
           </a:xfrm>
           <a:prstGeom prst="rect">
             <a:avLst/>
@@ -34940,7 +34940,7 @@
               </a:spcAft>
             </a:pPr>
             <a:r>
-              <a:rPr sz="1500" b="0">
+              <a:rPr sz="1350" b="0">
                 <a:solidFill>
                   <a:srgbClr val="000000"/>
                 </a:solidFill>
@@ -35002,8 +35002,8 @@
         </p:nvSpPr>
         <p:spPr>
           <a:xfrm>
-            <a:off x="694944" y="1636776"/>
-            <a:ext cx="6729984" cy="512064"/>
+            <a:off x="694944" y="1613916"/>
+            <a:ext cx="6729984" cy="448056"/>
           </a:xfrm>
           <a:prstGeom prst="rect">
             <a:avLst/>
@@ -35028,7 +35028,7 @@
               </a:spcAft>
             </a:pPr>
             <a:r>
-              <a:rPr sz="1500" b="0">
+              <a:rPr sz="1350" b="0">
                 <a:solidFill>
                   <a:srgbClr val="000000"/>
                 </a:solidFill>
@@ -35047,7 +35047,7 @@
         </p:nvSpPr>
         <p:spPr>
           <a:xfrm>
-            <a:off x="402336" y="1737360"/>
+            <a:off x="402336" y="1714500"/>
             <a:ext cx="192024" cy="192024"/>
           </a:xfrm>
           <a:prstGeom prst="ellipse">
@@ -35090,8 +35090,8 @@
         </p:nvSpPr>
         <p:spPr>
           <a:xfrm>
-            <a:off x="694944" y="2180844"/>
-            <a:ext cx="6729984" cy="512064"/>
+            <a:off x="694944" y="2093976"/>
+            <a:ext cx="6729984" cy="448056"/>
           </a:xfrm>
           <a:prstGeom prst="rect">
             <a:avLst/>
@@ -35116,7 +35116,7 @@
               </a:spcAft>
             </a:pPr>
             <a:r>
-              <a:rPr sz="1500" b="0">
+              <a:rPr sz="1350" b="0">
                 <a:solidFill>
                   <a:srgbClr val="000000"/>
                 </a:solidFill>
@@ -35135,7 +35135,7 @@
         </p:nvSpPr>
         <p:spPr>
           <a:xfrm>
-            <a:off x="402336" y="2281428"/>
+            <a:off x="402336" y="2194560"/>
             <a:ext cx="192024" cy="192024"/>
           </a:xfrm>
           <a:prstGeom prst="ellipse">
@@ -35178,8 +35178,8 @@
         </p:nvSpPr>
         <p:spPr>
           <a:xfrm>
-            <a:off x="694944" y="2724912"/>
-            <a:ext cx="6729984" cy="978408"/>
+            <a:off x="694944" y="2574036"/>
+            <a:ext cx="6729984" cy="649224"/>
           </a:xfrm>
           <a:prstGeom prst="rect">
             <a:avLst/>
@@ -35204,7 +35204,7 @@
               </a:spcAft>
             </a:pPr>
             <a:r>
-              <a:rPr sz="1500" b="0">
+              <a:rPr sz="1350" b="0">
                 <a:solidFill>
                   <a:srgbClr val="000000"/>
                 </a:solidFill>
@@ -35223,7 +35223,7 @@
         </p:nvSpPr>
         <p:spPr>
           <a:xfrm>
-            <a:off x="402336" y="2825496"/>
+            <a:off x="402336" y="2674620"/>
             <a:ext cx="192024" cy="192024"/>
           </a:xfrm>
           <a:prstGeom prst="ellipse">
@@ -35266,8 +35266,8 @@
         </p:nvSpPr>
         <p:spPr>
           <a:xfrm>
-            <a:off x="694944" y="3735324"/>
-            <a:ext cx="6729984" cy="512064"/>
+            <a:off x="694944" y="3255264"/>
+            <a:ext cx="6729984" cy="448056"/>
           </a:xfrm>
           <a:prstGeom prst="rect">
             <a:avLst/>
@@ -35292,7 +35292,7 @@
               </a:spcAft>
             </a:pPr>
             <a:r>
-              <a:rPr sz="1500" b="0">
+              <a:rPr sz="1350" b="0">
                 <a:solidFill>
                   <a:srgbClr val="000000"/>
                 </a:solidFill>
@@ -35311,7 +35311,7 @@
         </p:nvSpPr>
         <p:spPr>
           <a:xfrm>
-            <a:off x="402336" y="3835908"/>
+            <a:off x="402336" y="3355848"/>
             <a:ext cx="192024" cy="192024"/>
           </a:xfrm>
           <a:prstGeom prst="ellipse">
@@ -35399,7 +35399,7 @@
           <a:lstStyle/>
           <a:p>
             <a:r>
-              <a:rPr sz="2400" b="1">
+              <a:rPr sz="2200" b="1">
                 <a:solidFill>
                   <a:srgbClr val="0E39A9"/>
                 </a:solidFill>
@@ -35462,7 +35462,7 @@
         <p:spPr>
           <a:xfrm>
             <a:off x="694944" y="1444752"/>
-            <a:ext cx="6729984" cy="512064"/>
+            <a:ext cx="6729984" cy="256032"/>
           </a:xfrm>
           <a:prstGeom prst="rect">
             <a:avLst/>
@@ -35487,7 +35487,7 @@
               </a:spcAft>
             </a:pPr>
             <a:r>
-              <a:rPr sz="1600" b="0">
+              <a:rPr sz="1350" b="0">
                 <a:solidFill>
                   <a:srgbClr val="000000"/>
                 </a:solidFill>
@@ -35549,8 +35549,8 @@
         </p:nvSpPr>
         <p:spPr>
           <a:xfrm>
-            <a:off x="694944" y="1988820"/>
-            <a:ext cx="6729984" cy="512064"/>
+            <a:off x="694944" y="1732788"/>
+            <a:ext cx="6729984" cy="448056"/>
           </a:xfrm>
           <a:prstGeom prst="rect">
             <a:avLst/>
@@ -35575,7 +35575,7 @@
               </a:spcAft>
             </a:pPr>
             <a:r>
-              <a:rPr sz="1600" b="0">
+              <a:rPr sz="1350" b="0">
                 <a:solidFill>
                   <a:srgbClr val="000000"/>
                 </a:solidFill>
@@ -35594,7 +35594,7 @@
         </p:nvSpPr>
         <p:spPr>
           <a:xfrm>
-            <a:off x="402336" y="2089404"/>
+            <a:off x="402336" y="1833372"/>
             <a:ext cx="192024" cy="192024"/>
           </a:xfrm>
           <a:prstGeom prst="ellipse">
@@ -35637,8 +35637,8 @@
         </p:nvSpPr>
         <p:spPr>
           <a:xfrm>
-            <a:off x="694944" y="2532888"/>
-            <a:ext cx="6729984" cy="512064"/>
+            <a:off x="694944" y="2212848"/>
+            <a:ext cx="6729984" cy="448056"/>
           </a:xfrm>
           <a:prstGeom prst="rect">
             <a:avLst/>
@@ -35663,7 +35663,7 @@
               </a:spcAft>
             </a:pPr>
             <a:r>
-              <a:rPr sz="1600" b="0">
+              <a:rPr sz="1350" b="0">
                 <a:solidFill>
                   <a:srgbClr val="000000"/>
                 </a:solidFill>
@@ -35682,7 +35682,7 @@
         </p:nvSpPr>
         <p:spPr>
           <a:xfrm>
-            <a:off x="402336" y="2633472"/>
+            <a:off x="402336" y="2313432"/>
             <a:ext cx="192024" cy="192024"/>
           </a:xfrm>
           <a:prstGeom prst="ellipse">
@@ -35725,8 +35725,8 @@
         </p:nvSpPr>
         <p:spPr>
           <a:xfrm>
-            <a:off x="694944" y="3076956"/>
-            <a:ext cx="6729984" cy="512064"/>
+            <a:off x="694944" y="2692908"/>
+            <a:ext cx="6729984" cy="448056"/>
           </a:xfrm>
           <a:prstGeom prst="rect">
             <a:avLst/>
@@ -35751,7 +35751,7 @@
               </a:spcAft>
             </a:pPr>
             <a:r>
-              <a:rPr sz="1600" b="0">
+              <a:rPr sz="1350" b="0">
                 <a:solidFill>
                   <a:srgbClr val="000000"/>
                 </a:solidFill>
@@ -35770,7 +35770,7 @@
         </p:nvSpPr>
         <p:spPr>
           <a:xfrm>
-            <a:off x="402336" y="3177540"/>
+            <a:off x="402336" y="2793491"/>
             <a:ext cx="192024" cy="192024"/>
           </a:xfrm>
           <a:prstGeom prst="ellipse">
@@ -35858,7 +35858,7 @@
           <a:lstStyle/>
           <a:p>
             <a:r>
-              <a:rPr sz="2400" b="1">
+              <a:rPr sz="2200" b="1">
                 <a:solidFill>
                   <a:srgbClr val="0E39A9"/>
                 </a:solidFill>
@@ -35921,7 +35921,7 @@
         <p:spPr>
           <a:xfrm>
             <a:off x="694944" y="1325880"/>
-            <a:ext cx="6729984" cy="512064"/>
+            <a:ext cx="6729984" cy="448056"/>
           </a:xfrm>
           <a:prstGeom prst="rect">
             <a:avLst/>
@@ -35946,7 +35946,7 @@
               </a:spcAft>
             </a:pPr>
             <a:r>
-              <a:rPr sz="1450" b="0">
+              <a:rPr sz="1350" b="0">
                 <a:solidFill>
                   <a:srgbClr val="000000"/>
                 </a:solidFill>
@@ -36008,8 +36008,8 @@
         </p:nvSpPr>
         <p:spPr>
           <a:xfrm>
-            <a:off x="694944" y="1869948"/>
-            <a:ext cx="6729984" cy="512064"/>
+            <a:off x="694944" y="1805940"/>
+            <a:ext cx="6729984" cy="448056"/>
           </a:xfrm>
           <a:prstGeom prst="rect">
             <a:avLst/>
@@ -36034,7 +36034,7 @@
               </a:spcAft>
             </a:pPr>
             <a:r>
-              <a:rPr sz="1450" b="0">
+              <a:rPr sz="1350" b="0">
                 <a:solidFill>
                   <a:srgbClr val="000000"/>
                 </a:solidFill>
@@ -36053,7 +36053,7 @@
         </p:nvSpPr>
         <p:spPr>
           <a:xfrm>
-            <a:off x="402336" y="1970531"/>
+            <a:off x="402336" y="1906524"/>
             <a:ext cx="192024" cy="192024"/>
           </a:xfrm>
           <a:prstGeom prst="ellipse">
@@ -36096,8 +36096,8 @@
         </p:nvSpPr>
         <p:spPr>
           <a:xfrm>
-            <a:off x="694944" y="2414016"/>
-            <a:ext cx="6729984" cy="512064"/>
+            <a:off x="694944" y="2286000"/>
+            <a:ext cx="6729984" cy="448056"/>
           </a:xfrm>
           <a:prstGeom prst="rect">
             <a:avLst/>
@@ -36122,7 +36122,7 @@
               </a:spcAft>
             </a:pPr>
             <a:r>
-              <a:rPr sz="1450" b="0">
+              <a:rPr sz="1350" b="0">
                 <a:solidFill>
                   <a:srgbClr val="000000"/>
                 </a:solidFill>
@@ -36141,7 +36141,7 @@
         </p:nvSpPr>
         <p:spPr>
           <a:xfrm>
-            <a:off x="402336" y="2514600"/>
+            <a:off x="402336" y="2386584"/>
             <a:ext cx="192024" cy="192024"/>
           </a:xfrm>
           <a:prstGeom prst="ellipse">
@@ -36184,8 +36184,8 @@
         </p:nvSpPr>
         <p:spPr>
           <a:xfrm>
-            <a:off x="694944" y="2958084"/>
-            <a:ext cx="6729984" cy="512064"/>
+            <a:off x="694944" y="2766060"/>
+            <a:ext cx="6729984" cy="448056"/>
           </a:xfrm>
           <a:prstGeom prst="rect">
             <a:avLst/>
@@ -36210,7 +36210,7 @@
               </a:spcAft>
             </a:pPr>
             <a:r>
-              <a:rPr sz="1450" b="0">
+              <a:rPr sz="1350" b="0">
                 <a:solidFill>
                   <a:srgbClr val="000000"/>
                 </a:solidFill>
@@ -36229,7 +36229,7 @@
         </p:nvSpPr>
         <p:spPr>
           <a:xfrm>
-            <a:off x="402336" y="3058668"/>
+            <a:off x="402336" y="2866644"/>
             <a:ext cx="192024" cy="192024"/>
           </a:xfrm>
           <a:prstGeom prst="ellipse">
@@ -36272,8 +36272,8 @@
         </p:nvSpPr>
         <p:spPr>
           <a:xfrm>
-            <a:off x="694944" y="3502152"/>
-            <a:ext cx="6729984" cy="512064"/>
+            <a:off x="694944" y="3246120"/>
+            <a:ext cx="6729984" cy="448056"/>
           </a:xfrm>
           <a:prstGeom prst="rect">
             <a:avLst/>
@@ -36298,7 +36298,7 @@
               </a:spcAft>
             </a:pPr>
             <a:r>
-              <a:rPr sz="1450" b="0">
+              <a:rPr sz="1350" b="0">
                 <a:solidFill>
                   <a:srgbClr val="000000"/>
                 </a:solidFill>
@@ -36317,7 +36317,7 @@
         </p:nvSpPr>
         <p:spPr>
           <a:xfrm>
-            <a:off x="402336" y="3602736"/>
+            <a:off x="402336" y="3346703"/>
             <a:ext cx="192024" cy="192024"/>
           </a:xfrm>
           <a:prstGeom prst="ellipse">
@@ -36360,8 +36360,8 @@
         </p:nvSpPr>
         <p:spPr>
           <a:xfrm>
-            <a:off x="694944" y="4046220"/>
-            <a:ext cx="6729984" cy="512064"/>
+            <a:off x="694944" y="3726180"/>
+            <a:ext cx="6729984" cy="256032"/>
           </a:xfrm>
           <a:prstGeom prst="rect">
             <a:avLst/>
@@ -36386,7 +36386,7 @@
               </a:spcAft>
             </a:pPr>
             <a:r>
-              <a:rPr sz="1450" b="0">
+              <a:rPr sz="1350" b="0">
                 <a:solidFill>
                   <a:srgbClr val="000000"/>
                 </a:solidFill>
@@ -36405,7 +36405,7 @@
         </p:nvSpPr>
         <p:spPr>
           <a:xfrm>
-            <a:off x="402336" y="4146804"/>
+            <a:off x="402336" y="3826764"/>
             <a:ext cx="192024" cy="192024"/>
           </a:xfrm>
           <a:prstGeom prst="ellipse">
@@ -36493,7 +36493,7 @@
           <a:lstStyle/>
           <a:p>
             <a:r>
-              <a:rPr sz="2400" b="1">
+              <a:rPr sz="2200" b="1">
                 <a:solidFill>
                   <a:srgbClr val="0E39A9"/>
                 </a:solidFill>
@@ -36556,7 +36556,7 @@
         <p:spPr>
           <a:xfrm>
             <a:off x="694944" y="1325880"/>
-            <a:ext cx="6729984" cy="512064"/>
+            <a:ext cx="6729984" cy="448056"/>
           </a:xfrm>
           <a:prstGeom prst="rect">
             <a:avLst/>
@@ -36643,8 +36643,8 @@
         </p:nvSpPr>
         <p:spPr>
           <a:xfrm>
-            <a:off x="694944" y="1869948"/>
-            <a:ext cx="6729984" cy="512064"/>
+            <a:off x="694944" y="1805940"/>
+            <a:ext cx="6729984" cy="448056"/>
           </a:xfrm>
           <a:prstGeom prst="rect">
             <a:avLst/>
@@ -36688,7 +36688,7 @@
         </p:nvSpPr>
         <p:spPr>
           <a:xfrm>
-            <a:off x="402336" y="1970531"/>
+            <a:off x="402336" y="1906524"/>
             <a:ext cx="192024" cy="192024"/>
           </a:xfrm>
           <a:prstGeom prst="ellipse">
@@ -36731,8 +36731,8 @@
         </p:nvSpPr>
         <p:spPr>
           <a:xfrm>
-            <a:off x="694944" y="2414016"/>
-            <a:ext cx="6729984" cy="512064"/>
+            <a:off x="694944" y="2286000"/>
+            <a:ext cx="6729984" cy="448056"/>
           </a:xfrm>
           <a:prstGeom prst="rect">
             <a:avLst/>
@@ -36776,7 +36776,7 @@
         </p:nvSpPr>
         <p:spPr>
           <a:xfrm>
-            <a:off x="402336" y="2514600"/>
+            <a:off x="402336" y="2386584"/>
             <a:ext cx="192024" cy="192024"/>
           </a:xfrm>
           <a:prstGeom prst="ellipse">
@@ -36819,8 +36819,8 @@
         </p:nvSpPr>
         <p:spPr>
           <a:xfrm>
-            <a:off x="694944" y="2958084"/>
-            <a:ext cx="6729984" cy="745236"/>
+            <a:off x="694944" y="2766060"/>
+            <a:ext cx="6729984" cy="649224"/>
           </a:xfrm>
           <a:prstGeom prst="rect">
             <a:avLst/>
@@ -36864,7 +36864,7 @@
         </p:nvSpPr>
         <p:spPr>
           <a:xfrm>
-            <a:off x="402336" y="3058668"/>
+            <a:off x="402336" y="2866644"/>
             <a:ext cx="192024" cy="192024"/>
           </a:xfrm>
           <a:prstGeom prst="ellipse">
@@ -36907,8 +36907,8 @@
         </p:nvSpPr>
         <p:spPr>
           <a:xfrm>
-            <a:off x="694944" y="3735324"/>
-            <a:ext cx="6729984" cy="512064"/>
+            <a:off x="694944" y="3447288"/>
+            <a:ext cx="6729984" cy="448056"/>
           </a:xfrm>
           <a:prstGeom prst="rect">
             <a:avLst/>
@@ -36952,7 +36952,7 @@
         </p:nvSpPr>
         <p:spPr>
           <a:xfrm>
-            <a:off x="402336" y="3835908"/>
+            <a:off x="402336" y="3547872"/>
             <a:ext cx="192024" cy="192024"/>
           </a:xfrm>
           <a:prstGeom prst="ellipse">
@@ -36995,8 +36995,8 @@
         </p:nvSpPr>
         <p:spPr>
           <a:xfrm>
-            <a:off x="694944" y="4279392"/>
-            <a:ext cx="6729984" cy="402335"/>
+            <a:off x="694944" y="3927348"/>
+            <a:ext cx="6729984" cy="448056"/>
           </a:xfrm>
           <a:prstGeom prst="rect">
             <a:avLst/>
@@ -37040,7 +37040,7 @@
         </p:nvSpPr>
         <p:spPr>
           <a:xfrm>
-            <a:off x="402336" y="4379976"/>
+            <a:off x="402336" y="4027932"/>
             <a:ext cx="192024" cy="192024"/>
           </a:xfrm>
           <a:prstGeom prst="ellipse">
@@ -37128,7 +37128,7 @@
           <a:lstStyle/>
           <a:p>
             <a:r>
-              <a:rPr sz="2400" b="1">
+              <a:rPr sz="2200" b="1">
                 <a:solidFill>
                   <a:srgbClr val="0E39A9"/>
                 </a:solidFill>
@@ -37191,7 +37191,7 @@
         <p:spPr>
           <a:xfrm>
             <a:off x="694944" y="1444752"/>
-            <a:ext cx="6729984" cy="278892"/>
+            <a:ext cx="6729984" cy="256032"/>
           </a:xfrm>
           <a:prstGeom prst="rect">
             <a:avLst/>
@@ -37216,7 +37216,7 @@
               </a:spcAft>
             </a:pPr>
             <a:r>
-              <a:rPr sz="1500" b="0">
+              <a:rPr sz="1350" b="0">
                 <a:solidFill>
                   <a:srgbClr val="000000"/>
                 </a:solidFill>
@@ -37278,8 +37278,8 @@
         </p:nvSpPr>
         <p:spPr>
           <a:xfrm>
-            <a:off x="694944" y="1755648"/>
-            <a:ext cx="6729984" cy="745236"/>
+            <a:off x="694944" y="1732788"/>
+            <a:ext cx="6729984" cy="649224"/>
           </a:xfrm>
           <a:prstGeom prst="rect">
             <a:avLst/>
@@ -37304,7 +37304,7 @@
               </a:spcAft>
             </a:pPr>
             <a:r>
-              <a:rPr sz="1500" b="0">
+              <a:rPr sz="1350" b="0">
                 <a:solidFill>
                   <a:srgbClr val="000000"/>
                 </a:solidFill>
@@ -37323,7 +37323,7 @@
         </p:nvSpPr>
         <p:spPr>
           <a:xfrm>
-            <a:off x="402336" y="1856231"/>
+            <a:off x="402336" y="1833372"/>
             <a:ext cx="192024" cy="192024"/>
           </a:xfrm>
           <a:prstGeom prst="ellipse">
@@ -37366,8 +37366,8 @@
         </p:nvSpPr>
         <p:spPr>
           <a:xfrm>
-            <a:off x="694944" y="2532888"/>
-            <a:ext cx="6729984" cy="512064"/>
+            <a:off x="694944" y="2414016"/>
+            <a:ext cx="6729984" cy="448056"/>
           </a:xfrm>
           <a:prstGeom prst="rect">
             <a:avLst/>
@@ -37392,7 +37392,7 @@
               </a:spcAft>
             </a:pPr>
             <a:r>
-              <a:rPr sz="1500" b="0">
+              <a:rPr sz="1350" b="0">
                 <a:solidFill>
                   <a:srgbClr val="000000"/>
                 </a:solidFill>
@@ -37411,7 +37411,7 @@
         </p:nvSpPr>
         <p:spPr>
           <a:xfrm>
-            <a:off x="402336" y="2633472"/>
+            <a:off x="402336" y="2514600"/>
             <a:ext cx="192024" cy="192024"/>
           </a:xfrm>
           <a:prstGeom prst="ellipse">
@@ -37454,8 +37454,8 @@
         </p:nvSpPr>
         <p:spPr>
           <a:xfrm>
-            <a:off x="694944" y="3076956"/>
-            <a:ext cx="6729984" cy="745236"/>
+            <a:off x="694944" y="2894076"/>
+            <a:ext cx="6729984" cy="649224"/>
           </a:xfrm>
           <a:prstGeom prst="rect">
             <a:avLst/>
@@ -37480,7 +37480,7 @@
               </a:spcAft>
             </a:pPr>
             <a:r>
-              <a:rPr sz="1500" b="0">
+              <a:rPr sz="1350" b="0">
                 <a:solidFill>
                   <a:srgbClr val="000000"/>
                 </a:solidFill>
@@ -37499,7 +37499,7 @@
         </p:nvSpPr>
         <p:spPr>
           <a:xfrm>
-            <a:off x="402336" y="3177540"/>
+            <a:off x="402336" y="2994660"/>
             <a:ext cx="192024" cy="192024"/>
           </a:xfrm>
           <a:prstGeom prst="ellipse">
@@ -37542,8 +37542,8 @@
         </p:nvSpPr>
         <p:spPr>
           <a:xfrm>
-            <a:off x="694944" y="3854196"/>
-            <a:ext cx="6729984" cy="512064"/>
+            <a:off x="694944" y="3575304"/>
+            <a:ext cx="6729984" cy="448056"/>
           </a:xfrm>
           <a:prstGeom prst="rect">
             <a:avLst/>
@@ -37568,7 +37568,7 @@
               </a:spcAft>
             </a:pPr>
             <a:r>
-              <a:rPr sz="1500" b="0">
+              <a:rPr sz="1350" b="0">
                 <a:solidFill>
                   <a:srgbClr val="000000"/>
                 </a:solidFill>
@@ -37587,7 +37587,7 @@
         </p:nvSpPr>
         <p:spPr>
           <a:xfrm>
-            <a:off x="402336" y="3954780"/>
+            <a:off x="402336" y="3675888"/>
             <a:ext cx="192024" cy="192024"/>
           </a:xfrm>
           <a:prstGeom prst="ellipse">
@@ -37675,7 +37675,7 @@
           <a:lstStyle/>
           <a:p>
             <a:r>
-              <a:rPr sz="2400" b="1">
+              <a:rPr sz="2200" b="1">
                 <a:solidFill>
                   <a:srgbClr val="0E39A9"/>
                 </a:solidFill>
@@ -37738,7 +37738,7 @@
         <p:spPr>
           <a:xfrm>
             <a:off x="694944" y="1325880"/>
-            <a:ext cx="6729984" cy="278892"/>
+            <a:ext cx="6729984" cy="256032"/>
           </a:xfrm>
           <a:prstGeom prst="rect">
             <a:avLst/>
@@ -37782,8 +37782,8 @@
         </p:nvSpPr>
         <p:spPr>
           <a:xfrm>
-            <a:off x="694944" y="1636776"/>
-            <a:ext cx="6729984" cy="512064"/>
+            <a:off x="694944" y="1613916"/>
+            <a:ext cx="6729984" cy="448056"/>
           </a:xfrm>
           <a:prstGeom prst="rect">
             <a:avLst/>
@@ -37808,7 +37808,7 @@
               </a:spcAft>
             </a:pPr>
             <a:r>
-              <a:rPr sz="1300" b="0">
+              <a:rPr sz="1350" b="0">
                 <a:solidFill>
                   <a:srgbClr val="000000"/>
                 </a:solidFill>
@@ -37827,7 +37827,7 @@
         </p:nvSpPr>
         <p:spPr>
           <a:xfrm>
-            <a:off x="402336" y="1737360"/>
+            <a:off x="402336" y="1714500"/>
             <a:ext cx="192024" cy="192024"/>
           </a:xfrm>
           <a:prstGeom prst="ellipse">
@@ -37870,8 +37870,8 @@
         </p:nvSpPr>
         <p:spPr>
           <a:xfrm>
-            <a:off x="694944" y="2180844"/>
-            <a:ext cx="6729984" cy="512064"/>
+            <a:off x="694944" y="2093976"/>
+            <a:ext cx="6729984" cy="448056"/>
           </a:xfrm>
           <a:prstGeom prst="rect">
             <a:avLst/>
@@ -37896,7 +37896,7 @@
               </a:spcAft>
             </a:pPr>
             <a:r>
-              <a:rPr sz="1300" b="0">
+              <a:rPr sz="1350" b="0">
                 <a:solidFill>
                   <a:srgbClr val="000000"/>
                 </a:solidFill>
@@ -37915,7 +37915,7 @@
         </p:nvSpPr>
         <p:spPr>
           <a:xfrm>
-            <a:off x="402336" y="2281428"/>
+            <a:off x="402336" y="2194560"/>
             <a:ext cx="192024" cy="192024"/>
           </a:xfrm>
           <a:prstGeom prst="ellipse">
@@ -37958,8 +37958,8 @@
         </p:nvSpPr>
         <p:spPr>
           <a:xfrm>
-            <a:off x="694944" y="2724912"/>
-            <a:ext cx="6729984" cy="512064"/>
+            <a:off x="694944" y="2574036"/>
+            <a:ext cx="6729984" cy="448056"/>
           </a:xfrm>
           <a:prstGeom prst="rect">
             <a:avLst/>
@@ -37984,7 +37984,7 @@
               </a:spcAft>
             </a:pPr>
             <a:r>
-              <a:rPr sz="1300" b="0">
+              <a:rPr sz="1350" b="0">
                 <a:solidFill>
                   <a:srgbClr val="000000"/>
                 </a:solidFill>
@@ -38003,7 +38003,7 @@
         </p:nvSpPr>
         <p:spPr>
           <a:xfrm>
-            <a:off x="402336" y="2825496"/>
+            <a:off x="402336" y="2674620"/>
             <a:ext cx="192024" cy="192024"/>
           </a:xfrm>
           <a:prstGeom prst="ellipse">
@@ -38046,8 +38046,8 @@
         </p:nvSpPr>
         <p:spPr>
           <a:xfrm>
-            <a:off x="694944" y="3268980"/>
-            <a:ext cx="6729984" cy="512064"/>
+            <a:off x="694944" y="3054096"/>
+            <a:ext cx="6729984" cy="448056"/>
           </a:xfrm>
           <a:prstGeom prst="rect">
             <a:avLst/>
@@ -38072,7 +38072,7 @@
               </a:spcAft>
             </a:pPr>
             <a:r>
-              <a:rPr sz="1300" b="1">
+              <a:rPr sz="1350" b="1">
                 <a:solidFill>
                   <a:srgbClr val="1F7752"/>
                 </a:solidFill>
@@ -38091,7 +38091,7 @@
         </p:nvSpPr>
         <p:spPr>
           <a:xfrm>
-            <a:off x="402336" y="3369564"/>
+            <a:off x="402336" y="3154679"/>
             <a:ext cx="192024" cy="192024"/>
           </a:xfrm>
           <a:prstGeom prst="ellipse">
@@ -38134,8 +38134,8 @@
         </p:nvSpPr>
         <p:spPr>
           <a:xfrm>
-            <a:off x="694944" y="3813048"/>
-            <a:ext cx="6729984" cy="512064"/>
+            <a:off x="694944" y="3534156"/>
+            <a:ext cx="6729984" cy="448056"/>
           </a:xfrm>
           <a:prstGeom prst="rect">
             <a:avLst/>
@@ -38160,7 +38160,7 @@
               </a:spcAft>
             </a:pPr>
             <a:r>
-              <a:rPr sz="1300" b="1">
+              <a:rPr sz="1350" b="1">
                 <a:solidFill>
                   <a:srgbClr val="A62A2A"/>
                 </a:solidFill>
@@ -38179,7 +38179,7 @@
         </p:nvSpPr>
         <p:spPr>
           <a:xfrm>
-            <a:off x="402336" y="3913632"/>
+            <a:off x="402336" y="3634739"/>
             <a:ext cx="192024" cy="192024"/>
           </a:xfrm>
           <a:prstGeom prst="ellipse">
@@ -38222,8 +38222,8 @@
         </p:nvSpPr>
         <p:spPr>
           <a:xfrm>
-            <a:off x="694944" y="4357116"/>
-            <a:ext cx="6729984" cy="324611"/>
+            <a:off x="694944" y="4014215"/>
+            <a:ext cx="6729984" cy="649224"/>
           </a:xfrm>
           <a:prstGeom prst="rect">
             <a:avLst/>
@@ -38248,7 +38248,7 @@
               </a:spcAft>
             </a:pPr>
             <a:r>
-              <a:rPr sz="1300" b="0">
+              <a:rPr sz="1350" b="0">
                 <a:solidFill>
                   <a:srgbClr val="000000"/>
                 </a:solidFill>
@@ -38267,7 +38267,7 @@
         </p:nvSpPr>
         <p:spPr>
           <a:xfrm>
-            <a:off x="402336" y="4457700"/>
+            <a:off x="402336" y="4114800"/>
             <a:ext cx="192024" cy="192024"/>
           </a:xfrm>
           <a:prstGeom prst="ellipse">
@@ -38355,7 +38355,7 @@
           <a:lstStyle/>
           <a:p>
             <a:r>
-              <a:rPr sz="2400" b="1">
+              <a:rPr sz="2200" b="1">
                 <a:solidFill>
                   <a:srgbClr val="0E39A9"/>
                 </a:solidFill>
@@ -39149,7 +39149,7 @@
         <p:spPr>
           <a:xfrm>
             <a:off x="694944" y="1325880"/>
-            <a:ext cx="6729984" cy="278892"/>
+            <a:ext cx="6729984" cy="256032"/>
           </a:xfrm>
           <a:prstGeom prst="rect">
             <a:avLst/>
@@ -39174,7 +39174,7 @@
               </a:spcAft>
             </a:pPr>
             <a:r>
-              <a:rPr sz="1500" b="0">
+              <a:rPr sz="1350" b="0">
                 <a:solidFill>
                   <a:srgbClr val="000000"/>
                 </a:solidFill>
@@ -39236,8 +39236,8 @@
         </p:nvSpPr>
         <p:spPr>
           <a:xfrm>
-            <a:off x="694944" y="1636776"/>
-            <a:ext cx="6729984" cy="512064"/>
+            <a:off x="694944" y="1613916"/>
+            <a:ext cx="6729984" cy="256032"/>
           </a:xfrm>
           <a:prstGeom prst="rect">
             <a:avLst/>
@@ -39262,7 +39262,7 @@
               </a:spcAft>
             </a:pPr>
             <a:r>
-              <a:rPr sz="1500" b="0">
+              <a:rPr sz="1350" b="0">
                 <a:solidFill>
                   <a:srgbClr val="000000"/>
                 </a:solidFill>
@@ -39281,7 +39281,7 @@
         </p:nvSpPr>
         <p:spPr>
           <a:xfrm>
-            <a:off x="402336" y="1737360"/>
+            <a:off x="402336" y="1714500"/>
             <a:ext cx="192024" cy="192024"/>
           </a:xfrm>
           <a:prstGeom prst="ellipse">
@@ -39324,8 +39324,8 @@
         </p:nvSpPr>
         <p:spPr>
           <a:xfrm>
-            <a:off x="694944" y="2180844"/>
-            <a:ext cx="6729984" cy="512064"/>
+            <a:off x="694944" y="1901952"/>
+            <a:ext cx="6729984" cy="448056"/>
           </a:xfrm>
           <a:prstGeom prst="rect">
             <a:avLst/>
@@ -39350,7 +39350,7 @@
               </a:spcAft>
             </a:pPr>
             <a:r>
-              <a:rPr sz="1500" b="0">
+              <a:rPr sz="1350" b="0">
                 <a:solidFill>
                   <a:srgbClr val="000000"/>
                 </a:solidFill>
@@ -39369,7 +39369,7 @@
         </p:nvSpPr>
         <p:spPr>
           <a:xfrm>
-            <a:off x="402336" y="2281428"/>
+            <a:off x="402336" y="2002536"/>
             <a:ext cx="192024" cy="192024"/>
           </a:xfrm>
           <a:prstGeom prst="ellipse">
@@ -39412,8 +39412,8 @@
         </p:nvSpPr>
         <p:spPr>
           <a:xfrm>
-            <a:off x="694944" y="2724912"/>
-            <a:ext cx="6729984" cy="745236"/>
+            <a:off x="694944" y="2382012"/>
+            <a:ext cx="6729984" cy="448056"/>
           </a:xfrm>
           <a:prstGeom prst="rect">
             <a:avLst/>
@@ -39438,7 +39438,7 @@
               </a:spcAft>
             </a:pPr>
             <a:r>
-              <a:rPr sz="1500" b="0">
+              <a:rPr sz="1350" b="0">
                 <a:solidFill>
                   <a:srgbClr val="000000"/>
                 </a:solidFill>
@@ -39457,7 +39457,7 @@
         </p:nvSpPr>
         <p:spPr>
           <a:xfrm>
-            <a:off x="402336" y="2825496"/>
+            <a:off x="402336" y="2482596"/>
             <a:ext cx="192024" cy="192024"/>
           </a:xfrm>
           <a:prstGeom prst="ellipse">
@@ -39500,8 +39500,8 @@
         </p:nvSpPr>
         <p:spPr>
           <a:xfrm>
-            <a:off x="694944" y="3502152"/>
-            <a:ext cx="6729984" cy="512064"/>
+            <a:off x="694944" y="2862072"/>
+            <a:ext cx="6729984" cy="448056"/>
           </a:xfrm>
           <a:prstGeom prst="rect">
             <a:avLst/>
@@ -39526,7 +39526,7 @@
               </a:spcAft>
             </a:pPr>
             <a:r>
-              <a:rPr sz="1500" b="0">
+              <a:rPr sz="1350" b="0">
                 <a:solidFill>
                   <a:srgbClr val="000000"/>
                 </a:solidFill>
@@ -39545,7 +39545,7 @@
         </p:nvSpPr>
         <p:spPr>
           <a:xfrm>
-            <a:off x="402336" y="3602736"/>
+            <a:off x="402336" y="2962656"/>
             <a:ext cx="192024" cy="192024"/>
           </a:xfrm>
           <a:prstGeom prst="ellipse">
@@ -39696,7 +39696,7 @@
         <p:spPr>
           <a:xfrm>
             <a:off x="694944" y="1325880"/>
-            <a:ext cx="6729984" cy="512064"/>
+            <a:ext cx="6729984" cy="448056"/>
           </a:xfrm>
           <a:prstGeom prst="rect">
             <a:avLst/>
@@ -39721,7 +39721,7 @@
               </a:spcAft>
             </a:pPr>
             <a:r>
-              <a:rPr sz="1250" b="0">
+              <a:rPr sz="1350" b="0">
                 <a:solidFill>
                   <a:srgbClr val="000000"/>
                 </a:solidFill>
@@ -39783,8 +39783,8 @@
         </p:nvSpPr>
         <p:spPr>
           <a:xfrm>
-            <a:off x="694944" y="1869948"/>
-            <a:ext cx="6729984" cy="278892"/>
+            <a:off x="694944" y="1805940"/>
+            <a:ext cx="6729984" cy="256032"/>
           </a:xfrm>
           <a:prstGeom prst="rect">
             <a:avLst/>
@@ -39809,7 +39809,7 @@
               </a:spcAft>
             </a:pPr>
             <a:r>
-              <a:rPr sz="1250" b="0">
+              <a:rPr sz="1350" b="0">
                 <a:solidFill>
                   <a:srgbClr val="000000"/>
                 </a:solidFill>
@@ -39828,7 +39828,7 @@
         </p:nvSpPr>
         <p:spPr>
           <a:xfrm>
-            <a:off x="402336" y="1970531"/>
+            <a:off x="402336" y="1906524"/>
             <a:ext cx="192024" cy="192024"/>
           </a:xfrm>
           <a:prstGeom prst="ellipse">
@@ -39871,8 +39871,8 @@
         </p:nvSpPr>
         <p:spPr>
           <a:xfrm>
-            <a:off x="694944" y="2180844"/>
-            <a:ext cx="6729984" cy="512064"/>
+            <a:off x="694944" y="2093976"/>
+            <a:ext cx="6729984" cy="448056"/>
           </a:xfrm>
           <a:prstGeom prst="rect">
             <a:avLst/>
@@ -39897,7 +39897,7 @@
               </a:spcAft>
             </a:pPr>
             <a:r>
-              <a:rPr sz="1250" b="0">
+              <a:rPr sz="1350" b="0">
                 <a:solidFill>
                   <a:srgbClr val="000000"/>
                 </a:solidFill>
@@ -39916,7 +39916,7 @@
         </p:nvSpPr>
         <p:spPr>
           <a:xfrm>
-            <a:off x="402336" y="2281427"/>
+            <a:off x="402336" y="2194560"/>
             <a:ext cx="192024" cy="192024"/>
           </a:xfrm>
           <a:prstGeom prst="ellipse">
@@ -39959,8 +39959,8 @@
         </p:nvSpPr>
         <p:spPr>
           <a:xfrm>
-            <a:off x="694944" y="2724912"/>
-            <a:ext cx="6729984" cy="512064"/>
+            <a:off x="694944" y="2574036"/>
+            <a:ext cx="6729984" cy="448056"/>
           </a:xfrm>
           <a:prstGeom prst="rect">
             <a:avLst/>
@@ -39985,7 +39985,7 @@
               </a:spcAft>
             </a:pPr>
             <a:r>
-              <a:rPr sz="1250" b="0">
+              <a:rPr sz="1350" b="0">
                 <a:solidFill>
                   <a:srgbClr val="000000"/>
                 </a:solidFill>
@@ -40004,7 +40004,7 @@
         </p:nvSpPr>
         <p:spPr>
           <a:xfrm>
-            <a:off x="402336" y="2825496"/>
+            <a:off x="402336" y="2674620"/>
             <a:ext cx="192024" cy="192024"/>
           </a:xfrm>
           <a:prstGeom prst="ellipse">
@@ -40047,8 +40047,8 @@
         </p:nvSpPr>
         <p:spPr>
           <a:xfrm>
-            <a:off x="694944" y="3268980"/>
-            <a:ext cx="6729984" cy="278892"/>
+            <a:off x="694944" y="3054096"/>
+            <a:ext cx="6729984" cy="256032"/>
           </a:xfrm>
           <a:prstGeom prst="rect">
             <a:avLst/>
@@ -40073,7 +40073,7 @@
               </a:spcAft>
             </a:pPr>
             <a:r>
-              <a:rPr sz="1250" b="0">
+              <a:rPr sz="1350" b="0">
                 <a:solidFill>
                   <a:srgbClr val="000000"/>
                 </a:solidFill>
@@ -40092,7 +40092,7 @@
         </p:nvSpPr>
         <p:spPr>
           <a:xfrm>
-            <a:off x="402336" y="3369564"/>
+            <a:off x="402336" y="3154679"/>
             <a:ext cx="192024" cy="192024"/>
           </a:xfrm>
           <a:prstGeom prst="ellipse">
@@ -40135,8 +40135,8 @@
         </p:nvSpPr>
         <p:spPr>
           <a:xfrm>
-            <a:off x="694944" y="3579876"/>
-            <a:ext cx="6729984" cy="512064"/>
+            <a:off x="694944" y="3342132"/>
+            <a:ext cx="6729984" cy="448056"/>
           </a:xfrm>
           <a:prstGeom prst="rect">
             <a:avLst/>
@@ -40161,7 +40161,7 @@
               </a:spcAft>
             </a:pPr>
             <a:r>
-              <a:rPr sz="1250" b="0">
+              <a:rPr sz="1350" b="0">
                 <a:solidFill>
                   <a:srgbClr val="000000"/>
                 </a:solidFill>
@@ -40180,7 +40180,7 @@
         </p:nvSpPr>
         <p:spPr>
           <a:xfrm>
-            <a:off x="402336" y="3680460"/>
+            <a:off x="402336" y="3442715"/>
             <a:ext cx="192024" cy="192024"/>
           </a:xfrm>
           <a:prstGeom prst="ellipse">
@@ -40223,8 +40223,8 @@
         </p:nvSpPr>
         <p:spPr>
           <a:xfrm>
-            <a:off x="694944" y="4123944"/>
-            <a:ext cx="6729984" cy="512064"/>
+            <a:off x="694944" y="3822191"/>
+            <a:ext cx="6729984" cy="448056"/>
           </a:xfrm>
           <a:prstGeom prst="rect">
             <a:avLst/>
@@ -40249,7 +40249,7 @@
               </a:spcAft>
             </a:pPr>
             <a:r>
-              <a:rPr sz="1250" b="0">
+              <a:rPr sz="1350" b="0">
                 <a:solidFill>
                   <a:srgbClr val="000000"/>
                 </a:solidFill>
@@ -40268,7 +40268,7 @@
         </p:nvSpPr>
         <p:spPr>
           <a:xfrm>
-            <a:off x="402336" y="4224528"/>
+            <a:off x="402336" y="3922776"/>
             <a:ext cx="192024" cy="192024"/>
           </a:xfrm>
           <a:prstGeom prst="ellipse">
@@ -40419,7 +40419,7 @@
         <p:spPr>
           <a:xfrm>
             <a:off x="694944" y="1325880"/>
-            <a:ext cx="6729984" cy="512064"/>
+            <a:ext cx="6729984" cy="448056"/>
           </a:xfrm>
           <a:prstGeom prst="rect">
             <a:avLst/>
@@ -40444,7 +40444,7 @@
               </a:spcAft>
             </a:pPr>
             <a:r>
-              <a:rPr sz="1250" b="0">
+              <a:rPr sz="1350" b="0">
                 <a:solidFill>
                   <a:srgbClr val="000000"/>
                 </a:solidFill>
@@ -40506,8 +40506,8 @@
         </p:nvSpPr>
         <p:spPr>
           <a:xfrm>
-            <a:off x="694944" y="1869948"/>
-            <a:ext cx="6729984" cy="512064"/>
+            <a:off x="694944" y="1805940"/>
+            <a:ext cx="6729984" cy="448056"/>
           </a:xfrm>
           <a:prstGeom prst="rect">
             <a:avLst/>
@@ -40532,7 +40532,7 @@
               </a:spcAft>
             </a:pPr>
             <a:r>
-              <a:rPr sz="1250" b="0">
+              <a:rPr sz="1350" b="0">
                 <a:solidFill>
                   <a:srgbClr val="000000"/>
                 </a:solidFill>
@@ -40551,7 +40551,7 @@
         </p:nvSpPr>
         <p:spPr>
           <a:xfrm>
-            <a:off x="402336" y="1970531"/>
+            <a:off x="402336" y="1906524"/>
             <a:ext cx="192024" cy="192024"/>
           </a:xfrm>
           <a:prstGeom prst="ellipse">
@@ -40594,8 +40594,8 @@
         </p:nvSpPr>
         <p:spPr>
           <a:xfrm>
-            <a:off x="694944" y="2414016"/>
-            <a:ext cx="6729984" cy="512064"/>
+            <a:off x="694944" y="2286000"/>
+            <a:ext cx="6729984" cy="448056"/>
           </a:xfrm>
           <a:prstGeom prst="rect">
             <a:avLst/>
@@ -40620,7 +40620,7 @@
               </a:spcAft>
             </a:pPr>
             <a:r>
-              <a:rPr sz="1250" b="0">
+              <a:rPr sz="1350" b="0">
                 <a:solidFill>
                   <a:srgbClr val="000000"/>
                 </a:solidFill>
@@ -40639,7 +40639,7 @@
         </p:nvSpPr>
         <p:spPr>
           <a:xfrm>
-            <a:off x="402336" y="2514600"/>
+            <a:off x="402336" y="2386584"/>
             <a:ext cx="192024" cy="192024"/>
           </a:xfrm>
           <a:prstGeom prst="ellipse">
@@ -40682,8 +40682,8 @@
         </p:nvSpPr>
         <p:spPr>
           <a:xfrm>
-            <a:off x="694944" y="2958084"/>
-            <a:ext cx="6729984" cy="512064"/>
+            <a:off x="694944" y="2766060"/>
+            <a:ext cx="6729984" cy="448056"/>
           </a:xfrm>
           <a:prstGeom prst="rect">
             <a:avLst/>
@@ -40708,7 +40708,7 @@
               </a:spcAft>
             </a:pPr>
             <a:r>
-              <a:rPr sz="1250" b="0">
+              <a:rPr sz="1350" b="0">
                 <a:solidFill>
                   <a:srgbClr val="000000"/>
                 </a:solidFill>
@@ -40727,7 +40727,7 @@
         </p:nvSpPr>
         <p:spPr>
           <a:xfrm>
-            <a:off x="402336" y="3058668"/>
+            <a:off x="402336" y="2866644"/>
             <a:ext cx="192024" cy="192024"/>
           </a:xfrm>
           <a:prstGeom prst="ellipse">
@@ -40770,8 +40770,8 @@
         </p:nvSpPr>
         <p:spPr>
           <a:xfrm>
-            <a:off x="694944" y="3502152"/>
-            <a:ext cx="6729984" cy="512064"/>
+            <a:off x="694944" y="3246120"/>
+            <a:ext cx="6729984" cy="448056"/>
           </a:xfrm>
           <a:prstGeom prst="rect">
             <a:avLst/>
@@ -40796,7 +40796,7 @@
               </a:spcAft>
             </a:pPr>
             <a:r>
-              <a:rPr sz="1250" b="0">
+              <a:rPr sz="1350" b="0">
                 <a:solidFill>
                   <a:srgbClr val="000000"/>
                 </a:solidFill>
@@ -40815,7 +40815,7 @@
         </p:nvSpPr>
         <p:spPr>
           <a:xfrm>
-            <a:off x="402336" y="3602736"/>
+            <a:off x="402336" y="3346703"/>
             <a:ext cx="192024" cy="192024"/>
           </a:xfrm>
           <a:prstGeom prst="ellipse">
@@ -40858,8 +40858,8 @@
         </p:nvSpPr>
         <p:spPr>
           <a:xfrm>
-            <a:off x="694944" y="4046220"/>
-            <a:ext cx="6729984" cy="512064"/>
+            <a:off x="694944" y="3726180"/>
+            <a:ext cx="6729984" cy="448056"/>
           </a:xfrm>
           <a:prstGeom prst="rect">
             <a:avLst/>
@@ -40884,7 +40884,7 @@
               </a:spcAft>
             </a:pPr>
             <a:r>
-              <a:rPr sz="1250" b="0">
+              <a:rPr sz="1350" b="0">
                 <a:solidFill>
                   <a:srgbClr val="000000"/>
                 </a:solidFill>
@@ -40903,7 +40903,7 @@
         </p:nvSpPr>
         <p:spPr>
           <a:xfrm>
-            <a:off x="402336" y="4146804"/>
+            <a:off x="402336" y="3826764"/>
             <a:ext cx="192024" cy="192024"/>
           </a:xfrm>
           <a:prstGeom prst="ellipse">
@@ -41054,7 +41054,7 @@
         <p:spPr>
           <a:xfrm>
             <a:off x="694944" y="1325880"/>
-            <a:ext cx="6729984" cy="278892"/>
+            <a:ext cx="6729984" cy="256032"/>
           </a:xfrm>
           <a:prstGeom prst="rect">
             <a:avLst/>
@@ -41141,8 +41141,8 @@
         </p:nvSpPr>
         <p:spPr>
           <a:xfrm>
-            <a:off x="694944" y="1636776"/>
-            <a:ext cx="6729984" cy="512064"/>
+            <a:off x="694944" y="1613916"/>
+            <a:ext cx="6729984" cy="448056"/>
           </a:xfrm>
           <a:prstGeom prst="rect">
             <a:avLst/>
@@ -41186,7 +41186,7 @@
         </p:nvSpPr>
         <p:spPr>
           <a:xfrm>
-            <a:off x="402336" y="1737360"/>
+            <a:off x="402336" y="1714500"/>
             <a:ext cx="192024" cy="192024"/>
           </a:xfrm>
           <a:prstGeom prst="ellipse">
@@ -41229,8 +41229,8 @@
         </p:nvSpPr>
         <p:spPr>
           <a:xfrm>
-            <a:off x="694944" y="2180844"/>
-            <a:ext cx="6729984" cy="512064"/>
+            <a:off x="694944" y="2093976"/>
+            <a:ext cx="6729984" cy="448056"/>
           </a:xfrm>
           <a:prstGeom prst="rect">
             <a:avLst/>
@@ -41274,7 +41274,7 @@
         </p:nvSpPr>
         <p:spPr>
           <a:xfrm>
-            <a:off x="402336" y="2281428"/>
+            <a:off x="402336" y="2194560"/>
             <a:ext cx="192024" cy="192024"/>
           </a:xfrm>
           <a:prstGeom prst="ellipse">
@@ -41317,8 +41317,8 @@
         </p:nvSpPr>
         <p:spPr>
           <a:xfrm>
-            <a:off x="694944" y="2724912"/>
-            <a:ext cx="6729984" cy="512064"/>
+            <a:off x="694944" y="2574036"/>
+            <a:ext cx="6729984" cy="448056"/>
           </a:xfrm>
           <a:prstGeom prst="rect">
             <a:avLst/>
@@ -41362,7 +41362,7 @@
         </p:nvSpPr>
         <p:spPr>
           <a:xfrm>
-            <a:off x="402336" y="2825496"/>
+            <a:off x="402336" y="2674620"/>
             <a:ext cx="192024" cy="192024"/>
           </a:xfrm>
           <a:prstGeom prst="ellipse">
@@ -41405,8 +41405,8 @@
         </p:nvSpPr>
         <p:spPr>
           <a:xfrm>
-            <a:off x="694944" y="3268980"/>
-            <a:ext cx="6729984" cy="512064"/>
+            <a:off x="694944" y="3054096"/>
+            <a:ext cx="6729984" cy="448056"/>
           </a:xfrm>
           <a:prstGeom prst="rect">
             <a:avLst/>
@@ -41450,7 +41450,7 @@
         </p:nvSpPr>
         <p:spPr>
           <a:xfrm>
-            <a:off x="402336" y="3369564"/>
+            <a:off x="402336" y="3154679"/>
             <a:ext cx="192024" cy="192024"/>
           </a:xfrm>
           <a:prstGeom prst="ellipse">
@@ -41493,8 +41493,8 @@
         </p:nvSpPr>
         <p:spPr>
           <a:xfrm>
-            <a:off x="694944" y="3813048"/>
-            <a:ext cx="6729984" cy="512064"/>
+            <a:off x="694944" y="3534156"/>
+            <a:ext cx="6729984" cy="448056"/>
           </a:xfrm>
           <a:prstGeom prst="rect">
             <a:avLst/>
@@ -41538,7 +41538,7 @@
         </p:nvSpPr>
         <p:spPr>
           <a:xfrm>
-            <a:off x="402336" y="3913632"/>
+            <a:off x="402336" y="3634739"/>
             <a:ext cx="192024" cy="192024"/>
           </a:xfrm>
           <a:prstGeom prst="ellipse">
@@ -41689,7 +41689,7 @@
         <p:spPr>
           <a:xfrm>
             <a:off x="694944" y="1325880"/>
-            <a:ext cx="6729984" cy="512064"/>
+            <a:ext cx="6729984" cy="448056"/>
           </a:xfrm>
           <a:prstGeom prst="rect">
             <a:avLst/>
@@ -41714,7 +41714,7 @@
               </a:spcAft>
             </a:pPr>
             <a:r>
-              <a:rPr sz="1250" b="0">
+              <a:rPr sz="1350" b="0">
                 <a:solidFill>
                   <a:srgbClr val="000000"/>
                 </a:solidFill>
@@ -41776,8 +41776,8 @@
         </p:nvSpPr>
         <p:spPr>
           <a:xfrm>
-            <a:off x="694944" y="1869948"/>
-            <a:ext cx="6729984" cy="512064"/>
+            <a:off x="694944" y="1805940"/>
+            <a:ext cx="6729984" cy="448056"/>
           </a:xfrm>
           <a:prstGeom prst="rect">
             <a:avLst/>
@@ -41802,7 +41802,7 @@
               </a:spcAft>
             </a:pPr>
             <a:r>
-              <a:rPr sz="1250" b="0">
+              <a:rPr sz="1350" b="0">
                 <a:solidFill>
                   <a:srgbClr val="000000"/>
                 </a:solidFill>
@@ -41821,7 +41821,7 @@
         </p:nvSpPr>
         <p:spPr>
           <a:xfrm>
-            <a:off x="402336" y="1970531"/>
+            <a:off x="402336" y="1906524"/>
             <a:ext cx="192024" cy="192024"/>
           </a:xfrm>
           <a:prstGeom prst="ellipse">
@@ -41864,8 +41864,8 @@
         </p:nvSpPr>
         <p:spPr>
           <a:xfrm>
-            <a:off x="694944" y="2414016"/>
-            <a:ext cx="6729984" cy="512064"/>
+            <a:off x="694944" y="2286000"/>
+            <a:ext cx="6729984" cy="256032"/>
           </a:xfrm>
           <a:prstGeom prst="rect">
             <a:avLst/>
@@ -41890,7 +41890,7 @@
               </a:spcAft>
             </a:pPr>
             <a:r>
-              <a:rPr sz="1250" b="0">
+              <a:rPr sz="1350" b="0">
                 <a:solidFill>
                   <a:srgbClr val="000000"/>
                 </a:solidFill>
@@ -41909,7 +41909,7 @@
         </p:nvSpPr>
         <p:spPr>
           <a:xfrm>
-            <a:off x="402336" y="2514600"/>
+            <a:off x="402336" y="2386584"/>
             <a:ext cx="192024" cy="192024"/>
           </a:xfrm>
           <a:prstGeom prst="ellipse">
@@ -41952,8 +41952,8 @@
         </p:nvSpPr>
         <p:spPr>
           <a:xfrm>
-            <a:off x="694944" y="2958084"/>
-            <a:ext cx="6729984" cy="512064"/>
+            <a:off x="694944" y="2574036"/>
+            <a:ext cx="6729984" cy="448056"/>
           </a:xfrm>
           <a:prstGeom prst="rect">
             <a:avLst/>
@@ -41978,7 +41978,7 @@
               </a:spcAft>
             </a:pPr>
             <a:r>
-              <a:rPr sz="1250" b="0">
+              <a:rPr sz="1350" b="0">
                 <a:solidFill>
                   <a:srgbClr val="000000"/>
                 </a:solidFill>
@@ -41997,7 +41997,7 @@
         </p:nvSpPr>
         <p:spPr>
           <a:xfrm>
-            <a:off x="402336" y="3058668"/>
+            <a:off x="402336" y="2674620"/>
             <a:ext cx="192024" cy="192024"/>
           </a:xfrm>
           <a:prstGeom prst="ellipse">
@@ -42040,8 +42040,8 @@
         </p:nvSpPr>
         <p:spPr>
           <a:xfrm>
-            <a:off x="694944" y="3502152"/>
-            <a:ext cx="6729984" cy="745236"/>
+            <a:off x="694944" y="3054096"/>
+            <a:ext cx="6729984" cy="448056"/>
           </a:xfrm>
           <a:prstGeom prst="rect">
             <a:avLst/>
@@ -42066,7 +42066,7 @@
               </a:spcAft>
             </a:pPr>
             <a:r>
-              <a:rPr sz="1250" b="0">
+              <a:rPr sz="1350" b="0">
                 <a:solidFill>
                   <a:srgbClr val="000000"/>
                 </a:solidFill>
@@ -42085,7 +42085,7 @@
         </p:nvSpPr>
         <p:spPr>
           <a:xfrm>
-            <a:off x="402336" y="3602736"/>
+            <a:off x="402336" y="3154679"/>
             <a:ext cx="192024" cy="192024"/>
           </a:xfrm>
           <a:prstGeom prst="ellipse">
@@ -42128,8 +42128,8 @@
         </p:nvSpPr>
         <p:spPr>
           <a:xfrm>
-            <a:off x="694944" y="4279392"/>
-            <a:ext cx="6729984" cy="402335"/>
+            <a:off x="694944" y="3534156"/>
+            <a:ext cx="6729984" cy="448056"/>
           </a:xfrm>
           <a:prstGeom prst="rect">
             <a:avLst/>
@@ -42154,7 +42154,7 @@
               </a:spcAft>
             </a:pPr>
             <a:r>
-              <a:rPr sz="1250" b="0">
+              <a:rPr sz="1350" b="0">
                 <a:solidFill>
                   <a:srgbClr val="000000"/>
                 </a:solidFill>
@@ -42173,7 +42173,7 @@
         </p:nvSpPr>
         <p:spPr>
           <a:xfrm>
-            <a:off x="402336" y="4379976"/>
+            <a:off x="402336" y="3634739"/>
             <a:ext cx="192024" cy="192024"/>
           </a:xfrm>
           <a:prstGeom prst="ellipse">
@@ -42324,7 +42324,7 @@
         <p:spPr>
           <a:xfrm>
             <a:off x="694944" y="1325880"/>
-            <a:ext cx="6729984" cy="278892"/>
+            <a:ext cx="6729984" cy="256032"/>
           </a:xfrm>
           <a:prstGeom prst="rect">
             <a:avLst/>
@@ -42349,7 +42349,7 @@
               </a:spcAft>
             </a:pPr>
             <a:r>
-              <a:rPr sz="1400" b="0">
+              <a:rPr sz="1350" b="0">
                 <a:solidFill>
                   <a:srgbClr val="000000"/>
                 </a:solidFill>
@@ -42411,8 +42411,8 @@
         </p:nvSpPr>
         <p:spPr>
           <a:xfrm>
-            <a:off x="694944" y="1636776"/>
-            <a:ext cx="6729984" cy="512064"/>
+            <a:off x="694944" y="1613916"/>
+            <a:ext cx="6729984" cy="448056"/>
           </a:xfrm>
           <a:prstGeom prst="rect">
             <a:avLst/>
@@ -42437,7 +42437,7 @@
               </a:spcAft>
             </a:pPr>
             <a:r>
-              <a:rPr sz="1400" b="0">
+              <a:rPr sz="1350" b="0">
                 <a:solidFill>
                   <a:srgbClr val="000000"/>
                 </a:solidFill>
@@ -42456,7 +42456,7 @@
         </p:nvSpPr>
         <p:spPr>
           <a:xfrm>
-            <a:off x="402336" y="1737360"/>
+            <a:off x="402336" y="1714500"/>
             <a:ext cx="192024" cy="192024"/>
           </a:xfrm>
           <a:prstGeom prst="ellipse">
@@ -42499,8 +42499,8 @@
         </p:nvSpPr>
         <p:spPr>
           <a:xfrm>
-            <a:off x="694944" y="2180844"/>
-            <a:ext cx="6729984" cy="512064"/>
+            <a:off x="694944" y="2093976"/>
+            <a:ext cx="6729984" cy="448056"/>
           </a:xfrm>
           <a:prstGeom prst="rect">
             <a:avLst/>
@@ -42525,7 +42525,7 @@
               </a:spcAft>
             </a:pPr>
             <a:r>
-              <a:rPr sz="1400" b="0">
+              <a:rPr sz="1350" b="0">
                 <a:solidFill>
                   <a:srgbClr val="000000"/>
                 </a:solidFill>
@@ -42544,7 +42544,7 @@
         </p:nvSpPr>
         <p:spPr>
           <a:xfrm>
-            <a:off x="402336" y="2281428"/>
+            <a:off x="402336" y="2194560"/>
             <a:ext cx="192024" cy="192024"/>
           </a:xfrm>
           <a:prstGeom prst="ellipse">
@@ -42587,8 +42587,8 @@
         </p:nvSpPr>
         <p:spPr>
           <a:xfrm>
-            <a:off x="694944" y="2724912"/>
-            <a:ext cx="6729984" cy="512064"/>
+            <a:off x="694944" y="2574036"/>
+            <a:ext cx="6729984" cy="448056"/>
           </a:xfrm>
           <a:prstGeom prst="rect">
             <a:avLst/>
@@ -42613,7 +42613,7 @@
               </a:spcAft>
             </a:pPr>
             <a:r>
-              <a:rPr sz="1400" b="0">
+              <a:rPr sz="1350" b="0">
                 <a:solidFill>
                   <a:srgbClr val="000000"/>
                 </a:solidFill>
@@ -42632,7 +42632,7 @@
         </p:nvSpPr>
         <p:spPr>
           <a:xfrm>
-            <a:off x="402336" y="2825496"/>
+            <a:off x="402336" y="2674620"/>
             <a:ext cx="192024" cy="192024"/>
           </a:xfrm>
           <a:prstGeom prst="ellipse">
@@ -42675,8 +42675,8 @@
         </p:nvSpPr>
         <p:spPr>
           <a:xfrm>
-            <a:off x="694944" y="3268980"/>
-            <a:ext cx="6729984" cy="512064"/>
+            <a:off x="694944" y="3054096"/>
+            <a:ext cx="6729984" cy="448056"/>
           </a:xfrm>
           <a:prstGeom prst="rect">
             <a:avLst/>
@@ -42701,7 +42701,7 @@
               </a:spcAft>
             </a:pPr>
             <a:r>
-              <a:rPr sz="1400" b="0">
+              <a:rPr sz="1350" b="0">
                 <a:solidFill>
                   <a:srgbClr val="000000"/>
                 </a:solidFill>
@@ -42720,7 +42720,7 @@
         </p:nvSpPr>
         <p:spPr>
           <a:xfrm>
-            <a:off x="402336" y="3369564"/>
+            <a:off x="402336" y="3154679"/>
             <a:ext cx="192024" cy="192024"/>
           </a:xfrm>
           <a:prstGeom prst="ellipse">
@@ -42871,7 +42871,7 @@
         <p:spPr>
           <a:xfrm>
             <a:off x="694944" y="1325880"/>
-            <a:ext cx="6729984" cy="278892"/>
+            <a:ext cx="6729984" cy="256032"/>
           </a:xfrm>
           <a:prstGeom prst="rect">
             <a:avLst/>
@@ -42958,8 +42958,8 @@
         </p:nvSpPr>
         <p:spPr>
           <a:xfrm>
-            <a:off x="694944" y="1636776"/>
-            <a:ext cx="6729984" cy="512064"/>
+            <a:off x="694944" y="1613916"/>
+            <a:ext cx="6729984" cy="448056"/>
           </a:xfrm>
           <a:prstGeom prst="rect">
             <a:avLst/>
@@ -43003,7 +43003,7 @@
         </p:nvSpPr>
         <p:spPr>
           <a:xfrm>
-            <a:off x="402336" y="1737360"/>
+            <a:off x="402336" y="1714500"/>
             <a:ext cx="192024" cy="192024"/>
           </a:xfrm>
           <a:prstGeom prst="ellipse">
@@ -43046,8 +43046,8 @@
         </p:nvSpPr>
         <p:spPr>
           <a:xfrm>
-            <a:off x="694944" y="2180844"/>
-            <a:ext cx="6729984" cy="745236"/>
+            <a:off x="694944" y="2093976"/>
+            <a:ext cx="6729984" cy="649224"/>
           </a:xfrm>
           <a:prstGeom prst="rect">
             <a:avLst/>
@@ -43091,7 +43091,7 @@
         </p:nvSpPr>
         <p:spPr>
           <a:xfrm>
-            <a:off x="402336" y="2281428"/>
+            <a:off x="402336" y="2194560"/>
             <a:ext cx="192024" cy="192024"/>
           </a:xfrm>
           <a:prstGeom prst="ellipse">
@@ -43134,8 +43134,8 @@
         </p:nvSpPr>
         <p:spPr>
           <a:xfrm>
-            <a:off x="694944" y="2958084"/>
-            <a:ext cx="6729984" cy="512064"/>
+            <a:off x="694944" y="2775204"/>
+            <a:ext cx="6729984" cy="448056"/>
           </a:xfrm>
           <a:prstGeom prst="rect">
             <a:avLst/>
@@ -43179,7 +43179,7 @@
         </p:nvSpPr>
         <p:spPr>
           <a:xfrm>
-            <a:off x="402336" y="3058668"/>
+            <a:off x="402336" y="2875788"/>
             <a:ext cx="192024" cy="192024"/>
           </a:xfrm>
           <a:prstGeom prst="ellipse">
@@ -43222,8 +43222,8 @@
         </p:nvSpPr>
         <p:spPr>
           <a:xfrm>
-            <a:off x="694944" y="3502152"/>
-            <a:ext cx="6729984" cy="512064"/>
+            <a:off x="694944" y="3255264"/>
+            <a:ext cx="6729984" cy="448056"/>
           </a:xfrm>
           <a:prstGeom prst="rect">
             <a:avLst/>
@@ -43267,7 +43267,7 @@
         </p:nvSpPr>
         <p:spPr>
           <a:xfrm>
-            <a:off x="402336" y="3602736"/>
+            <a:off x="402336" y="3355848"/>
             <a:ext cx="192024" cy="192024"/>
           </a:xfrm>
           <a:prstGeom prst="ellipse">
@@ -43418,7 +43418,7 @@
         <p:spPr>
           <a:xfrm>
             <a:off x="694944" y="1325880"/>
-            <a:ext cx="6729984" cy="512064"/>
+            <a:ext cx="6729984" cy="448056"/>
           </a:xfrm>
           <a:prstGeom prst="rect">
             <a:avLst/>
@@ -43443,7 +43443,7 @@
               </a:spcAft>
             </a:pPr>
             <a:r>
-              <a:rPr sz="1400" b="0">
+              <a:rPr sz="1350" b="0">
                 <a:solidFill>
                   <a:srgbClr val="000000"/>
                 </a:solidFill>
@@ -43505,8 +43505,8 @@
         </p:nvSpPr>
         <p:spPr>
           <a:xfrm>
-            <a:off x="694944" y="1869948"/>
-            <a:ext cx="6729984" cy="512064"/>
+            <a:off x="694944" y="1805940"/>
+            <a:ext cx="6729984" cy="448056"/>
           </a:xfrm>
           <a:prstGeom prst="rect">
             <a:avLst/>
@@ -43531,7 +43531,7 @@
               </a:spcAft>
             </a:pPr>
             <a:r>
-              <a:rPr sz="1400" b="0">
+              <a:rPr sz="1350" b="0">
                 <a:solidFill>
                   <a:srgbClr val="000000"/>
                 </a:solidFill>
@@ -43550,7 +43550,7 @@
         </p:nvSpPr>
         <p:spPr>
           <a:xfrm>
-            <a:off x="402336" y="1970531"/>
+            <a:off x="402336" y="1906524"/>
             <a:ext cx="192024" cy="192024"/>
           </a:xfrm>
           <a:prstGeom prst="ellipse">
@@ -43593,8 +43593,8 @@
         </p:nvSpPr>
         <p:spPr>
           <a:xfrm>
-            <a:off x="694944" y="2414016"/>
-            <a:ext cx="6729984" cy="512064"/>
+            <a:off x="694944" y="2286000"/>
+            <a:ext cx="6729984" cy="448056"/>
           </a:xfrm>
           <a:prstGeom prst="rect">
             <a:avLst/>
@@ -43619,7 +43619,7 @@
               </a:spcAft>
             </a:pPr>
             <a:r>
-              <a:rPr sz="1400" b="0">
+              <a:rPr sz="1350" b="0">
                 <a:solidFill>
                   <a:srgbClr val="000000"/>
                 </a:solidFill>
@@ -43638,7 +43638,7 @@
         </p:nvSpPr>
         <p:spPr>
           <a:xfrm>
-            <a:off x="402336" y="2514600"/>
+            <a:off x="402336" y="2386584"/>
             <a:ext cx="192024" cy="192024"/>
           </a:xfrm>
           <a:prstGeom prst="ellipse">
@@ -43681,8 +43681,8 @@
         </p:nvSpPr>
         <p:spPr>
           <a:xfrm>
-            <a:off x="694944" y="2958084"/>
-            <a:ext cx="6729984" cy="512064"/>
+            <a:off x="694944" y="2766060"/>
+            <a:ext cx="6729984" cy="448056"/>
           </a:xfrm>
           <a:prstGeom prst="rect">
             <a:avLst/>
@@ -43707,7 +43707,7 @@
               </a:spcAft>
             </a:pPr>
             <a:r>
-              <a:rPr sz="1400" b="0">
+              <a:rPr sz="1350" b="0">
                 <a:solidFill>
                   <a:srgbClr val="000000"/>
                 </a:solidFill>
@@ -43726,7 +43726,7 @@
         </p:nvSpPr>
         <p:spPr>
           <a:xfrm>
-            <a:off x="402336" y="3058668"/>
+            <a:off x="402336" y="2866644"/>
             <a:ext cx="192024" cy="192024"/>
           </a:xfrm>
           <a:prstGeom prst="ellipse">
@@ -43769,8 +43769,8 @@
         </p:nvSpPr>
         <p:spPr>
           <a:xfrm>
-            <a:off x="694944" y="3502152"/>
-            <a:ext cx="6729984" cy="745236"/>
+            <a:off x="694944" y="3246120"/>
+            <a:ext cx="6729984" cy="448056"/>
           </a:xfrm>
           <a:prstGeom prst="rect">
             <a:avLst/>
@@ -43795,7 +43795,7 @@
               </a:spcAft>
             </a:pPr>
             <a:r>
-              <a:rPr sz="1400" b="0">
+              <a:rPr sz="1350" b="0">
                 <a:solidFill>
                   <a:srgbClr val="000000"/>
                 </a:solidFill>
@@ -43814,7 +43814,7 @@
         </p:nvSpPr>
         <p:spPr>
           <a:xfrm>
-            <a:off x="402336" y="3602736"/>
+            <a:off x="402336" y="3346703"/>
             <a:ext cx="192024" cy="192024"/>
           </a:xfrm>
           <a:prstGeom prst="ellipse">
@@ -43902,7 +43902,7 @@
           <a:lstStyle/>
           <a:p>
             <a:r>
-              <a:rPr sz="2400" b="1">
+              <a:rPr sz="2200" b="1">
                 <a:solidFill>
                   <a:srgbClr val="0E39A9"/>
                 </a:solidFill>
@@ -43965,7 +43965,7 @@
         <p:spPr>
           <a:xfrm>
             <a:off x="694944" y="1325880"/>
-            <a:ext cx="6729984" cy="278892"/>
+            <a:ext cx="6729984" cy="256032"/>
           </a:xfrm>
           <a:prstGeom prst="rect">
             <a:avLst/>
@@ -43990,7 +43990,7 @@
               </a:spcAft>
             </a:pPr>
             <a:r>
-              <a:rPr sz="1400" b="0">
+              <a:rPr sz="1350" b="0">
                 <a:solidFill>
                   <a:srgbClr val="000000"/>
                 </a:solidFill>
@@ -44052,8 +44052,8 @@
         </p:nvSpPr>
         <p:spPr>
           <a:xfrm>
-            <a:off x="694944" y="1636776"/>
-            <a:ext cx="6729984" cy="512064"/>
+            <a:off x="694944" y="1613916"/>
+            <a:ext cx="6729984" cy="448056"/>
           </a:xfrm>
           <a:prstGeom prst="rect">
             <a:avLst/>
@@ -44078,7 +44078,7 @@
               </a:spcAft>
             </a:pPr>
             <a:r>
-              <a:rPr sz="1400" b="0">
+              <a:rPr sz="1350" b="0">
                 <a:solidFill>
                   <a:srgbClr val="000000"/>
                 </a:solidFill>
@@ -44097,7 +44097,7 @@
         </p:nvSpPr>
         <p:spPr>
           <a:xfrm>
-            <a:off x="402336" y="1737360"/>
+            <a:off x="402336" y="1714500"/>
             <a:ext cx="192024" cy="192024"/>
           </a:xfrm>
           <a:prstGeom prst="ellipse">
@@ -44140,8 +44140,8 @@
         </p:nvSpPr>
         <p:spPr>
           <a:xfrm>
-            <a:off x="694944" y="2180844"/>
-            <a:ext cx="6729984" cy="278892"/>
+            <a:off x="694944" y="2093976"/>
+            <a:ext cx="6729984" cy="256032"/>
           </a:xfrm>
           <a:prstGeom prst="rect">
             <a:avLst/>
@@ -44166,7 +44166,7 @@
               </a:spcAft>
             </a:pPr>
             <a:r>
-              <a:rPr sz="1400" b="0">
+              <a:rPr sz="1350" b="0">
                 <a:solidFill>
                   <a:srgbClr val="000000"/>
                 </a:solidFill>
@@ -44185,7 +44185,7 @@
         </p:nvSpPr>
         <p:spPr>
           <a:xfrm>
-            <a:off x="402336" y="2281428"/>
+            <a:off x="402336" y="2194560"/>
             <a:ext cx="192024" cy="192024"/>
           </a:xfrm>
           <a:prstGeom prst="ellipse">
@@ -44228,8 +44228,8 @@
         </p:nvSpPr>
         <p:spPr>
           <a:xfrm>
-            <a:off x="694944" y="2491740"/>
-            <a:ext cx="6729984" cy="745236"/>
+            <a:off x="694944" y="2382012"/>
+            <a:ext cx="6729984" cy="448056"/>
           </a:xfrm>
           <a:prstGeom prst="rect">
             <a:avLst/>
@@ -44254,7 +44254,7 @@
               </a:spcAft>
             </a:pPr>
             <a:r>
-              <a:rPr sz="1400" b="0">
+              <a:rPr sz="1350" b="0">
                 <a:solidFill>
                   <a:srgbClr val="000000"/>
                 </a:solidFill>
@@ -44273,7 +44273,7 @@
         </p:nvSpPr>
         <p:spPr>
           <a:xfrm>
-            <a:off x="402336" y="2592324"/>
+            <a:off x="402336" y="2482596"/>
             <a:ext cx="192024" cy="192024"/>
           </a:xfrm>
           <a:prstGeom prst="ellipse">
@@ -44316,8 +44316,8 @@
         </p:nvSpPr>
         <p:spPr>
           <a:xfrm>
-            <a:off x="694944" y="3268980"/>
-            <a:ext cx="6729984" cy="512064"/>
+            <a:off x="694944" y="2862072"/>
+            <a:ext cx="6729984" cy="448056"/>
           </a:xfrm>
           <a:prstGeom prst="rect">
             <a:avLst/>
@@ -44342,7 +44342,7 @@
               </a:spcAft>
             </a:pPr>
             <a:r>
-              <a:rPr sz="1400" b="0">
+              <a:rPr sz="1350" b="0">
                 <a:solidFill>
                   <a:srgbClr val="000000"/>
                 </a:solidFill>
@@ -44361,7 +44361,7 @@
         </p:nvSpPr>
         <p:spPr>
           <a:xfrm>
-            <a:off x="402336" y="3369564"/>
+            <a:off x="402336" y="2962656"/>
             <a:ext cx="192024" cy="192024"/>
           </a:xfrm>
           <a:prstGeom prst="ellipse">
@@ -44512,7 +44512,7 @@
         <p:spPr>
           <a:xfrm>
             <a:off x="694944" y="1325880"/>
-            <a:ext cx="6729984" cy="512064"/>
+            <a:ext cx="6729984" cy="256032"/>
           </a:xfrm>
           <a:prstGeom prst="rect">
             <a:avLst/>
@@ -44537,7 +44537,7 @@
               </a:spcAft>
             </a:pPr>
             <a:r>
-              <a:rPr sz="1400" b="0">
+              <a:rPr sz="1350" b="0">
                 <a:solidFill>
                   <a:srgbClr val="000000"/>
                 </a:solidFill>
@@ -44599,8 +44599,8 @@
         </p:nvSpPr>
         <p:spPr>
           <a:xfrm>
-            <a:off x="694944" y="1869948"/>
-            <a:ext cx="6729984" cy="512064"/>
+            <a:off x="694944" y="1613916"/>
+            <a:ext cx="6729984" cy="448056"/>
           </a:xfrm>
           <a:prstGeom prst="rect">
             <a:avLst/>
@@ -44625,7 +44625,7 @@
               </a:spcAft>
             </a:pPr>
             <a:r>
-              <a:rPr sz="1400" b="0">
+              <a:rPr sz="1350" b="0">
                 <a:solidFill>
                   <a:srgbClr val="000000"/>
                 </a:solidFill>
@@ -44644,7 +44644,7 @@
         </p:nvSpPr>
         <p:spPr>
           <a:xfrm>
-            <a:off x="402336" y="1970531"/>
+            <a:off x="402336" y="1714500"/>
             <a:ext cx="192024" cy="192024"/>
           </a:xfrm>
           <a:prstGeom prst="ellipse">
@@ -44687,8 +44687,8 @@
         </p:nvSpPr>
         <p:spPr>
           <a:xfrm>
-            <a:off x="694944" y="2414016"/>
-            <a:ext cx="6729984" cy="512064"/>
+            <a:off x="694944" y="2093976"/>
+            <a:ext cx="6729984" cy="448056"/>
           </a:xfrm>
           <a:prstGeom prst="rect">
             <a:avLst/>
@@ -44713,7 +44713,7 @@
               </a:spcAft>
             </a:pPr>
             <a:r>
-              <a:rPr sz="1400" b="0">
+              <a:rPr sz="1350" b="0">
                 <a:solidFill>
                   <a:srgbClr val="000000"/>
                 </a:solidFill>
@@ -44732,7 +44732,7 @@
         </p:nvSpPr>
         <p:spPr>
           <a:xfrm>
-            <a:off x="402336" y="2514600"/>
+            <a:off x="402336" y="2194560"/>
             <a:ext cx="192024" cy="192024"/>
           </a:xfrm>
           <a:prstGeom prst="ellipse">
@@ -44775,8 +44775,8 @@
         </p:nvSpPr>
         <p:spPr>
           <a:xfrm>
-            <a:off x="694944" y="2958084"/>
-            <a:ext cx="6729984" cy="512064"/>
+            <a:off x="694944" y="2574036"/>
+            <a:ext cx="6729984" cy="448056"/>
           </a:xfrm>
           <a:prstGeom prst="rect">
             <a:avLst/>
@@ -44801,7 +44801,7 @@
               </a:spcAft>
             </a:pPr>
             <a:r>
-              <a:rPr sz="1400" b="0">
+              <a:rPr sz="1350" b="0">
                 <a:solidFill>
                   <a:srgbClr val="000000"/>
                 </a:solidFill>
@@ -44820,7 +44820,7 @@
         </p:nvSpPr>
         <p:spPr>
           <a:xfrm>
-            <a:off x="402336" y="3058668"/>
+            <a:off x="402336" y="2674620"/>
             <a:ext cx="192024" cy="192024"/>
           </a:xfrm>
           <a:prstGeom prst="ellipse">
@@ -44863,8 +44863,8 @@
         </p:nvSpPr>
         <p:spPr>
           <a:xfrm>
-            <a:off x="694944" y="3502152"/>
-            <a:ext cx="6729984" cy="512064"/>
+            <a:off x="694944" y="3054096"/>
+            <a:ext cx="6729984" cy="448056"/>
           </a:xfrm>
           <a:prstGeom prst="rect">
             <a:avLst/>
@@ -44889,7 +44889,7 @@
               </a:spcAft>
             </a:pPr>
             <a:r>
-              <a:rPr sz="1400" b="0">
+              <a:rPr sz="1350" b="0">
                 <a:solidFill>
                   <a:srgbClr val="000000"/>
                 </a:solidFill>
@@ -44908,7 +44908,7 @@
         </p:nvSpPr>
         <p:spPr>
           <a:xfrm>
-            <a:off x="402336" y="3602736"/>
+            <a:off x="402336" y="3154679"/>
             <a:ext cx="192024" cy="192024"/>
           </a:xfrm>
           <a:prstGeom prst="ellipse">
@@ -44996,7 +44996,7 @@
           <a:lstStyle/>
           <a:p>
             <a:r>
-              <a:rPr sz="2400" b="1">
+              <a:rPr sz="2200" b="1">
                 <a:solidFill>
                   <a:srgbClr val="0E39A9"/>
                 </a:solidFill>
@@ -45059,7 +45059,7 @@
         <p:spPr>
           <a:xfrm>
             <a:off x="694944" y="1325880"/>
-            <a:ext cx="6729984" cy="512064"/>
+            <a:ext cx="6729984" cy="448056"/>
           </a:xfrm>
           <a:prstGeom prst="rect">
             <a:avLst/>
@@ -45084,7 +45084,7 @@
               </a:spcAft>
             </a:pPr>
             <a:r>
-              <a:rPr sz="1450" b="0">
+              <a:rPr sz="1350" b="0">
                 <a:solidFill>
                   <a:srgbClr val="000000"/>
                 </a:solidFill>
@@ -45146,8 +45146,8 @@
         </p:nvSpPr>
         <p:spPr>
           <a:xfrm>
-            <a:off x="694944" y="1869948"/>
-            <a:ext cx="6729984" cy="512064"/>
+            <a:off x="694944" y="1805940"/>
+            <a:ext cx="6729984" cy="448056"/>
           </a:xfrm>
           <a:prstGeom prst="rect">
             <a:avLst/>
@@ -45172,7 +45172,7 @@
               </a:spcAft>
             </a:pPr>
             <a:r>
-              <a:rPr sz="1450" b="0">
+              <a:rPr sz="1350" b="0">
                 <a:solidFill>
                   <a:srgbClr val="000000"/>
                 </a:solidFill>
@@ -45191,7 +45191,7 @@
         </p:nvSpPr>
         <p:spPr>
           <a:xfrm>
-            <a:off x="402336" y="1970531"/>
+            <a:off x="402336" y="1906524"/>
             <a:ext cx="192024" cy="192024"/>
           </a:xfrm>
           <a:prstGeom prst="ellipse">
@@ -45234,8 +45234,8 @@
         </p:nvSpPr>
         <p:spPr>
           <a:xfrm>
-            <a:off x="694944" y="2414016"/>
-            <a:ext cx="6729984" cy="512064"/>
+            <a:off x="694944" y="2286000"/>
+            <a:ext cx="6729984" cy="448056"/>
           </a:xfrm>
           <a:prstGeom prst="rect">
             <a:avLst/>
@@ -45260,7 +45260,7 @@
               </a:spcAft>
             </a:pPr>
             <a:r>
-              <a:rPr sz="1450" b="0">
+              <a:rPr sz="1350" b="0">
                 <a:solidFill>
                   <a:srgbClr val="000000"/>
                 </a:solidFill>
@@ -45279,7 +45279,7 @@
         </p:nvSpPr>
         <p:spPr>
           <a:xfrm>
-            <a:off x="402336" y="2514600"/>
+            <a:off x="402336" y="2386584"/>
             <a:ext cx="192024" cy="192024"/>
           </a:xfrm>
           <a:prstGeom prst="ellipse">
@@ -45322,8 +45322,8 @@
         </p:nvSpPr>
         <p:spPr>
           <a:xfrm>
-            <a:off x="694944" y="2958084"/>
-            <a:ext cx="6729984" cy="512064"/>
+            <a:off x="694944" y="2766060"/>
+            <a:ext cx="6729984" cy="256032"/>
           </a:xfrm>
           <a:prstGeom prst="rect">
             <a:avLst/>
@@ -45348,7 +45348,7 @@
               </a:spcAft>
             </a:pPr>
             <a:r>
-              <a:rPr sz="1450" b="0">
+              <a:rPr sz="1350" b="0">
                 <a:solidFill>
                   <a:srgbClr val="000000"/>
                 </a:solidFill>
@@ -45367,7 +45367,7 @@
         </p:nvSpPr>
         <p:spPr>
           <a:xfrm>
-            <a:off x="402336" y="3058668"/>
+            <a:off x="402336" y="2866644"/>
             <a:ext cx="192024" cy="192024"/>
           </a:xfrm>
           <a:prstGeom prst="ellipse">
@@ -45410,8 +45410,8 @@
         </p:nvSpPr>
         <p:spPr>
           <a:xfrm>
-            <a:off x="694944" y="3502152"/>
-            <a:ext cx="6729984" cy="512064"/>
+            <a:off x="694944" y="3054096"/>
+            <a:ext cx="6729984" cy="448056"/>
           </a:xfrm>
           <a:prstGeom prst="rect">
             <a:avLst/>
@@ -45436,7 +45436,7 @@
               </a:spcAft>
             </a:pPr>
             <a:r>
-              <a:rPr sz="1450" b="0">
+              <a:rPr sz="1350" b="0">
                 <a:solidFill>
                   <a:srgbClr val="000000"/>
                 </a:solidFill>
@@ -45455,7 +45455,7 @@
         </p:nvSpPr>
         <p:spPr>
           <a:xfrm>
-            <a:off x="402336" y="3602736"/>
+            <a:off x="402336" y="3154679"/>
             <a:ext cx="192024" cy="192024"/>
           </a:xfrm>
           <a:prstGeom prst="ellipse">
@@ -45498,8 +45498,8 @@
         </p:nvSpPr>
         <p:spPr>
           <a:xfrm>
-            <a:off x="694944" y="4046220"/>
-            <a:ext cx="6729984" cy="635507"/>
+            <a:off x="694944" y="3534156"/>
+            <a:ext cx="6729984" cy="649224"/>
           </a:xfrm>
           <a:prstGeom prst="rect">
             <a:avLst/>
@@ -45524,7 +45524,7 @@
               </a:spcAft>
             </a:pPr>
             <a:r>
-              <a:rPr sz="1450" b="0">
+              <a:rPr sz="1350" b="0">
                 <a:solidFill>
                   <a:srgbClr val="000000"/>
                 </a:solidFill>
@@ -45543,7 +45543,7 @@
         </p:nvSpPr>
         <p:spPr>
           <a:xfrm>
-            <a:off x="402336" y="4146804"/>
+            <a:off x="402336" y="3634739"/>
             <a:ext cx="192024" cy="192024"/>
           </a:xfrm>
           <a:prstGeom prst="ellipse">
@@ -45629,7 +45629,7 @@
           <a:lstStyle/>
           <a:p>
             <a:r>
-              <a:rPr sz="2400" b="1">
+              <a:rPr sz="2200" b="1">
                 <a:solidFill>
                   <a:srgbClr val="0E39A9"/>
                 </a:solidFill>
@@ -45692,7 +45692,7 @@
         <p:spPr>
           <a:xfrm>
             <a:off x="694944" y="1325880"/>
-            <a:ext cx="6729984" cy="278892"/>
+            <a:ext cx="6729984" cy="256032"/>
           </a:xfrm>
           <a:prstGeom prst="rect">
             <a:avLst/>
@@ -45717,7 +45717,7 @@
               </a:spcAft>
             </a:pPr>
             <a:r>
-              <a:rPr sz="1300" b="1">
+              <a:rPr sz="1350" b="1">
                 <a:solidFill>
                   <a:srgbClr val="0E39A9"/>
                 </a:solidFill>
@@ -45736,8 +45736,8 @@
         </p:nvSpPr>
         <p:spPr>
           <a:xfrm>
-            <a:off x="694944" y="1636776"/>
-            <a:ext cx="6729984" cy="512064"/>
+            <a:off x="694944" y="1613916"/>
+            <a:ext cx="6729984" cy="448056"/>
           </a:xfrm>
           <a:prstGeom prst="rect">
             <a:avLst/>
@@ -45762,7 +45762,7 @@
               </a:spcAft>
             </a:pPr>
             <a:r>
-              <a:rPr sz="1250" b="0">
+              <a:rPr sz="1350" b="0">
                 <a:solidFill>
                   <a:srgbClr val="000000"/>
                 </a:solidFill>
@@ -45781,7 +45781,7 @@
         </p:nvSpPr>
         <p:spPr>
           <a:xfrm>
-            <a:off x="402336" y="1737360"/>
+            <a:off x="402336" y="1714500"/>
             <a:ext cx="192024" cy="192024"/>
           </a:xfrm>
           <a:prstGeom prst="ellipse">
@@ -45824,8 +45824,8 @@
         </p:nvSpPr>
         <p:spPr>
           <a:xfrm>
-            <a:off x="694944" y="2180844"/>
-            <a:ext cx="6729984" cy="512064"/>
+            <a:off x="694944" y="2093976"/>
+            <a:ext cx="6729984" cy="448056"/>
           </a:xfrm>
           <a:prstGeom prst="rect">
             <a:avLst/>
@@ -45850,7 +45850,7 @@
               </a:spcAft>
             </a:pPr>
             <a:r>
-              <a:rPr sz="1250" b="0">
+              <a:rPr sz="1350" b="0">
                 <a:solidFill>
                   <a:srgbClr val="000000"/>
                 </a:solidFill>
@@ -45869,7 +45869,7 @@
         </p:nvSpPr>
         <p:spPr>
           <a:xfrm>
-            <a:off x="402336" y="2281428"/>
+            <a:off x="402336" y="2194560"/>
             <a:ext cx="192024" cy="192024"/>
           </a:xfrm>
           <a:prstGeom prst="ellipse">
@@ -45912,8 +45912,8 @@
         </p:nvSpPr>
         <p:spPr>
           <a:xfrm>
-            <a:off x="694944" y="2724912"/>
-            <a:ext cx="6729984" cy="512064"/>
+            <a:off x="694944" y="2574036"/>
+            <a:ext cx="6729984" cy="448056"/>
           </a:xfrm>
           <a:prstGeom prst="rect">
             <a:avLst/>
@@ -45938,7 +45938,7 @@
               </a:spcAft>
             </a:pPr>
             <a:r>
-              <a:rPr sz="1250" b="0">
+              <a:rPr sz="1350" b="0">
                 <a:solidFill>
                   <a:srgbClr val="000000"/>
                 </a:solidFill>
@@ -45957,7 +45957,7 @@
         </p:nvSpPr>
         <p:spPr>
           <a:xfrm>
-            <a:off x="402336" y="2825496"/>
+            <a:off x="402336" y="2674620"/>
             <a:ext cx="192024" cy="192024"/>
           </a:xfrm>
           <a:prstGeom prst="ellipse">
@@ -46000,8 +46000,8 @@
         </p:nvSpPr>
         <p:spPr>
           <a:xfrm>
-            <a:off x="694944" y="3268980"/>
-            <a:ext cx="6729984" cy="278892"/>
+            <a:off x="694944" y="3054096"/>
+            <a:ext cx="6729984" cy="256032"/>
           </a:xfrm>
           <a:prstGeom prst="rect">
             <a:avLst/>
@@ -46026,7 +46026,7 @@
               </a:spcAft>
             </a:pPr>
             <a:r>
-              <a:rPr sz="1300" b="1">
+              <a:rPr sz="1350" b="1">
                 <a:solidFill>
                   <a:srgbClr val="0E39A9"/>
                 </a:solidFill>
@@ -46045,8 +46045,8 @@
         </p:nvSpPr>
         <p:spPr>
           <a:xfrm>
-            <a:off x="694944" y="3579876"/>
-            <a:ext cx="6729984" cy="745236"/>
+            <a:off x="694944" y="3342132"/>
+            <a:ext cx="6729984" cy="649224"/>
           </a:xfrm>
           <a:prstGeom prst="rect">
             <a:avLst/>
@@ -46071,7 +46071,7 @@
               </a:spcAft>
             </a:pPr>
             <a:r>
-              <a:rPr sz="1250" b="0">
+              <a:rPr sz="1350" b="0">
                 <a:solidFill>
                   <a:srgbClr val="000000"/>
                 </a:solidFill>
@@ -46090,7 +46090,7 @@
         </p:nvSpPr>
         <p:spPr>
           <a:xfrm>
-            <a:off x="402336" y="3680460"/>
+            <a:off x="402336" y="3442715"/>
             <a:ext cx="192024" cy="192024"/>
           </a:xfrm>
           <a:prstGeom prst="ellipse">
@@ -46133,8 +46133,8 @@
         </p:nvSpPr>
         <p:spPr>
           <a:xfrm>
-            <a:off x="694944" y="4357116"/>
-            <a:ext cx="6729984" cy="324611"/>
+            <a:off x="694944" y="4023360"/>
+            <a:ext cx="6729984" cy="448056"/>
           </a:xfrm>
           <a:prstGeom prst="rect">
             <a:avLst/>
@@ -46159,7 +46159,7 @@
               </a:spcAft>
             </a:pPr>
             <a:r>
-              <a:rPr sz="1250" b="0">
+              <a:rPr sz="1350" b="0">
                 <a:solidFill>
                   <a:srgbClr val="000000"/>
                 </a:solidFill>
@@ -46178,7 +46178,7 @@
         </p:nvSpPr>
         <p:spPr>
           <a:xfrm>
-            <a:off x="402336" y="4457700"/>
+            <a:off x="402336" y="4123944"/>
             <a:ext cx="192024" cy="192024"/>
           </a:xfrm>
           <a:prstGeom prst="ellipse">
@@ -46266,7 +46266,7 @@
           <a:lstStyle/>
           <a:p>
             <a:r>
-              <a:rPr sz="2400" b="1">
+              <a:rPr sz="2200" b="1">
                 <a:solidFill>
                   <a:srgbClr val="0E39A9"/>
                 </a:solidFill>
@@ -46329,7 +46329,7 @@
         <p:spPr>
           <a:xfrm>
             <a:off x="694944" y="1325880"/>
-            <a:ext cx="6729984" cy="745236"/>
+            <a:ext cx="6729984" cy="448056"/>
           </a:xfrm>
           <a:prstGeom prst="rect">
             <a:avLst/>
@@ -46354,7 +46354,7 @@
               </a:spcAft>
             </a:pPr>
             <a:r>
-              <a:rPr sz="1300" b="0">
+              <a:rPr sz="1350" b="0">
                 <a:solidFill>
                   <a:srgbClr val="000000"/>
                 </a:solidFill>
@@ -46416,8 +46416,8 @@
         </p:nvSpPr>
         <p:spPr>
           <a:xfrm>
-            <a:off x="694944" y="2103120"/>
-            <a:ext cx="6729984" cy="512064"/>
+            <a:off x="694944" y="1805940"/>
+            <a:ext cx="6729984" cy="448056"/>
           </a:xfrm>
           <a:prstGeom prst="rect">
             <a:avLst/>
@@ -46442,7 +46442,7 @@
               </a:spcAft>
             </a:pPr>
             <a:r>
-              <a:rPr sz="1300" b="0">
+              <a:rPr sz="1350" b="0">
                 <a:solidFill>
                   <a:srgbClr val="000000"/>
                 </a:solidFill>
@@ -46461,7 +46461,7 @@
         </p:nvSpPr>
         <p:spPr>
           <a:xfrm>
-            <a:off x="402336" y="2203703"/>
+            <a:off x="402336" y="1906524"/>
             <a:ext cx="192024" cy="192024"/>
           </a:xfrm>
           <a:prstGeom prst="ellipse">
@@ -46504,8 +46504,8 @@
         </p:nvSpPr>
         <p:spPr>
           <a:xfrm>
-            <a:off x="694944" y="2647188"/>
-            <a:ext cx="6729984" cy="512064"/>
+            <a:off x="694944" y="2286000"/>
+            <a:ext cx="6729984" cy="448056"/>
           </a:xfrm>
           <a:prstGeom prst="rect">
             <a:avLst/>
@@ -46530,7 +46530,7 @@
               </a:spcAft>
             </a:pPr>
             <a:r>
-              <a:rPr sz="1300" b="0">
+              <a:rPr sz="1350" b="0">
                 <a:solidFill>
                   <a:srgbClr val="000000"/>
                 </a:solidFill>
@@ -46549,7 +46549,7 @@
         </p:nvSpPr>
         <p:spPr>
           <a:xfrm>
-            <a:off x="402336" y="2747772"/>
+            <a:off x="402336" y="2386584"/>
             <a:ext cx="192024" cy="192024"/>
           </a:xfrm>
           <a:prstGeom prst="ellipse">
@@ -46592,8 +46592,8 @@
         </p:nvSpPr>
         <p:spPr>
           <a:xfrm>
-            <a:off x="694944" y="3191256"/>
-            <a:ext cx="6729984" cy="745236"/>
+            <a:off x="694944" y="2766060"/>
+            <a:ext cx="6729984" cy="649224"/>
           </a:xfrm>
           <a:prstGeom prst="rect">
             <a:avLst/>
@@ -46618,7 +46618,7 @@
               </a:spcAft>
             </a:pPr>
             <a:r>
-              <a:rPr sz="1300" b="0">
+              <a:rPr sz="1350" b="0">
                 <a:solidFill>
                   <a:srgbClr val="000000"/>
                 </a:solidFill>
@@ -46637,7 +46637,7 @@
         </p:nvSpPr>
         <p:spPr>
           <a:xfrm>
-            <a:off x="402336" y="3291840"/>
+            <a:off x="402336" y="2866644"/>
             <a:ext cx="192024" cy="192024"/>
           </a:xfrm>
           <a:prstGeom prst="ellipse">
@@ -46680,8 +46680,8 @@
         </p:nvSpPr>
         <p:spPr>
           <a:xfrm>
-            <a:off x="694944" y="3968496"/>
-            <a:ext cx="6729984" cy="713232"/>
+            <a:off x="694944" y="3447288"/>
+            <a:ext cx="6729984" cy="448056"/>
           </a:xfrm>
           <a:prstGeom prst="rect">
             <a:avLst/>
@@ -46706,7 +46706,7 @@
               </a:spcAft>
             </a:pPr>
             <a:r>
-              <a:rPr sz="1300" b="0">
+              <a:rPr sz="1350" b="0">
                 <a:solidFill>
                   <a:srgbClr val="000000"/>
                 </a:solidFill>
@@ -46725,7 +46725,7 @@
         </p:nvSpPr>
         <p:spPr>
           <a:xfrm>
-            <a:off x="402336" y="4069080"/>
+            <a:off x="402336" y="3547872"/>
             <a:ext cx="192024" cy="192024"/>
           </a:xfrm>
           <a:prstGeom prst="ellipse">
@@ -46768,8 +46768,8 @@
         </p:nvSpPr>
         <p:spPr>
           <a:xfrm>
-            <a:off x="694944" y="4713732"/>
-            <a:ext cx="6729984" cy="182880"/>
+            <a:off x="694944" y="3927348"/>
+            <a:ext cx="6729984" cy="256032"/>
           </a:xfrm>
           <a:prstGeom prst="rect">
             <a:avLst/>
@@ -46794,7 +46794,7 @@
               </a:spcAft>
             </a:pPr>
             <a:r>
-              <a:rPr sz="1300" b="0">
+              <a:rPr sz="1350" b="0">
                 <a:solidFill>
                   <a:srgbClr val="000000"/>
                 </a:solidFill>
@@ -46813,7 +46813,7 @@
         </p:nvSpPr>
         <p:spPr>
           <a:xfrm>
-            <a:off x="402336" y="4814316"/>
+            <a:off x="402336" y="4027932"/>
             <a:ext cx="192024" cy="192024"/>
           </a:xfrm>
           <a:prstGeom prst="ellipse">
@@ -46964,7 +46964,7 @@
         <p:spPr>
           <a:xfrm>
             <a:off x="694944" y="1325880"/>
-            <a:ext cx="6729984" cy="278892"/>
+            <a:ext cx="6729984" cy="256032"/>
           </a:xfrm>
           <a:prstGeom prst="rect">
             <a:avLst/>
@@ -46989,7 +46989,7 @@
               </a:spcAft>
             </a:pPr>
             <a:r>
-              <a:rPr sz="1450" b="1">
+              <a:rPr sz="1350" b="1">
                 <a:solidFill>
                   <a:srgbClr val="0E39A9"/>
                 </a:solidFill>
@@ -47008,8 +47008,8 @@
         </p:nvSpPr>
         <p:spPr>
           <a:xfrm>
-            <a:off x="694944" y="1636776"/>
-            <a:ext cx="6729984" cy="512064"/>
+            <a:off x="694944" y="1613916"/>
+            <a:ext cx="6729984" cy="448056"/>
           </a:xfrm>
           <a:prstGeom prst="rect">
             <a:avLst/>
@@ -47034,7 +47034,7 @@
               </a:spcAft>
             </a:pPr>
             <a:r>
-              <a:rPr sz="1400" b="0">
+              <a:rPr sz="1350" b="0">
                 <a:solidFill>
                   <a:srgbClr val="000000"/>
                 </a:solidFill>
@@ -47053,7 +47053,7 @@
         </p:nvSpPr>
         <p:spPr>
           <a:xfrm>
-            <a:off x="402336" y="1737360"/>
+            <a:off x="402336" y="1714500"/>
             <a:ext cx="192024" cy="192024"/>
           </a:xfrm>
           <a:prstGeom prst="ellipse">
@@ -47096,8 +47096,8 @@
         </p:nvSpPr>
         <p:spPr>
           <a:xfrm>
-            <a:off x="694944" y="2180844"/>
-            <a:ext cx="6729984" cy="512064"/>
+            <a:off x="694944" y="2093976"/>
+            <a:ext cx="6729984" cy="448056"/>
           </a:xfrm>
           <a:prstGeom prst="rect">
             <a:avLst/>
@@ -47122,7 +47122,7 @@
               </a:spcAft>
             </a:pPr>
             <a:r>
-              <a:rPr sz="1400" b="0">
+              <a:rPr sz="1350" b="0">
                 <a:solidFill>
                   <a:srgbClr val="000000"/>
                 </a:solidFill>
@@ -47141,7 +47141,7 @@
         </p:nvSpPr>
         <p:spPr>
           <a:xfrm>
-            <a:off x="402336" y="2281428"/>
+            <a:off x="402336" y="2194560"/>
             <a:ext cx="192024" cy="192024"/>
           </a:xfrm>
           <a:prstGeom prst="ellipse">
@@ -47184,8 +47184,8 @@
         </p:nvSpPr>
         <p:spPr>
           <a:xfrm>
-            <a:off x="694944" y="2724912"/>
-            <a:ext cx="6729984" cy="512064"/>
+            <a:off x="694944" y="2574036"/>
+            <a:ext cx="6729984" cy="448056"/>
           </a:xfrm>
           <a:prstGeom prst="rect">
             <a:avLst/>
@@ -47210,7 +47210,7 @@
               </a:spcAft>
             </a:pPr>
             <a:r>
-              <a:rPr sz="1400" b="0">
+              <a:rPr sz="1350" b="0">
                 <a:solidFill>
                   <a:srgbClr val="000000"/>
                 </a:solidFill>
@@ -47229,7 +47229,7 @@
         </p:nvSpPr>
         <p:spPr>
           <a:xfrm>
-            <a:off x="402336" y="2825496"/>
+            <a:off x="402336" y="2674620"/>
             <a:ext cx="192024" cy="192024"/>
           </a:xfrm>
           <a:prstGeom prst="ellipse">
@@ -47272,8 +47272,8 @@
         </p:nvSpPr>
         <p:spPr>
           <a:xfrm>
-            <a:off x="694944" y="3268980"/>
-            <a:ext cx="6729984" cy="278892"/>
+            <a:off x="694944" y="3054096"/>
+            <a:ext cx="6729984" cy="256032"/>
           </a:xfrm>
           <a:prstGeom prst="rect">
             <a:avLst/>
@@ -47298,7 +47298,7 @@
               </a:spcAft>
             </a:pPr>
             <a:r>
-              <a:rPr sz="1450" b="1">
+              <a:rPr sz="1350" b="1">
                 <a:solidFill>
                   <a:srgbClr val="0E39A9"/>
                 </a:solidFill>
@@ -47317,8 +47317,8 @@
         </p:nvSpPr>
         <p:spPr>
           <a:xfrm>
-            <a:off x="694944" y="3579876"/>
-            <a:ext cx="6729984" cy="512064"/>
+            <a:off x="694944" y="3342132"/>
+            <a:ext cx="6729984" cy="448056"/>
           </a:xfrm>
           <a:prstGeom prst="rect">
             <a:avLst/>
@@ -47343,7 +47343,7 @@
               </a:spcAft>
             </a:pPr>
             <a:r>
-              <a:rPr sz="1400" b="0">
+              <a:rPr sz="1350" b="0">
                 <a:solidFill>
                   <a:srgbClr val="000000"/>
                 </a:solidFill>
@@ -47362,7 +47362,7 @@
         </p:nvSpPr>
         <p:spPr>
           <a:xfrm>
-            <a:off x="402336" y="3680460"/>
+            <a:off x="402336" y="3442715"/>
             <a:ext cx="192024" cy="192024"/>
           </a:xfrm>
           <a:prstGeom prst="ellipse">
@@ -47405,8 +47405,8 @@
         </p:nvSpPr>
         <p:spPr>
           <a:xfrm>
-            <a:off x="694944" y="4123944"/>
-            <a:ext cx="6729984" cy="512064"/>
+            <a:off x="694944" y="3822191"/>
+            <a:ext cx="6729984" cy="448056"/>
           </a:xfrm>
           <a:prstGeom prst="rect">
             <a:avLst/>
@@ -47431,7 +47431,7 @@
               </a:spcAft>
             </a:pPr>
             <a:r>
-              <a:rPr sz="1400" b="0">
+              <a:rPr sz="1350" b="0">
                 <a:solidFill>
                   <a:srgbClr val="000000"/>
                 </a:solidFill>
@@ -47450,7 +47450,7 @@
         </p:nvSpPr>
         <p:spPr>
           <a:xfrm>
-            <a:off x="402336" y="4224528"/>
+            <a:off x="402336" y="3922776"/>
             <a:ext cx="192024" cy="192024"/>
           </a:xfrm>
           <a:prstGeom prst="ellipse">
@@ -47493,8 +47493,8 @@
         </p:nvSpPr>
         <p:spPr>
           <a:xfrm>
-            <a:off x="694944" y="4668012"/>
-            <a:ext cx="6729984" cy="182880"/>
+            <a:off x="694944" y="4302252"/>
+            <a:ext cx="6729984" cy="379476"/>
           </a:xfrm>
           <a:prstGeom prst="rect">
             <a:avLst/>
@@ -47519,7 +47519,7 @@
               </a:spcAft>
             </a:pPr>
             <a:r>
-              <a:rPr sz="1400" b="0">
+              <a:rPr sz="1350" b="0">
                 <a:solidFill>
                   <a:srgbClr val="000000"/>
                 </a:solidFill>
@@ -47538,7 +47538,7 @@
         </p:nvSpPr>
         <p:spPr>
           <a:xfrm>
-            <a:off x="402336" y="4768596"/>
+            <a:off x="402336" y="4402836"/>
             <a:ext cx="192024" cy="192024"/>
           </a:xfrm>
           <a:prstGeom prst="ellipse">
@@ -47626,7 +47626,7 @@
           <a:lstStyle/>
           <a:p>
             <a:r>
-              <a:rPr sz="2400" b="1">
+              <a:rPr sz="2200" b="1">
                 <a:solidFill>
                   <a:srgbClr val="0E39A9"/>
                 </a:solidFill>
@@ -47689,7 +47689,7 @@
         <p:spPr>
           <a:xfrm>
             <a:off x="694944" y="1325880"/>
-            <a:ext cx="6729984" cy="278892"/>
+            <a:ext cx="6729984" cy="256032"/>
           </a:xfrm>
           <a:prstGeom prst="rect">
             <a:avLst/>
@@ -47714,7 +47714,7 @@
               </a:spcAft>
             </a:pPr>
             <a:r>
-              <a:rPr sz="1500" b="0">
+              <a:rPr sz="1350" b="0">
                 <a:solidFill>
                   <a:srgbClr val="000000"/>
                 </a:solidFill>
@@ -47776,8 +47776,8 @@
         </p:nvSpPr>
         <p:spPr>
           <a:xfrm>
-            <a:off x="694944" y="1636776"/>
-            <a:ext cx="6729984" cy="745236"/>
+            <a:off x="694944" y="1613916"/>
+            <a:ext cx="6729984" cy="448056"/>
           </a:xfrm>
           <a:prstGeom prst="rect">
             <a:avLst/>
@@ -47802,7 +47802,7 @@
               </a:spcAft>
             </a:pPr>
             <a:r>
-              <a:rPr sz="1500" b="0">
+              <a:rPr sz="1350" b="0">
                 <a:solidFill>
                   <a:srgbClr val="000000"/>
                 </a:solidFill>
@@ -47821,7 +47821,7 @@
         </p:nvSpPr>
         <p:spPr>
           <a:xfrm>
-            <a:off x="402336" y="1737360"/>
+            <a:off x="402336" y="1714500"/>
             <a:ext cx="192024" cy="192024"/>
           </a:xfrm>
           <a:prstGeom prst="ellipse">
@@ -47864,8 +47864,8 @@
         </p:nvSpPr>
         <p:spPr>
           <a:xfrm>
-            <a:off x="694944" y="2414016"/>
-            <a:ext cx="6729984" cy="512064"/>
+            <a:off x="694944" y="2093976"/>
+            <a:ext cx="6729984" cy="448056"/>
           </a:xfrm>
           <a:prstGeom prst="rect">
             <a:avLst/>
@@ -47890,7 +47890,7 @@
               </a:spcAft>
             </a:pPr>
             <a:r>
-              <a:rPr sz="1500" b="0">
+              <a:rPr sz="1350" b="0">
                 <a:solidFill>
                   <a:srgbClr val="000000"/>
                 </a:solidFill>
@@ -47909,7 +47909,7 @@
         </p:nvSpPr>
         <p:spPr>
           <a:xfrm>
-            <a:off x="402336" y="2514600"/>
+            <a:off x="402336" y="2194560"/>
             <a:ext cx="192024" cy="192024"/>
           </a:xfrm>
           <a:prstGeom prst="ellipse">
@@ -47952,8 +47952,8 @@
         </p:nvSpPr>
         <p:spPr>
           <a:xfrm>
-            <a:off x="694944" y="2958084"/>
-            <a:ext cx="6729984" cy="512064"/>
+            <a:off x="694944" y="2574036"/>
+            <a:ext cx="6729984" cy="448056"/>
           </a:xfrm>
           <a:prstGeom prst="rect">
             <a:avLst/>
@@ -47978,7 +47978,7 @@
               </a:spcAft>
             </a:pPr>
             <a:r>
-              <a:rPr sz="1500" b="0">
+              <a:rPr sz="1350" b="0">
                 <a:solidFill>
                   <a:srgbClr val="000000"/>
                 </a:solidFill>
@@ -47997,7 +47997,7 @@
         </p:nvSpPr>
         <p:spPr>
           <a:xfrm>
-            <a:off x="402336" y="3058668"/>
+            <a:off x="402336" y="2674620"/>
             <a:ext cx="192024" cy="192024"/>
           </a:xfrm>
           <a:prstGeom prst="ellipse">
@@ -48040,8 +48040,8 @@
         </p:nvSpPr>
         <p:spPr>
           <a:xfrm>
-            <a:off x="694944" y="3502152"/>
-            <a:ext cx="6729984" cy="512064"/>
+            <a:off x="694944" y="3054096"/>
+            <a:ext cx="6729984" cy="448056"/>
           </a:xfrm>
           <a:prstGeom prst="rect">
             <a:avLst/>
@@ -48066,7 +48066,7 @@
               </a:spcAft>
             </a:pPr>
             <a:r>
-              <a:rPr sz="1500" b="0">
+              <a:rPr sz="1350" b="0">
                 <a:solidFill>
                   <a:srgbClr val="000000"/>
                 </a:solidFill>
@@ -48085,7 +48085,7 @@
         </p:nvSpPr>
         <p:spPr>
           <a:xfrm>
-            <a:off x="402336" y="3602736"/>
+            <a:off x="402336" y="3154679"/>
             <a:ext cx="192024" cy="192024"/>
           </a:xfrm>
           <a:prstGeom prst="ellipse">
@@ -48128,8 +48128,8 @@
         </p:nvSpPr>
         <p:spPr>
           <a:xfrm>
-            <a:off x="694944" y="4046220"/>
-            <a:ext cx="6729984" cy="512064"/>
+            <a:off x="694944" y="3534156"/>
+            <a:ext cx="6729984" cy="448056"/>
           </a:xfrm>
           <a:prstGeom prst="rect">
             <a:avLst/>
@@ -48154,7 +48154,7 @@
               </a:spcAft>
             </a:pPr>
             <a:r>
-              <a:rPr sz="1500" b="0">
+              <a:rPr sz="1350" b="0">
                 <a:solidFill>
                   <a:srgbClr val="000000"/>
                 </a:solidFill>
@@ -48173,7 +48173,7 @@
         </p:nvSpPr>
         <p:spPr>
           <a:xfrm>
-            <a:off x="402336" y="4146804"/>
+            <a:off x="402336" y="3634739"/>
             <a:ext cx="192024" cy="192024"/>
           </a:xfrm>
           <a:prstGeom prst="ellipse">
@@ -48261,7 +48261,7 @@
           <a:lstStyle/>
           <a:p>
             <a:r>
-              <a:rPr sz="2400" b="1">
+              <a:rPr sz="2200" b="1">
                 <a:solidFill>
                   <a:srgbClr val="0E39A9"/>
                 </a:solidFill>
@@ -48324,7 +48324,7 @@
         <p:spPr>
           <a:xfrm>
             <a:off x="694944" y="1325880"/>
-            <a:ext cx="6729984" cy="278892"/>
+            <a:ext cx="6729984" cy="256032"/>
           </a:xfrm>
           <a:prstGeom prst="rect">
             <a:avLst/>
@@ -48349,7 +48349,7 @@
               </a:spcAft>
             </a:pPr>
             <a:r>
-              <a:rPr sz="1700" b="0">
+              <a:rPr sz="1350" b="0">
                 <a:solidFill>
                   <a:srgbClr val="000000"/>
                 </a:solidFill>
@@ -48411,8 +48411,8 @@
         </p:nvSpPr>
         <p:spPr>
           <a:xfrm>
-            <a:off x="694944" y="1636776"/>
-            <a:ext cx="6729984" cy="278892"/>
+            <a:off x="694944" y="1613916"/>
+            <a:ext cx="6729984" cy="256032"/>
           </a:xfrm>
           <a:prstGeom prst="rect">
             <a:avLst/>
@@ -48437,7 +48437,7 @@
               </a:spcAft>
             </a:pPr>
             <a:r>
-              <a:rPr sz="1700" b="0">
+              <a:rPr sz="1350" b="0">
                 <a:solidFill>
                   <a:srgbClr val="000000"/>
                 </a:solidFill>
@@ -48456,7 +48456,7 @@
         </p:nvSpPr>
         <p:spPr>
           <a:xfrm>
-            <a:off x="402336" y="1737360"/>
+            <a:off x="402336" y="1714500"/>
             <a:ext cx="192024" cy="192024"/>
           </a:xfrm>
           <a:prstGeom prst="ellipse">
@@ -48499,8 +48499,8 @@
         </p:nvSpPr>
         <p:spPr>
           <a:xfrm>
-            <a:off x="694944" y="1947672"/>
-            <a:ext cx="6729984" cy="512064"/>
+            <a:off x="694944" y="1901952"/>
+            <a:ext cx="6729984" cy="448056"/>
           </a:xfrm>
           <a:prstGeom prst="rect">
             <a:avLst/>
@@ -48525,7 +48525,7 @@
               </a:spcAft>
             </a:pPr>
             <a:r>
-              <a:rPr sz="1700" b="0">
+              <a:rPr sz="1350" b="0">
                 <a:solidFill>
                   <a:srgbClr val="000000"/>
                 </a:solidFill>
@@ -48544,7 +48544,7 @@
         </p:nvSpPr>
         <p:spPr>
           <a:xfrm>
-            <a:off x="402336" y="2048255"/>
+            <a:off x="402336" y="2002536"/>
             <a:ext cx="192024" cy="192024"/>
           </a:xfrm>
           <a:prstGeom prst="ellipse">
@@ -48587,8 +48587,8 @@
         </p:nvSpPr>
         <p:spPr>
           <a:xfrm>
-            <a:off x="694944" y="2491740"/>
-            <a:ext cx="6729984" cy="512064"/>
+            <a:off x="694944" y="2382012"/>
+            <a:ext cx="6729984" cy="448056"/>
           </a:xfrm>
           <a:prstGeom prst="rect">
             <a:avLst/>
@@ -48613,7 +48613,7 @@
               </a:spcAft>
             </a:pPr>
             <a:r>
-              <a:rPr sz="1700" b="0">
+              <a:rPr sz="1350" b="0">
                 <a:solidFill>
                   <a:srgbClr val="000000"/>
                 </a:solidFill>
@@ -48632,7 +48632,7 @@
         </p:nvSpPr>
         <p:spPr>
           <a:xfrm>
-            <a:off x="402336" y="2592324"/>
+            <a:off x="402336" y="2482596"/>
             <a:ext cx="192024" cy="192024"/>
           </a:xfrm>
           <a:prstGeom prst="ellipse">
@@ -48675,8 +48675,8 @@
         </p:nvSpPr>
         <p:spPr>
           <a:xfrm>
-            <a:off x="694944" y="3035808"/>
-            <a:ext cx="6729984" cy="745236"/>
+            <a:off x="694944" y="2862072"/>
+            <a:ext cx="6729984" cy="448056"/>
           </a:xfrm>
           <a:prstGeom prst="rect">
             <a:avLst/>
@@ -48701,7 +48701,7 @@
               </a:spcAft>
             </a:pPr>
             <a:r>
-              <a:rPr sz="1700" b="0">
+              <a:rPr sz="1350" b="0">
                 <a:solidFill>
                   <a:srgbClr val="000000"/>
                 </a:solidFill>
@@ -48720,7 +48720,7 @@
         </p:nvSpPr>
         <p:spPr>
           <a:xfrm>
-            <a:off x="402336" y="3136392"/>
+            <a:off x="402336" y="2962656"/>
             <a:ext cx="192024" cy="192024"/>
           </a:xfrm>
           <a:prstGeom prst="ellipse">
@@ -48808,7 +48808,7 @@
           <a:lstStyle/>
           <a:p>
             <a:r>
-              <a:rPr sz="2400" b="1">
+              <a:rPr sz="2200" b="1">
                 <a:solidFill>
                   <a:srgbClr val="0E39A9"/>
                 </a:solidFill>
@@ -48871,7 +48871,7 @@
         <p:spPr>
           <a:xfrm>
             <a:off x="694944" y="1325880"/>
-            <a:ext cx="6729984" cy="512064"/>
+            <a:ext cx="6729984" cy="448056"/>
           </a:xfrm>
           <a:prstGeom prst="rect">
             <a:avLst/>
@@ -48896,7 +48896,7 @@
               </a:spcAft>
             </a:pPr>
             <a:r>
-              <a:rPr sz="1600" b="0">
+              <a:rPr sz="1350" b="0">
                 <a:solidFill>
                   <a:srgbClr val="000000"/>
                 </a:solidFill>
@@ -48958,8 +48958,8 @@
         </p:nvSpPr>
         <p:spPr>
           <a:xfrm>
-            <a:off x="694944" y="1869948"/>
-            <a:ext cx="6729984" cy="278892"/>
+            <a:off x="694944" y="1805940"/>
+            <a:ext cx="6729984" cy="256032"/>
           </a:xfrm>
           <a:prstGeom prst="rect">
             <a:avLst/>
@@ -48984,7 +48984,7 @@
               </a:spcAft>
             </a:pPr>
             <a:r>
-              <a:rPr sz="1600" b="0">
+              <a:rPr sz="1350" b="0">
                 <a:solidFill>
                   <a:srgbClr val="000000"/>
                 </a:solidFill>
@@ -49003,7 +49003,7 @@
         </p:nvSpPr>
         <p:spPr>
           <a:xfrm>
-            <a:off x="402336" y="1970531"/>
+            <a:off x="402336" y="1906524"/>
             <a:ext cx="192024" cy="192024"/>
           </a:xfrm>
           <a:prstGeom prst="ellipse">
@@ -49046,8 +49046,8 @@
         </p:nvSpPr>
         <p:spPr>
           <a:xfrm>
-            <a:off x="694944" y="2180844"/>
-            <a:ext cx="6729984" cy="512064"/>
+            <a:off x="694944" y="2093976"/>
+            <a:ext cx="6729984" cy="448056"/>
           </a:xfrm>
           <a:prstGeom prst="rect">
             <a:avLst/>
@@ -49072,7 +49072,7 @@
               </a:spcAft>
             </a:pPr>
             <a:r>
-              <a:rPr sz="1600" b="0">
+              <a:rPr sz="1350" b="0">
                 <a:solidFill>
                   <a:srgbClr val="000000"/>
                 </a:solidFill>
@@ -49091,7 +49091,7 @@
         </p:nvSpPr>
         <p:spPr>
           <a:xfrm>
-            <a:off x="402336" y="2281427"/>
+            <a:off x="402336" y="2194560"/>
             <a:ext cx="192024" cy="192024"/>
           </a:xfrm>
           <a:prstGeom prst="ellipse">
@@ -49134,8 +49134,8 @@
         </p:nvSpPr>
         <p:spPr>
           <a:xfrm>
-            <a:off x="694944" y="2724912"/>
-            <a:ext cx="6729984" cy="745236"/>
+            <a:off x="694944" y="2574036"/>
+            <a:ext cx="6729984" cy="448056"/>
           </a:xfrm>
           <a:prstGeom prst="rect">
             <a:avLst/>
@@ -49160,7 +49160,7 @@
               </a:spcAft>
             </a:pPr>
             <a:r>
-              <a:rPr sz="1600" b="0">
+              <a:rPr sz="1350" b="0">
                 <a:solidFill>
                   <a:srgbClr val="000000"/>
                 </a:solidFill>
@@ -49179,7 +49179,7 @@
         </p:nvSpPr>
         <p:spPr>
           <a:xfrm>
-            <a:off x="402336" y="2825496"/>
+            <a:off x="402336" y="2674620"/>
             <a:ext cx="192024" cy="192024"/>
           </a:xfrm>
           <a:prstGeom prst="ellipse">
@@ -49222,8 +49222,8 @@
         </p:nvSpPr>
         <p:spPr>
           <a:xfrm>
-            <a:off x="694944" y="3502152"/>
-            <a:ext cx="6729984" cy="512064"/>
+            <a:off x="694944" y="3054096"/>
+            <a:ext cx="6729984" cy="448056"/>
           </a:xfrm>
           <a:prstGeom prst="rect">
             <a:avLst/>
@@ -49248,7 +49248,7 @@
               </a:spcAft>
             </a:pPr>
             <a:r>
-              <a:rPr sz="1600" b="0">
+              <a:rPr sz="1350" b="0">
                 <a:solidFill>
                   <a:srgbClr val="000000"/>
                 </a:solidFill>
@@ -49267,7 +49267,7 @@
         </p:nvSpPr>
         <p:spPr>
           <a:xfrm>
-            <a:off x="402336" y="3602736"/>
+            <a:off x="402336" y="3154679"/>
             <a:ext cx="192024" cy="192024"/>
           </a:xfrm>
           <a:prstGeom prst="ellipse">
@@ -49355,7 +49355,7 @@
           <a:lstStyle/>
           <a:p>
             <a:r>
-              <a:rPr sz="2400" b="1">
+              <a:rPr sz="2200" b="1">
                 <a:solidFill>
                   <a:srgbClr val="0E39A9"/>
                 </a:solidFill>
@@ -49418,7 +49418,7 @@
         <p:spPr>
           <a:xfrm>
             <a:off x="694944" y="1325880"/>
-            <a:ext cx="6729984" cy="512064"/>
+            <a:ext cx="6729984" cy="256032"/>
           </a:xfrm>
           <a:prstGeom prst="rect">
             <a:avLst/>
@@ -49443,7 +49443,7 @@
               </a:spcAft>
             </a:pPr>
             <a:r>
-              <a:rPr sz="1550" b="0">
+              <a:rPr sz="1350" b="0">
                 <a:solidFill>
                   <a:srgbClr val="000000"/>
                 </a:solidFill>
@@ -49505,8 +49505,8 @@
         </p:nvSpPr>
         <p:spPr>
           <a:xfrm>
-            <a:off x="694944" y="1869948"/>
-            <a:ext cx="6729984" cy="278892"/>
+            <a:off x="694944" y="1613916"/>
+            <a:ext cx="6729984" cy="256032"/>
           </a:xfrm>
           <a:prstGeom prst="rect">
             <a:avLst/>
@@ -49531,7 +49531,7 @@
               </a:spcAft>
             </a:pPr>
             <a:r>
-              <a:rPr sz="1600" b="1">
+              <a:rPr sz="1350" b="1">
                 <a:solidFill>
                   <a:srgbClr val="0E39A9"/>
                 </a:solidFill>
@@ -49550,8 +49550,8 @@
         </p:nvSpPr>
         <p:spPr>
           <a:xfrm>
-            <a:off x="694944" y="2180844"/>
-            <a:ext cx="6729984" cy="278892"/>
+            <a:off x="694944" y="1901952"/>
+            <a:ext cx="6729984" cy="256032"/>
           </a:xfrm>
           <a:prstGeom prst="rect">
             <a:avLst/>
@@ -49576,7 +49576,7 @@
               </a:spcAft>
             </a:pPr>
             <a:r>
-              <a:rPr sz="1550" b="0">
+              <a:rPr sz="1350" b="0">
                 <a:solidFill>
                   <a:srgbClr val="000000"/>
                 </a:solidFill>
@@ -49595,7 +49595,7 @@
         </p:nvSpPr>
         <p:spPr>
           <a:xfrm>
-            <a:off x="402336" y="2281427"/>
+            <a:off x="402336" y="2002536"/>
             <a:ext cx="192024" cy="192024"/>
           </a:xfrm>
           <a:prstGeom prst="ellipse">
@@ -49638,8 +49638,8 @@
         </p:nvSpPr>
         <p:spPr>
           <a:xfrm>
-            <a:off x="694944" y="2491739"/>
-            <a:ext cx="6729984" cy="512064"/>
+            <a:off x="694944" y="2189988"/>
+            <a:ext cx="6729984" cy="448056"/>
           </a:xfrm>
           <a:prstGeom prst="rect">
             <a:avLst/>
@@ -49664,7 +49664,7 @@
               </a:spcAft>
             </a:pPr>
             <a:r>
-              <a:rPr sz="1550" b="0">
+              <a:rPr sz="1350" b="0">
                 <a:solidFill>
                   <a:srgbClr val="000000"/>
                 </a:solidFill>
@@ -49683,7 +49683,7 @@
         </p:nvSpPr>
         <p:spPr>
           <a:xfrm>
-            <a:off x="402336" y="2592323"/>
+            <a:off x="402336" y="2290572"/>
             <a:ext cx="192024" cy="192024"/>
           </a:xfrm>
           <a:prstGeom prst="ellipse">
@@ -49726,8 +49726,8 @@
         </p:nvSpPr>
         <p:spPr>
           <a:xfrm>
-            <a:off x="694944" y="3035808"/>
-            <a:ext cx="6729984" cy="512064"/>
+            <a:off x="694944" y="2670048"/>
+            <a:ext cx="6729984" cy="448056"/>
           </a:xfrm>
           <a:prstGeom prst="rect">
             <a:avLst/>
@@ -49752,7 +49752,7 @@
               </a:spcAft>
             </a:pPr>
             <a:r>
-              <a:rPr sz="1550" b="0">
+              <a:rPr sz="1350" b="0">
                 <a:solidFill>
                   <a:srgbClr val="000000"/>
                 </a:solidFill>
@@ -49771,7 +49771,7 @@
         </p:nvSpPr>
         <p:spPr>
           <a:xfrm>
-            <a:off x="402336" y="3136391"/>
+            <a:off x="402336" y="2770632"/>
             <a:ext cx="192024" cy="192024"/>
           </a:xfrm>
           <a:prstGeom prst="ellipse">
@@ -49814,8 +49814,8 @@
         </p:nvSpPr>
         <p:spPr>
           <a:xfrm>
-            <a:off x="694944" y="3579876"/>
-            <a:ext cx="6729984" cy="512064"/>
+            <a:off x="694944" y="3150108"/>
+            <a:ext cx="6729984" cy="448056"/>
           </a:xfrm>
           <a:prstGeom prst="rect">
             <a:avLst/>
@@ -49840,7 +49840,7 @@
               </a:spcAft>
             </a:pPr>
             <a:r>
-              <a:rPr sz="1550" b="0">
+              <a:rPr sz="1350" b="0">
                 <a:solidFill>
                   <a:srgbClr val="000000"/>
                 </a:solidFill>
@@ -49859,7 +49859,7 @@
         </p:nvSpPr>
         <p:spPr>
           <a:xfrm>
-            <a:off x="402336" y="3680460"/>
+            <a:off x="402336" y="3250691"/>
             <a:ext cx="192024" cy="192024"/>
           </a:xfrm>
           <a:prstGeom prst="ellipse">
@@ -49947,7 +49947,7 @@
           <a:lstStyle/>
           <a:p>
             <a:r>
-              <a:rPr sz="2400" b="1">
+              <a:rPr sz="2200" b="1">
                 <a:solidFill>
                   <a:srgbClr val="0E39A9"/>
                 </a:solidFill>
@@ -50010,7 +50010,7 @@
         <p:spPr>
           <a:xfrm>
             <a:off x="694944" y="1325880"/>
-            <a:ext cx="6729984" cy="512064"/>
+            <a:ext cx="6729984" cy="256032"/>
           </a:xfrm>
           <a:prstGeom prst="rect">
             <a:avLst/>
@@ -50035,7 +50035,7 @@
               </a:spcAft>
             </a:pPr>
             <a:r>
-              <a:rPr sz="1600" b="0">
+              <a:rPr sz="1350" b="0">
                 <a:solidFill>
                   <a:srgbClr val="000000"/>
                 </a:solidFill>
@@ -50097,8 +50097,8 @@
         </p:nvSpPr>
         <p:spPr>
           <a:xfrm>
-            <a:off x="694944" y="1869948"/>
-            <a:ext cx="6729984" cy="512064"/>
+            <a:off x="694944" y="1613916"/>
+            <a:ext cx="6729984" cy="256032"/>
           </a:xfrm>
           <a:prstGeom prst="rect">
             <a:avLst/>
@@ -50123,7 +50123,7 @@
               </a:spcAft>
             </a:pPr>
             <a:r>
-              <a:rPr sz="1600" b="0">
+              <a:rPr sz="1350" b="0">
                 <a:solidFill>
                   <a:srgbClr val="000000"/>
                 </a:solidFill>
@@ -50142,7 +50142,7 @@
         </p:nvSpPr>
         <p:spPr>
           <a:xfrm>
-            <a:off x="402336" y="1970531"/>
+            <a:off x="402336" y="1714500"/>
             <a:ext cx="192024" cy="192024"/>
           </a:xfrm>
           <a:prstGeom prst="ellipse">
@@ -50185,8 +50185,8 @@
         </p:nvSpPr>
         <p:spPr>
           <a:xfrm>
-            <a:off x="694944" y="2414016"/>
-            <a:ext cx="6729984" cy="278892"/>
+            <a:off x="694944" y="1901952"/>
+            <a:ext cx="6729984" cy="256032"/>
           </a:xfrm>
           <a:prstGeom prst="rect">
             <a:avLst/>
@@ -50211,7 +50211,7 @@
               </a:spcAft>
             </a:pPr>
             <a:r>
-              <a:rPr sz="1600" b="0">
+              <a:rPr sz="1350" b="0">
                 <a:solidFill>
                   <a:srgbClr val="000000"/>
                 </a:solidFill>
@@ -50230,7 +50230,7 @@
         </p:nvSpPr>
         <p:spPr>
           <a:xfrm>
-            <a:off x="402336" y="2514600"/>
+            <a:off x="402336" y="2002536"/>
             <a:ext cx="192024" cy="192024"/>
           </a:xfrm>
           <a:prstGeom prst="ellipse">
@@ -50273,8 +50273,8 @@
         </p:nvSpPr>
         <p:spPr>
           <a:xfrm>
-            <a:off x="694944" y="2724912"/>
-            <a:ext cx="6729984" cy="278892"/>
+            <a:off x="694944" y="2189988"/>
+            <a:ext cx="6729984" cy="256032"/>
           </a:xfrm>
           <a:prstGeom prst="rect">
             <a:avLst/>
@@ -50299,7 +50299,7 @@
               </a:spcAft>
             </a:pPr>
             <a:r>
-              <a:rPr sz="1600" b="0">
+              <a:rPr sz="1350" b="0">
                 <a:solidFill>
                   <a:srgbClr val="000000"/>
                 </a:solidFill>
@@ -50318,7 +50318,7 @@
         </p:nvSpPr>
         <p:spPr>
           <a:xfrm>
-            <a:off x="402336" y="2825496"/>
+            <a:off x="402336" y="2290572"/>
             <a:ext cx="192024" cy="192024"/>
           </a:xfrm>
           <a:prstGeom prst="ellipse">
@@ -50361,8 +50361,8 @@
         </p:nvSpPr>
         <p:spPr>
           <a:xfrm>
-            <a:off x="694944" y="3035808"/>
-            <a:ext cx="6729984" cy="512064"/>
+            <a:off x="694944" y="2478024"/>
+            <a:ext cx="6729984" cy="448056"/>
           </a:xfrm>
           <a:prstGeom prst="rect">
             <a:avLst/>
@@ -50387,7 +50387,7 @@
               </a:spcAft>
             </a:pPr>
             <a:r>
-              <a:rPr sz="1600" b="0">
+              <a:rPr sz="1350" b="0">
                 <a:solidFill>
                   <a:srgbClr val="000000"/>
                 </a:solidFill>
@@ -50406,7 +50406,7 @@
         </p:nvSpPr>
         <p:spPr>
           <a:xfrm>
-            <a:off x="402336" y="3136391"/>
+            <a:off x="402336" y="2578608"/>
             <a:ext cx="192024" cy="192024"/>
           </a:xfrm>
           <a:prstGeom prst="ellipse">

--- a/presentations/Aurora_Stays_RAG_Project_Presentation_Template_Style.pptx
+++ b/presentations/Aurora_Stays_RAG_Project_Presentation_Template_Style.pptx
@@ -46760,94 +46760,6 @@
           </a:p>
         </p:txBody>
       </p:sp>
-      <p:sp>
-        <p:nvSpPr>
-          <p:cNvPr id="424" name="TextBox 423"/>
-          <p:cNvSpPr txBox="1"/>
-          <p:nvPr/>
-        </p:nvSpPr>
-        <p:spPr>
-          <a:xfrm>
-            <a:off x="694944" y="3927348"/>
-            <a:ext cx="6729984" cy="256032"/>
-          </a:xfrm>
-          <a:prstGeom prst="rect">
-            <a:avLst/>
-          </a:prstGeom>
-          <a:noFill/>
-        </p:spPr>
-        <p:txBody>
-          <a:bodyPr wrap="square" lIns="82296" rIns="36576" tIns="18288" bIns="18288">
-            <a:normAutofit/>
-          </a:bodyPr>
-          <a:lstStyle/>
-          <a:p>
-            <a:pPr>
-              <a:lnSpc>
-                <a:spcPct val="100000"/>
-              </a:lnSpc>
-              <a:spcBef>
-                <a:spcPts val="0"/>
-              </a:spcBef>
-              <a:spcAft>
-                <a:spcPts val="0"/>
-              </a:spcAft>
-            </a:pPr>
-            <a:r>
-              <a:rPr sz="1350" b="0">
-                <a:solidFill>
-                  <a:srgbClr val="000000"/>
-                </a:solidFill>
-                <a:latin typeface="Montserrat"/>
-              </a:rPr>
-              <a:t>Handoff owner: raovutukoor1/aurora-stay-qna.</a:t>
-            </a:r>
-          </a:p>
-        </p:txBody>
-      </p:sp>
-      <p:sp>
-        <p:nvSpPr>
-          <p:cNvPr id="425" name="Oval 424"/>
-          <p:cNvSpPr/>
-          <p:nvPr/>
-        </p:nvSpPr>
-        <p:spPr>
-          <a:xfrm>
-            <a:off x="402336" y="4027932"/>
-            <a:ext cx="192024" cy="192024"/>
-          </a:xfrm>
-          <a:prstGeom prst="ellipse">
-            <a:avLst/>
-          </a:prstGeom>
-          <a:solidFill>
-            <a:srgbClr val="0944A1"/>
-          </a:solidFill>
-          <a:ln>
-            <a:noFill/>
-          </a:ln>
-        </p:spPr>
-        <p:style>
-          <a:lnRef idx="1">
-            <a:schemeClr val="accent1"/>
-          </a:lnRef>
-          <a:fillRef idx="3">
-            <a:schemeClr val="accent1"/>
-          </a:fillRef>
-          <a:effectRef idx="2">
-            <a:schemeClr val="accent1"/>
-          </a:effectRef>
-          <a:fontRef idx="minor">
-            <a:schemeClr val="lt1"/>
-          </a:fontRef>
-        </p:style>
-        <p:txBody>
-          <a:bodyPr rtlCol="0" anchor="ctr"/>
-          <a:lstStyle/>
-          <a:p>
-            <a:pPr algn="ctr"/>
-          </a:p>
-        </p:txBody>
-      </p:sp>
     </p:spTree>
   </p:cSld>
   <p:clrMapOvr>

--- a/presentations/Aurora_Stays_RAG_Project_Presentation_Template_Style.pptx
+++ b/presentations/Aurora_Stays_RAG_Project_Presentation_Template_Style.pptx
@@ -33940,7 +33940,7 @@
                 </a:solidFill>
                 <a:latin typeface="Montserrat"/>
               </a:rPr>
-              <a:t>Use only information explicitly supported by retrieved policy text.</a:t>
+              <a:t>Core system prompt: You are the Aurora Stays policy assistant. Use only the retrieved policy context to answer.</a:t>
             </a:r>
           </a:p>
         </p:txBody>
@@ -34028,7 +34028,7 @@
                 </a:solidFill>
                 <a:latin typeface="Montserrat"/>
               </a:rPr>
-              <a:t>Include relevant conditions, exclusions, limits, exceptions, and coverage details.</a:t>
+              <a:t>Use only information explicitly supported by retrieved policy text.</a:t>
             </a:r>
           </a:p>
         </p:txBody>
@@ -34116,7 +34116,7 @@
                 </a:solidFill>
                 <a:latin typeface="Montserrat"/>
               </a:rPr>
-              <a:t>Focus on the question; omit unrelated content and do not invent facts.</a:t>
+              <a:t>Include relevant conditions, exclusions, limits, exceptions, and coverage details.</a:t>
             </a:r>
           </a:p>
         </p:txBody>
@@ -34173,7 +34173,7 @@
         <p:spPr>
           <a:xfrm>
             <a:off x="694944" y="3054096"/>
-            <a:ext cx="6729984" cy="649224"/>
+            <a:ext cx="6729984" cy="448056"/>
           </a:xfrm>
           <a:prstGeom prst="rect">
             <a:avLst/>
@@ -34204,7 +34204,7 @@
                 </a:solidFill>
                 <a:latin typeface="Montserrat"/>
               </a:rPr>
-              <a:t>If evidence is insufficient, return: The available policy documents do not contain enough information to answer this question.</a:t>
+              <a:t>Focus on the question; omit unrelated content and do not invent facts.</a:t>
             </a:r>
           </a:p>
         </p:txBody>
@@ -34260,8 +34260,8 @@
         </p:nvSpPr>
         <p:spPr>
           <a:xfrm>
-            <a:off x="694944" y="3735324"/>
-            <a:ext cx="6729984" cy="448056"/>
+            <a:off x="694944" y="3534156"/>
+            <a:ext cx="6729984" cy="649224"/>
           </a:xfrm>
           <a:prstGeom prst="rect">
             <a:avLst/>
@@ -34292,6 +34292,94 @@
                 </a:solidFill>
                 <a:latin typeface="Montserrat"/>
               </a:rPr>
+              <a:t>If evidence is insufficient, return: The available policy documents do not contain enough information to answer this question.</a:t>
+            </a:r>
+          </a:p>
+        </p:txBody>
+      </p:sp>
+      <p:sp>
+        <p:nvSpPr>
+          <p:cNvPr id="275" name="Oval 274"/>
+          <p:cNvSpPr/>
+          <p:nvPr/>
+        </p:nvSpPr>
+        <p:spPr>
+          <a:xfrm>
+            <a:off x="402336" y="3634739"/>
+            <a:ext cx="192024" cy="192024"/>
+          </a:xfrm>
+          <a:prstGeom prst="ellipse">
+            <a:avLst/>
+          </a:prstGeom>
+          <a:solidFill>
+            <a:srgbClr val="0944A1"/>
+          </a:solidFill>
+          <a:ln>
+            <a:noFill/>
+          </a:ln>
+        </p:spPr>
+        <p:style>
+          <a:lnRef idx="1">
+            <a:schemeClr val="accent1"/>
+          </a:lnRef>
+          <a:fillRef idx="3">
+            <a:schemeClr val="accent1"/>
+          </a:fillRef>
+          <a:effectRef idx="2">
+            <a:schemeClr val="accent1"/>
+          </a:effectRef>
+          <a:fontRef idx="minor">
+            <a:schemeClr val="lt1"/>
+          </a:fontRef>
+        </p:style>
+        <p:txBody>
+          <a:bodyPr rtlCol="0" anchor="ctr"/>
+          <a:lstStyle/>
+          <a:p>
+            <a:pPr algn="ctr"/>
+          </a:p>
+        </p:txBody>
+      </p:sp>
+      <p:sp>
+        <p:nvSpPr>
+          <p:cNvPr id="276" name="TextBox 275"/>
+          <p:cNvSpPr txBox="1"/>
+          <p:nvPr/>
+        </p:nvSpPr>
+        <p:spPr>
+          <a:xfrm>
+            <a:off x="694944" y="4215383"/>
+            <a:ext cx="6729984" cy="448056"/>
+          </a:xfrm>
+          <a:prstGeom prst="rect">
+            <a:avLst/>
+          </a:prstGeom>
+          <a:noFill/>
+        </p:spPr>
+        <p:txBody>
+          <a:bodyPr wrap="square" lIns="82296" rIns="36576" tIns="18288" bIns="18288">
+            <a:normAutofit/>
+          </a:bodyPr>
+          <a:lstStyle/>
+          <a:p>
+            <a:pPr>
+              <a:lnSpc>
+                <a:spcPct val="100000"/>
+              </a:lnSpc>
+              <a:spcBef>
+                <a:spcPts val="0"/>
+              </a:spcBef>
+              <a:spcAft>
+                <a:spcPts val="0"/>
+              </a:spcAft>
+            </a:pPr>
+            <a:r>
+              <a:rPr sz="1350" b="0">
+                <a:solidFill>
+                  <a:srgbClr val="000000"/>
+                </a:solidFill>
+                <a:latin typeface="Montserrat"/>
+              </a:rPr>
               <a:t>Additional guards focus Advance Purchase, Accessible King, and late-checkout questions on their relevant evidence.</a:t>
             </a:r>
           </a:p>
@@ -34299,13 +34387,13 @@
       </p:sp>
       <p:sp>
         <p:nvSpPr>
-          <p:cNvPr id="275" name="Oval 274"/>
+          <p:cNvPr id="277" name="Oval 276"/>
           <p:cNvSpPr/>
           <p:nvPr/>
         </p:nvSpPr>
         <p:spPr>
           <a:xfrm>
-            <a:off x="402336" y="3835908"/>
+            <a:off x="402336" y="4315968"/>
             <a:ext cx="192024" cy="192024"/>
           </a:xfrm>
           <a:prstGeom prst="ellipse">
@@ -36939,7 +37027,7 @@
                 </a:solidFill>
                 <a:latin typeface="Montserrat"/>
               </a:rPr>
-              <a:t>Cases are classified as AUTO ANSWER, ASSISTED REVIEW, or MANUAL LOOKUP from the composite score.</a:t>
+              <a:t>Output artifacts: deepeval_options_summary.csv and deepeval_options_cases.csv.</a:t>
             </a:r>
           </a:p>
         </p:txBody>
@@ -37027,6 +37115,94 @@
                 </a:solidFill>
                 <a:latin typeface="Montserrat"/>
               </a:rPr>
+              <a:t>Cases are classified as AUTO ANSWER, ASSISTED REVIEW, or MANUAL LOOKUP from the composite score.</a:t>
+            </a:r>
+          </a:p>
+        </p:txBody>
+      </p:sp>
+      <p:sp>
+        <p:nvSpPr>
+          <p:cNvPr id="315" name="Oval 314"/>
+          <p:cNvSpPr/>
+          <p:nvPr/>
+        </p:nvSpPr>
+        <p:spPr>
+          <a:xfrm>
+            <a:off x="402336" y="4027932"/>
+            <a:ext cx="192024" cy="192024"/>
+          </a:xfrm>
+          <a:prstGeom prst="ellipse">
+            <a:avLst/>
+          </a:prstGeom>
+          <a:solidFill>
+            <a:srgbClr val="0944A1"/>
+          </a:solidFill>
+          <a:ln>
+            <a:noFill/>
+          </a:ln>
+        </p:spPr>
+        <p:style>
+          <a:lnRef idx="1">
+            <a:schemeClr val="accent1"/>
+          </a:lnRef>
+          <a:fillRef idx="3">
+            <a:schemeClr val="accent1"/>
+          </a:fillRef>
+          <a:effectRef idx="2">
+            <a:schemeClr val="accent1"/>
+          </a:effectRef>
+          <a:fontRef idx="minor">
+            <a:schemeClr val="lt1"/>
+          </a:fontRef>
+        </p:style>
+        <p:txBody>
+          <a:bodyPr rtlCol="0" anchor="ctr"/>
+          <a:lstStyle/>
+          <a:p>
+            <a:pPr algn="ctr"/>
+          </a:p>
+        </p:txBody>
+      </p:sp>
+      <p:sp>
+        <p:nvSpPr>
+          <p:cNvPr id="316" name="TextBox 315"/>
+          <p:cNvSpPr txBox="1"/>
+          <p:nvPr/>
+        </p:nvSpPr>
+        <p:spPr>
+          <a:xfrm>
+            <a:off x="694944" y="4407408"/>
+            <a:ext cx="6729984" cy="274319"/>
+          </a:xfrm>
+          <a:prstGeom prst="rect">
+            <a:avLst/>
+          </a:prstGeom>
+          <a:noFill/>
+        </p:spPr>
+        <p:txBody>
+          <a:bodyPr wrap="square" lIns="82296" rIns="36576" tIns="18288" bIns="18288">
+            <a:normAutofit/>
+          </a:bodyPr>
+          <a:lstStyle/>
+          <a:p>
+            <a:pPr>
+              <a:lnSpc>
+                <a:spcPct val="100000"/>
+              </a:lnSpc>
+              <a:spcBef>
+                <a:spcPts val="0"/>
+              </a:spcBef>
+              <a:spcAft>
+                <a:spcPts val="0"/>
+              </a:spcAft>
+            </a:pPr>
+            <a:r>
+              <a:rPr sz="1350" b="0">
+                <a:solidFill>
+                  <a:srgbClr val="000000"/>
+                </a:solidFill>
+                <a:latin typeface="Montserrat"/>
+              </a:rPr>
               <a:t>Result: baseline k=5 is the selected configuration by highest composite score.</a:t>
             </a:r>
           </a:p>
@@ -37034,13 +37210,13 @@
       </p:sp>
       <p:sp>
         <p:nvSpPr>
-          <p:cNvPr id="315" name="Oval 314"/>
+          <p:cNvPr id="317" name="Oval 316"/>
           <p:cNvSpPr/>
           <p:nvPr/>
         </p:nvSpPr>
         <p:spPr>
           <a:xfrm>
-            <a:off x="402336" y="4027932"/>
+            <a:off x="402336" y="4507992"/>
             <a:ext cx="192024" cy="192024"/>
           </a:xfrm>
           <a:prstGeom prst="ellipse">
@@ -37763,27 +37939,70 @@
               </a:spcAft>
             </a:pPr>
             <a:r>
-              <a:rPr sz="1350" b="1">
-                <a:solidFill>
-                  <a:srgbClr val="0E39A9"/>
+              <a:rPr sz="1350" b="0">
+                <a:solidFill>
+                  <a:srgbClr val="000000"/>
                 </a:solidFill>
                 <a:latin typeface="Montserrat"/>
               </a:rPr>
-              <a:t>Held-out DeepEval comparison (10 cases)</a:t>
+              <a:t>Held-out case-level output — selected baseline k=5</a:t>
             </a:r>
           </a:p>
         </p:txBody>
       </p:sp>
       <p:sp>
         <p:nvSpPr>
-          <p:cNvPr id="321" name="TextBox 320"/>
+          <p:cNvPr id="321" name="Oval 320"/>
+          <p:cNvSpPr/>
+          <p:nvPr/>
+        </p:nvSpPr>
+        <p:spPr>
+          <a:xfrm>
+            <a:off x="402336" y="1426464"/>
+            <a:ext cx="192024" cy="192024"/>
+          </a:xfrm>
+          <a:prstGeom prst="ellipse">
+            <a:avLst/>
+          </a:prstGeom>
+          <a:solidFill>
+            <a:srgbClr val="0944A1"/>
+          </a:solidFill>
+          <a:ln>
+            <a:noFill/>
+          </a:ln>
+        </p:spPr>
+        <p:style>
+          <a:lnRef idx="1">
+            <a:schemeClr val="accent1"/>
+          </a:lnRef>
+          <a:fillRef idx="3">
+            <a:schemeClr val="accent1"/>
+          </a:fillRef>
+          <a:effectRef idx="2">
+            <a:schemeClr val="accent1"/>
+          </a:effectRef>
+          <a:fontRef idx="minor">
+            <a:schemeClr val="lt1"/>
+          </a:fontRef>
+        </p:style>
+        <p:txBody>
+          <a:bodyPr rtlCol="0" anchor="ctr"/>
+          <a:lstStyle/>
+          <a:p>
+            <a:pPr algn="ctr"/>
+          </a:p>
+        </p:txBody>
+      </p:sp>
+      <p:sp>
+        <p:nvSpPr>
+          <p:cNvPr id="322" name="TextBox 321"/>
           <p:cNvSpPr txBox="1"/>
           <p:nvPr/>
         </p:nvSpPr>
         <p:spPr>
           <a:xfrm>
             <a:off x="694944" y="1613916"/>
-            <a:ext cx="6729984" cy="448056"/>
+            <a:ext cx="6729984" cy="256032"/>
           </a:xfrm>
           <a:prstGeom prst="rect">
             <a:avLst/>
@@ -37814,14 +38033,14 @@
                 </a:solidFill>
                 <a:latin typeface="Montserrat"/>
               </a:rPr>
-              <a:t>Baseline k=5     F=.993  R=.977  P=.808  AR=.939  Composite=.941  Pass=9/10</a:t>
+              <a:t>Case 01 | OTA cancellation/refund | PASS | Composite .944</a:t>
             </a:r>
           </a:p>
         </p:txBody>
       </p:sp>
       <p:sp>
         <p:nvSpPr>
-          <p:cNvPr id="322" name="Oval 321"/>
+          <p:cNvPr id="323" name="Oval 322"/>
           <p:cNvSpPr/>
           <p:nvPr/>
         </p:nvSpPr>
@@ -37864,14 +38083,14 @@
       </p:sp>
       <p:sp>
         <p:nvSpPr>
-          <p:cNvPr id="323" name="TextBox 322"/>
+          <p:cNvPr id="324" name="TextBox 323"/>
           <p:cNvSpPr txBox="1"/>
           <p:nvPr/>
         </p:nvSpPr>
         <p:spPr>
           <a:xfrm>
-            <a:off x="694944" y="2093976"/>
-            <a:ext cx="6729984" cy="448056"/>
+            <a:off x="694944" y="1901952"/>
+            <a:ext cx="6729984" cy="256032"/>
           </a:xfrm>
           <a:prstGeom prst="rect">
             <a:avLst/>
@@ -37902,20 +38121,20 @@
                 </a:solidFill>
                 <a:latin typeface="Montserrat"/>
               </a:rPr>
-              <a:t>Hybrid k=5       F=.995  R=.979  P=.787  AR=.922  Composite=.935  Pass=8/10</a:t>
+              <a:t>Case 02 | Member discount/cancellation | PASS | Composite .956</a:t>
             </a:r>
           </a:p>
         </p:txBody>
       </p:sp>
       <p:sp>
         <p:nvSpPr>
-          <p:cNvPr id="324" name="Oval 323"/>
+          <p:cNvPr id="325" name="Oval 324"/>
           <p:cNvSpPr/>
           <p:nvPr/>
         </p:nvSpPr>
         <p:spPr>
           <a:xfrm>
-            <a:off x="402336" y="2194560"/>
+            <a:off x="402336" y="2002536"/>
             <a:ext cx="192024" cy="192024"/>
           </a:xfrm>
           <a:prstGeom prst="ellipse">
@@ -37952,14 +38171,14 @@
       </p:sp>
       <p:sp>
         <p:nvSpPr>
-          <p:cNvPr id="325" name="TextBox 324"/>
+          <p:cNvPr id="326" name="TextBox 325"/>
           <p:cNvSpPr txBox="1"/>
           <p:nvPr/>
         </p:nvSpPr>
         <p:spPr>
           <a:xfrm>
-            <a:off x="694944" y="2574036"/>
-            <a:ext cx="6729984" cy="448056"/>
+            <a:off x="694944" y="2189988"/>
+            <a:ext cx="6729984" cy="256032"/>
           </a:xfrm>
           <a:prstGeom prst="rect">
             <a:avLst/>
@@ -37990,20 +38209,20 @@
                 </a:solidFill>
                 <a:latin typeface="Montserrat"/>
               </a:rPr>
-              <a:t>Hybrid k=6       F=.993  R=.982  P=.781  AR=.929  Composite=.935  Pass=8/10</a:t>
+              <a:t>Case 03 | Double Queen occupancy | PASS | Composite .988</a:t>
             </a:r>
           </a:p>
         </p:txBody>
       </p:sp>
       <p:sp>
         <p:nvSpPr>
-          <p:cNvPr id="326" name="Oval 325"/>
+          <p:cNvPr id="327" name="Oval 326"/>
           <p:cNvSpPr/>
           <p:nvPr/>
         </p:nvSpPr>
         <p:spPr>
           <a:xfrm>
-            <a:off x="402336" y="2674620"/>
+            <a:off x="402336" y="2290572"/>
             <a:ext cx="192024" cy="192024"/>
           </a:xfrm>
           <a:prstGeom prst="ellipse">
@@ -38040,14 +38259,14 @@
       </p:sp>
       <p:sp>
         <p:nvSpPr>
-          <p:cNvPr id="327" name="TextBox 326"/>
+          <p:cNvPr id="328" name="TextBox 327"/>
           <p:cNvSpPr txBox="1"/>
           <p:nvPr/>
         </p:nvSpPr>
         <p:spPr>
           <a:xfrm>
-            <a:off x="694944" y="3054096"/>
-            <a:ext cx="6729984" cy="448056"/>
+            <a:off x="694944" y="2478024"/>
+            <a:ext cx="6729984" cy="256032"/>
           </a:xfrm>
           <a:prstGeom prst="rect">
             <a:avLst/>
@@ -38072,26 +38291,26 @@
               </a:spcAft>
             </a:pPr>
             <a:r>
-              <a:rPr sz="1350" b="1">
-                <a:solidFill>
-                  <a:srgbClr val="1F7752"/>
+              <a:rPr sz="1350" b="0">
+                <a:solidFill>
+                  <a:srgbClr val="000000"/>
                 </a:solidFill>
                 <a:latin typeface="Montserrat"/>
               </a:rPr>
-              <a:t>Selected: baseline k=5 because it has the highest weighted composite score.</a:t>
+              <a:t>Case 04 | Accessible King inclusions | FAIL | Precision .451</a:t>
             </a:r>
           </a:p>
         </p:txBody>
       </p:sp>
       <p:sp>
         <p:nvSpPr>
-          <p:cNvPr id="328" name="Oval 327"/>
+          <p:cNvPr id="329" name="Oval 328"/>
           <p:cNvSpPr/>
           <p:nvPr/>
         </p:nvSpPr>
         <p:spPr>
           <a:xfrm>
-            <a:off x="402336" y="3154679"/>
+            <a:off x="402336" y="2578608"/>
             <a:ext cx="192024" cy="192024"/>
           </a:xfrm>
           <a:prstGeom prst="ellipse">
@@ -38128,14 +38347,14 @@
       </p:sp>
       <p:sp>
         <p:nvSpPr>
-          <p:cNvPr id="329" name="TextBox 328"/>
+          <p:cNvPr id="330" name="TextBox 329"/>
           <p:cNvSpPr txBox="1"/>
           <p:nvPr/>
         </p:nvSpPr>
         <p:spPr>
           <a:xfrm>
-            <a:off x="694944" y="3534156"/>
-            <a:ext cx="6729984" cy="448056"/>
+            <a:off x="694944" y="2766060"/>
+            <a:ext cx="6729984" cy="256032"/>
           </a:xfrm>
           <a:prstGeom prst="rect">
             <a:avLst/>
@@ -38160,26 +38379,26 @@
               </a:spcAft>
             </a:pPr>
             <a:r>
-              <a:rPr sz="1350" b="1">
-                <a:solidFill>
-                  <a:srgbClr val="A62A2A"/>
+              <a:rPr sz="1350" b="0">
+                <a:solidFill>
+                  <a:srgbClr val="000000"/>
                 </a:solidFill>
                 <a:latin typeface="Montserrat"/>
               </a:rPr>
-              <a:t>Only remaining failure: Accessible King room inclusions; Contextual Precision=.451.</a:t>
+              <a:t>Case 05 | Atlanta/Miami parking | PASS | Composite .975</a:t>
             </a:r>
           </a:p>
         </p:txBody>
       </p:sp>
       <p:sp>
         <p:nvSpPr>
-          <p:cNvPr id="330" name="Oval 329"/>
+          <p:cNvPr id="331" name="Oval 330"/>
           <p:cNvSpPr/>
           <p:nvPr/>
         </p:nvSpPr>
         <p:spPr>
           <a:xfrm>
-            <a:off x="402336" y="3634739"/>
+            <a:off x="402336" y="2866644"/>
             <a:ext cx="192024" cy="192024"/>
           </a:xfrm>
           <a:prstGeom prst="ellipse">
@@ -38216,14 +38435,14 @@
       </p:sp>
       <p:sp>
         <p:nvSpPr>
-          <p:cNvPr id="331" name="TextBox 330"/>
+          <p:cNvPr id="332" name="TextBox 331"/>
           <p:cNvSpPr txBox="1"/>
           <p:nvPr/>
         </p:nvSpPr>
         <p:spPr>
           <a:xfrm>
-            <a:off x="694944" y="4014215"/>
-            <a:ext cx="6729984" cy="649224"/>
+            <a:off x="694944" y="3054096"/>
+            <a:ext cx="6729984" cy="256032"/>
           </a:xfrm>
           <a:prstGeom prst="rect">
             <a:avLst/>
@@ -38254,20 +38473,548 @@
                 </a:solidFill>
                 <a:latin typeface="Montserrat"/>
               </a:rPr>
-              <a:t>The benchmark question is underspecified. A focused clarification plus single-chunk retrieval scored Precision=.961 and passed all four metrics.</a:t>
+              <a:t>Case 06 | Miami breakfast | PASS | Composite .963</a:t>
             </a:r>
           </a:p>
         </p:txBody>
       </p:sp>
       <p:sp>
         <p:nvSpPr>
-          <p:cNvPr id="332" name="Oval 331"/>
+          <p:cNvPr id="333" name="Oval 332"/>
           <p:cNvSpPr/>
           <p:nvPr/>
         </p:nvSpPr>
         <p:spPr>
           <a:xfrm>
-            <a:off x="402336" y="4114800"/>
+            <a:off x="402336" y="3154679"/>
+            <a:ext cx="192024" cy="192024"/>
+          </a:xfrm>
+          <a:prstGeom prst="ellipse">
+            <a:avLst/>
+          </a:prstGeom>
+          <a:solidFill>
+            <a:srgbClr val="0944A1"/>
+          </a:solidFill>
+          <a:ln>
+            <a:noFill/>
+          </a:ln>
+        </p:spPr>
+        <p:style>
+          <a:lnRef idx="1">
+            <a:schemeClr val="accent1"/>
+          </a:lnRef>
+          <a:fillRef idx="3">
+            <a:schemeClr val="accent1"/>
+          </a:fillRef>
+          <a:effectRef idx="2">
+            <a:schemeClr val="accent1"/>
+          </a:effectRef>
+          <a:fontRef idx="minor">
+            <a:schemeClr val="lt1"/>
+          </a:fontRef>
+        </p:style>
+        <p:txBody>
+          <a:bodyPr rtlCol="0" anchor="ctr"/>
+          <a:lstStyle/>
+          <a:p>
+            <a:pPr algn="ctr"/>
+          </a:p>
+        </p:txBody>
+      </p:sp>
+      <p:sp>
+        <p:nvSpPr>
+          <p:cNvPr id="334" name="TextBox 333"/>
+          <p:cNvSpPr txBox="1"/>
+          <p:nvPr/>
+        </p:nvSpPr>
+        <p:spPr>
+          <a:xfrm>
+            <a:off x="694944" y="3342132"/>
+            <a:ext cx="6729984" cy="256032"/>
+          </a:xfrm>
+          <a:prstGeom prst="rect">
+            <a:avLst/>
+          </a:prstGeom>
+          <a:noFill/>
+        </p:spPr>
+        <p:txBody>
+          <a:bodyPr wrap="square" lIns="82296" rIns="36576" tIns="18288" bIns="18288">
+            <a:normAutofit/>
+          </a:bodyPr>
+          <a:lstStyle/>
+          <a:p>
+            <a:pPr>
+              <a:lnSpc>
+                <a:spcPct val="100000"/>
+              </a:lnSpc>
+              <a:spcBef>
+                <a:spcPts val="0"/>
+              </a:spcBef>
+              <a:spcAft>
+                <a:spcPts val="0"/>
+              </a:spcAft>
+            </a:pPr>
+            <a:r>
+              <a:rPr sz="1350" b="0">
+                <a:solidFill>
+                  <a:srgbClr val="000000"/>
+                </a:solidFill>
+                <a:latin typeface="Montserrat"/>
+              </a:rPr>
+              <a:t>Case 07 | Advance Purchase change | PASS | Composite .916</a:t>
+            </a:r>
+          </a:p>
+        </p:txBody>
+      </p:sp>
+      <p:sp>
+        <p:nvSpPr>
+          <p:cNvPr id="335" name="Oval 334"/>
+          <p:cNvSpPr/>
+          <p:nvPr/>
+        </p:nvSpPr>
+        <p:spPr>
+          <a:xfrm>
+            <a:off x="402336" y="3442715"/>
+            <a:ext cx="192024" cy="192024"/>
+          </a:xfrm>
+          <a:prstGeom prst="ellipse">
+            <a:avLst/>
+          </a:prstGeom>
+          <a:solidFill>
+            <a:srgbClr val="0944A1"/>
+          </a:solidFill>
+          <a:ln>
+            <a:noFill/>
+          </a:ln>
+        </p:spPr>
+        <p:style>
+          <a:lnRef idx="1">
+            <a:schemeClr val="accent1"/>
+          </a:lnRef>
+          <a:fillRef idx="3">
+            <a:schemeClr val="accent1"/>
+          </a:fillRef>
+          <a:effectRef idx="2">
+            <a:schemeClr val="accent1"/>
+          </a:effectRef>
+          <a:fontRef idx="minor">
+            <a:schemeClr val="lt1"/>
+          </a:fontRef>
+        </p:style>
+        <p:txBody>
+          <a:bodyPr rtlCol="0" anchor="ctr"/>
+          <a:lstStyle/>
+          <a:p>
+            <a:pPr algn="ctr"/>
+          </a:p>
+        </p:txBody>
+      </p:sp>
+      <p:sp>
+        <p:nvSpPr>
+          <p:cNvPr id="336" name="TextBox 335"/>
+          <p:cNvSpPr txBox="1"/>
+          <p:nvPr/>
+        </p:nvSpPr>
+        <p:spPr>
+          <a:xfrm>
+            <a:off x="694944" y="3630168"/>
+            <a:ext cx="6729984" cy="256032"/>
+          </a:xfrm>
+          <a:prstGeom prst="rect">
+            <a:avLst/>
+          </a:prstGeom>
+          <a:noFill/>
+        </p:spPr>
+        <p:txBody>
+          <a:bodyPr wrap="square" lIns="82296" rIns="36576" tIns="18288" bIns="18288">
+            <a:normAutofit/>
+          </a:bodyPr>
+          <a:lstStyle/>
+          <a:p>
+            <a:pPr>
+              <a:lnSpc>
+                <a:spcPct val="100000"/>
+              </a:lnSpc>
+              <a:spcBef>
+                <a:spcPts val="0"/>
+              </a:spcBef>
+              <a:spcAft>
+                <a:spcPts val="0"/>
+              </a:spcAft>
+            </a:pPr>
+            <a:r>
+              <a:rPr sz="1350" b="0">
+                <a:solidFill>
+                  <a:srgbClr val="000000"/>
+                </a:solidFill>
+                <a:latin typeface="Montserrat"/>
+              </a:rPr>
+              <a:t>Case 08 | Denver late checkout | PASS | Composite .939</a:t>
+            </a:r>
+          </a:p>
+        </p:txBody>
+      </p:sp>
+      <p:sp>
+        <p:nvSpPr>
+          <p:cNvPr id="337" name="Oval 336"/>
+          <p:cNvSpPr/>
+          <p:nvPr/>
+        </p:nvSpPr>
+        <p:spPr>
+          <a:xfrm>
+            <a:off x="402336" y="3730752"/>
+            <a:ext cx="192024" cy="192024"/>
+          </a:xfrm>
+          <a:prstGeom prst="ellipse">
+            <a:avLst/>
+          </a:prstGeom>
+          <a:solidFill>
+            <a:srgbClr val="0944A1"/>
+          </a:solidFill>
+          <a:ln>
+            <a:noFill/>
+          </a:ln>
+        </p:spPr>
+        <p:style>
+          <a:lnRef idx="1">
+            <a:schemeClr val="accent1"/>
+          </a:lnRef>
+          <a:fillRef idx="3">
+            <a:schemeClr val="accent1"/>
+          </a:fillRef>
+          <a:effectRef idx="2">
+            <a:schemeClr val="accent1"/>
+          </a:effectRef>
+          <a:fontRef idx="minor">
+            <a:schemeClr val="lt1"/>
+          </a:fontRef>
+        </p:style>
+        <p:txBody>
+          <a:bodyPr rtlCol="0" anchor="ctr"/>
+          <a:lstStyle/>
+          <a:p>
+            <a:pPr algn="ctr"/>
+          </a:p>
+        </p:txBody>
+      </p:sp>
+      <p:sp>
+        <p:nvSpPr>
+          <p:cNvPr id="338" name="TextBox 337"/>
+          <p:cNvSpPr txBox="1"/>
+          <p:nvPr/>
+        </p:nvSpPr>
+        <p:spPr>
+          <a:xfrm>
+            <a:off x="694944" y="3918204"/>
+            <a:ext cx="6729984" cy="256032"/>
+          </a:xfrm>
+          <a:prstGeom prst="rect">
+            <a:avLst/>
+          </a:prstGeom>
+          <a:noFill/>
+        </p:spPr>
+        <p:txBody>
+          <a:bodyPr wrap="square" lIns="82296" rIns="36576" tIns="18288" bIns="18288">
+            <a:normAutofit/>
+          </a:bodyPr>
+          <a:lstStyle/>
+          <a:p>
+            <a:pPr>
+              <a:lnSpc>
+                <a:spcPct val="100000"/>
+              </a:lnSpc>
+              <a:spcBef>
+                <a:spcPts val="0"/>
+              </a:spcBef>
+              <a:spcAft>
+                <a:spcPts val="0"/>
+              </a:spcAft>
+            </a:pPr>
+            <a:r>
+              <a:rPr sz="1350" b="0">
+                <a:solidFill>
+                  <a:srgbClr val="000000"/>
+                </a:solidFill>
+                <a:latin typeface="Montserrat"/>
+              </a:rPr>
+              <a:t>Case 09 | ASH-CHI pet fee | PASS | Composite .974</a:t>
+            </a:r>
+          </a:p>
+        </p:txBody>
+      </p:sp>
+      <p:sp>
+        <p:nvSpPr>
+          <p:cNvPr id="339" name="Oval 338"/>
+          <p:cNvSpPr/>
+          <p:nvPr/>
+        </p:nvSpPr>
+        <p:spPr>
+          <a:xfrm>
+            <a:off x="402336" y="4018788"/>
+            <a:ext cx="192024" cy="192024"/>
+          </a:xfrm>
+          <a:prstGeom prst="ellipse">
+            <a:avLst/>
+          </a:prstGeom>
+          <a:solidFill>
+            <a:srgbClr val="0944A1"/>
+          </a:solidFill>
+          <a:ln>
+            <a:noFill/>
+          </a:ln>
+        </p:spPr>
+        <p:style>
+          <a:lnRef idx="1">
+            <a:schemeClr val="accent1"/>
+          </a:lnRef>
+          <a:fillRef idx="3">
+            <a:schemeClr val="accent1"/>
+          </a:fillRef>
+          <a:effectRef idx="2">
+            <a:schemeClr val="accent1"/>
+          </a:effectRef>
+          <a:fontRef idx="minor">
+            <a:schemeClr val="lt1"/>
+          </a:fontRef>
+        </p:style>
+        <p:txBody>
+          <a:bodyPr rtlCol="0" anchor="ctr"/>
+          <a:lstStyle/>
+          <a:p>
+            <a:pPr algn="ctr"/>
+          </a:p>
+        </p:txBody>
+      </p:sp>
+      <p:sp>
+        <p:nvSpPr>
+          <p:cNvPr id="340" name="TextBox 339"/>
+          <p:cNvSpPr txBox="1"/>
+          <p:nvPr/>
+        </p:nvSpPr>
+        <p:spPr>
+          <a:xfrm>
+            <a:off x="694944" y="4206240"/>
+            <a:ext cx="6729984" cy="256032"/>
+          </a:xfrm>
+          <a:prstGeom prst="rect">
+            <a:avLst/>
+          </a:prstGeom>
+          <a:noFill/>
+        </p:spPr>
+        <p:txBody>
+          <a:bodyPr wrap="square" lIns="82296" rIns="36576" tIns="18288" bIns="18288">
+            <a:normAutofit/>
+          </a:bodyPr>
+          <a:lstStyle/>
+          <a:p>
+            <a:pPr>
+              <a:lnSpc>
+                <a:spcPct val="100000"/>
+              </a:lnSpc>
+              <a:spcBef>
+                <a:spcPts val="0"/>
+              </a:spcBef>
+              <a:spcAft>
+                <a:spcPts val="0"/>
+              </a:spcAft>
+            </a:pPr>
+            <a:r>
+              <a:rPr sz="1350" b="0">
+                <a:solidFill>
+                  <a:srgbClr val="000000"/>
+                </a:solidFill>
+                <a:latin typeface="Montserrat"/>
+              </a:rPr>
+              <a:t>Case 10 | Card-hold difference | PASS | Composite .934</a:t>
+            </a:r>
+          </a:p>
+        </p:txBody>
+      </p:sp>
+      <p:sp>
+        <p:nvSpPr>
+          <p:cNvPr id="341" name="Oval 340"/>
+          <p:cNvSpPr/>
+          <p:nvPr/>
+        </p:nvSpPr>
+        <p:spPr>
+          <a:xfrm>
+            <a:off x="402336" y="4306824"/>
+            <a:ext cx="192024" cy="192024"/>
+          </a:xfrm>
+          <a:prstGeom prst="ellipse">
+            <a:avLst/>
+          </a:prstGeom>
+          <a:solidFill>
+            <a:srgbClr val="0944A1"/>
+          </a:solidFill>
+          <a:ln>
+            <a:noFill/>
+          </a:ln>
+        </p:spPr>
+        <p:style>
+          <a:lnRef idx="1">
+            <a:schemeClr val="accent1"/>
+          </a:lnRef>
+          <a:fillRef idx="3">
+            <a:schemeClr val="accent1"/>
+          </a:fillRef>
+          <a:effectRef idx="2">
+            <a:schemeClr val="accent1"/>
+          </a:effectRef>
+          <a:fontRef idx="minor">
+            <a:schemeClr val="lt1"/>
+          </a:fontRef>
+        </p:style>
+        <p:txBody>
+          <a:bodyPr rtlCol="0" anchor="ctr"/>
+          <a:lstStyle/>
+          <a:p>
+            <a:pPr algn="ctr"/>
+          </a:p>
+        </p:txBody>
+      </p:sp>
+      <p:sp>
+        <p:nvSpPr>
+          <p:cNvPr id="342" name="TextBox 341"/>
+          <p:cNvSpPr txBox="1"/>
+          <p:nvPr/>
+        </p:nvSpPr>
+        <p:spPr>
+          <a:xfrm>
+            <a:off x="694944" y="4494276"/>
+            <a:ext cx="6729984" cy="187451"/>
+          </a:xfrm>
+          <a:prstGeom prst="rect">
+            <a:avLst/>
+          </a:prstGeom>
+          <a:noFill/>
+        </p:spPr>
+        <p:txBody>
+          <a:bodyPr wrap="square" lIns="82296" rIns="36576" tIns="18288" bIns="18288">
+            <a:normAutofit/>
+          </a:bodyPr>
+          <a:lstStyle/>
+          <a:p>
+            <a:pPr>
+              <a:lnSpc>
+                <a:spcPct val="100000"/>
+              </a:lnSpc>
+              <a:spcBef>
+                <a:spcPts val="0"/>
+              </a:spcBef>
+              <a:spcAft>
+                <a:spcPts val="0"/>
+              </a:spcAft>
+            </a:pPr>
+            <a:r>
+              <a:rPr sz="1350" b="0">
+                <a:solidFill>
+                  <a:srgbClr val="000000"/>
+                </a:solidFill>
+                <a:latin typeface="Montserrat"/>
+              </a:rPr>
+              <a:t>Selected baseline result: 9/10 passed; weighted composite .941.</a:t>
+            </a:r>
+          </a:p>
+        </p:txBody>
+      </p:sp>
+      <p:sp>
+        <p:nvSpPr>
+          <p:cNvPr id="343" name="Oval 342"/>
+          <p:cNvSpPr/>
+          <p:nvPr/>
+        </p:nvSpPr>
+        <p:spPr>
+          <a:xfrm>
+            <a:off x="402336" y="4594860"/>
+            <a:ext cx="192024" cy="192024"/>
+          </a:xfrm>
+          <a:prstGeom prst="ellipse">
+            <a:avLst/>
+          </a:prstGeom>
+          <a:solidFill>
+            <a:srgbClr val="0944A1"/>
+          </a:solidFill>
+          <a:ln>
+            <a:noFill/>
+          </a:ln>
+        </p:spPr>
+        <p:style>
+          <a:lnRef idx="1">
+            <a:schemeClr val="accent1"/>
+          </a:lnRef>
+          <a:fillRef idx="3">
+            <a:schemeClr val="accent1"/>
+          </a:fillRef>
+          <a:effectRef idx="2">
+            <a:schemeClr val="accent1"/>
+          </a:effectRef>
+          <a:fontRef idx="minor">
+            <a:schemeClr val="lt1"/>
+          </a:fontRef>
+        </p:style>
+        <p:txBody>
+          <a:bodyPr rtlCol="0" anchor="ctr"/>
+          <a:lstStyle/>
+          <a:p>
+            <a:pPr algn="ctr"/>
+          </a:p>
+        </p:txBody>
+      </p:sp>
+      <p:sp>
+        <p:nvSpPr>
+          <p:cNvPr id="344" name="TextBox 343"/>
+          <p:cNvSpPr txBox="1"/>
+          <p:nvPr/>
+        </p:nvSpPr>
+        <p:spPr>
+          <a:xfrm>
+            <a:off x="694944" y="4713732"/>
+            <a:ext cx="6729984" cy="182880"/>
+          </a:xfrm>
+          <a:prstGeom prst="rect">
+            <a:avLst/>
+          </a:prstGeom>
+          <a:noFill/>
+        </p:spPr>
+        <p:txBody>
+          <a:bodyPr wrap="square" lIns="82296" rIns="36576" tIns="18288" bIns="18288">
+            <a:normAutofit/>
+          </a:bodyPr>
+          <a:lstStyle/>
+          <a:p>
+            <a:pPr>
+              <a:lnSpc>
+                <a:spcPct val="100000"/>
+              </a:lnSpc>
+              <a:spcBef>
+                <a:spcPts val="0"/>
+              </a:spcBef>
+              <a:spcAft>
+                <a:spcPts val="0"/>
+              </a:spcAft>
+            </a:pPr>
+            <a:r>
+              <a:rPr sz="1350" b="0">
+                <a:solidFill>
+                  <a:srgbClr val="000000"/>
+                </a:solidFill>
+                <a:latin typeface="Montserrat"/>
+              </a:rPr>
+              <a:t>The focused clarification experiment raised the failed case's Precision to .961 and passed all four metrics.</a:t>
+            </a:r>
+          </a:p>
+        </p:txBody>
+      </p:sp>
+      <p:sp>
+        <p:nvSpPr>
+          <p:cNvPr id="345" name="Oval 344"/>
+          <p:cNvSpPr/>
+          <p:nvPr/>
+        </p:nvSpPr>
+        <p:spPr>
+          <a:xfrm>
+            <a:off x="402336" y="4814316"/>
             <a:ext cx="192024" cy="192024"/>
           </a:xfrm>
           <a:prstGeom prst="ellipse">
@@ -42990,7 +43737,7 @@
                 </a:solidFill>
                 <a:latin typeface="Montserrat"/>
               </a:rPr>
-              <a:t>Latest published commit: 7fda05a — Publish latest Aurora Stays evaluation and presentation.</a:t>
+              <a:t>Latest published commit: 3b34c59 — removed the handoff-owner line from slide 31.</a:t>
             </a:r>
           </a:p>
         </p:txBody>
@@ -43047,7 +43794,7 @@
         <p:spPr>
           <a:xfrm>
             <a:off x="694944" y="2093976"/>
-            <a:ext cx="6729984" cy="649224"/>
+            <a:ext cx="6729984" cy="448056"/>
           </a:xfrm>
           <a:prstGeom prst="rect">
             <a:avLst/>
@@ -43078,7 +43825,7 @@
                 </a:solidFill>
                 <a:latin typeface="Montserrat"/>
               </a:rPr>
-              <a:t>Published groups include backend and frontend source, FAISS artifacts, the final executed notebook, evaluation CSVs, and the presentation pack.</a:t>
+              <a:t>Key files: backend/app.py, backend/rag_utils.py, frontend/app.py, Dockerfiles, and requirements files.</a:t>
             </a:r>
           </a:p>
         </p:txBody>
@@ -43134,8 +43881,8 @@
         </p:nvSpPr>
         <p:spPr>
           <a:xfrm>
-            <a:off x="694944" y="2775204"/>
-            <a:ext cx="6729984" cy="448056"/>
+            <a:off x="694944" y="2574036"/>
+            <a:ext cx="6729984" cy="649224"/>
           </a:xfrm>
           <a:prstGeom prst="rect">
             <a:avLst/>
@@ -43166,7 +43913,7 @@
                 </a:solidFill>
                 <a:latin typeface="Montserrat"/>
               </a:rPr>
-              <a:t>The supplied template and generated PPTX/PDF presentation files are included for handoff.</a:t>
+              <a:t>Evaluation files: notebooks/Aurora_Stays_RAG_POC_Local_final_executed.ipynb, reports/evaluation_results.md, and deepeval_options_cases.csv.</a:t>
             </a:r>
           </a:p>
         </p:txBody>
@@ -43179,7 +43926,7 @@
         </p:nvSpPr>
         <p:spPr>
           <a:xfrm>
-            <a:off x="402336" y="2875788"/>
+            <a:off x="402336" y="2674620"/>
             <a:ext cx="192024" cy="192024"/>
           </a:xfrm>
           <a:prstGeom prst="ellipse">
@@ -43254,6 +44001,94 @@
                 </a:solidFill>
                 <a:latin typeface="Montserrat"/>
               </a:rPr>
+              <a:t>Presentation files: build_aurora_presentation.py, the template-style PPTX, and the generated PDF packs.</a:t>
+            </a:r>
+          </a:p>
+        </p:txBody>
+      </p:sp>
+      <p:sp>
+        <p:nvSpPr>
+          <p:cNvPr id="385" name="Oval 384"/>
+          <p:cNvSpPr/>
+          <p:nvPr/>
+        </p:nvSpPr>
+        <p:spPr>
+          <a:xfrm>
+            <a:off x="402336" y="3355848"/>
+            <a:ext cx="192024" cy="192024"/>
+          </a:xfrm>
+          <a:prstGeom prst="ellipse">
+            <a:avLst/>
+          </a:prstGeom>
+          <a:solidFill>
+            <a:srgbClr val="0944A1"/>
+          </a:solidFill>
+          <a:ln>
+            <a:noFill/>
+          </a:ln>
+        </p:spPr>
+        <p:style>
+          <a:lnRef idx="1">
+            <a:schemeClr val="accent1"/>
+          </a:lnRef>
+          <a:fillRef idx="3">
+            <a:schemeClr val="accent1"/>
+          </a:fillRef>
+          <a:effectRef idx="2">
+            <a:schemeClr val="accent1"/>
+          </a:effectRef>
+          <a:fontRef idx="minor">
+            <a:schemeClr val="lt1"/>
+          </a:fontRef>
+        </p:style>
+        <p:txBody>
+          <a:bodyPr rtlCol="0" anchor="ctr"/>
+          <a:lstStyle/>
+          <a:p>
+            <a:pPr algn="ctr"/>
+          </a:p>
+        </p:txBody>
+      </p:sp>
+      <p:sp>
+        <p:nvSpPr>
+          <p:cNvPr id="386" name="TextBox 385"/>
+          <p:cNvSpPr txBox="1"/>
+          <p:nvPr/>
+        </p:nvSpPr>
+        <p:spPr>
+          <a:xfrm>
+            <a:off x="694944" y="3735324"/>
+            <a:ext cx="6729984" cy="448056"/>
+          </a:xfrm>
+          <a:prstGeom prst="rect">
+            <a:avLst/>
+          </a:prstGeom>
+          <a:noFill/>
+        </p:spPr>
+        <p:txBody>
+          <a:bodyPr wrap="square" lIns="82296" rIns="36576" tIns="18288" bIns="18288">
+            <a:normAutofit/>
+          </a:bodyPr>
+          <a:lstStyle/>
+          <a:p>
+            <a:pPr>
+              <a:lnSpc>
+                <a:spcPct val="100000"/>
+              </a:lnSpc>
+              <a:spcBef>
+                <a:spcPts val="0"/>
+              </a:spcBef>
+              <a:spcAft>
+                <a:spcPts val="0"/>
+              </a:spcAft>
+            </a:pPr>
+            <a:r>
+              <a:rPr sz="1350" b="0">
+                <a:solidFill>
+                  <a:srgbClr val="000000"/>
+                </a:solidFill>
+                <a:latin typeface="Montserrat"/>
+              </a:rPr>
               <a:t>Credentials remain excluded: config/config.json, .env, and supplied token/config files are not tracked.</a:t>
             </a:r>
           </a:p>
@@ -43261,13 +44096,13 @@
       </p:sp>
       <p:sp>
         <p:nvSpPr>
-          <p:cNvPr id="385" name="Oval 384"/>
+          <p:cNvPr id="387" name="Oval 386"/>
           <p:cNvSpPr/>
           <p:nvPr/>
         </p:nvSpPr>
         <p:spPr>
           <a:xfrm>
-            <a:off x="402336" y="3355848"/>
+            <a:off x="402336" y="3835908"/>
             <a:ext cx="192024" cy="192024"/>
           </a:xfrm>
           <a:prstGeom prst="ellipse">
@@ -43713,7 +44548,7 @@
                 </a:solidFill>
                 <a:latin typeface="Montserrat"/>
               </a:rPr>
-              <a:t>Production smoke tests used the parking-fee query and the ASH-CHI Loop pet-charge query.</a:t>
+              <a:t>Validated local endpoints: frontend http://localhost:8501 and backend http://127.0.0.1:5000.</a:t>
             </a:r>
           </a:p>
         </p:txBody>
@@ -43801,6 +44636,94 @@
                 </a:solidFill>
                 <a:latin typeface="Montserrat"/>
               </a:rPr>
+              <a:t>Production smoke tests used the parking-fee query and the ASH-CHI Loop pet-charge query.</a:t>
+            </a:r>
+          </a:p>
+        </p:txBody>
+      </p:sp>
+      <p:sp>
+        <p:nvSpPr>
+          <p:cNvPr id="393" name="Oval 392"/>
+          <p:cNvSpPr/>
+          <p:nvPr/>
+        </p:nvSpPr>
+        <p:spPr>
+          <a:xfrm>
+            <a:off x="402336" y="3346703"/>
+            <a:ext cx="192024" cy="192024"/>
+          </a:xfrm>
+          <a:prstGeom prst="ellipse">
+            <a:avLst/>
+          </a:prstGeom>
+          <a:solidFill>
+            <a:srgbClr val="0944A1"/>
+          </a:solidFill>
+          <a:ln>
+            <a:noFill/>
+          </a:ln>
+        </p:spPr>
+        <p:style>
+          <a:lnRef idx="1">
+            <a:schemeClr val="accent1"/>
+          </a:lnRef>
+          <a:fillRef idx="3">
+            <a:schemeClr val="accent1"/>
+          </a:fillRef>
+          <a:effectRef idx="2">
+            <a:schemeClr val="accent1"/>
+          </a:effectRef>
+          <a:fontRef idx="minor">
+            <a:schemeClr val="lt1"/>
+          </a:fontRef>
+        </p:style>
+        <p:txBody>
+          <a:bodyPr rtlCol="0" anchor="ctr"/>
+          <a:lstStyle/>
+          <a:p>
+            <a:pPr algn="ctr"/>
+          </a:p>
+        </p:txBody>
+      </p:sp>
+      <p:sp>
+        <p:nvSpPr>
+          <p:cNvPr id="394" name="TextBox 393"/>
+          <p:cNvSpPr txBox="1"/>
+          <p:nvPr/>
+        </p:nvSpPr>
+        <p:spPr>
+          <a:xfrm>
+            <a:off x="694944" y="3726180"/>
+            <a:ext cx="6729984" cy="448056"/>
+          </a:xfrm>
+          <a:prstGeom prst="rect">
+            <a:avLst/>
+          </a:prstGeom>
+          <a:noFill/>
+        </p:spPr>
+        <p:txBody>
+          <a:bodyPr wrap="square" lIns="82296" rIns="36576" tIns="18288" bIns="18288">
+            <a:normAutofit/>
+          </a:bodyPr>
+          <a:lstStyle/>
+          <a:p>
+            <a:pPr>
+              <a:lnSpc>
+                <a:spcPct val="100000"/>
+              </a:lnSpc>
+              <a:spcBef>
+                <a:spcPts val="0"/>
+              </a:spcBef>
+              <a:spcAft>
+                <a:spcPts val="0"/>
+              </a:spcAft>
+            </a:pPr>
+            <a:r>
+              <a:rPr sz="1350" b="0">
+                <a:solidFill>
+                  <a:srgbClr val="000000"/>
+                </a:solidFill>
+                <a:latin typeface="Montserrat"/>
+              </a:rPr>
               <a:t>API keys belong in Codespaces Secrets or a private local config file, never in the forwarded URL or source code.</a:t>
             </a:r>
           </a:p>
@@ -43808,13 +44731,13 @@
       </p:sp>
       <p:sp>
         <p:nvSpPr>
-          <p:cNvPr id="393" name="Oval 392"/>
+          <p:cNvPr id="395" name="Oval 394"/>
           <p:cNvSpPr/>
           <p:nvPr/>
         </p:nvSpPr>
         <p:spPr>
           <a:xfrm>
-            <a:off x="402336" y="3346703"/>
+            <a:off x="402336" y="3826764"/>
             <a:ext cx="192024" cy="192024"/>
           </a:xfrm>
           <a:prstGeom prst="ellipse">
@@ -44229,7 +45152,7 @@
         <p:spPr>
           <a:xfrm>
             <a:off x="694944" y="2382012"/>
-            <a:ext cx="6729984" cy="448056"/>
+            <a:ext cx="6729984" cy="649224"/>
           </a:xfrm>
           <a:prstGeom prst="rect">
             <a:avLst/>
@@ -44260,7 +45183,7 @@
                 </a:solidFill>
                 <a:latin typeface="Montserrat"/>
               </a:rPr>
-              <a:t>Expected evidence includes ASH-ATL Midtown self parking at $28 per night and ASH-MIA Brickell valet at $55 per night.</a:t>
+              <a:t>Response excerpt: relevant_chunks include ASH-ATL Midtown self parking at $28 per night and ASH-MIA Brickell valet at $55 per night.</a:t>
             </a:r>
           </a:p>
         </p:txBody>
@@ -44316,7 +45239,7 @@
         </p:nvSpPr>
         <p:spPr>
           <a:xfrm>
-            <a:off x="694944" y="2862072"/>
+            <a:off x="694944" y="3063240"/>
             <a:ext cx="6729984" cy="448056"/>
           </a:xfrm>
           <a:prstGeom prst="rect">
@@ -44361,7 +45284,7 @@
         </p:nvSpPr>
         <p:spPr>
           <a:xfrm>
-            <a:off x="402336" y="2962656"/>
+            <a:off x="402336" y="3163824"/>
             <a:ext cx="192024" cy="192024"/>
           </a:xfrm>
           <a:prstGeom prst="ellipse">
@@ -44807,7 +45730,7 @@
                 </a:solidFill>
                 <a:latin typeface="Montserrat"/>
               </a:rPr>
-              <a:t>The parking example returns a grounded comparison of the Atlanta and Miami fees with supporting chunks.</a:t>
+              <a:t>Answer excerpt: Atlanta Midtown self parking is $28 per night; Miami Brickell uses valet parking at $55 per night.</a:t>
             </a:r>
           </a:p>
         </p:txBody>
@@ -44895,6 +45818,94 @@
                 </a:solidFill>
                 <a:latin typeface="Montserrat"/>
               </a:rPr>
+              <a:t>The response also returns the supporting chunks for auditability.</a:t>
+            </a:r>
+          </a:p>
+        </p:txBody>
+      </p:sp>
+      <p:sp>
+        <p:nvSpPr>
+          <p:cNvPr id="409" name="Oval 408"/>
+          <p:cNvSpPr/>
+          <p:nvPr/>
+        </p:nvSpPr>
+        <p:spPr>
+          <a:xfrm>
+            <a:off x="402336" y="3154679"/>
+            <a:ext cx="192024" cy="192024"/>
+          </a:xfrm>
+          <a:prstGeom prst="ellipse">
+            <a:avLst/>
+          </a:prstGeom>
+          <a:solidFill>
+            <a:srgbClr val="0944A1"/>
+          </a:solidFill>
+          <a:ln>
+            <a:noFill/>
+          </a:ln>
+        </p:spPr>
+        <p:style>
+          <a:lnRef idx="1">
+            <a:schemeClr val="accent1"/>
+          </a:lnRef>
+          <a:fillRef idx="3">
+            <a:schemeClr val="accent1"/>
+          </a:fillRef>
+          <a:effectRef idx="2">
+            <a:schemeClr val="accent1"/>
+          </a:effectRef>
+          <a:fontRef idx="minor">
+            <a:schemeClr val="lt1"/>
+          </a:fontRef>
+        </p:style>
+        <p:txBody>
+          <a:bodyPr rtlCol="0" anchor="ctr"/>
+          <a:lstStyle/>
+          <a:p>
+            <a:pPr algn="ctr"/>
+          </a:p>
+        </p:txBody>
+      </p:sp>
+      <p:sp>
+        <p:nvSpPr>
+          <p:cNvPr id="410" name="TextBox 409"/>
+          <p:cNvSpPr txBox="1"/>
+          <p:nvPr/>
+        </p:nvSpPr>
+        <p:spPr>
+          <a:xfrm>
+            <a:off x="694944" y="3534156"/>
+            <a:ext cx="6729984" cy="448056"/>
+          </a:xfrm>
+          <a:prstGeom prst="rect">
+            <a:avLst/>
+          </a:prstGeom>
+          <a:noFill/>
+        </p:spPr>
+        <p:txBody>
+          <a:bodyPr wrap="square" lIns="82296" rIns="36576" tIns="18288" bIns="18288">
+            <a:normAutofit/>
+          </a:bodyPr>
+          <a:lstStyle/>
+          <a:p>
+            <a:pPr>
+              <a:lnSpc>
+                <a:spcPct val="100000"/>
+              </a:lnSpc>
+              <a:spcBef>
+                <a:spcPts val="0"/>
+              </a:spcBef>
+              <a:spcAft>
+                <a:spcPts val="0"/>
+              </a:spcAft>
+            </a:pPr>
+            <a:r>
+              <a:rPr sz="1350" b="0">
+                <a:solidFill>
+                  <a:srgbClr val="000000"/>
+                </a:solidFill>
+                <a:latin typeface="Montserrat"/>
+              </a:rPr>
               <a:t>Use POST /v1/answer when only the final answer is required; use this endpoint for auditability.</a:t>
             </a:r>
           </a:p>
@@ -44902,13 +45913,13 @@
       </p:sp>
       <p:sp>
         <p:nvSpPr>
-          <p:cNvPr id="409" name="Oval 408"/>
+          <p:cNvPr id="411" name="Oval 410"/>
           <p:cNvSpPr/>
           <p:nvPr/>
         </p:nvSpPr>
         <p:spPr>
           <a:xfrm>
-            <a:off x="402336" y="3154679"/>
+            <a:off x="402336" y="3634739"/>
             <a:ext cx="192024" cy="192024"/>
           </a:xfrm>
           <a:prstGeom prst="ellipse">
@@ -46272,7 +47283,7 @@
                 </a:solidFill>
                 <a:latin typeface="Montserrat"/>
               </a:rPr>
-              <a:t>Production Readiness and Handoff Notes</a:t>
+              <a:t>Recommendations and Success Measures</a:t>
             </a:r>
           </a:p>
         </p:txBody>
@@ -46360,7 +47371,7 @@
                 </a:solidFill>
                 <a:latin typeface="Montserrat"/>
               </a:rPr>
-              <a:t>Selected baseline: k=5 with chunk_size=512, overlap=64, MMR lambda=0.50, fetch_k=20, and CrossEncoder reranking.</a:t>
+              <a:t>Recommendation 1: pilot the k=5 baseline with evidence display enabled for support staff.</a:t>
             </a:r>
           </a:p>
         </p:txBody>
@@ -46448,7 +47459,7 @@
                 </a:solidFill>
                 <a:latin typeface="Montserrat"/>
               </a:rPr>
-              <a:t>Held-out result: 9/10 cases passed; weighted composite score 0.941.</a:t>
+              <a:t>Recommendation 2: route ambiguous or insufficient-context questions to assisted review rather than forcing an auto-answer.</a:t>
             </a:r>
           </a:p>
         </p:txBody>
@@ -46536,7 +47547,7 @@
                 </a:solidFill>
                 <a:latin typeface="Montserrat"/>
               </a:rPr>
-              <a:t>The application is runnable through the Flask backend and Streamlit frontend, locally or in GitHub Codespaces.</a:t>
+              <a:t>Recommendation 3: keep the benchmark question unchanged, but improve production question clarification and prompt handling.</a:t>
             </a:r>
           </a:p>
         </p:txBody>
@@ -46593,7 +47604,7 @@
         <p:spPr>
           <a:xfrm>
             <a:off x="694944" y="2766060"/>
-            <a:ext cx="6729984" cy="649224"/>
+            <a:ext cx="6729984" cy="448056"/>
           </a:xfrm>
           <a:prstGeom prst="rect">
             <a:avLst/>
@@ -46624,7 +47635,7 @@
                 </a:solidFill>
                 <a:latin typeface="Montserrat"/>
               </a:rPr>
-              <a:t>Keep the benchmark question unchanged for evaluation; treat the remaining precision issue as a question/auto-answer limitation.</a:t>
+              <a:t>Track success through held-out pass rate, Contextual Precision, escalation rate, answer latency, and evidence-click usage.</a:t>
             </a:r>
           </a:p>
         </p:txBody>
@@ -46680,7 +47691,7 @@
         </p:nvSpPr>
         <p:spPr>
           <a:xfrm>
-            <a:off x="694944" y="3447288"/>
+            <a:off x="694944" y="3246120"/>
             <a:ext cx="6729984" cy="448056"/>
           </a:xfrm>
           <a:prstGeom prst="rect">
@@ -46712,7 +47723,7 @@
                 </a:solidFill>
                 <a:latin typeface="Montserrat"/>
               </a:rPr>
-              <a:t>Next operational step: add monitoring for insufficient context and review the single known failure before broader rollout.</a:t>
+              <a:t>Before broader rollout, capture the live Codespaces URL and screenshots, then repeat the two production smoke tests.</a:t>
             </a:r>
           </a:p>
         </p:txBody>
@@ -46725,7 +47736,95 @@
         </p:nvSpPr>
         <p:spPr>
           <a:xfrm>
-            <a:off x="402336" y="3547872"/>
+            <a:off x="402336" y="3346703"/>
+            <a:ext cx="192024" cy="192024"/>
+          </a:xfrm>
+          <a:prstGeom prst="ellipse">
+            <a:avLst/>
+          </a:prstGeom>
+          <a:solidFill>
+            <a:srgbClr val="0944A1"/>
+          </a:solidFill>
+          <a:ln>
+            <a:noFill/>
+          </a:ln>
+        </p:spPr>
+        <p:style>
+          <a:lnRef idx="1">
+            <a:schemeClr val="accent1"/>
+          </a:lnRef>
+          <a:fillRef idx="3">
+            <a:schemeClr val="accent1"/>
+          </a:fillRef>
+          <a:effectRef idx="2">
+            <a:schemeClr val="accent1"/>
+          </a:effectRef>
+          <a:fontRef idx="minor">
+            <a:schemeClr val="lt1"/>
+          </a:fontRef>
+        </p:style>
+        <p:txBody>
+          <a:bodyPr rtlCol="0" anchor="ctr"/>
+          <a:lstStyle/>
+          <a:p>
+            <a:pPr algn="ctr"/>
+          </a:p>
+        </p:txBody>
+      </p:sp>
+      <p:sp>
+        <p:nvSpPr>
+          <p:cNvPr id="424" name="TextBox 423"/>
+          <p:cNvSpPr txBox="1"/>
+          <p:nvPr/>
+        </p:nvSpPr>
+        <p:spPr>
+          <a:xfrm>
+            <a:off x="694944" y="3726180"/>
+            <a:ext cx="6729984" cy="448056"/>
+          </a:xfrm>
+          <a:prstGeom prst="rect">
+            <a:avLst/>
+          </a:prstGeom>
+          <a:noFill/>
+        </p:spPr>
+        <p:txBody>
+          <a:bodyPr wrap="square" lIns="82296" rIns="36576" tIns="18288" bIns="18288">
+            <a:normAutofit/>
+          </a:bodyPr>
+          <a:lstStyle/>
+          <a:p>
+            <a:pPr>
+              <a:lnSpc>
+                <a:spcPct val="100000"/>
+              </a:lnSpc>
+              <a:spcBef>
+                <a:spcPts val="0"/>
+              </a:spcBef>
+              <a:spcAft>
+                <a:spcPts val="0"/>
+              </a:spcAft>
+            </a:pPr>
+            <a:r>
+              <a:rPr sz="1350" b="0">
+                <a:solidFill>
+                  <a:srgbClr val="000000"/>
+                </a:solidFill>
+                <a:latin typeface="Montserrat"/>
+              </a:rPr>
+              <a:t>Decision: proceed with a controlled pilot; review the single known Accessible King failure before wider release.</a:t>
+            </a:r>
+          </a:p>
+        </p:txBody>
+      </p:sp>
+      <p:sp>
+        <p:nvSpPr>
+          <p:cNvPr id="425" name="Oval 424"/>
+          <p:cNvSpPr/>
+          <p:nvPr/>
+        </p:nvSpPr>
+        <p:spPr>
+          <a:xfrm>
+            <a:off x="402336" y="3826764"/>
             <a:ext cx="192024" cy="192024"/>
           </a:xfrm>
           <a:prstGeom prst="ellipse">

--- a/presentations/Aurora_Stays_RAG_Project_Presentation_Template_Style.pptx
+++ b/presentations/Aurora_Stays_RAG_Project_Presentation_Template_Style.pptx
@@ -37905,16 +37905,2974 @@
           </a:p>
         </p:txBody>
       </p:sp>
-      <p:sp>
-        <p:nvSpPr>
-          <p:cNvPr id="320" name="TextBox 319"/>
+      <p:graphicFrame>
+        <p:nvGraphicFramePr>
+          <p:cNvPr id="320" name="Table 319"/>
+          <p:cNvGraphicFramePr>
+            <a:graphicFrameLocks noGrp="1"/>
+          </p:cNvGraphicFramePr>
+          <p:nvPr/>
+        </p:nvGraphicFramePr>
+        <p:xfrm>
+          <a:off x="438912" y="1207008"/>
+          <a:ext cx="6821424" cy="3401568"/>
+        </p:xfrm>
+        <a:graphic>
+          <a:graphicData uri="http://schemas.openxmlformats.org/drawingml/2006/table">
+            <a:tbl>
+              <a:tblPr firstRow="1" bandRow="1">
+                <a:tableStyleId>{5C22544A-7EE6-4342-B048-85BDC9FD1C3A}</a:tableStyleId>
+              </a:tblPr>
+              <a:tblGrid>
+                <a:gridCol w="429768"/>
+                <a:gridCol w="2743200"/>
+                <a:gridCol w="530352"/>
+                <a:gridCol w="530352"/>
+                <a:gridCol w="530352"/>
+                <a:gridCol w="530352"/>
+                <a:gridCol w="777240"/>
+                <a:gridCol w="749808"/>
+              </a:tblGrid>
+              <a:tr h="309233">
+                <a:tc>
+                  <a:txBody>
+                    <a:bodyPr/>
+                    <a:lstStyle/>
+                    <a:p>
+                      <a:pPr algn="ctr">
+                        <a:lnSpc>
+                          <a:spcPct val="100000"/>
+                        </a:lnSpc>
+                        <a:spcBef>
+                          <a:spcPts val="0"/>
+                        </a:spcBef>
+                        <a:spcAft>
+                          <a:spcPts val="0"/>
+                        </a:spcAft>
+                      </a:pPr>
+                      <a:r>
+                        <a:rPr sz="819" b="1">
+                          <a:solidFill>
+                            <a:srgbClr val="FFFFFF"/>
+                          </a:solidFill>
+                          <a:latin typeface="Montserrat"/>
+                        </a:rPr>
+                        <a:t>Case</a:t>
+                      </a:r>
+                    </a:p>
+                  </a:txBody>
+                  <a:tcPr marL="32004" marR="32004" marT="9144" marB="9144">
+                    <a:solidFill>
+                      <a:srgbClr val="0E39A9"/>
+                    </a:solidFill>
+                  </a:tcPr>
+                </a:tc>
+                <a:tc>
+                  <a:txBody>
+                    <a:bodyPr/>
+                    <a:lstStyle/>
+                    <a:p>
+                      <a:pPr algn="l">
+                        <a:lnSpc>
+                          <a:spcPct val="100000"/>
+                        </a:lnSpc>
+                        <a:spcBef>
+                          <a:spcPts val="0"/>
+                        </a:spcBef>
+                        <a:spcAft>
+                          <a:spcPts val="0"/>
+                        </a:spcAft>
+                      </a:pPr>
+                      <a:r>
+                        <a:rPr sz="819" b="1">
+                          <a:solidFill>
+                            <a:srgbClr val="FFFFFF"/>
+                          </a:solidFill>
+                          <a:latin typeface="Montserrat"/>
+                        </a:rPr>
+                        <a:t>Test case</a:t>
+                      </a:r>
+                    </a:p>
+                  </a:txBody>
+                  <a:tcPr marL="32004" marR="32004" marT="9144" marB="9144">
+                    <a:solidFill>
+                      <a:srgbClr val="0E39A9"/>
+                    </a:solidFill>
+                  </a:tcPr>
+                </a:tc>
+                <a:tc>
+                  <a:txBody>
+                    <a:bodyPr/>
+                    <a:lstStyle/>
+                    <a:p>
+                      <a:pPr algn="ctr">
+                        <a:lnSpc>
+                          <a:spcPct val="100000"/>
+                        </a:lnSpc>
+                        <a:spcBef>
+                          <a:spcPts val="0"/>
+                        </a:spcBef>
+                        <a:spcAft>
+                          <a:spcPts val="0"/>
+                        </a:spcAft>
+                      </a:pPr>
+                      <a:r>
+                        <a:rPr sz="819" b="1">
+                          <a:solidFill>
+                            <a:srgbClr val="FFFFFF"/>
+                          </a:solidFill>
+                          <a:latin typeface="Montserrat"/>
+                        </a:rPr>
+                        <a:t>F</a:t>
+                      </a:r>
+                    </a:p>
+                  </a:txBody>
+                  <a:tcPr marL="32004" marR="32004" marT="9144" marB="9144">
+                    <a:solidFill>
+                      <a:srgbClr val="0E39A9"/>
+                    </a:solidFill>
+                  </a:tcPr>
+                </a:tc>
+                <a:tc>
+                  <a:txBody>
+                    <a:bodyPr/>
+                    <a:lstStyle/>
+                    <a:p>
+                      <a:pPr algn="ctr">
+                        <a:lnSpc>
+                          <a:spcPct val="100000"/>
+                        </a:lnSpc>
+                        <a:spcBef>
+                          <a:spcPts val="0"/>
+                        </a:spcBef>
+                        <a:spcAft>
+                          <a:spcPts val="0"/>
+                        </a:spcAft>
+                      </a:pPr>
+                      <a:r>
+                        <a:rPr sz="819" b="1">
+                          <a:solidFill>
+                            <a:srgbClr val="FFFFFF"/>
+                          </a:solidFill>
+                          <a:latin typeface="Montserrat"/>
+                        </a:rPr>
+                        <a:t>R</a:t>
+                      </a:r>
+                    </a:p>
+                  </a:txBody>
+                  <a:tcPr marL="32004" marR="32004" marT="9144" marB="9144">
+                    <a:solidFill>
+                      <a:srgbClr val="0E39A9"/>
+                    </a:solidFill>
+                  </a:tcPr>
+                </a:tc>
+                <a:tc>
+                  <a:txBody>
+                    <a:bodyPr/>
+                    <a:lstStyle/>
+                    <a:p>
+                      <a:pPr algn="ctr">
+                        <a:lnSpc>
+                          <a:spcPct val="100000"/>
+                        </a:lnSpc>
+                        <a:spcBef>
+                          <a:spcPts val="0"/>
+                        </a:spcBef>
+                        <a:spcAft>
+                          <a:spcPts val="0"/>
+                        </a:spcAft>
+                      </a:pPr>
+                      <a:r>
+                        <a:rPr sz="819" b="1">
+                          <a:solidFill>
+                            <a:srgbClr val="FFFFFF"/>
+                          </a:solidFill>
+                          <a:latin typeface="Montserrat"/>
+                        </a:rPr>
+                        <a:t>P</a:t>
+                      </a:r>
+                    </a:p>
+                  </a:txBody>
+                  <a:tcPr marL="32004" marR="32004" marT="9144" marB="9144">
+                    <a:solidFill>
+                      <a:srgbClr val="0E39A9"/>
+                    </a:solidFill>
+                  </a:tcPr>
+                </a:tc>
+                <a:tc>
+                  <a:txBody>
+                    <a:bodyPr/>
+                    <a:lstStyle/>
+                    <a:p>
+                      <a:pPr algn="ctr">
+                        <a:lnSpc>
+                          <a:spcPct val="100000"/>
+                        </a:lnSpc>
+                        <a:spcBef>
+                          <a:spcPts val="0"/>
+                        </a:spcBef>
+                        <a:spcAft>
+                          <a:spcPts val="0"/>
+                        </a:spcAft>
+                      </a:pPr>
+                      <a:r>
+                        <a:rPr sz="819" b="1">
+                          <a:solidFill>
+                            <a:srgbClr val="FFFFFF"/>
+                          </a:solidFill>
+                          <a:latin typeface="Montserrat"/>
+                        </a:rPr>
+                        <a:t>AR</a:t>
+                      </a:r>
+                    </a:p>
+                  </a:txBody>
+                  <a:tcPr marL="32004" marR="32004" marT="9144" marB="9144">
+                    <a:solidFill>
+                      <a:srgbClr val="0E39A9"/>
+                    </a:solidFill>
+                  </a:tcPr>
+                </a:tc>
+                <a:tc>
+                  <a:txBody>
+                    <a:bodyPr/>
+                    <a:lstStyle/>
+                    <a:p>
+                      <a:pPr algn="ctr">
+                        <a:lnSpc>
+                          <a:spcPct val="100000"/>
+                        </a:lnSpc>
+                        <a:spcBef>
+                          <a:spcPts val="0"/>
+                        </a:spcBef>
+                        <a:spcAft>
+                          <a:spcPts val="0"/>
+                        </a:spcAft>
+                      </a:pPr>
+                      <a:r>
+                        <a:rPr sz="819" b="1">
+                          <a:solidFill>
+                            <a:srgbClr val="FFFFFF"/>
+                          </a:solidFill>
+                          <a:latin typeface="Montserrat"/>
+                        </a:rPr>
+                        <a:t>Composite</a:t>
+                      </a:r>
+                    </a:p>
+                  </a:txBody>
+                  <a:tcPr marL="32004" marR="32004" marT="9144" marB="9144">
+                    <a:solidFill>
+                      <a:srgbClr val="0E39A9"/>
+                    </a:solidFill>
+                  </a:tcPr>
+                </a:tc>
+                <a:tc>
+                  <a:txBody>
+                    <a:bodyPr/>
+                    <a:lstStyle/>
+                    <a:p>
+                      <a:pPr algn="ctr">
+                        <a:lnSpc>
+                          <a:spcPct val="100000"/>
+                        </a:lnSpc>
+                        <a:spcBef>
+                          <a:spcPts val="0"/>
+                        </a:spcBef>
+                        <a:spcAft>
+                          <a:spcPts val="0"/>
+                        </a:spcAft>
+                      </a:pPr>
+                      <a:r>
+                        <a:rPr sz="819" b="1">
+                          <a:solidFill>
+                            <a:srgbClr val="FFFFFF"/>
+                          </a:solidFill>
+                          <a:latin typeface="Montserrat"/>
+                        </a:rPr>
+                        <a:t>Result</a:t>
+                      </a:r>
+                    </a:p>
+                  </a:txBody>
+                  <a:tcPr marL="32004" marR="32004" marT="9144" marB="9144">
+                    <a:solidFill>
+                      <a:srgbClr val="0E39A9"/>
+                    </a:solidFill>
+                  </a:tcPr>
+                </a:tc>
+              </a:tr>
+              <a:tr h="309233">
+                <a:tc>
+                  <a:txBody>
+                    <a:bodyPr/>
+                    <a:lstStyle/>
+                    <a:p>
+                      <a:pPr algn="ctr">
+                        <a:lnSpc>
+                          <a:spcPct val="100000"/>
+                        </a:lnSpc>
+                        <a:spcBef>
+                          <a:spcPts val="0"/>
+                        </a:spcBef>
+                        <a:spcAft>
+                          <a:spcPts val="0"/>
+                        </a:spcAft>
+                      </a:pPr>
+                      <a:r>
+                        <a:rPr sz="840" b="0">
+                          <a:solidFill>
+                            <a:srgbClr val="000000"/>
+                          </a:solidFill>
+                          <a:latin typeface="Montserrat"/>
+                        </a:rPr>
+                        <a:t>01</a:t>
+                      </a:r>
+                    </a:p>
+                  </a:txBody>
+                  <a:tcPr marL="32004" marR="32004" marT="9144" marB="9144">
+                    <a:solidFill>
+                      <a:srgbClr val="FFFFFF"/>
+                    </a:solidFill>
+                  </a:tcPr>
+                </a:tc>
+                <a:tc>
+                  <a:txBody>
+                    <a:bodyPr/>
+                    <a:lstStyle/>
+                    <a:p>
+                      <a:pPr algn="l">
+                        <a:lnSpc>
+                          <a:spcPct val="100000"/>
+                        </a:lnSpc>
+                        <a:spcBef>
+                          <a:spcPts val="0"/>
+                        </a:spcBef>
+                        <a:spcAft>
+                          <a:spcPts val="0"/>
+                        </a:spcAft>
+                      </a:pPr>
+                      <a:r>
+                        <a:rPr sz="840" b="0">
+                          <a:solidFill>
+                            <a:srgbClr val="000000"/>
+                          </a:solidFill>
+                          <a:latin typeface="Montserrat"/>
+                        </a:rPr>
+                        <a:t>OTA cancellation/refund</a:t>
+                      </a:r>
+                    </a:p>
+                  </a:txBody>
+                  <a:tcPr marL="32004" marR="32004" marT="9144" marB="9144">
+                    <a:solidFill>
+                      <a:srgbClr val="FFFFFF"/>
+                    </a:solidFill>
+                  </a:tcPr>
+                </a:tc>
+                <a:tc>
+                  <a:txBody>
+                    <a:bodyPr/>
+                    <a:lstStyle/>
+                    <a:p>
+                      <a:pPr algn="ctr">
+                        <a:lnSpc>
+                          <a:spcPct val="100000"/>
+                        </a:lnSpc>
+                        <a:spcBef>
+                          <a:spcPts val="0"/>
+                        </a:spcBef>
+                        <a:spcAft>
+                          <a:spcPts val="0"/>
+                        </a:spcAft>
+                      </a:pPr>
+                      <a:r>
+                        <a:rPr sz="840" b="0">
+                          <a:solidFill>
+                            <a:srgbClr val="000000"/>
+                          </a:solidFill>
+                          <a:latin typeface="Montserrat"/>
+                        </a:rPr>
+                        <a:t>.991</a:t>
+                      </a:r>
+                    </a:p>
+                  </a:txBody>
+                  <a:tcPr marL="32004" marR="32004" marT="9144" marB="9144">
+                    <a:solidFill>
+                      <a:srgbClr val="FFFFFF"/>
+                    </a:solidFill>
+                  </a:tcPr>
+                </a:tc>
+                <a:tc>
+                  <a:txBody>
+                    <a:bodyPr/>
+                    <a:lstStyle/>
+                    <a:p>
+                      <a:pPr algn="ctr">
+                        <a:lnSpc>
+                          <a:spcPct val="100000"/>
+                        </a:lnSpc>
+                        <a:spcBef>
+                          <a:spcPts val="0"/>
+                        </a:spcBef>
+                        <a:spcAft>
+                          <a:spcPts val="0"/>
+                        </a:spcAft>
+                      </a:pPr>
+                      <a:r>
+                        <a:rPr sz="840" b="0">
+                          <a:solidFill>
+                            <a:srgbClr val="000000"/>
+                          </a:solidFill>
+                          <a:latin typeface="Montserrat"/>
+                        </a:rPr>
+                        <a:t>.946</a:t>
+                      </a:r>
+                    </a:p>
+                  </a:txBody>
+                  <a:tcPr marL="32004" marR="32004" marT="9144" marB="9144">
+                    <a:solidFill>
+                      <a:srgbClr val="FFFFFF"/>
+                    </a:solidFill>
+                  </a:tcPr>
+                </a:tc>
+                <a:tc>
+                  <a:txBody>
+                    <a:bodyPr/>
+                    <a:lstStyle/>
+                    <a:p>
+                      <a:pPr algn="ctr">
+                        <a:lnSpc>
+                          <a:spcPct val="100000"/>
+                        </a:lnSpc>
+                        <a:spcBef>
+                          <a:spcPts val="0"/>
+                        </a:spcBef>
+                        <a:spcAft>
+                          <a:spcPts val="0"/>
+                        </a:spcAft>
+                      </a:pPr>
+                      <a:r>
+                        <a:rPr sz="840" b="0">
+                          <a:solidFill>
+                            <a:srgbClr val="000000"/>
+                          </a:solidFill>
+                          <a:latin typeface="Montserrat"/>
+                        </a:rPr>
+                        <a:t>.826</a:t>
+                      </a:r>
+                    </a:p>
+                  </a:txBody>
+                  <a:tcPr marL="32004" marR="32004" marT="9144" marB="9144">
+                    <a:solidFill>
+                      <a:srgbClr val="FFFFFF"/>
+                    </a:solidFill>
+                  </a:tcPr>
+                </a:tc>
+                <a:tc>
+                  <a:txBody>
+                    <a:bodyPr/>
+                    <a:lstStyle/>
+                    <a:p>
+                      <a:pPr algn="ctr">
+                        <a:lnSpc>
+                          <a:spcPct val="100000"/>
+                        </a:lnSpc>
+                        <a:spcBef>
+                          <a:spcPts val="0"/>
+                        </a:spcBef>
+                        <a:spcAft>
+                          <a:spcPts val="0"/>
+                        </a:spcAft>
+                      </a:pPr>
+                      <a:r>
+                        <a:rPr sz="840" b="0">
+                          <a:solidFill>
+                            <a:srgbClr val="000000"/>
+                          </a:solidFill>
+                          <a:latin typeface="Montserrat"/>
+                        </a:rPr>
+                        <a:t>.977</a:t>
+                      </a:r>
+                    </a:p>
+                  </a:txBody>
+                  <a:tcPr marL="32004" marR="32004" marT="9144" marB="9144">
+                    <a:solidFill>
+                      <a:srgbClr val="FFFFFF"/>
+                    </a:solidFill>
+                  </a:tcPr>
+                </a:tc>
+                <a:tc>
+                  <a:txBody>
+                    <a:bodyPr/>
+                    <a:lstStyle/>
+                    <a:p>
+                      <a:pPr algn="ctr">
+                        <a:lnSpc>
+                          <a:spcPct val="100000"/>
+                        </a:lnSpc>
+                        <a:spcBef>
+                          <a:spcPts val="0"/>
+                        </a:spcBef>
+                        <a:spcAft>
+                          <a:spcPts val="0"/>
+                        </a:spcAft>
+                      </a:pPr>
+                      <a:r>
+                        <a:rPr sz="840" b="0">
+                          <a:solidFill>
+                            <a:srgbClr val="000000"/>
+                          </a:solidFill>
+                          <a:latin typeface="Montserrat"/>
+                        </a:rPr>
+                        <a:t>.944</a:t>
+                      </a:r>
+                    </a:p>
+                  </a:txBody>
+                  <a:tcPr marL="32004" marR="32004" marT="9144" marB="9144">
+                    <a:solidFill>
+                      <a:srgbClr val="FFFFFF"/>
+                    </a:solidFill>
+                  </a:tcPr>
+                </a:tc>
+                <a:tc>
+                  <a:txBody>
+                    <a:bodyPr/>
+                    <a:lstStyle/>
+                    <a:p>
+                      <a:pPr algn="ctr">
+                        <a:lnSpc>
+                          <a:spcPct val="100000"/>
+                        </a:lnSpc>
+                        <a:spcBef>
+                          <a:spcPts val="0"/>
+                        </a:spcBef>
+                        <a:spcAft>
+                          <a:spcPts val="0"/>
+                        </a:spcAft>
+                      </a:pPr>
+                      <a:r>
+                        <a:rPr sz="840" b="1">
+                          <a:solidFill>
+                            <a:srgbClr val="1F7752"/>
+                          </a:solidFill>
+                          <a:latin typeface="Montserrat"/>
+                        </a:rPr>
+                        <a:t>PASS</a:t>
+                      </a:r>
+                    </a:p>
+                  </a:txBody>
+                  <a:tcPr marL="32004" marR="32004" marT="9144" marB="9144">
+                    <a:solidFill>
+                      <a:srgbClr val="FFFFFF"/>
+                    </a:solidFill>
+                  </a:tcPr>
+                </a:tc>
+              </a:tr>
+              <a:tr h="309233">
+                <a:tc>
+                  <a:txBody>
+                    <a:bodyPr/>
+                    <a:lstStyle/>
+                    <a:p>
+                      <a:pPr algn="ctr">
+                        <a:lnSpc>
+                          <a:spcPct val="100000"/>
+                        </a:lnSpc>
+                        <a:spcBef>
+                          <a:spcPts val="0"/>
+                        </a:spcBef>
+                        <a:spcAft>
+                          <a:spcPts val="0"/>
+                        </a:spcAft>
+                      </a:pPr>
+                      <a:r>
+                        <a:rPr sz="840" b="0">
+                          <a:solidFill>
+                            <a:srgbClr val="000000"/>
+                          </a:solidFill>
+                          <a:latin typeface="Montserrat"/>
+                        </a:rPr>
+                        <a:t>02</a:t>
+                      </a:r>
+                    </a:p>
+                  </a:txBody>
+                  <a:tcPr marL="32004" marR="32004" marT="9144" marB="9144">
+                    <a:solidFill>
+                      <a:srgbClr val="F2F6FF"/>
+                    </a:solidFill>
+                  </a:tcPr>
+                </a:tc>
+                <a:tc>
+                  <a:txBody>
+                    <a:bodyPr/>
+                    <a:lstStyle/>
+                    <a:p>
+                      <a:pPr algn="l">
+                        <a:lnSpc>
+                          <a:spcPct val="100000"/>
+                        </a:lnSpc>
+                        <a:spcBef>
+                          <a:spcPts val="0"/>
+                        </a:spcBef>
+                        <a:spcAft>
+                          <a:spcPts val="0"/>
+                        </a:spcAft>
+                      </a:pPr>
+                      <a:r>
+                        <a:rPr sz="840" b="0">
+                          <a:solidFill>
+                            <a:srgbClr val="000000"/>
+                          </a:solidFill>
+                          <a:latin typeface="Montserrat"/>
+                        </a:rPr>
+                        <a:t>Member discount/cancellation</a:t>
+                      </a:r>
+                    </a:p>
+                  </a:txBody>
+                  <a:tcPr marL="32004" marR="32004" marT="9144" marB="9144">
+                    <a:solidFill>
+                      <a:srgbClr val="F2F6FF"/>
+                    </a:solidFill>
+                  </a:tcPr>
+                </a:tc>
+                <a:tc>
+                  <a:txBody>
+                    <a:bodyPr/>
+                    <a:lstStyle/>
+                    <a:p>
+                      <a:pPr algn="ctr">
+                        <a:lnSpc>
+                          <a:spcPct val="100000"/>
+                        </a:lnSpc>
+                        <a:spcBef>
+                          <a:spcPts val="0"/>
+                        </a:spcBef>
+                        <a:spcAft>
+                          <a:spcPts val="0"/>
+                        </a:spcAft>
+                      </a:pPr>
+                      <a:r>
+                        <a:rPr sz="840" b="0">
+                          <a:solidFill>
+                            <a:srgbClr val="000000"/>
+                          </a:solidFill>
+                          <a:latin typeface="Montserrat"/>
+                        </a:rPr>
+                        <a:t>1.000</a:t>
+                      </a:r>
+                    </a:p>
+                  </a:txBody>
+                  <a:tcPr marL="32004" marR="32004" marT="9144" marB="9144">
+                    <a:solidFill>
+                      <a:srgbClr val="F2F6FF"/>
+                    </a:solidFill>
+                  </a:tcPr>
+                </a:tc>
+                <a:tc>
+                  <a:txBody>
+                    <a:bodyPr/>
+                    <a:lstStyle/>
+                    <a:p>
+                      <a:pPr algn="ctr">
+                        <a:lnSpc>
+                          <a:spcPct val="100000"/>
+                        </a:lnSpc>
+                        <a:spcBef>
+                          <a:spcPts val="0"/>
+                        </a:spcBef>
+                        <a:spcAft>
+                          <a:spcPts val="0"/>
+                        </a:spcAft>
+                      </a:pPr>
+                      <a:r>
+                        <a:rPr sz="840" b="0">
+                          <a:solidFill>
+                            <a:srgbClr val="000000"/>
+                          </a:solidFill>
+                          <a:latin typeface="Montserrat"/>
+                        </a:rPr>
+                        <a:t>.995</a:t>
+                      </a:r>
+                    </a:p>
+                  </a:txBody>
+                  <a:tcPr marL="32004" marR="32004" marT="9144" marB="9144">
+                    <a:solidFill>
+                      <a:srgbClr val="F2F6FF"/>
+                    </a:solidFill>
+                  </a:tcPr>
+                </a:tc>
+                <a:tc>
+                  <a:txBody>
+                    <a:bodyPr/>
+                    <a:lstStyle/>
+                    <a:p>
+                      <a:pPr algn="ctr">
+                        <a:lnSpc>
+                          <a:spcPct val="100000"/>
+                        </a:lnSpc>
+                        <a:spcBef>
+                          <a:spcPts val="0"/>
+                        </a:spcBef>
+                        <a:spcAft>
+                          <a:spcPts val="0"/>
+                        </a:spcAft>
+                      </a:pPr>
+                      <a:r>
+                        <a:rPr sz="840" b="0">
+                          <a:solidFill>
+                            <a:srgbClr val="000000"/>
+                          </a:solidFill>
+                          <a:latin typeface="Montserrat"/>
+                        </a:rPr>
+                        <a:t>.814</a:t>
+                      </a:r>
+                    </a:p>
+                  </a:txBody>
+                  <a:tcPr marL="32004" marR="32004" marT="9144" marB="9144">
+                    <a:solidFill>
+                      <a:srgbClr val="F2F6FF"/>
+                    </a:solidFill>
+                  </a:tcPr>
+                </a:tc>
+                <a:tc>
+                  <a:txBody>
+                    <a:bodyPr/>
+                    <a:lstStyle/>
+                    <a:p>
+                      <a:pPr algn="ctr">
+                        <a:lnSpc>
+                          <a:spcPct val="100000"/>
+                        </a:lnSpc>
+                        <a:spcBef>
+                          <a:spcPts val="0"/>
+                        </a:spcBef>
+                        <a:spcAft>
+                          <a:spcPts val="0"/>
+                        </a:spcAft>
+                      </a:pPr>
+                      <a:r>
+                        <a:rPr sz="840" b="0">
+                          <a:solidFill>
+                            <a:srgbClr val="000000"/>
+                          </a:solidFill>
+                          <a:latin typeface="Montserrat"/>
+                        </a:rPr>
+                        <a:t>.971</a:t>
+                      </a:r>
+                    </a:p>
+                  </a:txBody>
+                  <a:tcPr marL="32004" marR="32004" marT="9144" marB="9144">
+                    <a:solidFill>
+                      <a:srgbClr val="F2F6FF"/>
+                    </a:solidFill>
+                  </a:tcPr>
+                </a:tc>
+                <a:tc>
+                  <a:txBody>
+                    <a:bodyPr/>
+                    <a:lstStyle/>
+                    <a:p>
+                      <a:pPr algn="ctr">
+                        <a:lnSpc>
+                          <a:spcPct val="100000"/>
+                        </a:lnSpc>
+                        <a:spcBef>
+                          <a:spcPts val="0"/>
+                        </a:spcBef>
+                        <a:spcAft>
+                          <a:spcPts val="0"/>
+                        </a:spcAft>
+                      </a:pPr>
+                      <a:r>
+                        <a:rPr sz="840" b="0">
+                          <a:solidFill>
+                            <a:srgbClr val="000000"/>
+                          </a:solidFill>
+                          <a:latin typeface="Montserrat"/>
+                        </a:rPr>
+                        <a:t>.956</a:t>
+                      </a:r>
+                    </a:p>
+                  </a:txBody>
+                  <a:tcPr marL="32004" marR="32004" marT="9144" marB="9144">
+                    <a:solidFill>
+                      <a:srgbClr val="F2F6FF"/>
+                    </a:solidFill>
+                  </a:tcPr>
+                </a:tc>
+                <a:tc>
+                  <a:txBody>
+                    <a:bodyPr/>
+                    <a:lstStyle/>
+                    <a:p>
+                      <a:pPr algn="ctr">
+                        <a:lnSpc>
+                          <a:spcPct val="100000"/>
+                        </a:lnSpc>
+                        <a:spcBef>
+                          <a:spcPts val="0"/>
+                        </a:spcBef>
+                        <a:spcAft>
+                          <a:spcPts val="0"/>
+                        </a:spcAft>
+                      </a:pPr>
+                      <a:r>
+                        <a:rPr sz="840" b="1">
+                          <a:solidFill>
+                            <a:srgbClr val="1F7752"/>
+                          </a:solidFill>
+                          <a:latin typeface="Montserrat"/>
+                        </a:rPr>
+                        <a:t>PASS</a:t>
+                      </a:r>
+                    </a:p>
+                  </a:txBody>
+                  <a:tcPr marL="32004" marR="32004" marT="9144" marB="9144">
+                    <a:solidFill>
+                      <a:srgbClr val="F2F6FF"/>
+                    </a:solidFill>
+                  </a:tcPr>
+                </a:tc>
+              </a:tr>
+              <a:tr h="309233">
+                <a:tc>
+                  <a:txBody>
+                    <a:bodyPr/>
+                    <a:lstStyle/>
+                    <a:p>
+                      <a:pPr algn="ctr">
+                        <a:lnSpc>
+                          <a:spcPct val="100000"/>
+                        </a:lnSpc>
+                        <a:spcBef>
+                          <a:spcPts val="0"/>
+                        </a:spcBef>
+                        <a:spcAft>
+                          <a:spcPts val="0"/>
+                        </a:spcAft>
+                      </a:pPr>
+                      <a:r>
+                        <a:rPr sz="840" b="0">
+                          <a:solidFill>
+                            <a:srgbClr val="000000"/>
+                          </a:solidFill>
+                          <a:latin typeface="Montserrat"/>
+                        </a:rPr>
+                        <a:t>03</a:t>
+                      </a:r>
+                    </a:p>
+                  </a:txBody>
+                  <a:tcPr marL="32004" marR="32004" marT="9144" marB="9144">
+                    <a:solidFill>
+                      <a:srgbClr val="FFFFFF"/>
+                    </a:solidFill>
+                  </a:tcPr>
+                </a:tc>
+                <a:tc>
+                  <a:txBody>
+                    <a:bodyPr/>
+                    <a:lstStyle/>
+                    <a:p>
+                      <a:pPr algn="l">
+                        <a:lnSpc>
+                          <a:spcPct val="100000"/>
+                        </a:lnSpc>
+                        <a:spcBef>
+                          <a:spcPts val="0"/>
+                        </a:spcBef>
+                        <a:spcAft>
+                          <a:spcPts val="0"/>
+                        </a:spcAft>
+                      </a:pPr>
+                      <a:r>
+                        <a:rPr sz="840" b="0">
+                          <a:solidFill>
+                            <a:srgbClr val="000000"/>
+                          </a:solidFill>
+                          <a:latin typeface="Montserrat"/>
+                        </a:rPr>
+                        <a:t>Double Queen occupancy</a:t>
+                      </a:r>
+                    </a:p>
+                  </a:txBody>
+                  <a:tcPr marL="32004" marR="32004" marT="9144" marB="9144">
+                    <a:solidFill>
+                      <a:srgbClr val="FFFFFF"/>
+                    </a:solidFill>
+                  </a:tcPr>
+                </a:tc>
+                <a:tc>
+                  <a:txBody>
+                    <a:bodyPr/>
+                    <a:lstStyle/>
+                    <a:p>
+                      <a:pPr algn="ctr">
+                        <a:lnSpc>
+                          <a:spcPct val="100000"/>
+                        </a:lnSpc>
+                        <a:spcBef>
+                          <a:spcPts val="0"/>
+                        </a:spcBef>
+                        <a:spcAft>
+                          <a:spcPts val="0"/>
+                        </a:spcAft>
+                      </a:pPr>
+                      <a:r>
+                        <a:rPr sz="840" b="0">
+                          <a:solidFill>
+                            <a:srgbClr val="000000"/>
+                          </a:solidFill>
+                          <a:latin typeface="Montserrat"/>
+                        </a:rPr>
+                        <a:t>1.000</a:t>
+                      </a:r>
+                    </a:p>
+                  </a:txBody>
+                  <a:tcPr marL="32004" marR="32004" marT="9144" marB="9144">
+                    <a:solidFill>
+                      <a:srgbClr val="FFFFFF"/>
+                    </a:solidFill>
+                  </a:tcPr>
+                </a:tc>
+                <a:tc>
+                  <a:txBody>
+                    <a:bodyPr/>
+                    <a:lstStyle/>
+                    <a:p>
+                      <a:pPr algn="ctr">
+                        <a:lnSpc>
+                          <a:spcPct val="100000"/>
+                        </a:lnSpc>
+                        <a:spcBef>
+                          <a:spcPts val="0"/>
+                        </a:spcBef>
+                        <a:spcAft>
+                          <a:spcPts val="0"/>
+                        </a:spcAft>
+                      </a:pPr>
+                      <a:r>
+                        <a:rPr sz="840" b="0">
+                          <a:solidFill>
+                            <a:srgbClr val="000000"/>
+                          </a:solidFill>
+                          <a:latin typeface="Montserrat"/>
+                        </a:rPr>
+                        <a:t>.994</a:t>
+                      </a:r>
+                    </a:p>
+                  </a:txBody>
+                  <a:tcPr marL="32004" marR="32004" marT="9144" marB="9144">
+                    <a:solidFill>
+                      <a:srgbClr val="FFFFFF"/>
+                    </a:solidFill>
+                  </a:tcPr>
+                </a:tc>
+                <a:tc>
+                  <a:txBody>
+                    <a:bodyPr/>
+                    <a:lstStyle/>
+                    <a:p>
+                      <a:pPr algn="ctr">
+                        <a:lnSpc>
+                          <a:spcPct val="100000"/>
+                        </a:lnSpc>
+                        <a:spcBef>
+                          <a:spcPts val="0"/>
+                        </a:spcBef>
+                        <a:spcAft>
+                          <a:spcPts val="0"/>
+                        </a:spcAft>
+                      </a:pPr>
+                      <a:r>
+                        <a:rPr sz="840" b="0">
+                          <a:solidFill>
+                            <a:srgbClr val="000000"/>
+                          </a:solidFill>
+                          <a:latin typeface="Montserrat"/>
+                        </a:rPr>
+                        <a:t>.958</a:t>
+                      </a:r>
+                    </a:p>
+                  </a:txBody>
+                  <a:tcPr marL="32004" marR="32004" marT="9144" marB="9144">
+                    <a:solidFill>
+                      <a:srgbClr val="FFFFFF"/>
+                    </a:solidFill>
+                  </a:tcPr>
+                </a:tc>
+                <a:tc>
+                  <a:txBody>
+                    <a:bodyPr/>
+                    <a:lstStyle/>
+                    <a:p>
+                      <a:pPr algn="ctr">
+                        <a:lnSpc>
+                          <a:spcPct val="100000"/>
+                        </a:lnSpc>
+                        <a:spcBef>
+                          <a:spcPts val="0"/>
+                        </a:spcBef>
+                        <a:spcAft>
+                          <a:spcPts val="0"/>
+                        </a:spcAft>
+                      </a:pPr>
+                      <a:r>
+                        <a:rPr sz="840" b="0">
+                          <a:solidFill>
+                            <a:srgbClr val="000000"/>
+                          </a:solidFill>
+                          <a:latin typeface="Montserrat"/>
+                        </a:rPr>
+                        <a:t>.990</a:t>
+                      </a:r>
+                    </a:p>
+                  </a:txBody>
+                  <a:tcPr marL="32004" marR="32004" marT="9144" marB="9144">
+                    <a:solidFill>
+                      <a:srgbClr val="FFFFFF"/>
+                    </a:solidFill>
+                  </a:tcPr>
+                </a:tc>
+                <a:tc>
+                  <a:txBody>
+                    <a:bodyPr/>
+                    <a:lstStyle/>
+                    <a:p>
+                      <a:pPr algn="ctr">
+                        <a:lnSpc>
+                          <a:spcPct val="100000"/>
+                        </a:lnSpc>
+                        <a:spcBef>
+                          <a:spcPts val="0"/>
+                        </a:spcBef>
+                        <a:spcAft>
+                          <a:spcPts val="0"/>
+                        </a:spcAft>
+                      </a:pPr>
+                      <a:r>
+                        <a:rPr sz="840" b="0">
+                          <a:solidFill>
+                            <a:srgbClr val="000000"/>
+                          </a:solidFill>
+                          <a:latin typeface="Montserrat"/>
+                        </a:rPr>
+                        <a:t>.988</a:t>
+                      </a:r>
+                    </a:p>
+                  </a:txBody>
+                  <a:tcPr marL="32004" marR="32004" marT="9144" marB="9144">
+                    <a:solidFill>
+                      <a:srgbClr val="FFFFFF"/>
+                    </a:solidFill>
+                  </a:tcPr>
+                </a:tc>
+                <a:tc>
+                  <a:txBody>
+                    <a:bodyPr/>
+                    <a:lstStyle/>
+                    <a:p>
+                      <a:pPr algn="ctr">
+                        <a:lnSpc>
+                          <a:spcPct val="100000"/>
+                        </a:lnSpc>
+                        <a:spcBef>
+                          <a:spcPts val="0"/>
+                        </a:spcBef>
+                        <a:spcAft>
+                          <a:spcPts val="0"/>
+                        </a:spcAft>
+                      </a:pPr>
+                      <a:r>
+                        <a:rPr sz="840" b="1">
+                          <a:solidFill>
+                            <a:srgbClr val="1F7752"/>
+                          </a:solidFill>
+                          <a:latin typeface="Montserrat"/>
+                        </a:rPr>
+                        <a:t>PASS</a:t>
+                      </a:r>
+                    </a:p>
+                  </a:txBody>
+                  <a:tcPr marL="32004" marR="32004" marT="9144" marB="9144">
+                    <a:solidFill>
+                      <a:srgbClr val="FFFFFF"/>
+                    </a:solidFill>
+                  </a:tcPr>
+                </a:tc>
+              </a:tr>
+              <a:tr h="309233">
+                <a:tc>
+                  <a:txBody>
+                    <a:bodyPr/>
+                    <a:lstStyle/>
+                    <a:p>
+                      <a:pPr algn="ctr">
+                        <a:lnSpc>
+                          <a:spcPct val="100000"/>
+                        </a:lnSpc>
+                        <a:spcBef>
+                          <a:spcPts val="0"/>
+                        </a:spcBef>
+                        <a:spcAft>
+                          <a:spcPts val="0"/>
+                        </a:spcAft>
+                      </a:pPr>
+                      <a:r>
+                        <a:rPr sz="840" b="0">
+                          <a:solidFill>
+                            <a:srgbClr val="000000"/>
+                          </a:solidFill>
+                          <a:latin typeface="Montserrat"/>
+                        </a:rPr>
+                        <a:t>04</a:t>
+                      </a:r>
+                    </a:p>
+                  </a:txBody>
+                  <a:tcPr marL="32004" marR="32004" marT="9144" marB="9144">
+                    <a:solidFill>
+                      <a:srgbClr val="FFEBEB"/>
+                    </a:solidFill>
+                  </a:tcPr>
+                </a:tc>
+                <a:tc>
+                  <a:txBody>
+                    <a:bodyPr/>
+                    <a:lstStyle/>
+                    <a:p>
+                      <a:pPr algn="l">
+                        <a:lnSpc>
+                          <a:spcPct val="100000"/>
+                        </a:lnSpc>
+                        <a:spcBef>
+                          <a:spcPts val="0"/>
+                        </a:spcBef>
+                        <a:spcAft>
+                          <a:spcPts val="0"/>
+                        </a:spcAft>
+                      </a:pPr>
+                      <a:r>
+                        <a:rPr sz="840" b="0">
+                          <a:solidFill>
+                            <a:srgbClr val="000000"/>
+                          </a:solidFill>
+                          <a:latin typeface="Montserrat"/>
+                        </a:rPr>
+                        <a:t>Accessible King inclusions</a:t>
+                      </a:r>
+                    </a:p>
+                  </a:txBody>
+                  <a:tcPr marL="32004" marR="32004" marT="9144" marB="9144">
+                    <a:solidFill>
+                      <a:srgbClr val="FFEBEB"/>
+                    </a:solidFill>
+                  </a:tcPr>
+                </a:tc>
+                <a:tc>
+                  <a:txBody>
+                    <a:bodyPr/>
+                    <a:lstStyle/>
+                    <a:p>
+                      <a:pPr algn="ctr">
+                        <a:lnSpc>
+                          <a:spcPct val="100000"/>
+                        </a:lnSpc>
+                        <a:spcBef>
+                          <a:spcPts val="0"/>
+                        </a:spcBef>
+                        <a:spcAft>
+                          <a:spcPts val="0"/>
+                        </a:spcAft>
+                      </a:pPr>
+                      <a:r>
+                        <a:rPr sz="840" b="0">
+                          <a:solidFill>
+                            <a:srgbClr val="000000"/>
+                          </a:solidFill>
+                          <a:latin typeface="Montserrat"/>
+                        </a:rPr>
+                        <a:t>.989</a:t>
+                      </a:r>
+                    </a:p>
+                  </a:txBody>
+                  <a:tcPr marL="32004" marR="32004" marT="9144" marB="9144">
+                    <a:solidFill>
+                      <a:srgbClr val="FFEBEB"/>
+                    </a:solidFill>
+                  </a:tcPr>
+                </a:tc>
+                <a:tc>
+                  <a:txBody>
+                    <a:bodyPr/>
+                    <a:lstStyle/>
+                    <a:p>
+                      <a:pPr algn="ctr">
+                        <a:lnSpc>
+                          <a:spcPct val="100000"/>
+                        </a:lnSpc>
+                        <a:spcBef>
+                          <a:spcPts val="0"/>
+                        </a:spcBef>
+                        <a:spcAft>
+                          <a:spcPts val="0"/>
+                        </a:spcAft>
+                      </a:pPr>
+                      <a:r>
+                        <a:rPr sz="840" b="0">
+                          <a:solidFill>
+                            <a:srgbClr val="000000"/>
+                          </a:solidFill>
+                          <a:latin typeface="Montserrat"/>
+                        </a:rPr>
+                        <a:t>.913</a:t>
+                      </a:r>
+                    </a:p>
+                  </a:txBody>
+                  <a:tcPr marL="32004" marR="32004" marT="9144" marB="9144">
+                    <a:solidFill>
+                      <a:srgbClr val="FFEBEB"/>
+                    </a:solidFill>
+                  </a:tcPr>
+                </a:tc>
+                <a:tc>
+                  <a:txBody>
+                    <a:bodyPr/>
+                    <a:lstStyle/>
+                    <a:p>
+                      <a:pPr algn="ctr">
+                        <a:lnSpc>
+                          <a:spcPct val="100000"/>
+                        </a:lnSpc>
+                        <a:spcBef>
+                          <a:spcPts val="0"/>
+                        </a:spcBef>
+                        <a:spcAft>
+                          <a:spcPts val="0"/>
+                        </a:spcAft>
+                      </a:pPr>
+                      <a:r>
+                        <a:rPr sz="840" b="0">
+                          <a:solidFill>
+                            <a:srgbClr val="000000"/>
+                          </a:solidFill>
+                          <a:latin typeface="Montserrat"/>
+                        </a:rPr>
+                        <a:t>.451</a:t>
+                      </a:r>
+                    </a:p>
+                  </a:txBody>
+                  <a:tcPr marL="32004" marR="32004" marT="9144" marB="9144">
+                    <a:solidFill>
+                      <a:srgbClr val="FFEBEB"/>
+                    </a:solidFill>
+                  </a:tcPr>
+                </a:tc>
+                <a:tc>
+                  <a:txBody>
+                    <a:bodyPr/>
+                    <a:lstStyle/>
+                    <a:p>
+                      <a:pPr algn="ctr">
+                        <a:lnSpc>
+                          <a:spcPct val="100000"/>
+                        </a:lnSpc>
+                        <a:spcBef>
+                          <a:spcPts val="0"/>
+                        </a:spcBef>
+                        <a:spcAft>
+                          <a:spcPts val="0"/>
+                        </a:spcAft>
+                      </a:pPr>
+                      <a:r>
+                        <a:rPr sz="840" b="0">
+                          <a:solidFill>
+                            <a:srgbClr val="000000"/>
+                          </a:solidFill>
+                          <a:latin typeface="Montserrat"/>
+                        </a:rPr>
+                        <a:t>.801</a:t>
+                      </a:r>
+                    </a:p>
+                  </a:txBody>
+                  <a:tcPr marL="32004" marR="32004" marT="9144" marB="9144">
+                    <a:solidFill>
+                      <a:srgbClr val="FFEBEB"/>
+                    </a:solidFill>
+                  </a:tcPr>
+                </a:tc>
+                <a:tc>
+                  <a:txBody>
+                    <a:bodyPr/>
+                    <a:lstStyle/>
+                    <a:p>
+                      <a:pPr algn="ctr">
+                        <a:lnSpc>
+                          <a:spcPct val="100000"/>
+                        </a:lnSpc>
+                        <a:spcBef>
+                          <a:spcPts val="0"/>
+                        </a:spcBef>
+                        <a:spcAft>
+                          <a:spcPts val="0"/>
+                        </a:spcAft>
+                      </a:pPr>
+                      <a:r>
+                        <a:rPr sz="840" b="0">
+                          <a:solidFill>
+                            <a:srgbClr val="000000"/>
+                          </a:solidFill>
+                          <a:latin typeface="Montserrat"/>
+                        </a:rPr>
+                        <a:t>.825</a:t>
+                      </a:r>
+                    </a:p>
+                  </a:txBody>
+                  <a:tcPr marL="32004" marR="32004" marT="9144" marB="9144">
+                    <a:solidFill>
+                      <a:srgbClr val="FFEBEB"/>
+                    </a:solidFill>
+                  </a:tcPr>
+                </a:tc>
+                <a:tc>
+                  <a:txBody>
+                    <a:bodyPr/>
+                    <a:lstStyle/>
+                    <a:p>
+                      <a:pPr algn="ctr">
+                        <a:lnSpc>
+                          <a:spcPct val="100000"/>
+                        </a:lnSpc>
+                        <a:spcBef>
+                          <a:spcPts val="0"/>
+                        </a:spcBef>
+                        <a:spcAft>
+                          <a:spcPts val="0"/>
+                        </a:spcAft>
+                      </a:pPr>
+                      <a:r>
+                        <a:rPr sz="840" b="1">
+                          <a:solidFill>
+                            <a:srgbClr val="A62A2A"/>
+                          </a:solidFill>
+                          <a:latin typeface="Montserrat"/>
+                        </a:rPr>
+                        <a:t>FAIL</a:t>
+                      </a:r>
+                    </a:p>
+                  </a:txBody>
+                  <a:tcPr marL="32004" marR="32004" marT="9144" marB="9144">
+                    <a:solidFill>
+                      <a:srgbClr val="FFEBEB"/>
+                    </a:solidFill>
+                  </a:tcPr>
+                </a:tc>
+              </a:tr>
+              <a:tr h="309233">
+                <a:tc>
+                  <a:txBody>
+                    <a:bodyPr/>
+                    <a:lstStyle/>
+                    <a:p>
+                      <a:pPr algn="ctr">
+                        <a:lnSpc>
+                          <a:spcPct val="100000"/>
+                        </a:lnSpc>
+                        <a:spcBef>
+                          <a:spcPts val="0"/>
+                        </a:spcBef>
+                        <a:spcAft>
+                          <a:spcPts val="0"/>
+                        </a:spcAft>
+                      </a:pPr>
+                      <a:r>
+                        <a:rPr sz="840" b="0">
+                          <a:solidFill>
+                            <a:srgbClr val="000000"/>
+                          </a:solidFill>
+                          <a:latin typeface="Montserrat"/>
+                        </a:rPr>
+                        <a:t>05</a:t>
+                      </a:r>
+                    </a:p>
+                  </a:txBody>
+                  <a:tcPr marL="32004" marR="32004" marT="9144" marB="9144">
+                    <a:solidFill>
+                      <a:srgbClr val="FFFFFF"/>
+                    </a:solidFill>
+                  </a:tcPr>
+                </a:tc>
+                <a:tc>
+                  <a:txBody>
+                    <a:bodyPr/>
+                    <a:lstStyle/>
+                    <a:p>
+                      <a:pPr algn="l">
+                        <a:lnSpc>
+                          <a:spcPct val="100000"/>
+                        </a:lnSpc>
+                        <a:spcBef>
+                          <a:spcPts val="0"/>
+                        </a:spcBef>
+                        <a:spcAft>
+                          <a:spcPts val="0"/>
+                        </a:spcAft>
+                      </a:pPr>
+                      <a:r>
+                        <a:rPr sz="840" b="0">
+                          <a:solidFill>
+                            <a:srgbClr val="000000"/>
+                          </a:solidFill>
+                          <a:latin typeface="Montserrat"/>
+                        </a:rPr>
+                        <a:t>Atlanta/Miami parking</a:t>
+                      </a:r>
+                    </a:p>
+                  </a:txBody>
+                  <a:tcPr marL="32004" marR="32004" marT="9144" marB="9144">
+                    <a:solidFill>
+                      <a:srgbClr val="FFFFFF"/>
+                    </a:solidFill>
+                  </a:tcPr>
+                </a:tc>
+                <a:tc>
+                  <a:txBody>
+                    <a:bodyPr/>
+                    <a:lstStyle/>
+                    <a:p>
+                      <a:pPr algn="ctr">
+                        <a:lnSpc>
+                          <a:spcPct val="100000"/>
+                        </a:lnSpc>
+                        <a:spcBef>
+                          <a:spcPts val="0"/>
+                        </a:spcBef>
+                        <a:spcAft>
+                          <a:spcPts val="0"/>
+                        </a:spcAft>
+                      </a:pPr>
+                      <a:r>
+                        <a:rPr sz="840" b="0">
+                          <a:solidFill>
+                            <a:srgbClr val="000000"/>
+                          </a:solidFill>
+                          <a:latin typeface="Montserrat"/>
+                        </a:rPr>
+                        <a:t>1.000</a:t>
+                      </a:r>
+                    </a:p>
+                  </a:txBody>
+                  <a:tcPr marL="32004" marR="32004" marT="9144" marB="9144">
+                    <a:solidFill>
+                      <a:srgbClr val="FFFFFF"/>
+                    </a:solidFill>
+                  </a:tcPr>
+                </a:tc>
+                <a:tc>
+                  <a:txBody>
+                    <a:bodyPr/>
+                    <a:lstStyle/>
+                    <a:p>
+                      <a:pPr algn="ctr">
+                        <a:lnSpc>
+                          <a:spcPct val="100000"/>
+                        </a:lnSpc>
+                        <a:spcBef>
+                          <a:spcPts val="0"/>
+                        </a:spcBef>
+                        <a:spcAft>
+                          <a:spcPts val="0"/>
+                        </a:spcAft>
+                      </a:pPr>
+                      <a:r>
+                        <a:rPr sz="840" b="0">
+                          <a:solidFill>
+                            <a:srgbClr val="000000"/>
+                          </a:solidFill>
+                          <a:latin typeface="Montserrat"/>
+                        </a:rPr>
+                        <a:t>1.000</a:t>
+                      </a:r>
+                    </a:p>
+                  </a:txBody>
+                  <a:tcPr marL="32004" marR="32004" marT="9144" marB="9144">
+                    <a:solidFill>
+                      <a:srgbClr val="FFFFFF"/>
+                    </a:solidFill>
+                  </a:tcPr>
+                </a:tc>
+                <a:tc>
+                  <a:txBody>
+                    <a:bodyPr/>
+                    <a:lstStyle/>
+                    <a:p>
+                      <a:pPr algn="ctr">
+                        <a:lnSpc>
+                          <a:spcPct val="100000"/>
+                        </a:lnSpc>
+                        <a:spcBef>
+                          <a:spcPts val="0"/>
+                        </a:spcBef>
+                        <a:spcAft>
+                          <a:spcPts val="0"/>
+                        </a:spcAft>
+                      </a:pPr>
+                      <a:r>
+                        <a:rPr sz="840" b="0">
+                          <a:solidFill>
+                            <a:srgbClr val="000000"/>
+                          </a:solidFill>
+                          <a:latin typeface="Montserrat"/>
+                        </a:rPr>
+                        <a:t>.893</a:t>
+                      </a:r>
+                    </a:p>
+                  </a:txBody>
+                  <a:tcPr marL="32004" marR="32004" marT="9144" marB="9144">
+                    <a:solidFill>
+                      <a:srgbClr val="FFFFFF"/>
+                    </a:solidFill>
+                  </a:tcPr>
+                </a:tc>
+                <a:tc>
+                  <a:txBody>
+                    <a:bodyPr/>
+                    <a:lstStyle/>
+                    <a:p>
+                      <a:pPr algn="ctr">
+                        <a:lnSpc>
+                          <a:spcPct val="100000"/>
+                        </a:lnSpc>
+                        <a:spcBef>
+                          <a:spcPts val="0"/>
+                        </a:spcBef>
+                        <a:spcAft>
+                          <a:spcPts val="0"/>
+                        </a:spcAft>
+                      </a:pPr>
+                      <a:r>
+                        <a:rPr sz="840" b="0">
+                          <a:solidFill>
+                            <a:srgbClr val="000000"/>
+                          </a:solidFill>
+                          <a:latin typeface="Montserrat"/>
+                        </a:rPr>
+                        <a:t>.982</a:t>
+                      </a:r>
+                    </a:p>
+                  </a:txBody>
+                  <a:tcPr marL="32004" marR="32004" marT="9144" marB="9144">
+                    <a:solidFill>
+                      <a:srgbClr val="FFFFFF"/>
+                    </a:solidFill>
+                  </a:tcPr>
+                </a:tc>
+                <a:tc>
+                  <a:txBody>
+                    <a:bodyPr/>
+                    <a:lstStyle/>
+                    <a:p>
+                      <a:pPr algn="ctr">
+                        <a:lnSpc>
+                          <a:spcPct val="100000"/>
+                        </a:lnSpc>
+                        <a:spcBef>
+                          <a:spcPts val="0"/>
+                        </a:spcBef>
+                        <a:spcAft>
+                          <a:spcPts val="0"/>
+                        </a:spcAft>
+                      </a:pPr>
+                      <a:r>
+                        <a:rPr sz="840" b="0">
+                          <a:solidFill>
+                            <a:srgbClr val="000000"/>
+                          </a:solidFill>
+                          <a:latin typeface="Montserrat"/>
+                        </a:rPr>
+                        <a:t>.975</a:t>
+                      </a:r>
+                    </a:p>
+                  </a:txBody>
+                  <a:tcPr marL="32004" marR="32004" marT="9144" marB="9144">
+                    <a:solidFill>
+                      <a:srgbClr val="FFFFFF"/>
+                    </a:solidFill>
+                  </a:tcPr>
+                </a:tc>
+                <a:tc>
+                  <a:txBody>
+                    <a:bodyPr/>
+                    <a:lstStyle/>
+                    <a:p>
+                      <a:pPr algn="ctr">
+                        <a:lnSpc>
+                          <a:spcPct val="100000"/>
+                        </a:lnSpc>
+                        <a:spcBef>
+                          <a:spcPts val="0"/>
+                        </a:spcBef>
+                        <a:spcAft>
+                          <a:spcPts val="0"/>
+                        </a:spcAft>
+                      </a:pPr>
+                      <a:r>
+                        <a:rPr sz="840" b="1">
+                          <a:solidFill>
+                            <a:srgbClr val="1F7752"/>
+                          </a:solidFill>
+                          <a:latin typeface="Montserrat"/>
+                        </a:rPr>
+                        <a:t>PASS</a:t>
+                      </a:r>
+                    </a:p>
+                  </a:txBody>
+                  <a:tcPr marL="32004" marR="32004" marT="9144" marB="9144">
+                    <a:solidFill>
+                      <a:srgbClr val="FFFFFF"/>
+                    </a:solidFill>
+                  </a:tcPr>
+                </a:tc>
+              </a:tr>
+              <a:tr h="309233">
+                <a:tc>
+                  <a:txBody>
+                    <a:bodyPr/>
+                    <a:lstStyle/>
+                    <a:p>
+                      <a:pPr algn="ctr">
+                        <a:lnSpc>
+                          <a:spcPct val="100000"/>
+                        </a:lnSpc>
+                        <a:spcBef>
+                          <a:spcPts val="0"/>
+                        </a:spcBef>
+                        <a:spcAft>
+                          <a:spcPts val="0"/>
+                        </a:spcAft>
+                      </a:pPr>
+                      <a:r>
+                        <a:rPr sz="840" b="0">
+                          <a:solidFill>
+                            <a:srgbClr val="000000"/>
+                          </a:solidFill>
+                          <a:latin typeface="Montserrat"/>
+                        </a:rPr>
+                        <a:t>06</a:t>
+                      </a:r>
+                    </a:p>
+                  </a:txBody>
+                  <a:tcPr marL="32004" marR="32004" marT="9144" marB="9144">
+                    <a:solidFill>
+                      <a:srgbClr val="F2F6FF"/>
+                    </a:solidFill>
+                  </a:tcPr>
+                </a:tc>
+                <a:tc>
+                  <a:txBody>
+                    <a:bodyPr/>
+                    <a:lstStyle/>
+                    <a:p>
+                      <a:pPr algn="l">
+                        <a:lnSpc>
+                          <a:spcPct val="100000"/>
+                        </a:lnSpc>
+                        <a:spcBef>
+                          <a:spcPts val="0"/>
+                        </a:spcBef>
+                        <a:spcAft>
+                          <a:spcPts val="0"/>
+                        </a:spcAft>
+                      </a:pPr>
+                      <a:r>
+                        <a:rPr sz="840" b="0">
+                          <a:solidFill>
+                            <a:srgbClr val="000000"/>
+                          </a:solidFill>
+                          <a:latin typeface="Montserrat"/>
+                        </a:rPr>
+                        <a:t>Miami breakfast</a:t>
+                      </a:r>
+                    </a:p>
+                  </a:txBody>
+                  <a:tcPr marL="32004" marR="32004" marT="9144" marB="9144">
+                    <a:solidFill>
+                      <a:srgbClr val="F2F6FF"/>
+                    </a:solidFill>
+                  </a:tcPr>
+                </a:tc>
+                <a:tc>
+                  <a:txBody>
+                    <a:bodyPr/>
+                    <a:lstStyle/>
+                    <a:p>
+                      <a:pPr algn="ctr">
+                        <a:lnSpc>
+                          <a:spcPct val="100000"/>
+                        </a:lnSpc>
+                        <a:spcBef>
+                          <a:spcPts val="0"/>
+                        </a:spcBef>
+                        <a:spcAft>
+                          <a:spcPts val="0"/>
+                        </a:spcAft>
+                      </a:pPr>
+                      <a:r>
+                        <a:rPr sz="840" b="0">
+                          <a:solidFill>
+                            <a:srgbClr val="000000"/>
+                          </a:solidFill>
+                          <a:latin typeface="Montserrat"/>
+                        </a:rPr>
+                        <a:t>1.000</a:t>
+                      </a:r>
+                    </a:p>
+                  </a:txBody>
+                  <a:tcPr marL="32004" marR="32004" marT="9144" marB="9144">
+                    <a:solidFill>
+                      <a:srgbClr val="F2F6FF"/>
+                    </a:solidFill>
+                  </a:tcPr>
+                </a:tc>
+                <a:tc>
+                  <a:txBody>
+                    <a:bodyPr/>
+                    <a:lstStyle/>
+                    <a:p>
+                      <a:pPr algn="ctr">
+                        <a:lnSpc>
+                          <a:spcPct val="100000"/>
+                        </a:lnSpc>
+                        <a:spcBef>
+                          <a:spcPts val="0"/>
+                        </a:spcBef>
+                        <a:spcAft>
+                          <a:spcPts val="0"/>
+                        </a:spcAft>
+                      </a:pPr>
+                      <a:r>
+                        <a:rPr sz="840" b="0">
+                          <a:solidFill>
+                            <a:srgbClr val="000000"/>
+                          </a:solidFill>
+                          <a:latin typeface="Montserrat"/>
+                        </a:rPr>
+                        <a:t>.994</a:t>
+                      </a:r>
+                    </a:p>
+                  </a:txBody>
+                  <a:tcPr marL="32004" marR="32004" marT="9144" marB="9144">
+                    <a:solidFill>
+                      <a:srgbClr val="F2F6FF"/>
+                    </a:solidFill>
+                  </a:tcPr>
+                </a:tc>
+                <a:tc>
+                  <a:txBody>
+                    <a:bodyPr/>
+                    <a:lstStyle/>
+                    <a:p>
+                      <a:pPr algn="ctr">
+                        <a:lnSpc>
+                          <a:spcPct val="100000"/>
+                        </a:lnSpc>
+                        <a:spcBef>
+                          <a:spcPts val="0"/>
+                        </a:spcBef>
+                        <a:spcAft>
+                          <a:spcPts val="0"/>
+                        </a:spcAft>
+                      </a:pPr>
+                      <a:r>
+                        <a:rPr sz="840" b="0">
+                          <a:solidFill>
+                            <a:srgbClr val="000000"/>
+                          </a:solidFill>
+                          <a:latin typeface="Montserrat"/>
+                        </a:rPr>
+                        <a:t>.828</a:t>
+                      </a:r>
+                    </a:p>
+                  </a:txBody>
+                  <a:tcPr marL="32004" marR="32004" marT="9144" marB="9144">
+                    <a:solidFill>
+                      <a:srgbClr val="F2F6FF"/>
+                    </a:solidFill>
+                  </a:tcPr>
+                </a:tc>
+                <a:tc>
+                  <a:txBody>
+                    <a:bodyPr/>
+                    <a:lstStyle/>
+                    <a:p>
+                      <a:pPr algn="ctr">
+                        <a:lnSpc>
+                          <a:spcPct val="100000"/>
+                        </a:lnSpc>
+                        <a:spcBef>
+                          <a:spcPts val="0"/>
+                        </a:spcBef>
+                        <a:spcAft>
+                          <a:spcPts val="0"/>
+                        </a:spcAft>
+                      </a:pPr>
+                      <a:r>
+                        <a:rPr sz="840" b="0">
+                          <a:solidFill>
+                            <a:srgbClr val="000000"/>
+                          </a:solidFill>
+                          <a:latin typeface="Montserrat"/>
+                        </a:rPr>
+                        <a:t>.994</a:t>
+                      </a:r>
+                    </a:p>
+                  </a:txBody>
+                  <a:tcPr marL="32004" marR="32004" marT="9144" marB="9144">
+                    <a:solidFill>
+                      <a:srgbClr val="F2F6FF"/>
+                    </a:solidFill>
+                  </a:tcPr>
+                </a:tc>
+                <a:tc>
+                  <a:txBody>
+                    <a:bodyPr/>
+                    <a:lstStyle/>
+                    <a:p>
+                      <a:pPr algn="ctr">
+                        <a:lnSpc>
+                          <a:spcPct val="100000"/>
+                        </a:lnSpc>
+                        <a:spcBef>
+                          <a:spcPts val="0"/>
+                        </a:spcBef>
+                        <a:spcAft>
+                          <a:spcPts val="0"/>
+                        </a:spcAft>
+                      </a:pPr>
+                      <a:r>
+                        <a:rPr sz="840" b="0">
+                          <a:solidFill>
+                            <a:srgbClr val="000000"/>
+                          </a:solidFill>
+                          <a:latin typeface="Montserrat"/>
+                        </a:rPr>
+                        <a:t>.963</a:t>
+                      </a:r>
+                    </a:p>
+                  </a:txBody>
+                  <a:tcPr marL="32004" marR="32004" marT="9144" marB="9144">
+                    <a:solidFill>
+                      <a:srgbClr val="F2F6FF"/>
+                    </a:solidFill>
+                  </a:tcPr>
+                </a:tc>
+                <a:tc>
+                  <a:txBody>
+                    <a:bodyPr/>
+                    <a:lstStyle/>
+                    <a:p>
+                      <a:pPr algn="ctr">
+                        <a:lnSpc>
+                          <a:spcPct val="100000"/>
+                        </a:lnSpc>
+                        <a:spcBef>
+                          <a:spcPts val="0"/>
+                        </a:spcBef>
+                        <a:spcAft>
+                          <a:spcPts val="0"/>
+                        </a:spcAft>
+                      </a:pPr>
+                      <a:r>
+                        <a:rPr sz="840" b="1">
+                          <a:solidFill>
+                            <a:srgbClr val="1F7752"/>
+                          </a:solidFill>
+                          <a:latin typeface="Montserrat"/>
+                        </a:rPr>
+                        <a:t>PASS</a:t>
+                      </a:r>
+                    </a:p>
+                  </a:txBody>
+                  <a:tcPr marL="32004" marR="32004" marT="9144" marB="9144">
+                    <a:solidFill>
+                      <a:srgbClr val="F2F6FF"/>
+                    </a:solidFill>
+                  </a:tcPr>
+                </a:tc>
+              </a:tr>
+              <a:tr h="309233">
+                <a:tc>
+                  <a:txBody>
+                    <a:bodyPr/>
+                    <a:lstStyle/>
+                    <a:p>
+                      <a:pPr algn="ctr">
+                        <a:lnSpc>
+                          <a:spcPct val="100000"/>
+                        </a:lnSpc>
+                        <a:spcBef>
+                          <a:spcPts val="0"/>
+                        </a:spcBef>
+                        <a:spcAft>
+                          <a:spcPts val="0"/>
+                        </a:spcAft>
+                      </a:pPr>
+                      <a:r>
+                        <a:rPr sz="840" b="0">
+                          <a:solidFill>
+                            <a:srgbClr val="000000"/>
+                          </a:solidFill>
+                          <a:latin typeface="Montserrat"/>
+                        </a:rPr>
+                        <a:t>07</a:t>
+                      </a:r>
+                    </a:p>
+                  </a:txBody>
+                  <a:tcPr marL="32004" marR="32004" marT="9144" marB="9144">
+                    <a:solidFill>
+                      <a:srgbClr val="FFFFFF"/>
+                    </a:solidFill>
+                  </a:tcPr>
+                </a:tc>
+                <a:tc>
+                  <a:txBody>
+                    <a:bodyPr/>
+                    <a:lstStyle/>
+                    <a:p>
+                      <a:pPr algn="l">
+                        <a:lnSpc>
+                          <a:spcPct val="100000"/>
+                        </a:lnSpc>
+                        <a:spcBef>
+                          <a:spcPts val="0"/>
+                        </a:spcBef>
+                        <a:spcAft>
+                          <a:spcPts val="0"/>
+                        </a:spcAft>
+                      </a:pPr>
+                      <a:r>
+                        <a:rPr sz="840" b="0">
+                          <a:solidFill>
+                            <a:srgbClr val="000000"/>
+                          </a:solidFill>
+                          <a:latin typeface="Montserrat"/>
+                        </a:rPr>
+                        <a:t>Advance Purchase change</a:t>
+                      </a:r>
+                    </a:p>
+                  </a:txBody>
+                  <a:tcPr marL="32004" marR="32004" marT="9144" marB="9144">
+                    <a:solidFill>
+                      <a:srgbClr val="FFFFFF"/>
+                    </a:solidFill>
+                  </a:tcPr>
+                </a:tc>
+                <a:tc>
+                  <a:txBody>
+                    <a:bodyPr/>
+                    <a:lstStyle/>
+                    <a:p>
+                      <a:pPr algn="ctr">
+                        <a:lnSpc>
+                          <a:spcPct val="100000"/>
+                        </a:lnSpc>
+                        <a:spcBef>
+                          <a:spcPts val="0"/>
+                        </a:spcBef>
+                        <a:spcAft>
+                          <a:spcPts val="0"/>
+                        </a:spcAft>
+                      </a:pPr>
+                      <a:r>
+                        <a:rPr sz="840" b="0">
+                          <a:solidFill>
+                            <a:srgbClr val="000000"/>
+                          </a:solidFill>
+                          <a:latin typeface="Montserrat"/>
+                        </a:rPr>
+                        <a:t>.956</a:t>
+                      </a:r>
+                    </a:p>
+                  </a:txBody>
+                  <a:tcPr marL="32004" marR="32004" marT="9144" marB="9144">
+                    <a:solidFill>
+                      <a:srgbClr val="FFFFFF"/>
+                    </a:solidFill>
+                  </a:tcPr>
+                </a:tc>
+                <a:tc>
+                  <a:txBody>
+                    <a:bodyPr/>
+                    <a:lstStyle/>
+                    <a:p>
+                      <a:pPr algn="ctr">
+                        <a:lnSpc>
+                          <a:spcPct val="100000"/>
+                        </a:lnSpc>
+                        <a:spcBef>
+                          <a:spcPts val="0"/>
+                        </a:spcBef>
+                        <a:spcAft>
+                          <a:spcPts val="0"/>
+                        </a:spcAft>
+                      </a:pPr>
+                      <a:r>
+                        <a:rPr sz="840" b="0">
+                          <a:solidFill>
+                            <a:srgbClr val="000000"/>
+                          </a:solidFill>
+                          <a:latin typeface="Montserrat"/>
+                        </a:rPr>
+                        <a:t>.962</a:t>
+                      </a:r>
+                    </a:p>
+                  </a:txBody>
+                  <a:tcPr marL="32004" marR="32004" marT="9144" marB="9144">
+                    <a:solidFill>
+                      <a:srgbClr val="FFFFFF"/>
+                    </a:solidFill>
+                  </a:tcPr>
+                </a:tc>
+                <a:tc>
+                  <a:txBody>
+                    <a:bodyPr/>
+                    <a:lstStyle/>
+                    <a:p>
+                      <a:pPr algn="ctr">
+                        <a:lnSpc>
+                          <a:spcPct val="100000"/>
+                        </a:lnSpc>
+                        <a:spcBef>
+                          <a:spcPts val="0"/>
+                        </a:spcBef>
+                        <a:spcAft>
+                          <a:spcPts val="0"/>
+                        </a:spcAft>
+                      </a:pPr>
+                      <a:r>
+                        <a:rPr sz="840" b="0">
+                          <a:solidFill>
+                            <a:srgbClr val="000000"/>
+                          </a:solidFill>
+                          <a:latin typeface="Montserrat"/>
+                        </a:rPr>
+                        <a:t>.809</a:t>
+                      </a:r>
+                    </a:p>
+                  </a:txBody>
+                  <a:tcPr marL="32004" marR="32004" marT="9144" marB="9144">
+                    <a:solidFill>
+                      <a:srgbClr val="FFFFFF"/>
+                    </a:solidFill>
+                  </a:tcPr>
+                </a:tc>
+                <a:tc>
+                  <a:txBody>
+                    <a:bodyPr/>
+                    <a:lstStyle/>
+                    <a:p>
+                      <a:pPr algn="ctr">
+                        <a:lnSpc>
+                          <a:spcPct val="100000"/>
+                        </a:lnSpc>
+                        <a:spcBef>
+                          <a:spcPts val="0"/>
+                        </a:spcBef>
+                        <a:spcAft>
+                          <a:spcPts val="0"/>
+                        </a:spcAft>
+                      </a:pPr>
+                      <a:r>
+                        <a:rPr sz="840" b="0">
+                          <a:solidFill>
+                            <a:srgbClr val="000000"/>
+                          </a:solidFill>
+                          <a:latin typeface="Montserrat"/>
+                        </a:rPr>
+                        <a:t>.896</a:t>
+                      </a:r>
+                    </a:p>
+                  </a:txBody>
+                  <a:tcPr marL="32004" marR="32004" marT="9144" marB="9144">
+                    <a:solidFill>
+                      <a:srgbClr val="FFFFFF"/>
+                    </a:solidFill>
+                  </a:tcPr>
+                </a:tc>
+                <a:tc>
+                  <a:txBody>
+                    <a:bodyPr/>
+                    <a:lstStyle/>
+                    <a:p>
+                      <a:pPr algn="ctr">
+                        <a:lnSpc>
+                          <a:spcPct val="100000"/>
+                        </a:lnSpc>
+                        <a:spcBef>
+                          <a:spcPts val="0"/>
+                        </a:spcBef>
+                        <a:spcAft>
+                          <a:spcPts val="0"/>
+                        </a:spcAft>
+                      </a:pPr>
+                      <a:r>
+                        <a:rPr sz="840" b="0">
+                          <a:solidFill>
+                            <a:srgbClr val="000000"/>
+                          </a:solidFill>
+                          <a:latin typeface="Montserrat"/>
+                        </a:rPr>
+                        <a:t>.916</a:t>
+                      </a:r>
+                    </a:p>
+                  </a:txBody>
+                  <a:tcPr marL="32004" marR="32004" marT="9144" marB="9144">
+                    <a:solidFill>
+                      <a:srgbClr val="FFFFFF"/>
+                    </a:solidFill>
+                  </a:tcPr>
+                </a:tc>
+                <a:tc>
+                  <a:txBody>
+                    <a:bodyPr/>
+                    <a:lstStyle/>
+                    <a:p>
+                      <a:pPr algn="ctr">
+                        <a:lnSpc>
+                          <a:spcPct val="100000"/>
+                        </a:lnSpc>
+                        <a:spcBef>
+                          <a:spcPts val="0"/>
+                        </a:spcBef>
+                        <a:spcAft>
+                          <a:spcPts val="0"/>
+                        </a:spcAft>
+                      </a:pPr>
+                      <a:r>
+                        <a:rPr sz="840" b="1">
+                          <a:solidFill>
+                            <a:srgbClr val="1F7752"/>
+                          </a:solidFill>
+                          <a:latin typeface="Montserrat"/>
+                        </a:rPr>
+                        <a:t>PASS</a:t>
+                      </a:r>
+                    </a:p>
+                  </a:txBody>
+                  <a:tcPr marL="32004" marR="32004" marT="9144" marB="9144">
+                    <a:solidFill>
+                      <a:srgbClr val="FFFFFF"/>
+                    </a:solidFill>
+                  </a:tcPr>
+                </a:tc>
+              </a:tr>
+              <a:tr h="309233">
+                <a:tc>
+                  <a:txBody>
+                    <a:bodyPr/>
+                    <a:lstStyle/>
+                    <a:p>
+                      <a:pPr algn="ctr">
+                        <a:lnSpc>
+                          <a:spcPct val="100000"/>
+                        </a:lnSpc>
+                        <a:spcBef>
+                          <a:spcPts val="0"/>
+                        </a:spcBef>
+                        <a:spcAft>
+                          <a:spcPts val="0"/>
+                        </a:spcAft>
+                      </a:pPr>
+                      <a:r>
+                        <a:rPr sz="840" b="0">
+                          <a:solidFill>
+                            <a:srgbClr val="000000"/>
+                          </a:solidFill>
+                          <a:latin typeface="Montserrat"/>
+                        </a:rPr>
+                        <a:t>08</a:t>
+                      </a:r>
+                    </a:p>
+                  </a:txBody>
+                  <a:tcPr marL="32004" marR="32004" marT="9144" marB="9144">
+                    <a:solidFill>
+                      <a:srgbClr val="F2F6FF"/>
+                    </a:solidFill>
+                  </a:tcPr>
+                </a:tc>
+                <a:tc>
+                  <a:txBody>
+                    <a:bodyPr/>
+                    <a:lstStyle/>
+                    <a:p>
+                      <a:pPr algn="l">
+                        <a:lnSpc>
+                          <a:spcPct val="100000"/>
+                        </a:lnSpc>
+                        <a:spcBef>
+                          <a:spcPts val="0"/>
+                        </a:spcBef>
+                        <a:spcAft>
+                          <a:spcPts val="0"/>
+                        </a:spcAft>
+                      </a:pPr>
+                      <a:r>
+                        <a:rPr sz="840" b="0">
+                          <a:solidFill>
+                            <a:srgbClr val="000000"/>
+                          </a:solidFill>
+                          <a:latin typeface="Montserrat"/>
+                        </a:rPr>
+                        <a:t>Denver late checkout</a:t>
+                      </a:r>
+                    </a:p>
+                  </a:txBody>
+                  <a:tcPr marL="32004" marR="32004" marT="9144" marB="9144">
+                    <a:solidFill>
+                      <a:srgbClr val="F2F6FF"/>
+                    </a:solidFill>
+                  </a:tcPr>
+                </a:tc>
+                <a:tc>
+                  <a:txBody>
+                    <a:bodyPr/>
+                    <a:lstStyle/>
+                    <a:p>
+                      <a:pPr algn="ctr">
+                        <a:lnSpc>
+                          <a:spcPct val="100000"/>
+                        </a:lnSpc>
+                        <a:spcBef>
+                          <a:spcPts val="0"/>
+                        </a:spcBef>
+                        <a:spcAft>
+                          <a:spcPts val="0"/>
+                        </a:spcAft>
+                      </a:pPr>
+                      <a:r>
+                        <a:rPr sz="840" b="0">
+                          <a:solidFill>
+                            <a:srgbClr val="000000"/>
+                          </a:solidFill>
+                          <a:latin typeface="Montserrat"/>
+                        </a:rPr>
+                        <a:t>.998</a:t>
+                      </a:r>
+                    </a:p>
+                  </a:txBody>
+                  <a:tcPr marL="32004" marR="32004" marT="9144" marB="9144">
+                    <a:solidFill>
+                      <a:srgbClr val="F2F6FF"/>
+                    </a:solidFill>
+                  </a:tcPr>
+                </a:tc>
+                <a:tc>
+                  <a:txBody>
+                    <a:bodyPr/>
+                    <a:lstStyle/>
+                    <a:p>
+                      <a:pPr algn="ctr">
+                        <a:lnSpc>
+                          <a:spcPct val="100000"/>
+                        </a:lnSpc>
+                        <a:spcBef>
+                          <a:spcPts val="0"/>
+                        </a:spcBef>
+                        <a:spcAft>
+                          <a:spcPts val="0"/>
+                        </a:spcAft>
+                      </a:pPr>
+                      <a:r>
+                        <a:rPr sz="840" b="0">
+                          <a:solidFill>
+                            <a:srgbClr val="000000"/>
+                          </a:solidFill>
+                          <a:latin typeface="Montserrat"/>
+                        </a:rPr>
+                        <a:t>.986</a:t>
+                      </a:r>
+                    </a:p>
+                  </a:txBody>
+                  <a:tcPr marL="32004" marR="32004" marT="9144" marB="9144">
+                    <a:solidFill>
+                      <a:srgbClr val="F2F6FF"/>
+                    </a:solidFill>
+                  </a:tcPr>
+                </a:tc>
+                <a:tc>
+                  <a:txBody>
+                    <a:bodyPr/>
+                    <a:lstStyle/>
+                    <a:p>
+                      <a:pPr algn="ctr">
+                        <a:lnSpc>
+                          <a:spcPct val="100000"/>
+                        </a:lnSpc>
+                        <a:spcBef>
+                          <a:spcPts val="0"/>
+                        </a:spcBef>
+                        <a:spcAft>
+                          <a:spcPts val="0"/>
+                        </a:spcAft>
+                      </a:pPr>
+                      <a:r>
+                        <a:rPr sz="840" b="0">
+                          <a:solidFill>
+                            <a:srgbClr val="000000"/>
+                          </a:solidFill>
+                          <a:latin typeface="Montserrat"/>
+                        </a:rPr>
+                        <a:t>.834</a:t>
+                      </a:r>
+                    </a:p>
+                  </a:txBody>
+                  <a:tcPr marL="32004" marR="32004" marT="9144" marB="9144">
+                    <a:solidFill>
+                      <a:srgbClr val="F2F6FF"/>
+                    </a:solidFill>
+                  </a:tcPr>
+                </a:tc>
+                <a:tc>
+                  <a:txBody>
+                    <a:bodyPr/>
+                    <a:lstStyle/>
+                    <a:p>
+                      <a:pPr algn="ctr">
+                        <a:lnSpc>
+                          <a:spcPct val="100000"/>
+                        </a:lnSpc>
+                        <a:spcBef>
+                          <a:spcPts val="0"/>
+                        </a:spcBef>
+                        <a:spcAft>
+                          <a:spcPts val="0"/>
+                        </a:spcAft>
+                      </a:pPr>
+                      <a:r>
+                        <a:rPr sz="840" b="0">
+                          <a:solidFill>
+                            <a:srgbClr val="000000"/>
+                          </a:solidFill>
+                          <a:latin typeface="Montserrat"/>
+                        </a:rPr>
+                        <a:t>.884</a:t>
+                      </a:r>
+                    </a:p>
+                  </a:txBody>
+                  <a:tcPr marL="32004" marR="32004" marT="9144" marB="9144">
+                    <a:solidFill>
+                      <a:srgbClr val="F2F6FF"/>
+                    </a:solidFill>
+                  </a:tcPr>
+                </a:tc>
+                <a:tc>
+                  <a:txBody>
+                    <a:bodyPr/>
+                    <a:lstStyle/>
+                    <a:p>
+                      <a:pPr algn="ctr">
+                        <a:lnSpc>
+                          <a:spcPct val="100000"/>
+                        </a:lnSpc>
+                        <a:spcBef>
+                          <a:spcPts val="0"/>
+                        </a:spcBef>
+                        <a:spcAft>
+                          <a:spcPts val="0"/>
+                        </a:spcAft>
+                      </a:pPr>
+                      <a:r>
+                        <a:rPr sz="840" b="0">
+                          <a:solidFill>
+                            <a:srgbClr val="000000"/>
+                          </a:solidFill>
+                          <a:latin typeface="Montserrat"/>
+                        </a:rPr>
+                        <a:t>.939</a:t>
+                      </a:r>
+                    </a:p>
+                  </a:txBody>
+                  <a:tcPr marL="32004" marR="32004" marT="9144" marB="9144">
+                    <a:solidFill>
+                      <a:srgbClr val="F2F6FF"/>
+                    </a:solidFill>
+                  </a:tcPr>
+                </a:tc>
+                <a:tc>
+                  <a:txBody>
+                    <a:bodyPr/>
+                    <a:lstStyle/>
+                    <a:p>
+                      <a:pPr algn="ctr">
+                        <a:lnSpc>
+                          <a:spcPct val="100000"/>
+                        </a:lnSpc>
+                        <a:spcBef>
+                          <a:spcPts val="0"/>
+                        </a:spcBef>
+                        <a:spcAft>
+                          <a:spcPts val="0"/>
+                        </a:spcAft>
+                      </a:pPr>
+                      <a:r>
+                        <a:rPr sz="840" b="1">
+                          <a:solidFill>
+                            <a:srgbClr val="1F7752"/>
+                          </a:solidFill>
+                          <a:latin typeface="Montserrat"/>
+                        </a:rPr>
+                        <a:t>PASS</a:t>
+                      </a:r>
+                    </a:p>
+                  </a:txBody>
+                  <a:tcPr marL="32004" marR="32004" marT="9144" marB="9144">
+                    <a:solidFill>
+                      <a:srgbClr val="F2F6FF"/>
+                    </a:solidFill>
+                  </a:tcPr>
+                </a:tc>
+              </a:tr>
+              <a:tr h="309233">
+                <a:tc>
+                  <a:txBody>
+                    <a:bodyPr/>
+                    <a:lstStyle/>
+                    <a:p>
+                      <a:pPr algn="ctr">
+                        <a:lnSpc>
+                          <a:spcPct val="100000"/>
+                        </a:lnSpc>
+                        <a:spcBef>
+                          <a:spcPts val="0"/>
+                        </a:spcBef>
+                        <a:spcAft>
+                          <a:spcPts val="0"/>
+                        </a:spcAft>
+                      </a:pPr>
+                      <a:r>
+                        <a:rPr sz="840" b="0">
+                          <a:solidFill>
+                            <a:srgbClr val="000000"/>
+                          </a:solidFill>
+                          <a:latin typeface="Montserrat"/>
+                        </a:rPr>
+                        <a:t>09</a:t>
+                      </a:r>
+                    </a:p>
+                  </a:txBody>
+                  <a:tcPr marL="32004" marR="32004" marT="9144" marB="9144">
+                    <a:solidFill>
+                      <a:srgbClr val="FFFFFF"/>
+                    </a:solidFill>
+                  </a:tcPr>
+                </a:tc>
+                <a:tc>
+                  <a:txBody>
+                    <a:bodyPr/>
+                    <a:lstStyle/>
+                    <a:p>
+                      <a:pPr algn="l">
+                        <a:lnSpc>
+                          <a:spcPct val="100000"/>
+                        </a:lnSpc>
+                        <a:spcBef>
+                          <a:spcPts val="0"/>
+                        </a:spcBef>
+                        <a:spcAft>
+                          <a:spcPts val="0"/>
+                        </a:spcAft>
+                      </a:pPr>
+                      <a:r>
+                        <a:rPr sz="840" b="0">
+                          <a:solidFill>
+                            <a:srgbClr val="000000"/>
+                          </a:solidFill>
+                          <a:latin typeface="Montserrat"/>
+                        </a:rPr>
+                        <a:t>ASH-CHI pet fee</a:t>
+                      </a:r>
+                    </a:p>
+                  </a:txBody>
+                  <a:tcPr marL="32004" marR="32004" marT="9144" marB="9144">
+                    <a:solidFill>
+                      <a:srgbClr val="FFFFFF"/>
+                    </a:solidFill>
+                  </a:tcPr>
+                </a:tc>
+                <a:tc>
+                  <a:txBody>
+                    <a:bodyPr/>
+                    <a:lstStyle/>
+                    <a:p>
+                      <a:pPr algn="ctr">
+                        <a:lnSpc>
+                          <a:spcPct val="100000"/>
+                        </a:lnSpc>
+                        <a:spcBef>
+                          <a:spcPts val="0"/>
+                        </a:spcBef>
+                        <a:spcAft>
+                          <a:spcPts val="0"/>
+                        </a:spcAft>
+                      </a:pPr>
+                      <a:r>
+                        <a:rPr sz="840" b="0">
+                          <a:solidFill>
+                            <a:srgbClr val="000000"/>
+                          </a:solidFill>
+                          <a:latin typeface="Montserrat"/>
+                        </a:rPr>
+                        <a:t>1.000</a:t>
+                      </a:r>
+                    </a:p>
+                  </a:txBody>
+                  <a:tcPr marL="32004" marR="32004" marT="9144" marB="9144">
+                    <a:solidFill>
+                      <a:srgbClr val="FFFFFF"/>
+                    </a:solidFill>
+                  </a:tcPr>
+                </a:tc>
+                <a:tc>
+                  <a:txBody>
+                    <a:bodyPr/>
+                    <a:lstStyle/>
+                    <a:p>
+                      <a:pPr algn="ctr">
+                        <a:lnSpc>
+                          <a:spcPct val="100000"/>
+                        </a:lnSpc>
+                        <a:spcBef>
+                          <a:spcPts val="0"/>
+                        </a:spcBef>
+                        <a:spcAft>
+                          <a:spcPts val="0"/>
+                        </a:spcAft>
+                      </a:pPr>
+                      <a:r>
+                        <a:rPr sz="840" b="0">
+                          <a:solidFill>
+                            <a:srgbClr val="000000"/>
+                          </a:solidFill>
+                          <a:latin typeface="Montserrat"/>
+                        </a:rPr>
+                        <a:t>.986</a:t>
+                      </a:r>
+                    </a:p>
+                  </a:txBody>
+                  <a:tcPr marL="32004" marR="32004" marT="9144" marB="9144">
+                    <a:solidFill>
+                      <a:srgbClr val="FFFFFF"/>
+                    </a:solidFill>
+                  </a:tcPr>
+                </a:tc>
+                <a:tc>
+                  <a:txBody>
+                    <a:bodyPr/>
+                    <a:lstStyle/>
+                    <a:p>
+                      <a:pPr algn="ctr">
+                        <a:lnSpc>
+                          <a:spcPct val="100000"/>
+                        </a:lnSpc>
+                        <a:spcBef>
+                          <a:spcPts val="0"/>
+                        </a:spcBef>
+                        <a:spcAft>
+                          <a:spcPts val="0"/>
+                        </a:spcAft>
+                      </a:pPr>
+                      <a:r>
+                        <a:rPr sz="840" b="0">
+                          <a:solidFill>
+                            <a:srgbClr val="000000"/>
+                          </a:solidFill>
+                          <a:latin typeface="Montserrat"/>
+                        </a:rPr>
+                        <a:t>.888</a:t>
+                      </a:r>
+                    </a:p>
+                  </a:txBody>
+                  <a:tcPr marL="32004" marR="32004" marT="9144" marB="9144">
+                    <a:solidFill>
+                      <a:srgbClr val="FFFFFF"/>
+                    </a:solidFill>
+                  </a:tcPr>
+                </a:tc>
+                <a:tc>
+                  <a:txBody>
+                    <a:bodyPr/>
+                    <a:lstStyle/>
+                    <a:p>
+                      <a:pPr algn="ctr">
+                        <a:lnSpc>
+                          <a:spcPct val="100000"/>
+                        </a:lnSpc>
+                        <a:spcBef>
+                          <a:spcPts val="0"/>
+                        </a:spcBef>
+                        <a:spcAft>
+                          <a:spcPts val="0"/>
+                        </a:spcAft>
+                      </a:pPr>
+                      <a:r>
+                        <a:rPr sz="840" b="0">
+                          <a:solidFill>
+                            <a:srgbClr val="000000"/>
+                          </a:solidFill>
+                          <a:latin typeface="Montserrat"/>
+                        </a:rPr>
+                        <a:t>1.000</a:t>
+                      </a:r>
+                    </a:p>
+                  </a:txBody>
+                  <a:tcPr marL="32004" marR="32004" marT="9144" marB="9144">
+                    <a:solidFill>
+                      <a:srgbClr val="FFFFFF"/>
+                    </a:solidFill>
+                  </a:tcPr>
+                </a:tc>
+                <a:tc>
+                  <a:txBody>
+                    <a:bodyPr/>
+                    <a:lstStyle/>
+                    <a:p>
+                      <a:pPr algn="ctr">
+                        <a:lnSpc>
+                          <a:spcPct val="100000"/>
+                        </a:lnSpc>
+                        <a:spcBef>
+                          <a:spcPts val="0"/>
+                        </a:spcBef>
+                        <a:spcAft>
+                          <a:spcPts val="0"/>
+                        </a:spcAft>
+                      </a:pPr>
+                      <a:r>
+                        <a:rPr sz="840" b="0">
+                          <a:solidFill>
+                            <a:srgbClr val="000000"/>
+                          </a:solidFill>
+                          <a:latin typeface="Montserrat"/>
+                        </a:rPr>
+                        <a:t>.974</a:t>
+                      </a:r>
+                    </a:p>
+                  </a:txBody>
+                  <a:tcPr marL="32004" marR="32004" marT="9144" marB="9144">
+                    <a:solidFill>
+                      <a:srgbClr val="FFFFFF"/>
+                    </a:solidFill>
+                  </a:tcPr>
+                </a:tc>
+                <a:tc>
+                  <a:txBody>
+                    <a:bodyPr/>
+                    <a:lstStyle/>
+                    <a:p>
+                      <a:pPr algn="ctr">
+                        <a:lnSpc>
+                          <a:spcPct val="100000"/>
+                        </a:lnSpc>
+                        <a:spcBef>
+                          <a:spcPts val="0"/>
+                        </a:spcBef>
+                        <a:spcAft>
+                          <a:spcPts val="0"/>
+                        </a:spcAft>
+                      </a:pPr>
+                      <a:r>
+                        <a:rPr sz="840" b="1">
+                          <a:solidFill>
+                            <a:srgbClr val="1F7752"/>
+                          </a:solidFill>
+                          <a:latin typeface="Montserrat"/>
+                        </a:rPr>
+                        <a:t>PASS</a:t>
+                      </a:r>
+                    </a:p>
+                  </a:txBody>
+                  <a:tcPr marL="32004" marR="32004" marT="9144" marB="9144">
+                    <a:solidFill>
+                      <a:srgbClr val="FFFFFF"/>
+                    </a:solidFill>
+                  </a:tcPr>
+                </a:tc>
+              </a:tr>
+              <a:tr h="309238">
+                <a:tc>
+                  <a:txBody>
+                    <a:bodyPr/>
+                    <a:lstStyle/>
+                    <a:p>
+                      <a:pPr algn="ctr">
+                        <a:lnSpc>
+                          <a:spcPct val="100000"/>
+                        </a:lnSpc>
+                        <a:spcBef>
+                          <a:spcPts val="0"/>
+                        </a:spcBef>
+                        <a:spcAft>
+                          <a:spcPts val="0"/>
+                        </a:spcAft>
+                      </a:pPr>
+                      <a:r>
+                        <a:rPr sz="840" b="0">
+                          <a:solidFill>
+                            <a:srgbClr val="000000"/>
+                          </a:solidFill>
+                          <a:latin typeface="Montserrat"/>
+                        </a:rPr>
+                        <a:t>10</a:t>
+                      </a:r>
+                    </a:p>
+                  </a:txBody>
+                  <a:tcPr marL="32004" marR="32004" marT="9144" marB="9144">
+                    <a:solidFill>
+                      <a:srgbClr val="F2F6FF"/>
+                    </a:solidFill>
+                  </a:tcPr>
+                </a:tc>
+                <a:tc>
+                  <a:txBody>
+                    <a:bodyPr/>
+                    <a:lstStyle/>
+                    <a:p>
+                      <a:pPr algn="l">
+                        <a:lnSpc>
+                          <a:spcPct val="100000"/>
+                        </a:lnSpc>
+                        <a:spcBef>
+                          <a:spcPts val="0"/>
+                        </a:spcBef>
+                        <a:spcAft>
+                          <a:spcPts val="0"/>
+                        </a:spcAft>
+                      </a:pPr>
+                      <a:r>
+                        <a:rPr sz="840" b="0">
+                          <a:solidFill>
+                            <a:srgbClr val="000000"/>
+                          </a:solidFill>
+                          <a:latin typeface="Montserrat"/>
+                        </a:rPr>
+                        <a:t>Card-hold difference</a:t>
+                      </a:r>
+                    </a:p>
+                  </a:txBody>
+                  <a:tcPr marL="32004" marR="32004" marT="9144" marB="9144">
+                    <a:solidFill>
+                      <a:srgbClr val="F2F6FF"/>
+                    </a:solidFill>
+                  </a:tcPr>
+                </a:tc>
+                <a:tc>
+                  <a:txBody>
+                    <a:bodyPr/>
+                    <a:lstStyle/>
+                    <a:p>
+                      <a:pPr algn="ctr">
+                        <a:lnSpc>
+                          <a:spcPct val="100000"/>
+                        </a:lnSpc>
+                        <a:spcBef>
+                          <a:spcPts val="0"/>
+                        </a:spcBef>
+                        <a:spcAft>
+                          <a:spcPts val="0"/>
+                        </a:spcAft>
+                      </a:pPr>
+                      <a:r>
+                        <a:rPr sz="840" b="0">
+                          <a:solidFill>
+                            <a:srgbClr val="000000"/>
+                          </a:solidFill>
+                          <a:latin typeface="Montserrat"/>
+                        </a:rPr>
+                        <a:t>.999</a:t>
+                      </a:r>
+                    </a:p>
+                  </a:txBody>
+                  <a:tcPr marL="32004" marR="32004" marT="9144" marB="9144">
+                    <a:solidFill>
+                      <a:srgbClr val="F2F6FF"/>
+                    </a:solidFill>
+                  </a:tcPr>
+                </a:tc>
+                <a:tc>
+                  <a:txBody>
+                    <a:bodyPr/>
+                    <a:lstStyle/>
+                    <a:p>
+                      <a:pPr algn="ctr">
+                        <a:lnSpc>
+                          <a:spcPct val="100000"/>
+                        </a:lnSpc>
+                        <a:spcBef>
+                          <a:spcPts val="0"/>
+                        </a:spcBef>
+                        <a:spcAft>
+                          <a:spcPts val="0"/>
+                        </a:spcAft>
+                      </a:pPr>
+                      <a:r>
+                        <a:rPr sz="840" b="0">
+                          <a:solidFill>
+                            <a:srgbClr val="000000"/>
+                          </a:solidFill>
+                          <a:latin typeface="Montserrat"/>
+                        </a:rPr>
+                        <a:t>.998</a:t>
+                      </a:r>
+                    </a:p>
+                  </a:txBody>
+                  <a:tcPr marL="32004" marR="32004" marT="9144" marB="9144">
+                    <a:solidFill>
+                      <a:srgbClr val="F2F6FF"/>
+                    </a:solidFill>
+                  </a:tcPr>
+                </a:tc>
+                <a:tc>
+                  <a:txBody>
+                    <a:bodyPr/>
+                    <a:lstStyle/>
+                    <a:p>
+                      <a:pPr algn="ctr">
+                        <a:lnSpc>
+                          <a:spcPct val="100000"/>
+                        </a:lnSpc>
+                        <a:spcBef>
+                          <a:spcPts val="0"/>
+                        </a:spcBef>
+                        <a:spcAft>
+                          <a:spcPts val="0"/>
+                        </a:spcAft>
+                      </a:pPr>
+                      <a:r>
+                        <a:rPr sz="840" b="0">
+                          <a:solidFill>
+                            <a:srgbClr val="000000"/>
+                          </a:solidFill>
+                          <a:latin typeface="Montserrat"/>
+                        </a:rPr>
+                        <a:t>.781</a:t>
+                      </a:r>
+                    </a:p>
+                  </a:txBody>
+                  <a:tcPr marL="32004" marR="32004" marT="9144" marB="9144">
+                    <a:solidFill>
+                      <a:srgbClr val="F2F6FF"/>
+                    </a:solidFill>
+                  </a:tcPr>
+                </a:tc>
+                <a:tc>
+                  <a:txBody>
+                    <a:bodyPr/>
+                    <a:lstStyle/>
+                    <a:p>
+                      <a:pPr algn="ctr">
+                        <a:lnSpc>
+                          <a:spcPct val="100000"/>
+                        </a:lnSpc>
+                        <a:spcBef>
+                          <a:spcPts val="0"/>
+                        </a:spcBef>
+                        <a:spcAft>
+                          <a:spcPts val="0"/>
+                        </a:spcAft>
+                      </a:pPr>
+                      <a:r>
+                        <a:rPr sz="840" b="0">
+                          <a:solidFill>
+                            <a:srgbClr val="000000"/>
+                          </a:solidFill>
+                          <a:latin typeface="Montserrat"/>
+                        </a:rPr>
+                        <a:t>.895</a:t>
+                      </a:r>
+                    </a:p>
+                  </a:txBody>
+                  <a:tcPr marL="32004" marR="32004" marT="9144" marB="9144">
+                    <a:solidFill>
+                      <a:srgbClr val="F2F6FF"/>
+                    </a:solidFill>
+                  </a:tcPr>
+                </a:tc>
+                <a:tc>
+                  <a:txBody>
+                    <a:bodyPr/>
+                    <a:lstStyle/>
+                    <a:p>
+                      <a:pPr algn="ctr">
+                        <a:lnSpc>
+                          <a:spcPct val="100000"/>
+                        </a:lnSpc>
+                        <a:spcBef>
+                          <a:spcPts val="0"/>
+                        </a:spcBef>
+                        <a:spcAft>
+                          <a:spcPts val="0"/>
+                        </a:spcAft>
+                      </a:pPr>
+                      <a:r>
+                        <a:rPr sz="840" b="0">
+                          <a:solidFill>
+                            <a:srgbClr val="000000"/>
+                          </a:solidFill>
+                          <a:latin typeface="Montserrat"/>
+                        </a:rPr>
+                        <a:t>.934</a:t>
+                      </a:r>
+                    </a:p>
+                  </a:txBody>
+                  <a:tcPr marL="32004" marR="32004" marT="9144" marB="9144">
+                    <a:solidFill>
+                      <a:srgbClr val="F2F6FF"/>
+                    </a:solidFill>
+                  </a:tcPr>
+                </a:tc>
+                <a:tc>
+                  <a:txBody>
+                    <a:bodyPr/>
+                    <a:lstStyle/>
+                    <a:p>
+                      <a:pPr algn="ctr">
+                        <a:lnSpc>
+                          <a:spcPct val="100000"/>
+                        </a:lnSpc>
+                        <a:spcBef>
+                          <a:spcPts val="0"/>
+                        </a:spcBef>
+                        <a:spcAft>
+                          <a:spcPts val="0"/>
+                        </a:spcAft>
+                      </a:pPr>
+                      <a:r>
+                        <a:rPr sz="840" b="1">
+                          <a:solidFill>
+                            <a:srgbClr val="1F7752"/>
+                          </a:solidFill>
+                          <a:latin typeface="Montserrat"/>
+                        </a:rPr>
+                        <a:t>PASS</a:t>
+                      </a:r>
+                    </a:p>
+                  </a:txBody>
+                  <a:tcPr marL="32004" marR="32004" marT="9144" marB="9144">
+                    <a:solidFill>
+                      <a:srgbClr val="F2F6FF"/>
+                    </a:solidFill>
+                  </a:tcPr>
+                </a:tc>
+              </a:tr>
+            </a:tbl>
+          </a:graphicData>
+        </a:graphic>
+      </p:graphicFrame>
+      <p:sp>
+        <p:nvSpPr>
+          <p:cNvPr id="321" name="TextBox 320"/>
           <p:cNvSpPr txBox="1"/>
           <p:nvPr/>
         </p:nvSpPr>
         <p:spPr>
           <a:xfrm>
-            <a:off x="694944" y="1325880"/>
-            <a:ext cx="6729984" cy="256032"/>
+            <a:off x="502920" y="4681728"/>
+            <a:ext cx="8138160" cy="256032"/>
           </a:xfrm>
           <a:prstGeom prst="rect">
             <a:avLst/>
@@ -37922,15 +40880,12 @@
           <a:noFill/>
         </p:spPr>
         <p:txBody>
-          <a:bodyPr wrap="square" lIns="82296" rIns="36576" tIns="18288" bIns="18288">
-            <a:normAutofit/>
+          <a:bodyPr wrap="square" lIns="27432" rIns="27432">
+            <a:spAutoFit/>
           </a:bodyPr>
           <a:lstStyle/>
           <a:p>
             <a:pPr>
-              <a:lnSpc>
-                <a:spcPct val="100000"/>
-              </a:lnSpc>
               <a:spcBef>
                 <a:spcPts val="0"/>
               </a:spcBef>
@@ -37939,1113 +40894,14 @@
               </a:spcAft>
             </a:pPr>
             <a:r>
-              <a:rPr sz="1350" b="0">
-                <a:solidFill>
-                  <a:srgbClr val="000000"/>
+              <a:rPr sz="950" b="1">
+                <a:solidFill>
+                  <a:srgbClr val="0E39A9"/>
                 </a:solidFill>
                 <a:latin typeface="Montserrat"/>
               </a:rPr>
-              <a:t>Held-out case-level output — selected baseline k=5</a:t>
+              <a:t>Selected baseline: 9/10 passed; weighted composite .941. The only failure is Accessible King Precision=.451.</a:t>
             </a:r>
-          </a:p>
-        </p:txBody>
-      </p:sp>
-      <p:sp>
-        <p:nvSpPr>
-          <p:cNvPr id="321" name="Oval 320"/>
-          <p:cNvSpPr/>
-          <p:nvPr/>
-        </p:nvSpPr>
-        <p:spPr>
-          <a:xfrm>
-            <a:off x="402336" y="1426464"/>
-            <a:ext cx="192024" cy="192024"/>
-          </a:xfrm>
-          <a:prstGeom prst="ellipse">
-            <a:avLst/>
-          </a:prstGeom>
-          <a:solidFill>
-            <a:srgbClr val="0944A1"/>
-          </a:solidFill>
-          <a:ln>
-            <a:noFill/>
-          </a:ln>
-        </p:spPr>
-        <p:style>
-          <a:lnRef idx="1">
-            <a:schemeClr val="accent1"/>
-          </a:lnRef>
-          <a:fillRef idx="3">
-            <a:schemeClr val="accent1"/>
-          </a:fillRef>
-          <a:effectRef idx="2">
-            <a:schemeClr val="accent1"/>
-          </a:effectRef>
-          <a:fontRef idx="minor">
-            <a:schemeClr val="lt1"/>
-          </a:fontRef>
-        </p:style>
-        <p:txBody>
-          <a:bodyPr rtlCol="0" anchor="ctr"/>
-          <a:lstStyle/>
-          <a:p>
-            <a:pPr algn="ctr"/>
-          </a:p>
-        </p:txBody>
-      </p:sp>
-      <p:sp>
-        <p:nvSpPr>
-          <p:cNvPr id="322" name="TextBox 321"/>
-          <p:cNvSpPr txBox="1"/>
-          <p:nvPr/>
-        </p:nvSpPr>
-        <p:spPr>
-          <a:xfrm>
-            <a:off x="694944" y="1613916"/>
-            <a:ext cx="6729984" cy="256032"/>
-          </a:xfrm>
-          <a:prstGeom prst="rect">
-            <a:avLst/>
-          </a:prstGeom>
-          <a:noFill/>
-        </p:spPr>
-        <p:txBody>
-          <a:bodyPr wrap="square" lIns="82296" rIns="36576" tIns="18288" bIns="18288">
-            <a:normAutofit/>
-          </a:bodyPr>
-          <a:lstStyle/>
-          <a:p>
-            <a:pPr>
-              <a:lnSpc>
-                <a:spcPct val="100000"/>
-              </a:lnSpc>
-              <a:spcBef>
-                <a:spcPts val="0"/>
-              </a:spcBef>
-              <a:spcAft>
-                <a:spcPts val="0"/>
-              </a:spcAft>
-            </a:pPr>
-            <a:r>
-              <a:rPr sz="1350" b="0">
-                <a:solidFill>
-                  <a:srgbClr val="000000"/>
-                </a:solidFill>
-                <a:latin typeface="Montserrat"/>
-              </a:rPr>
-              <a:t>Case 01 | OTA cancellation/refund | PASS | Composite .944</a:t>
-            </a:r>
-          </a:p>
-        </p:txBody>
-      </p:sp>
-      <p:sp>
-        <p:nvSpPr>
-          <p:cNvPr id="323" name="Oval 322"/>
-          <p:cNvSpPr/>
-          <p:nvPr/>
-        </p:nvSpPr>
-        <p:spPr>
-          <a:xfrm>
-            <a:off x="402336" y="1714500"/>
-            <a:ext cx="192024" cy="192024"/>
-          </a:xfrm>
-          <a:prstGeom prst="ellipse">
-            <a:avLst/>
-          </a:prstGeom>
-          <a:solidFill>
-            <a:srgbClr val="0944A1"/>
-          </a:solidFill>
-          <a:ln>
-            <a:noFill/>
-          </a:ln>
-        </p:spPr>
-        <p:style>
-          <a:lnRef idx="1">
-            <a:schemeClr val="accent1"/>
-          </a:lnRef>
-          <a:fillRef idx="3">
-            <a:schemeClr val="accent1"/>
-          </a:fillRef>
-          <a:effectRef idx="2">
-            <a:schemeClr val="accent1"/>
-          </a:effectRef>
-          <a:fontRef idx="minor">
-            <a:schemeClr val="lt1"/>
-          </a:fontRef>
-        </p:style>
-        <p:txBody>
-          <a:bodyPr rtlCol="0" anchor="ctr"/>
-          <a:lstStyle/>
-          <a:p>
-            <a:pPr algn="ctr"/>
-          </a:p>
-        </p:txBody>
-      </p:sp>
-      <p:sp>
-        <p:nvSpPr>
-          <p:cNvPr id="324" name="TextBox 323"/>
-          <p:cNvSpPr txBox="1"/>
-          <p:nvPr/>
-        </p:nvSpPr>
-        <p:spPr>
-          <a:xfrm>
-            <a:off x="694944" y="1901952"/>
-            <a:ext cx="6729984" cy="256032"/>
-          </a:xfrm>
-          <a:prstGeom prst="rect">
-            <a:avLst/>
-          </a:prstGeom>
-          <a:noFill/>
-        </p:spPr>
-        <p:txBody>
-          <a:bodyPr wrap="square" lIns="82296" rIns="36576" tIns="18288" bIns="18288">
-            <a:normAutofit/>
-          </a:bodyPr>
-          <a:lstStyle/>
-          <a:p>
-            <a:pPr>
-              <a:lnSpc>
-                <a:spcPct val="100000"/>
-              </a:lnSpc>
-              <a:spcBef>
-                <a:spcPts val="0"/>
-              </a:spcBef>
-              <a:spcAft>
-                <a:spcPts val="0"/>
-              </a:spcAft>
-            </a:pPr>
-            <a:r>
-              <a:rPr sz="1350" b="0">
-                <a:solidFill>
-                  <a:srgbClr val="000000"/>
-                </a:solidFill>
-                <a:latin typeface="Montserrat"/>
-              </a:rPr>
-              <a:t>Case 02 | Member discount/cancellation | PASS | Composite .956</a:t>
-            </a:r>
-          </a:p>
-        </p:txBody>
-      </p:sp>
-      <p:sp>
-        <p:nvSpPr>
-          <p:cNvPr id="325" name="Oval 324"/>
-          <p:cNvSpPr/>
-          <p:nvPr/>
-        </p:nvSpPr>
-        <p:spPr>
-          <a:xfrm>
-            <a:off x="402336" y="2002536"/>
-            <a:ext cx="192024" cy="192024"/>
-          </a:xfrm>
-          <a:prstGeom prst="ellipse">
-            <a:avLst/>
-          </a:prstGeom>
-          <a:solidFill>
-            <a:srgbClr val="0944A1"/>
-          </a:solidFill>
-          <a:ln>
-            <a:noFill/>
-          </a:ln>
-        </p:spPr>
-        <p:style>
-          <a:lnRef idx="1">
-            <a:schemeClr val="accent1"/>
-          </a:lnRef>
-          <a:fillRef idx="3">
-            <a:schemeClr val="accent1"/>
-          </a:fillRef>
-          <a:effectRef idx="2">
-            <a:schemeClr val="accent1"/>
-          </a:effectRef>
-          <a:fontRef idx="minor">
-            <a:schemeClr val="lt1"/>
-          </a:fontRef>
-        </p:style>
-        <p:txBody>
-          <a:bodyPr rtlCol="0" anchor="ctr"/>
-          <a:lstStyle/>
-          <a:p>
-            <a:pPr algn="ctr"/>
-          </a:p>
-        </p:txBody>
-      </p:sp>
-      <p:sp>
-        <p:nvSpPr>
-          <p:cNvPr id="326" name="TextBox 325"/>
-          <p:cNvSpPr txBox="1"/>
-          <p:nvPr/>
-        </p:nvSpPr>
-        <p:spPr>
-          <a:xfrm>
-            <a:off x="694944" y="2189988"/>
-            <a:ext cx="6729984" cy="256032"/>
-          </a:xfrm>
-          <a:prstGeom prst="rect">
-            <a:avLst/>
-          </a:prstGeom>
-          <a:noFill/>
-        </p:spPr>
-        <p:txBody>
-          <a:bodyPr wrap="square" lIns="82296" rIns="36576" tIns="18288" bIns="18288">
-            <a:normAutofit/>
-          </a:bodyPr>
-          <a:lstStyle/>
-          <a:p>
-            <a:pPr>
-              <a:lnSpc>
-                <a:spcPct val="100000"/>
-              </a:lnSpc>
-              <a:spcBef>
-                <a:spcPts val="0"/>
-              </a:spcBef>
-              <a:spcAft>
-                <a:spcPts val="0"/>
-              </a:spcAft>
-            </a:pPr>
-            <a:r>
-              <a:rPr sz="1350" b="0">
-                <a:solidFill>
-                  <a:srgbClr val="000000"/>
-                </a:solidFill>
-                <a:latin typeface="Montserrat"/>
-              </a:rPr>
-              <a:t>Case 03 | Double Queen occupancy | PASS | Composite .988</a:t>
-            </a:r>
-          </a:p>
-        </p:txBody>
-      </p:sp>
-      <p:sp>
-        <p:nvSpPr>
-          <p:cNvPr id="327" name="Oval 326"/>
-          <p:cNvSpPr/>
-          <p:nvPr/>
-        </p:nvSpPr>
-        <p:spPr>
-          <a:xfrm>
-            <a:off x="402336" y="2290572"/>
-            <a:ext cx="192024" cy="192024"/>
-          </a:xfrm>
-          <a:prstGeom prst="ellipse">
-            <a:avLst/>
-          </a:prstGeom>
-          <a:solidFill>
-            <a:srgbClr val="0944A1"/>
-          </a:solidFill>
-          <a:ln>
-            <a:noFill/>
-          </a:ln>
-        </p:spPr>
-        <p:style>
-          <a:lnRef idx="1">
-            <a:schemeClr val="accent1"/>
-          </a:lnRef>
-          <a:fillRef idx="3">
-            <a:schemeClr val="accent1"/>
-          </a:fillRef>
-          <a:effectRef idx="2">
-            <a:schemeClr val="accent1"/>
-          </a:effectRef>
-          <a:fontRef idx="minor">
-            <a:schemeClr val="lt1"/>
-          </a:fontRef>
-        </p:style>
-        <p:txBody>
-          <a:bodyPr rtlCol="0" anchor="ctr"/>
-          <a:lstStyle/>
-          <a:p>
-            <a:pPr algn="ctr"/>
-          </a:p>
-        </p:txBody>
-      </p:sp>
-      <p:sp>
-        <p:nvSpPr>
-          <p:cNvPr id="328" name="TextBox 327"/>
-          <p:cNvSpPr txBox="1"/>
-          <p:nvPr/>
-        </p:nvSpPr>
-        <p:spPr>
-          <a:xfrm>
-            <a:off x="694944" y="2478024"/>
-            <a:ext cx="6729984" cy="256032"/>
-          </a:xfrm>
-          <a:prstGeom prst="rect">
-            <a:avLst/>
-          </a:prstGeom>
-          <a:noFill/>
-        </p:spPr>
-        <p:txBody>
-          <a:bodyPr wrap="square" lIns="82296" rIns="36576" tIns="18288" bIns="18288">
-            <a:normAutofit/>
-          </a:bodyPr>
-          <a:lstStyle/>
-          <a:p>
-            <a:pPr>
-              <a:lnSpc>
-                <a:spcPct val="100000"/>
-              </a:lnSpc>
-              <a:spcBef>
-                <a:spcPts val="0"/>
-              </a:spcBef>
-              <a:spcAft>
-                <a:spcPts val="0"/>
-              </a:spcAft>
-            </a:pPr>
-            <a:r>
-              <a:rPr sz="1350" b="0">
-                <a:solidFill>
-                  <a:srgbClr val="000000"/>
-                </a:solidFill>
-                <a:latin typeface="Montserrat"/>
-              </a:rPr>
-              <a:t>Case 04 | Accessible King inclusions | FAIL | Precision .451</a:t>
-            </a:r>
-          </a:p>
-        </p:txBody>
-      </p:sp>
-      <p:sp>
-        <p:nvSpPr>
-          <p:cNvPr id="329" name="Oval 328"/>
-          <p:cNvSpPr/>
-          <p:nvPr/>
-        </p:nvSpPr>
-        <p:spPr>
-          <a:xfrm>
-            <a:off x="402336" y="2578608"/>
-            <a:ext cx="192024" cy="192024"/>
-          </a:xfrm>
-          <a:prstGeom prst="ellipse">
-            <a:avLst/>
-          </a:prstGeom>
-          <a:solidFill>
-            <a:srgbClr val="0944A1"/>
-          </a:solidFill>
-          <a:ln>
-            <a:noFill/>
-          </a:ln>
-        </p:spPr>
-        <p:style>
-          <a:lnRef idx="1">
-            <a:schemeClr val="accent1"/>
-          </a:lnRef>
-          <a:fillRef idx="3">
-            <a:schemeClr val="accent1"/>
-          </a:fillRef>
-          <a:effectRef idx="2">
-            <a:schemeClr val="accent1"/>
-          </a:effectRef>
-          <a:fontRef idx="minor">
-            <a:schemeClr val="lt1"/>
-          </a:fontRef>
-        </p:style>
-        <p:txBody>
-          <a:bodyPr rtlCol="0" anchor="ctr"/>
-          <a:lstStyle/>
-          <a:p>
-            <a:pPr algn="ctr"/>
-          </a:p>
-        </p:txBody>
-      </p:sp>
-      <p:sp>
-        <p:nvSpPr>
-          <p:cNvPr id="330" name="TextBox 329"/>
-          <p:cNvSpPr txBox="1"/>
-          <p:nvPr/>
-        </p:nvSpPr>
-        <p:spPr>
-          <a:xfrm>
-            <a:off x="694944" y="2766060"/>
-            <a:ext cx="6729984" cy="256032"/>
-          </a:xfrm>
-          <a:prstGeom prst="rect">
-            <a:avLst/>
-          </a:prstGeom>
-          <a:noFill/>
-        </p:spPr>
-        <p:txBody>
-          <a:bodyPr wrap="square" lIns="82296" rIns="36576" tIns="18288" bIns="18288">
-            <a:normAutofit/>
-          </a:bodyPr>
-          <a:lstStyle/>
-          <a:p>
-            <a:pPr>
-              <a:lnSpc>
-                <a:spcPct val="100000"/>
-              </a:lnSpc>
-              <a:spcBef>
-                <a:spcPts val="0"/>
-              </a:spcBef>
-              <a:spcAft>
-                <a:spcPts val="0"/>
-              </a:spcAft>
-            </a:pPr>
-            <a:r>
-              <a:rPr sz="1350" b="0">
-                <a:solidFill>
-                  <a:srgbClr val="000000"/>
-                </a:solidFill>
-                <a:latin typeface="Montserrat"/>
-              </a:rPr>
-              <a:t>Case 05 | Atlanta/Miami parking | PASS | Composite .975</a:t>
-            </a:r>
-          </a:p>
-        </p:txBody>
-      </p:sp>
-      <p:sp>
-        <p:nvSpPr>
-          <p:cNvPr id="331" name="Oval 330"/>
-          <p:cNvSpPr/>
-          <p:nvPr/>
-        </p:nvSpPr>
-        <p:spPr>
-          <a:xfrm>
-            <a:off x="402336" y="2866644"/>
-            <a:ext cx="192024" cy="192024"/>
-          </a:xfrm>
-          <a:prstGeom prst="ellipse">
-            <a:avLst/>
-          </a:prstGeom>
-          <a:solidFill>
-            <a:srgbClr val="0944A1"/>
-          </a:solidFill>
-          <a:ln>
-            <a:noFill/>
-          </a:ln>
-        </p:spPr>
-        <p:style>
-          <a:lnRef idx="1">
-            <a:schemeClr val="accent1"/>
-          </a:lnRef>
-          <a:fillRef idx="3">
-            <a:schemeClr val="accent1"/>
-          </a:fillRef>
-          <a:effectRef idx="2">
-            <a:schemeClr val="accent1"/>
-          </a:effectRef>
-          <a:fontRef idx="minor">
-            <a:schemeClr val="lt1"/>
-          </a:fontRef>
-        </p:style>
-        <p:txBody>
-          <a:bodyPr rtlCol="0" anchor="ctr"/>
-          <a:lstStyle/>
-          <a:p>
-            <a:pPr algn="ctr"/>
-          </a:p>
-        </p:txBody>
-      </p:sp>
-      <p:sp>
-        <p:nvSpPr>
-          <p:cNvPr id="332" name="TextBox 331"/>
-          <p:cNvSpPr txBox="1"/>
-          <p:nvPr/>
-        </p:nvSpPr>
-        <p:spPr>
-          <a:xfrm>
-            <a:off x="694944" y="3054096"/>
-            <a:ext cx="6729984" cy="256032"/>
-          </a:xfrm>
-          <a:prstGeom prst="rect">
-            <a:avLst/>
-          </a:prstGeom>
-          <a:noFill/>
-        </p:spPr>
-        <p:txBody>
-          <a:bodyPr wrap="square" lIns="82296" rIns="36576" tIns="18288" bIns="18288">
-            <a:normAutofit/>
-          </a:bodyPr>
-          <a:lstStyle/>
-          <a:p>
-            <a:pPr>
-              <a:lnSpc>
-                <a:spcPct val="100000"/>
-              </a:lnSpc>
-              <a:spcBef>
-                <a:spcPts val="0"/>
-              </a:spcBef>
-              <a:spcAft>
-                <a:spcPts val="0"/>
-              </a:spcAft>
-            </a:pPr>
-            <a:r>
-              <a:rPr sz="1350" b="0">
-                <a:solidFill>
-                  <a:srgbClr val="000000"/>
-                </a:solidFill>
-                <a:latin typeface="Montserrat"/>
-              </a:rPr>
-              <a:t>Case 06 | Miami breakfast | PASS | Composite .963</a:t>
-            </a:r>
-          </a:p>
-        </p:txBody>
-      </p:sp>
-      <p:sp>
-        <p:nvSpPr>
-          <p:cNvPr id="333" name="Oval 332"/>
-          <p:cNvSpPr/>
-          <p:nvPr/>
-        </p:nvSpPr>
-        <p:spPr>
-          <a:xfrm>
-            <a:off x="402336" y="3154679"/>
-            <a:ext cx="192024" cy="192024"/>
-          </a:xfrm>
-          <a:prstGeom prst="ellipse">
-            <a:avLst/>
-          </a:prstGeom>
-          <a:solidFill>
-            <a:srgbClr val="0944A1"/>
-          </a:solidFill>
-          <a:ln>
-            <a:noFill/>
-          </a:ln>
-        </p:spPr>
-        <p:style>
-          <a:lnRef idx="1">
-            <a:schemeClr val="accent1"/>
-          </a:lnRef>
-          <a:fillRef idx="3">
-            <a:schemeClr val="accent1"/>
-          </a:fillRef>
-          <a:effectRef idx="2">
-            <a:schemeClr val="accent1"/>
-          </a:effectRef>
-          <a:fontRef idx="minor">
-            <a:schemeClr val="lt1"/>
-          </a:fontRef>
-        </p:style>
-        <p:txBody>
-          <a:bodyPr rtlCol="0" anchor="ctr"/>
-          <a:lstStyle/>
-          <a:p>
-            <a:pPr algn="ctr"/>
-          </a:p>
-        </p:txBody>
-      </p:sp>
-      <p:sp>
-        <p:nvSpPr>
-          <p:cNvPr id="334" name="TextBox 333"/>
-          <p:cNvSpPr txBox="1"/>
-          <p:nvPr/>
-        </p:nvSpPr>
-        <p:spPr>
-          <a:xfrm>
-            <a:off x="694944" y="3342132"/>
-            <a:ext cx="6729984" cy="256032"/>
-          </a:xfrm>
-          <a:prstGeom prst="rect">
-            <a:avLst/>
-          </a:prstGeom>
-          <a:noFill/>
-        </p:spPr>
-        <p:txBody>
-          <a:bodyPr wrap="square" lIns="82296" rIns="36576" tIns="18288" bIns="18288">
-            <a:normAutofit/>
-          </a:bodyPr>
-          <a:lstStyle/>
-          <a:p>
-            <a:pPr>
-              <a:lnSpc>
-                <a:spcPct val="100000"/>
-              </a:lnSpc>
-              <a:spcBef>
-                <a:spcPts val="0"/>
-              </a:spcBef>
-              <a:spcAft>
-                <a:spcPts val="0"/>
-              </a:spcAft>
-            </a:pPr>
-            <a:r>
-              <a:rPr sz="1350" b="0">
-                <a:solidFill>
-                  <a:srgbClr val="000000"/>
-                </a:solidFill>
-                <a:latin typeface="Montserrat"/>
-              </a:rPr>
-              <a:t>Case 07 | Advance Purchase change | PASS | Composite .916</a:t>
-            </a:r>
-          </a:p>
-        </p:txBody>
-      </p:sp>
-      <p:sp>
-        <p:nvSpPr>
-          <p:cNvPr id="335" name="Oval 334"/>
-          <p:cNvSpPr/>
-          <p:nvPr/>
-        </p:nvSpPr>
-        <p:spPr>
-          <a:xfrm>
-            <a:off x="402336" y="3442715"/>
-            <a:ext cx="192024" cy="192024"/>
-          </a:xfrm>
-          <a:prstGeom prst="ellipse">
-            <a:avLst/>
-          </a:prstGeom>
-          <a:solidFill>
-            <a:srgbClr val="0944A1"/>
-          </a:solidFill>
-          <a:ln>
-            <a:noFill/>
-          </a:ln>
-        </p:spPr>
-        <p:style>
-          <a:lnRef idx="1">
-            <a:schemeClr val="accent1"/>
-          </a:lnRef>
-          <a:fillRef idx="3">
-            <a:schemeClr val="accent1"/>
-          </a:fillRef>
-          <a:effectRef idx="2">
-            <a:schemeClr val="accent1"/>
-          </a:effectRef>
-          <a:fontRef idx="minor">
-            <a:schemeClr val="lt1"/>
-          </a:fontRef>
-        </p:style>
-        <p:txBody>
-          <a:bodyPr rtlCol="0" anchor="ctr"/>
-          <a:lstStyle/>
-          <a:p>
-            <a:pPr algn="ctr"/>
-          </a:p>
-        </p:txBody>
-      </p:sp>
-      <p:sp>
-        <p:nvSpPr>
-          <p:cNvPr id="336" name="TextBox 335"/>
-          <p:cNvSpPr txBox="1"/>
-          <p:nvPr/>
-        </p:nvSpPr>
-        <p:spPr>
-          <a:xfrm>
-            <a:off x="694944" y="3630168"/>
-            <a:ext cx="6729984" cy="256032"/>
-          </a:xfrm>
-          <a:prstGeom prst="rect">
-            <a:avLst/>
-          </a:prstGeom>
-          <a:noFill/>
-        </p:spPr>
-        <p:txBody>
-          <a:bodyPr wrap="square" lIns="82296" rIns="36576" tIns="18288" bIns="18288">
-            <a:normAutofit/>
-          </a:bodyPr>
-          <a:lstStyle/>
-          <a:p>
-            <a:pPr>
-              <a:lnSpc>
-                <a:spcPct val="100000"/>
-              </a:lnSpc>
-              <a:spcBef>
-                <a:spcPts val="0"/>
-              </a:spcBef>
-              <a:spcAft>
-                <a:spcPts val="0"/>
-              </a:spcAft>
-            </a:pPr>
-            <a:r>
-              <a:rPr sz="1350" b="0">
-                <a:solidFill>
-                  <a:srgbClr val="000000"/>
-                </a:solidFill>
-                <a:latin typeface="Montserrat"/>
-              </a:rPr>
-              <a:t>Case 08 | Denver late checkout | PASS | Composite .939</a:t>
-            </a:r>
-          </a:p>
-        </p:txBody>
-      </p:sp>
-      <p:sp>
-        <p:nvSpPr>
-          <p:cNvPr id="337" name="Oval 336"/>
-          <p:cNvSpPr/>
-          <p:nvPr/>
-        </p:nvSpPr>
-        <p:spPr>
-          <a:xfrm>
-            <a:off x="402336" y="3730752"/>
-            <a:ext cx="192024" cy="192024"/>
-          </a:xfrm>
-          <a:prstGeom prst="ellipse">
-            <a:avLst/>
-          </a:prstGeom>
-          <a:solidFill>
-            <a:srgbClr val="0944A1"/>
-          </a:solidFill>
-          <a:ln>
-            <a:noFill/>
-          </a:ln>
-        </p:spPr>
-        <p:style>
-          <a:lnRef idx="1">
-            <a:schemeClr val="accent1"/>
-          </a:lnRef>
-          <a:fillRef idx="3">
-            <a:schemeClr val="accent1"/>
-          </a:fillRef>
-          <a:effectRef idx="2">
-            <a:schemeClr val="accent1"/>
-          </a:effectRef>
-          <a:fontRef idx="minor">
-            <a:schemeClr val="lt1"/>
-          </a:fontRef>
-        </p:style>
-        <p:txBody>
-          <a:bodyPr rtlCol="0" anchor="ctr"/>
-          <a:lstStyle/>
-          <a:p>
-            <a:pPr algn="ctr"/>
-          </a:p>
-        </p:txBody>
-      </p:sp>
-      <p:sp>
-        <p:nvSpPr>
-          <p:cNvPr id="338" name="TextBox 337"/>
-          <p:cNvSpPr txBox="1"/>
-          <p:nvPr/>
-        </p:nvSpPr>
-        <p:spPr>
-          <a:xfrm>
-            <a:off x="694944" y="3918204"/>
-            <a:ext cx="6729984" cy="256032"/>
-          </a:xfrm>
-          <a:prstGeom prst="rect">
-            <a:avLst/>
-          </a:prstGeom>
-          <a:noFill/>
-        </p:spPr>
-        <p:txBody>
-          <a:bodyPr wrap="square" lIns="82296" rIns="36576" tIns="18288" bIns="18288">
-            <a:normAutofit/>
-          </a:bodyPr>
-          <a:lstStyle/>
-          <a:p>
-            <a:pPr>
-              <a:lnSpc>
-                <a:spcPct val="100000"/>
-              </a:lnSpc>
-              <a:spcBef>
-                <a:spcPts val="0"/>
-              </a:spcBef>
-              <a:spcAft>
-                <a:spcPts val="0"/>
-              </a:spcAft>
-            </a:pPr>
-            <a:r>
-              <a:rPr sz="1350" b="0">
-                <a:solidFill>
-                  <a:srgbClr val="000000"/>
-                </a:solidFill>
-                <a:latin typeface="Montserrat"/>
-              </a:rPr>
-              <a:t>Case 09 | ASH-CHI pet fee | PASS | Composite .974</a:t>
-            </a:r>
-          </a:p>
-        </p:txBody>
-      </p:sp>
-      <p:sp>
-        <p:nvSpPr>
-          <p:cNvPr id="339" name="Oval 338"/>
-          <p:cNvSpPr/>
-          <p:nvPr/>
-        </p:nvSpPr>
-        <p:spPr>
-          <a:xfrm>
-            <a:off x="402336" y="4018788"/>
-            <a:ext cx="192024" cy="192024"/>
-          </a:xfrm>
-          <a:prstGeom prst="ellipse">
-            <a:avLst/>
-          </a:prstGeom>
-          <a:solidFill>
-            <a:srgbClr val="0944A1"/>
-          </a:solidFill>
-          <a:ln>
-            <a:noFill/>
-          </a:ln>
-        </p:spPr>
-        <p:style>
-          <a:lnRef idx="1">
-            <a:schemeClr val="accent1"/>
-          </a:lnRef>
-          <a:fillRef idx="3">
-            <a:schemeClr val="accent1"/>
-          </a:fillRef>
-          <a:effectRef idx="2">
-            <a:schemeClr val="accent1"/>
-          </a:effectRef>
-          <a:fontRef idx="minor">
-            <a:schemeClr val="lt1"/>
-          </a:fontRef>
-        </p:style>
-        <p:txBody>
-          <a:bodyPr rtlCol="0" anchor="ctr"/>
-          <a:lstStyle/>
-          <a:p>
-            <a:pPr algn="ctr"/>
-          </a:p>
-        </p:txBody>
-      </p:sp>
-      <p:sp>
-        <p:nvSpPr>
-          <p:cNvPr id="340" name="TextBox 339"/>
-          <p:cNvSpPr txBox="1"/>
-          <p:nvPr/>
-        </p:nvSpPr>
-        <p:spPr>
-          <a:xfrm>
-            <a:off x="694944" y="4206240"/>
-            <a:ext cx="6729984" cy="256032"/>
-          </a:xfrm>
-          <a:prstGeom prst="rect">
-            <a:avLst/>
-          </a:prstGeom>
-          <a:noFill/>
-        </p:spPr>
-        <p:txBody>
-          <a:bodyPr wrap="square" lIns="82296" rIns="36576" tIns="18288" bIns="18288">
-            <a:normAutofit/>
-          </a:bodyPr>
-          <a:lstStyle/>
-          <a:p>
-            <a:pPr>
-              <a:lnSpc>
-                <a:spcPct val="100000"/>
-              </a:lnSpc>
-              <a:spcBef>
-                <a:spcPts val="0"/>
-              </a:spcBef>
-              <a:spcAft>
-                <a:spcPts val="0"/>
-              </a:spcAft>
-            </a:pPr>
-            <a:r>
-              <a:rPr sz="1350" b="0">
-                <a:solidFill>
-                  <a:srgbClr val="000000"/>
-                </a:solidFill>
-                <a:latin typeface="Montserrat"/>
-              </a:rPr>
-              <a:t>Case 10 | Card-hold difference | PASS | Composite .934</a:t>
-            </a:r>
-          </a:p>
-        </p:txBody>
-      </p:sp>
-      <p:sp>
-        <p:nvSpPr>
-          <p:cNvPr id="341" name="Oval 340"/>
-          <p:cNvSpPr/>
-          <p:nvPr/>
-        </p:nvSpPr>
-        <p:spPr>
-          <a:xfrm>
-            <a:off x="402336" y="4306824"/>
-            <a:ext cx="192024" cy="192024"/>
-          </a:xfrm>
-          <a:prstGeom prst="ellipse">
-            <a:avLst/>
-          </a:prstGeom>
-          <a:solidFill>
-            <a:srgbClr val="0944A1"/>
-          </a:solidFill>
-          <a:ln>
-            <a:noFill/>
-          </a:ln>
-        </p:spPr>
-        <p:style>
-          <a:lnRef idx="1">
-            <a:schemeClr val="accent1"/>
-          </a:lnRef>
-          <a:fillRef idx="3">
-            <a:schemeClr val="accent1"/>
-          </a:fillRef>
-          <a:effectRef idx="2">
-            <a:schemeClr val="accent1"/>
-          </a:effectRef>
-          <a:fontRef idx="minor">
-            <a:schemeClr val="lt1"/>
-          </a:fontRef>
-        </p:style>
-        <p:txBody>
-          <a:bodyPr rtlCol="0" anchor="ctr"/>
-          <a:lstStyle/>
-          <a:p>
-            <a:pPr algn="ctr"/>
-          </a:p>
-        </p:txBody>
-      </p:sp>
-      <p:sp>
-        <p:nvSpPr>
-          <p:cNvPr id="342" name="TextBox 341"/>
-          <p:cNvSpPr txBox="1"/>
-          <p:nvPr/>
-        </p:nvSpPr>
-        <p:spPr>
-          <a:xfrm>
-            <a:off x="694944" y="4494276"/>
-            <a:ext cx="6729984" cy="187451"/>
-          </a:xfrm>
-          <a:prstGeom prst="rect">
-            <a:avLst/>
-          </a:prstGeom>
-          <a:noFill/>
-        </p:spPr>
-        <p:txBody>
-          <a:bodyPr wrap="square" lIns="82296" rIns="36576" tIns="18288" bIns="18288">
-            <a:normAutofit/>
-          </a:bodyPr>
-          <a:lstStyle/>
-          <a:p>
-            <a:pPr>
-              <a:lnSpc>
-                <a:spcPct val="100000"/>
-              </a:lnSpc>
-              <a:spcBef>
-                <a:spcPts val="0"/>
-              </a:spcBef>
-              <a:spcAft>
-                <a:spcPts val="0"/>
-              </a:spcAft>
-            </a:pPr>
-            <a:r>
-              <a:rPr sz="1350" b="0">
-                <a:solidFill>
-                  <a:srgbClr val="000000"/>
-                </a:solidFill>
-                <a:latin typeface="Montserrat"/>
-              </a:rPr>
-              <a:t>Selected baseline result: 9/10 passed; weighted composite .941.</a:t>
-            </a:r>
-          </a:p>
-        </p:txBody>
-      </p:sp>
-      <p:sp>
-        <p:nvSpPr>
-          <p:cNvPr id="343" name="Oval 342"/>
-          <p:cNvSpPr/>
-          <p:nvPr/>
-        </p:nvSpPr>
-        <p:spPr>
-          <a:xfrm>
-            <a:off x="402336" y="4594860"/>
-            <a:ext cx="192024" cy="192024"/>
-          </a:xfrm>
-          <a:prstGeom prst="ellipse">
-            <a:avLst/>
-          </a:prstGeom>
-          <a:solidFill>
-            <a:srgbClr val="0944A1"/>
-          </a:solidFill>
-          <a:ln>
-            <a:noFill/>
-          </a:ln>
-        </p:spPr>
-        <p:style>
-          <a:lnRef idx="1">
-            <a:schemeClr val="accent1"/>
-          </a:lnRef>
-          <a:fillRef idx="3">
-            <a:schemeClr val="accent1"/>
-          </a:fillRef>
-          <a:effectRef idx="2">
-            <a:schemeClr val="accent1"/>
-          </a:effectRef>
-          <a:fontRef idx="minor">
-            <a:schemeClr val="lt1"/>
-          </a:fontRef>
-        </p:style>
-        <p:txBody>
-          <a:bodyPr rtlCol="0" anchor="ctr"/>
-          <a:lstStyle/>
-          <a:p>
-            <a:pPr algn="ctr"/>
-          </a:p>
-        </p:txBody>
-      </p:sp>
-      <p:sp>
-        <p:nvSpPr>
-          <p:cNvPr id="344" name="TextBox 343"/>
-          <p:cNvSpPr txBox="1"/>
-          <p:nvPr/>
-        </p:nvSpPr>
-        <p:spPr>
-          <a:xfrm>
-            <a:off x="694944" y="4713732"/>
-            <a:ext cx="6729984" cy="182880"/>
-          </a:xfrm>
-          <a:prstGeom prst="rect">
-            <a:avLst/>
-          </a:prstGeom>
-          <a:noFill/>
-        </p:spPr>
-        <p:txBody>
-          <a:bodyPr wrap="square" lIns="82296" rIns="36576" tIns="18288" bIns="18288">
-            <a:normAutofit/>
-          </a:bodyPr>
-          <a:lstStyle/>
-          <a:p>
-            <a:pPr>
-              <a:lnSpc>
-                <a:spcPct val="100000"/>
-              </a:lnSpc>
-              <a:spcBef>
-                <a:spcPts val="0"/>
-              </a:spcBef>
-              <a:spcAft>
-                <a:spcPts val="0"/>
-              </a:spcAft>
-            </a:pPr>
-            <a:r>
-              <a:rPr sz="1350" b="0">
-                <a:solidFill>
-                  <a:srgbClr val="000000"/>
-                </a:solidFill>
-                <a:latin typeface="Montserrat"/>
-              </a:rPr>
-              <a:t>The focused clarification experiment raised the failed case's Precision to .961 and passed all four metrics.</a:t>
-            </a:r>
-          </a:p>
-        </p:txBody>
-      </p:sp>
-      <p:sp>
-        <p:nvSpPr>
-          <p:cNvPr id="345" name="Oval 344"/>
-          <p:cNvSpPr/>
-          <p:nvPr/>
-        </p:nvSpPr>
-        <p:spPr>
-          <a:xfrm>
-            <a:off x="402336" y="4814316"/>
-            <a:ext cx="192024" cy="192024"/>
-          </a:xfrm>
-          <a:prstGeom prst="ellipse">
-            <a:avLst/>
-          </a:prstGeom>
-          <a:solidFill>
-            <a:srgbClr val="0944A1"/>
-          </a:solidFill>
-          <a:ln>
-            <a:noFill/>
-          </a:ln>
-        </p:spPr>
-        <p:style>
-          <a:lnRef idx="1">
-            <a:schemeClr val="accent1"/>
-          </a:lnRef>
-          <a:fillRef idx="3">
-            <a:schemeClr val="accent1"/>
-          </a:fillRef>
-          <a:effectRef idx="2">
-            <a:schemeClr val="accent1"/>
-          </a:effectRef>
-          <a:fontRef idx="minor">
-            <a:schemeClr val="lt1"/>
-          </a:fontRef>
-        </p:style>
-        <p:txBody>
-          <a:bodyPr rtlCol="0" anchor="ctr"/>
-          <a:lstStyle/>
-          <a:p>
-            <a:pPr algn="ctr"/>
           </a:p>
         </p:txBody>
       </p:sp>

--- a/presentations/Aurora_Stays_RAG_Project_Presentation_Template_Style.pptx
+++ b/presentations/Aurora_Stays_RAG_Project_Presentation_Template_Style.pptx
@@ -37915,7 +37915,7 @@
         </p:nvGraphicFramePr>
         <p:xfrm>
           <a:off x="438912" y="1207008"/>
-          <a:ext cx="6821424" cy="3401568"/>
+          <a:ext cx="6821424" cy="3200400"/>
         </p:xfrm>
         <a:graphic>
           <a:graphicData uri="http://schemas.openxmlformats.org/drawingml/2006/table">
@@ -37933,7 +37933,7 @@
                 <a:gridCol w="777240"/>
                 <a:gridCol w="749808"/>
               </a:tblGrid>
-              <a:tr h="309233">
+              <a:tr h="290945">
                 <a:tc>
                   <a:txBody>
                     <a:bodyPr/>
@@ -38199,7 +38199,7 @@
                   </a:tcPr>
                 </a:tc>
               </a:tr>
-              <a:tr h="309233">
+              <a:tr h="290945">
                 <a:tc>
                   <a:txBody>
                     <a:bodyPr/>
@@ -38465,7 +38465,7 @@
                   </a:tcPr>
                 </a:tc>
               </a:tr>
-              <a:tr h="309233">
+              <a:tr h="290945">
                 <a:tc>
                   <a:txBody>
                     <a:bodyPr/>
@@ -38731,7 +38731,7 @@
                   </a:tcPr>
                 </a:tc>
               </a:tr>
-              <a:tr h="309233">
+              <a:tr h="290945">
                 <a:tc>
                   <a:txBody>
                     <a:bodyPr/>
@@ -38997,7 +38997,7 @@
                   </a:tcPr>
                 </a:tc>
               </a:tr>
-              <a:tr h="309233">
+              <a:tr h="290945">
                 <a:tc>
                   <a:txBody>
                     <a:bodyPr/>
@@ -39263,7 +39263,7 @@
                   </a:tcPr>
                 </a:tc>
               </a:tr>
-              <a:tr h="309233">
+              <a:tr h="290945">
                 <a:tc>
                   <a:txBody>
                     <a:bodyPr/>
@@ -39529,7 +39529,7 @@
                   </a:tcPr>
                 </a:tc>
               </a:tr>
-              <a:tr h="309233">
+              <a:tr h="290945">
                 <a:tc>
                   <a:txBody>
                     <a:bodyPr/>
@@ -39795,7 +39795,7 @@
                   </a:tcPr>
                 </a:tc>
               </a:tr>
-              <a:tr h="309233">
+              <a:tr h="290945">
                 <a:tc>
                   <a:txBody>
                     <a:bodyPr/>
@@ -40061,7 +40061,7 @@
                   </a:tcPr>
                 </a:tc>
               </a:tr>
-              <a:tr h="309233">
+              <a:tr h="290945">
                 <a:tc>
                   <a:txBody>
                     <a:bodyPr/>
@@ -40327,7 +40327,7 @@
                   </a:tcPr>
                 </a:tc>
               </a:tr>
-              <a:tr h="309233">
+              <a:tr h="290945">
                 <a:tc>
                   <a:txBody>
                     <a:bodyPr/>
@@ -40593,7 +40593,7 @@
                   </a:tcPr>
                 </a:tc>
               </a:tr>
-              <a:tr h="309238">
+              <a:tr h="290950">
                 <a:tc>
                   <a:txBody>
                     <a:bodyPr/>
@@ -40871,8 +40871,8 @@
         </p:nvSpPr>
         <p:spPr>
           <a:xfrm>
-            <a:off x="502920" y="4681728"/>
-            <a:ext cx="8138160" cy="256032"/>
+            <a:off x="502920" y="4480560"/>
+            <a:ext cx="8138160" cy="219456"/>
           </a:xfrm>
           <a:prstGeom prst="rect">
             <a:avLst/>
@@ -40894,13 +40894,55 @@
               </a:spcAft>
             </a:pPr>
             <a:r>
-              <a:rPr sz="950" b="1">
+              <a:rPr sz="880" b="1">
                 <a:solidFill>
                   <a:srgbClr val="0E39A9"/>
                 </a:solidFill>
                 <a:latin typeface="Montserrat"/>
               </a:rPr>
               <a:t>Selected baseline: 9/10 passed; weighted composite .941. The only failure is Accessible King Precision=.451.</a:t>
+            </a:r>
+          </a:p>
+        </p:txBody>
+      </p:sp>
+      <p:sp>
+        <p:nvSpPr>
+          <p:cNvPr id="322" name="TextBox 321"/>
+          <p:cNvSpPr txBox="1"/>
+          <p:nvPr/>
+        </p:nvSpPr>
+        <p:spPr>
+          <a:xfrm>
+            <a:off x="502920" y="4727448"/>
+            <a:ext cx="8138160" cy="219456"/>
+          </a:xfrm>
+          <a:prstGeom prst="rect">
+            <a:avLst/>
+          </a:prstGeom>
+          <a:noFill/>
+        </p:spPr>
+        <p:txBody>
+          <a:bodyPr wrap="square" lIns="27432" rIns="27432">
+            <a:spAutoFit/>
+          </a:bodyPr>
+          <a:lstStyle/>
+          <a:p>
+            <a:pPr>
+              <a:spcBef>
+                <a:spcPts val="0"/>
+              </a:spcBef>
+              <a:spcAft>
+                <a:spcPts val="0"/>
+              </a:spcAft>
+            </a:pPr>
+            <a:r>
+              <a:rPr sz="830" i="1">
+                <a:solidFill>
+                  <a:srgbClr val="505050"/>
+                </a:solidFill>
+                <a:latin typeface="Montserrat"/>
+              </a:rPr>
+              <a:t>F = Faithfulness | R = Contextual Recall | P = Contextual Precision | AR = Answer Relevancy</a:t>
             </a:r>
           </a:p>
         </p:txBody>
